--- a/template.pptx
+++ b/template.pptx
@@ -4469,7 +4469,7 @@
           <p:nvPr>
             <p:extLst>
               <p:ext uri="{D42A27DB-BD31-4B8C-83A1-F6EECF244321}">
-                <p14:modId xmlns:p14="http://schemas.microsoft.com/office/powerpoint/2010/main" val="152890870"/>
+                <p14:modId xmlns:p14="http://schemas.microsoft.com/office/powerpoint/2010/main" val="3821139647"/>
               </p:ext>
             </p:extLst>
           </p:nvPr>
@@ -5654,15 +5654,7 @@
                         </a:spcBef>
                       </a:pPr>
                       <a:r>
-                        <a:rPr sz="1100" spc="-10" dirty="0">
-                          <a:latin typeface="Roboto" panose="02000000000000000000" pitchFamily="2" charset="0"/>
-                          <a:ea typeface="Roboto" panose="02000000000000000000" pitchFamily="2" charset="0"/>
-                          <a:cs typeface="Roboto" panose="02000000000000000000" pitchFamily="2" charset="0"/>
-                        </a:rPr>
-                        <a:t>-</a:t>
-                      </a:r>
-                      <a:r>
-                        <a:rPr lang="en-GB" sz="1100" dirty="0"/>
+                        <a:rPr lang="en-GB" sz="1100"/>
                         <a:t>{{</a:t>
                       </a:r>
                       <a:r>

--- a/template.pptx
+++ b/template.pptx
@@ -140,7 +140,7 @@
           <a:p>
             <a:fld id="{C2BA462C-7B8E-41CC-A074-F2F31662260A}" type="datetimeFigureOut">
               <a:rPr lang="en-GB" smtClean="0"/>
-              <a:t>22/06/2026</a:t>
+              <a:t>23/06/2026</a:t>
             </a:fld>
             <a:endParaRPr lang="en-GB"/>
           </a:p>
@@ -317,7 +317,7 @@
           <a:p>
             <a:fld id="{1082EEEB-836D-594B-9F80-250148AC8146}" type="datetimeFigureOut">
               <a:rPr lang="en-US" smtClean="0"/>
-              <a:t>6/22/2026</a:t>
+              <a:t>6/23/2026</a:t>
             </a:fld>
             <a:endParaRPr lang="en-US"/>
           </a:p>
@@ -2022,7 +2022,7 @@
         <p:spPr>
           <a:xfrm>
             <a:off x="556491" y="1464191"/>
-            <a:ext cx="7729509" cy="7380867"/>
+            <a:ext cx="7729509" cy="7686078"/>
           </a:xfrm>
           <a:prstGeom prst="rect">
             <a:avLst/>
@@ -2074,7 +2074,15 @@
             </a:r>
             <a:r>
               <a:rPr lang="en-GB" sz="1400" dirty="0"/>
-              <a:t>}} {{modulation}}</a:t>
+              <a:t>}} {{modulation}}{{</a:t>
+            </a:r>
+            <a:r>
+              <a:rPr lang="en-GB" sz="1400" dirty="0" err="1"/>
+              <a:t>lane_config</a:t>
+            </a:r>
+            <a:r>
+              <a:rPr lang="en-GB" sz="1400" dirty="0"/>
+              <a:t>}}</a:t>
             </a:r>
           </a:p>
           <a:p>
@@ -2130,7 +2138,7 @@
             </a:r>
             <a:r>
               <a:rPr lang="en-GB" sz="1400" dirty="0" err="1"/>
-              <a:t>dsp_statement</a:t>
+              <a:t>cdr_statement</a:t>
             </a:r>
             <a:r>
               <a:rPr lang="en-GB" sz="1400" dirty="0"/>
@@ -2156,7 +2164,15 @@
             </a:pPr>
             <a:r>
               <a:rPr lang="en-GB" sz="1400" dirty="0"/>
-              <a:t>Reach up to {{reach_om4}} over OM4 &amp; {{reach_om3}} over OM3 MMF</a:t>
+              <a:t>{{</a:t>
+            </a:r>
+            <a:r>
+              <a:rPr lang="en-GB" sz="1400" dirty="0" err="1"/>
+              <a:t>reach_description</a:t>
+            </a:r>
+            <a:r>
+              <a:rPr lang="en-GB" sz="1400" dirty="0"/>
+              <a:t>}}</a:t>
             </a:r>
           </a:p>
           <a:p>
@@ -2212,11 +2228,11 @@
             </a:r>
             <a:r>
               <a:rPr lang="en-GB" sz="1400" dirty="0" err="1"/>
-              <a:t>tx_channels</a:t>
+              <a:t>optics_description</a:t>
             </a:r>
             <a:r>
               <a:rPr lang="en-GB" sz="1400" dirty="0"/>
-              <a:t>}} channels {{wavelength}} VCSEL array</a:t>
+              <a:t>}}</a:t>
             </a:r>
           </a:p>
           <a:p>
@@ -2242,11 +2258,11 @@
             </a:r>
             <a:r>
               <a:rPr lang="en-GB" sz="1400" dirty="0" err="1"/>
-              <a:t>rx_channels</a:t>
+              <a:t>rx_optics_description</a:t>
             </a:r>
             <a:r>
               <a:rPr lang="en-GB" sz="1400" dirty="0"/>
-              <a:t>}} channels PIN photodetector array</a:t>
+              <a:t>}}</a:t>
             </a:r>
           </a:p>
           <a:p>
@@ -2276,7 +2292,7 @@
             </a:r>
             <a:r>
               <a:rPr lang="en-GB" sz="1400" dirty="0"/>
-              <a:t>}} ~ {{</a:t>
+              <a:t>}} to {{</a:t>
             </a:r>
             <a:r>
               <a:rPr lang="en-GB" sz="1400" dirty="0" err="1"/>
@@ -2284,7 +2300,7 @@
             </a:r>
             <a:r>
               <a:rPr lang="en-GB" sz="1400" dirty="0"/>
-              <a:t>}}ºC</a:t>
+              <a:t>}}</a:t>
             </a:r>
           </a:p>
           <a:p>
@@ -2336,27 +2352,11 @@
             </a:pPr>
             <a:r>
               <a:rPr lang="en-GB" sz="1400" dirty="0"/>
-              <a:t>Power dissipation &lt; {{</a:t>
+              <a:t>Power dissipation &lt;{{</a:t>
             </a:r>
             <a:r>
               <a:rPr lang="en-GB" sz="1400" dirty="0" err="1"/>
               <a:t>power_max</a:t>
-            </a:r>
-            <a:r>
-              <a:rPr lang="en-GB" sz="1400" dirty="0"/>
-              <a:t>}}TDEC&lt; 4.5dB{{</a:t>
-            </a:r>
-            <a:r>
-              <a:rPr lang="en-GB" sz="1400" dirty="0" err="1"/>
-              <a:t>tdec_param</a:t>
-            </a:r>
-            <a:r>
-              <a:rPr lang="en-GB" sz="1400" dirty="0"/>
-              <a:t>}} &lt; {{</a:t>
-            </a:r>
-            <a:r>
-              <a:rPr lang="en-GB" sz="1400" dirty="0" err="1"/>
-              <a:t>tdec_value</a:t>
             </a:r>
             <a:r>
               <a:rPr lang="en-GB" sz="1400" dirty="0"/>
@@ -2386,11 +2386,27 @@
             </a:r>
             <a:r>
               <a:rPr lang="en-GB" sz="1400" dirty="0" err="1"/>
-              <a:t>connector_type</a:t>
+              <a:t>tdec_param</a:t>
             </a:r>
             <a:r>
               <a:rPr lang="en-GB" sz="1400" dirty="0"/>
-              <a:t>}} port</a:t>
+              <a:t>}} &lt;{{</a:t>
+            </a:r>
+            <a:r>
+              <a:rPr lang="en-GB" sz="1400" dirty="0" err="1"/>
+              <a:t>tdec_value</a:t>
+            </a:r>
+            <a:r>
+              <a:rPr lang="en-GB" sz="1400" dirty="0"/>
+              <a:t>}}{{</a:t>
+            </a:r>
+            <a:r>
+              <a:rPr lang="en-GB" sz="1400" dirty="0" err="1"/>
+              <a:t>tdec_unit</a:t>
+            </a:r>
+            <a:r>
+              <a:rPr lang="en-GB" sz="1400" dirty="0"/>
+              <a:t>}}</a:t>
             </a:r>
           </a:p>
           <a:p>
@@ -2406,6 +2422,34 @@
               </a:buClr>
               <a:buFont typeface="Arial" panose="020B0604020202020204" pitchFamily="34" charset="0"/>
               <a:buChar char="•"/>
+              <a:tabLst>
+                <a:tab pos="278765" algn="l"/>
+              </a:tabLst>
+            </a:pPr>
+            <a:r>
+              <a:rPr lang="en-GB" sz="1400" dirty="0"/>
+              <a:t>{{</a:t>
+            </a:r>
+            <a:r>
+              <a:rPr lang="en-GB" sz="1400" dirty="0" err="1"/>
+              <a:t>connector_type</a:t>
+            </a:r>
+            <a:r>
+              <a:rPr lang="en-GB" sz="1400" dirty="0"/>
+              <a:t>}} connector</a:t>
+            </a:r>
+          </a:p>
+          <a:p>
+            <a:pPr marL="12700">
+              <a:lnSpc>
+                <a:spcPct val="100000"/>
+              </a:lnSpc>
+              <a:spcBef>
+                <a:spcPts val="660"/>
+              </a:spcBef>
+              <a:buClr>
+                <a:srgbClr val="40AD48"/>
+              </a:buClr>
               <a:tabLst>
                 <a:tab pos="278765" algn="l"/>
               </a:tabLst>
@@ -4374,7 +4418,7 @@
         </p:nvSpPr>
         <p:spPr>
           <a:xfrm>
-            <a:off x="304801" y="1510160"/>
+            <a:off x="483205" y="1494790"/>
             <a:ext cx="4272915" cy="228909"/>
           </a:xfrm>
           <a:prstGeom prst="rect">
@@ -4469,14 +4513,14 @@
           <p:nvPr>
             <p:extLst>
               <p:ext uri="{D42A27DB-BD31-4B8C-83A1-F6EECF244321}">
-                <p14:modId xmlns:p14="http://schemas.microsoft.com/office/powerpoint/2010/main" val="3821139647"/>
+                <p14:modId xmlns:p14="http://schemas.microsoft.com/office/powerpoint/2010/main" val="3840723450"/>
               </p:ext>
             </p:extLst>
           </p:nvPr>
         </p:nvGraphicFramePr>
         <p:xfrm>
-          <a:off x="304801" y="1943757"/>
-          <a:ext cx="8772938" cy="1746759"/>
+          <a:off x="483205" y="1943757"/>
+          <a:ext cx="8139492" cy="1665898"/>
         </p:xfrm>
         <a:graphic>
           <a:graphicData uri="http://schemas.openxmlformats.org/drawingml/2006/table">
@@ -4485,35 +4529,35 @@
                 <a:tableStyleId>{2D5ABB26-0587-4C30-8999-92F81FD0307C}</a:tableStyleId>
               </a:tblPr>
               <a:tblGrid>
-                <a:gridCol w="2425147">
+                <a:gridCol w="1945670">
                   <a:extLst>
                     <a:ext uri="{9D8B030D-6E8A-4147-A177-3AD203B41FA5}">
                       <a16:colId xmlns:a16="http://schemas.microsoft.com/office/drawing/2014/main" val="20000"/>
                     </a:ext>
                   </a:extLst>
                 </a:gridCol>
-                <a:gridCol w="1391478">
+                <a:gridCol w="1476375">
                   <a:extLst>
                     <a:ext uri="{9D8B030D-6E8A-4147-A177-3AD203B41FA5}">
                       <a16:colId xmlns:a16="http://schemas.microsoft.com/office/drawing/2014/main" val="20001"/>
                     </a:ext>
                   </a:extLst>
                 </a:gridCol>
-                <a:gridCol w="1497496">
+                <a:gridCol w="1552575">
                   <a:extLst>
                     <a:ext uri="{9D8B030D-6E8A-4147-A177-3AD203B41FA5}">
                       <a16:colId xmlns:a16="http://schemas.microsoft.com/office/drawing/2014/main" val="20002"/>
                     </a:ext>
                   </a:extLst>
                 </a:gridCol>
-                <a:gridCol w="1722782">
+                <a:gridCol w="1554187">
                   <a:extLst>
                     <a:ext uri="{9D8B030D-6E8A-4147-A177-3AD203B41FA5}">
                       <a16:colId xmlns:a16="http://schemas.microsoft.com/office/drawing/2014/main" val="20003"/>
                     </a:ext>
                   </a:extLst>
                 </a:gridCol>
-                <a:gridCol w="1736035">
+                <a:gridCol w="1610685">
                   <a:extLst>
                     <a:ext uri="{9D8B030D-6E8A-4147-A177-3AD203B41FA5}">
                       <a16:colId xmlns:a16="http://schemas.microsoft.com/office/drawing/2014/main" val="20004"/>
@@ -4881,7 +4925,7 @@
                       </a:endParaRPr>
                     </a:p>
                   </a:txBody>
-                  <a:tcPr marL="0" marR="0" marT="42545" marB="0">
+                  <a:tcPr marL="0" marR="0" marT="42545" marB="0" anchor="ctr">
                     <a:lnL w="6350">
                       <a:solidFill>
                         <a:srgbClr val="000000"/>
@@ -4946,7 +4990,7 @@
                       </a:endParaRPr>
                     </a:p>
                   </a:txBody>
-                  <a:tcPr marL="0" marR="0" marT="51435" marB="0">
+                  <a:tcPr marL="0" marR="0" marT="51435" marB="0" anchor="ctr">
                     <a:lnL w="6350" cap="flat" cmpd="sng" algn="ctr">
                       <a:solidFill>
                         <a:srgbClr val="000000"/>
@@ -5014,7 +5058,7 @@
                       </a:endParaRPr>
                     </a:p>
                   </a:txBody>
-                  <a:tcPr marL="0" marR="0" marT="42545" marB="0">
+                  <a:tcPr marL="0" marR="0" marT="42545" marB="0" anchor="ctr">
                     <a:lnL w="6350" cap="flat" cmpd="sng" algn="ctr">
                       <a:solidFill>
                         <a:srgbClr val="000000"/>
@@ -5079,7 +5123,7 @@
                       </a:endParaRPr>
                     </a:p>
                   </a:txBody>
-                  <a:tcPr marL="0" marR="0" marT="42545" marB="0">
+                  <a:tcPr marL="0" marR="0" marT="42545" marB="0" anchor="ctr">
                     <a:lnL w="6350">
                       <a:solidFill>
                         <a:srgbClr val="000000"/>
@@ -5141,7 +5185,7 @@
                       </a:endParaRPr>
                     </a:p>
                   </a:txBody>
-                  <a:tcPr marL="0" marR="0" marT="42545" marB="0">
+                  <a:tcPr marL="0" marR="0" marT="42545" marB="0" anchor="ctr">
                     <a:lnL w="6350">
                       <a:solidFill>
                         <a:srgbClr val="000000"/>
@@ -5210,7 +5254,7 @@
                       </a:endParaRPr>
                     </a:p>
                   </a:txBody>
-                  <a:tcPr marL="0" marR="0" marT="42545" marB="0">
+                  <a:tcPr marL="0" marR="0" marT="42545" marB="0" anchor="ctr">
                     <a:lnL w="6350">
                       <a:solidFill>
                         <a:srgbClr val="000000"/>
@@ -5275,7 +5319,7 @@
                       </a:endParaRPr>
                     </a:p>
                   </a:txBody>
-                  <a:tcPr marL="0" marR="0" marT="52069" marB="0">
+                  <a:tcPr marL="0" marR="0" marT="52069" marB="0" anchor="ctr">
                     <a:lnL w="6350" cap="flat" cmpd="sng" algn="ctr">
                       <a:solidFill>
                         <a:srgbClr val="000000"/>
@@ -5343,7 +5387,7 @@
                       </a:endParaRPr>
                     </a:p>
                   </a:txBody>
-                  <a:tcPr marL="0" marR="0" marT="42545" marB="0">
+                  <a:tcPr marL="0" marR="0" marT="42545" marB="0" anchor="ctr">
                     <a:lnL w="6350" cap="flat" cmpd="sng" algn="ctr">
                       <a:solidFill>
                         <a:srgbClr val="000000"/>
@@ -5408,7 +5452,7 @@
                       </a:endParaRPr>
                     </a:p>
                   </a:txBody>
-                  <a:tcPr marL="0" marR="0" marT="42545" marB="0">
+                  <a:tcPr marL="0" marR="0" marT="42545" marB="0" anchor="ctr">
                     <a:lnL w="6350">
                       <a:solidFill>
                         <a:srgbClr val="000000"/>
@@ -5470,7 +5514,7 @@
                       </a:endParaRPr>
                     </a:p>
                   </a:txBody>
-                  <a:tcPr marL="0" marR="0" marT="42545" marB="0">
+                  <a:tcPr marL="0" marR="0" marT="42545" marB="0" anchor="ctr">
                     <a:lnL w="6350">
                       <a:solidFill>
                         <a:srgbClr val="000000"/>
@@ -5539,7 +5583,7 @@
                       </a:endParaRPr>
                     </a:p>
                   </a:txBody>
-                  <a:tcPr marL="0" marR="0" marT="43180" marB="0">
+                  <a:tcPr marL="0" marR="0" marT="43180" marB="0" anchor="ctr">
                     <a:lnL w="6350">
                       <a:solidFill>
                         <a:srgbClr val="000000"/>
@@ -5604,7 +5648,7 @@
                       </a:endParaRPr>
                     </a:p>
                   </a:txBody>
-                  <a:tcPr marL="0" marR="0" marT="43180" marB="0">
+                  <a:tcPr marL="0" marR="0" marT="43180" marB="0" anchor="ctr">
                     <a:lnL w="6350" cap="flat" cmpd="sng" algn="ctr">
                       <a:solidFill>
                         <a:srgbClr val="000000"/>
@@ -5654,7 +5698,7 @@
                         </a:spcBef>
                       </a:pPr>
                       <a:r>
-                        <a:rPr lang="en-GB" sz="1100"/>
+                        <a:rPr lang="en-GB" sz="1100" dirty="0"/>
                         <a:t>{{</a:t>
                       </a:r>
                       <a:r>
@@ -5672,7 +5716,7 @@
                       </a:endParaRPr>
                     </a:p>
                   </a:txBody>
-                  <a:tcPr marL="0" marR="0" marT="43180" marB="0">
+                  <a:tcPr marL="0" marR="0" marT="43180" marB="0" anchor="ctr">
                     <a:lnL w="6350" cap="flat" cmpd="sng" algn="ctr">
                       <a:solidFill>
                         <a:srgbClr val="000000"/>
@@ -5737,7 +5781,7 @@
                       </a:endParaRPr>
                     </a:p>
                   </a:txBody>
-                  <a:tcPr marL="0" marR="0" marT="43180" marB="0">
+                  <a:tcPr marL="0" marR="0" marT="43180" marB="0" anchor="ctr">
                     <a:lnL w="6350">
                       <a:solidFill>
                         <a:srgbClr val="000000"/>
@@ -5799,7 +5843,7 @@
                       </a:endParaRPr>
                     </a:p>
                   </a:txBody>
-                  <a:tcPr marL="0" marR="0" marT="43180" marB="0">
+                  <a:tcPr marL="0" marR="0" marT="43180" marB="0" anchor="ctr">
                     <a:lnL w="6350">
                       <a:solidFill>
                         <a:srgbClr val="000000"/>
@@ -5868,7 +5912,7 @@
                       </a:endParaRPr>
                     </a:p>
                   </a:txBody>
-                  <a:tcPr marL="0" marR="0" marT="43180" marB="0">
+                  <a:tcPr marL="0" marR="0" marT="43180" marB="0" anchor="ctr">
                     <a:lnL w="6350">
                       <a:solidFill>
                         <a:srgbClr val="000000"/>
@@ -5906,7 +5950,7 @@
                     <a:bodyPr/>
                     <a:lstStyle/>
                     <a:p>
-                      <a:pPr>
+                      <a:pPr algn="ctr">
                         <a:lnSpc>
                           <a:spcPct val="100000"/>
                         </a:lnSpc>
@@ -5930,7 +5974,7 @@
                       </a:endParaRPr>
                     </a:p>
                   </a:txBody>
-                  <a:tcPr marL="0" marR="0" marT="0" marB="0">
+                  <a:tcPr marL="0" marR="0" marT="0" marB="0" anchor="ctr">
                     <a:lnL w="6350" cap="flat" cmpd="sng" algn="ctr">
                       <a:solidFill>
                         <a:srgbClr val="000000"/>
@@ -5998,7 +6042,7 @@
                       </a:endParaRPr>
                     </a:p>
                   </a:txBody>
-                  <a:tcPr marL="0" marR="0" marT="43180" marB="0">
+                  <a:tcPr marL="0" marR="0" marT="43180" marB="0" anchor="ctr">
                     <a:lnL w="6350" cap="flat" cmpd="sng" algn="ctr">
                       <a:solidFill>
                         <a:srgbClr val="000000"/>
@@ -6063,7 +6107,7 @@
                       </a:endParaRPr>
                     </a:p>
                   </a:txBody>
-                  <a:tcPr marL="0" marR="0" marT="43180" marB="0">
+                  <a:tcPr marL="0" marR="0" marT="43180" marB="0" anchor="ctr">
                     <a:lnL w="6350">
                       <a:solidFill>
                         <a:srgbClr val="000000"/>
@@ -6125,7 +6169,7 @@
                       </a:endParaRPr>
                     </a:p>
                   </a:txBody>
-                  <a:tcPr marL="0" marR="0" marT="43180" marB="0">
+                  <a:tcPr marL="0" marR="0" marT="43180" marB="0" anchor="ctr">
                     <a:lnL w="6350">
                       <a:solidFill>
                         <a:srgbClr val="000000"/>
@@ -6179,7 +6223,7 @@
         </p:nvSpPr>
         <p:spPr>
           <a:xfrm>
-            <a:off x="483205" y="3799193"/>
+            <a:off x="483205" y="3908844"/>
             <a:ext cx="4108255" cy="228268"/>
           </a:xfrm>
           <a:prstGeom prst="rect">
@@ -6278,14 +6322,14 @@
           <p:nvPr>
             <p:extLst>
               <p:ext uri="{D42A27DB-BD31-4B8C-83A1-F6EECF244321}">
-                <p14:modId xmlns:p14="http://schemas.microsoft.com/office/powerpoint/2010/main" val="2067126341"/>
+                <p14:modId xmlns:p14="http://schemas.microsoft.com/office/powerpoint/2010/main" val="1933851360"/>
               </p:ext>
             </p:extLst>
           </p:nvPr>
         </p:nvGraphicFramePr>
         <p:xfrm>
-          <a:off x="304800" y="4215495"/>
-          <a:ext cx="8772938" cy="1457325"/>
+          <a:off x="483206" y="4215495"/>
+          <a:ext cx="8139493" cy="1585595"/>
         </p:xfrm>
         <a:graphic>
           <a:graphicData uri="http://schemas.openxmlformats.org/drawingml/2006/table">
@@ -6294,42 +6338,42 @@
                 <a:tableStyleId>{2D5ABB26-0587-4C30-8999-92F81FD0307C}</a:tableStyleId>
               </a:tblPr>
               <a:tblGrid>
-                <a:gridCol w="2742743">
+                <a:gridCol w="2317144">
                   <a:extLst>
                     <a:ext uri="{9D8B030D-6E8A-4147-A177-3AD203B41FA5}">
                       <a16:colId xmlns:a16="http://schemas.microsoft.com/office/drawing/2014/main" val="20000"/>
                     </a:ext>
                   </a:extLst>
                 </a:gridCol>
-                <a:gridCol w="1202611">
+                <a:gridCol w="1276350">
                   <a:extLst>
                     <a:ext uri="{9D8B030D-6E8A-4147-A177-3AD203B41FA5}">
                       <a16:colId xmlns:a16="http://schemas.microsoft.com/office/drawing/2014/main" val="20001"/>
                     </a:ext>
                   </a:extLst>
                 </a:gridCol>
-                <a:gridCol w="1207534">
+                <a:gridCol w="1085850">
                   <a:extLst>
                     <a:ext uri="{9D8B030D-6E8A-4147-A177-3AD203B41FA5}">
                       <a16:colId xmlns:a16="http://schemas.microsoft.com/office/drawing/2014/main" val="20002"/>
                     </a:ext>
                   </a:extLst>
                 </a:gridCol>
-                <a:gridCol w="1207534">
+                <a:gridCol w="1221827">
                   <a:extLst>
                     <a:ext uri="{9D8B030D-6E8A-4147-A177-3AD203B41FA5}">
                       <a16:colId xmlns:a16="http://schemas.microsoft.com/office/drawing/2014/main" val="20003"/>
                     </a:ext>
                   </a:extLst>
                 </a:gridCol>
-                <a:gridCol w="1207534">
+                <a:gridCol w="1120345">
                   <a:extLst>
                     <a:ext uri="{9D8B030D-6E8A-4147-A177-3AD203B41FA5}">
                       <a16:colId xmlns:a16="http://schemas.microsoft.com/office/drawing/2014/main" val="20004"/>
                     </a:ext>
                   </a:extLst>
                 </a:gridCol>
-                <a:gridCol w="1204982">
+                <a:gridCol w="1117977">
                   <a:extLst>
                     <a:ext uri="{9D8B030D-6E8A-4147-A177-3AD203B41FA5}">
                       <a16:colId xmlns:a16="http://schemas.microsoft.com/office/drawing/2014/main" val="20005"/>
@@ -6764,7 +6808,7 @@
                       </a:endParaRPr>
                     </a:p>
                   </a:txBody>
-                  <a:tcPr marL="0" marR="0" marT="43815" marB="0">
+                  <a:tcPr marL="0" marR="0" marT="43815" marB="0" anchor="ctr">
                     <a:lnL w="6350">
                       <a:solidFill>
                         <a:srgbClr val="000000"/>
@@ -6809,7 +6853,7 @@
                       </a:pPr>
                       <a:r>
                         <a:rPr lang="en-GB" sz="1100" spc="-25" dirty="0">
-                          <a:latin typeface="Roboto" panose="02000000000000000000" pitchFamily="2" charset="0"/>
+                          <a:latin typeface="+mn-lt"/>
                           <a:ea typeface="Roboto" panose="02000000000000000000" pitchFamily="2" charset="0"/>
                           <a:cs typeface="Roboto" panose="02000000000000000000" pitchFamily="2" charset="0"/>
                         </a:rPr>
@@ -6817,7 +6861,7 @@
                       </a:r>
                       <a:r>
                         <a:rPr lang="en-GB" sz="1100" spc="-25" dirty="0" err="1">
-                          <a:latin typeface="Roboto" panose="02000000000000000000" pitchFamily="2" charset="0"/>
+                          <a:latin typeface="+mn-lt"/>
                           <a:ea typeface="Roboto" panose="02000000000000000000" pitchFamily="2" charset="0"/>
                           <a:cs typeface="Roboto" panose="02000000000000000000" pitchFamily="2" charset="0"/>
                         </a:rPr>
@@ -6825,20 +6869,20 @@
                       </a:r>
                       <a:r>
                         <a:rPr lang="en-GB" sz="1100" spc="-25" dirty="0">
-                          <a:latin typeface="Roboto" panose="02000000000000000000" pitchFamily="2" charset="0"/>
+                          <a:latin typeface="+mn-lt"/>
                           <a:ea typeface="Roboto" panose="02000000000000000000" pitchFamily="2" charset="0"/>
                           <a:cs typeface="Roboto" panose="02000000000000000000" pitchFamily="2" charset="0"/>
                         </a:rPr>
                         <a:t>}}</a:t>
                       </a:r>
                       <a:endParaRPr sz="1100" dirty="0">
-                        <a:latin typeface="Roboto" panose="02000000000000000000" pitchFamily="2" charset="0"/>
+                        <a:latin typeface="+mn-lt"/>
                         <a:ea typeface="Roboto" panose="02000000000000000000" pitchFamily="2" charset="0"/>
                         <a:cs typeface="Roboto" panose="02000000000000000000" pitchFamily="2" charset="0"/>
                       </a:endParaRPr>
                     </a:p>
                   </a:txBody>
-                  <a:tcPr marL="0" marR="0" marT="43815" marB="0">
+                  <a:tcPr marL="0" marR="0" marT="43815" marB="0" anchor="ctr">
                     <a:lnL w="6350">
                       <a:solidFill>
                         <a:srgbClr val="000000"/>
@@ -6882,25 +6926,31 @@
                         </a:spcBef>
                       </a:pPr>
                       <a:r>
-                        <a:rPr lang="en-GB" sz="1100" dirty="0"/>
+                        <a:rPr lang="en-GB" sz="1100" dirty="0">
+                          <a:latin typeface="+mn-lt"/>
+                        </a:rPr>
                         <a:t>{{</a:t>
                       </a:r>
                       <a:r>
-                        <a:rPr lang="en-GB" sz="1100" dirty="0" err="1"/>
+                        <a:rPr lang="en-GB" sz="1100" dirty="0" err="1">
+                          <a:latin typeface="+mn-lt"/>
+                        </a:rPr>
                         <a:t>op_temp_min</a:t>
                       </a:r>
                       <a:r>
-                        <a:rPr lang="en-GB" sz="1100" dirty="0"/>
+                        <a:rPr lang="en-GB" sz="1100" dirty="0">
+                          <a:latin typeface="+mn-lt"/>
+                        </a:rPr>
                         <a:t>}}</a:t>
                       </a:r>
                       <a:endParaRPr sz="1100" dirty="0">
-                        <a:latin typeface="Roboto" panose="02000000000000000000" pitchFamily="2" charset="0"/>
+                        <a:latin typeface="+mn-lt"/>
                         <a:ea typeface="Roboto" panose="02000000000000000000" pitchFamily="2" charset="0"/>
                         <a:cs typeface="Roboto" panose="02000000000000000000" pitchFamily="2" charset="0"/>
                       </a:endParaRPr>
                     </a:p>
                   </a:txBody>
-                  <a:tcPr marL="0" marR="0" marT="43815" marB="0">
+                  <a:tcPr marL="0" marR="0" marT="43815" marB="0" anchor="ctr">
                     <a:lnL w="6350">
                       <a:solidFill>
                         <a:srgbClr val="000000"/>
@@ -6935,14 +6985,14 @@
                     <a:bodyPr/>
                     <a:lstStyle/>
                     <a:p>
-                      <a:pPr>
+                      <a:pPr algn="ctr">
                         <a:lnSpc>
                           <a:spcPct val="100000"/>
                         </a:lnSpc>
                       </a:pPr>
                       <a:r>
                         <a:rPr lang="en-GB" sz="1100" dirty="0">
-                          <a:latin typeface="Roboto" panose="02000000000000000000" pitchFamily="2" charset="0"/>
+                          <a:latin typeface="+mn-lt"/>
                           <a:ea typeface="Roboto" panose="02000000000000000000" pitchFamily="2" charset="0"/>
                           <a:cs typeface="Roboto" panose="02000000000000000000" pitchFamily="2" charset="0"/>
                         </a:rPr>
@@ -6950,7 +7000,7 @@
                       </a:r>
                       <a:r>
                         <a:rPr lang="en-GB" sz="1100" dirty="0" err="1">
-                          <a:latin typeface="Roboto" panose="02000000000000000000" pitchFamily="2" charset="0"/>
+                          <a:latin typeface="+mn-lt"/>
                           <a:ea typeface="Roboto" panose="02000000000000000000" pitchFamily="2" charset="0"/>
                           <a:cs typeface="Roboto" panose="02000000000000000000" pitchFamily="2" charset="0"/>
                         </a:rPr>
@@ -6958,20 +7008,20 @@
                       </a:r>
                       <a:r>
                         <a:rPr lang="en-GB" sz="1100" dirty="0">
-                          <a:latin typeface="Roboto" panose="02000000000000000000" pitchFamily="2" charset="0"/>
+                          <a:latin typeface="+mn-lt"/>
                           <a:ea typeface="Roboto" panose="02000000000000000000" pitchFamily="2" charset="0"/>
                           <a:cs typeface="Roboto" panose="02000000000000000000" pitchFamily="2" charset="0"/>
                         </a:rPr>
                         <a:t>}}</a:t>
                       </a:r>
                       <a:endParaRPr sz="1100" dirty="0">
-                        <a:latin typeface="Roboto" panose="02000000000000000000" pitchFamily="2" charset="0"/>
+                        <a:latin typeface="+mn-lt"/>
                         <a:ea typeface="Roboto" panose="02000000000000000000" pitchFamily="2" charset="0"/>
                         <a:cs typeface="Roboto" panose="02000000000000000000" pitchFamily="2" charset="0"/>
                       </a:endParaRPr>
                     </a:p>
                   </a:txBody>
-                  <a:tcPr marL="0" marR="0" marT="0" marB="0">
+                  <a:tcPr marL="0" marR="0" marT="0" marB="0" anchor="ctr">
                     <a:lnL w="6350">
                       <a:solidFill>
                         <a:srgbClr val="000000"/>
@@ -7016,7 +7066,7 @@
                       </a:pPr>
                       <a:r>
                         <a:rPr lang="en-GB" sz="1100" spc="-25" dirty="0">
-                          <a:latin typeface="Roboto" panose="02000000000000000000" pitchFamily="2" charset="0"/>
+                          <a:latin typeface="+mn-lt"/>
                           <a:ea typeface="Roboto" panose="02000000000000000000" pitchFamily="2" charset="0"/>
                           <a:cs typeface="Roboto" panose="02000000000000000000" pitchFamily="2" charset="0"/>
                         </a:rPr>
@@ -7024,7 +7074,7 @@
                       </a:r>
                       <a:r>
                         <a:rPr lang="en-GB" sz="1100" spc="-25" dirty="0" err="1">
-                          <a:latin typeface="Roboto" panose="02000000000000000000" pitchFamily="2" charset="0"/>
+                          <a:latin typeface="+mn-lt"/>
                           <a:ea typeface="Roboto" panose="02000000000000000000" pitchFamily="2" charset="0"/>
                           <a:cs typeface="Roboto" panose="02000000000000000000" pitchFamily="2" charset="0"/>
                         </a:rPr>
@@ -7032,20 +7082,20 @@
                       </a:r>
                       <a:r>
                         <a:rPr lang="en-GB" sz="1100" spc="-25" dirty="0">
-                          <a:latin typeface="Roboto" panose="02000000000000000000" pitchFamily="2" charset="0"/>
+                          <a:latin typeface="+mn-lt"/>
                           <a:ea typeface="Roboto" panose="02000000000000000000" pitchFamily="2" charset="0"/>
                           <a:cs typeface="Roboto" panose="02000000000000000000" pitchFamily="2" charset="0"/>
                         </a:rPr>
                         <a:t>}}</a:t>
                       </a:r>
                       <a:endParaRPr sz="1100" dirty="0">
-                        <a:latin typeface="Roboto" panose="02000000000000000000" pitchFamily="2" charset="0"/>
+                        <a:latin typeface="+mn-lt"/>
                         <a:ea typeface="Roboto" panose="02000000000000000000" pitchFamily="2" charset="0"/>
                         <a:cs typeface="Roboto" panose="02000000000000000000" pitchFamily="2" charset="0"/>
                       </a:endParaRPr>
                     </a:p>
                   </a:txBody>
-                  <a:tcPr marL="0" marR="0" marT="43815" marB="0">
+                  <a:tcPr marL="0" marR="0" marT="43815" marB="0" anchor="ctr">
                     <a:lnL w="6350">
                       <a:solidFill>
                         <a:srgbClr val="000000"/>
@@ -7090,7 +7140,7 @@
                       </a:pPr>
                       <a:r>
                         <a:rPr lang="en-GB" sz="1100" spc="-50" dirty="0">
-                          <a:latin typeface="Roboto" panose="02000000000000000000" pitchFamily="2" charset="0"/>
+                          <a:latin typeface="+mn-lt"/>
                           <a:ea typeface="Roboto" panose="02000000000000000000" pitchFamily="2" charset="0"/>
                           <a:cs typeface="Roboto" panose="02000000000000000000" pitchFamily="2" charset="0"/>
                         </a:rPr>
@@ -7098,7 +7148,7 @@
                       </a:r>
                       <a:r>
                         <a:rPr lang="en-GB" sz="1100" spc="-50" dirty="0" err="1">
-                          <a:latin typeface="Roboto" panose="02000000000000000000" pitchFamily="2" charset="0"/>
+                          <a:latin typeface="+mn-lt"/>
                           <a:ea typeface="Roboto" panose="02000000000000000000" pitchFamily="2" charset="0"/>
                           <a:cs typeface="Roboto" panose="02000000000000000000" pitchFamily="2" charset="0"/>
                         </a:rPr>
@@ -7106,20 +7156,20 @@
                       </a:r>
                       <a:r>
                         <a:rPr lang="en-GB" sz="1100" spc="-50" dirty="0">
-                          <a:latin typeface="Roboto" panose="02000000000000000000" pitchFamily="2" charset="0"/>
+                          <a:latin typeface="+mn-lt"/>
                           <a:ea typeface="Roboto" panose="02000000000000000000" pitchFamily="2" charset="0"/>
                           <a:cs typeface="Roboto" panose="02000000000000000000" pitchFamily="2" charset="0"/>
                         </a:rPr>
                         <a:t>}}</a:t>
                       </a:r>
                       <a:endParaRPr sz="1100" dirty="0">
-                        <a:latin typeface="Roboto" panose="02000000000000000000" pitchFamily="2" charset="0"/>
+                        <a:latin typeface="+mn-lt"/>
                         <a:ea typeface="Roboto" panose="02000000000000000000" pitchFamily="2" charset="0"/>
                         <a:cs typeface="Roboto" panose="02000000000000000000" pitchFamily="2" charset="0"/>
                       </a:endParaRPr>
                     </a:p>
                   </a:txBody>
-                  <a:tcPr marL="0" marR="0" marT="43815" marB="0">
+                  <a:tcPr marL="0" marR="0" marT="43815" marB="0" anchor="ctr">
                     <a:lnL w="6350">
                       <a:solidFill>
                         <a:srgbClr val="000000"/>
@@ -7188,7 +7238,7 @@
                       </a:endParaRPr>
                     </a:p>
                   </a:txBody>
-                  <a:tcPr marL="0" marR="0" marT="42545" marB="0">
+                  <a:tcPr marL="0" marR="0" marT="42545" marB="0" anchor="ctr">
                     <a:lnL w="6350">
                       <a:solidFill>
                         <a:srgbClr val="000000"/>
@@ -7265,13 +7315,13 @@
                         <a:t>}}</a:t>
                       </a:r>
                       <a:endParaRPr sz="1100" dirty="0">
-                        <a:latin typeface="Roboto" panose="02000000000000000000" pitchFamily="2" charset="0"/>
+                        <a:latin typeface="+mn-lt"/>
                         <a:ea typeface="Roboto" panose="02000000000000000000" pitchFamily="2" charset="0"/>
                         <a:cs typeface="Roboto" panose="02000000000000000000" pitchFamily="2" charset="0"/>
                       </a:endParaRPr>
                     </a:p>
                   </a:txBody>
-                  <a:tcPr marL="0" marR="0" marT="42545" marB="0">
+                  <a:tcPr marL="0" marR="0" marT="42545" marB="0" anchor="ctr">
                     <a:lnL w="6350">
                       <a:solidFill>
                         <a:srgbClr val="000000"/>
@@ -7348,13 +7398,13 @@
                         <a:t>}}</a:t>
                       </a:r>
                       <a:endParaRPr sz="1100" dirty="0">
-                        <a:latin typeface="Roboto" panose="02000000000000000000" pitchFamily="2" charset="0"/>
+                        <a:latin typeface="+mn-lt"/>
                         <a:ea typeface="Roboto" panose="02000000000000000000" pitchFamily="2" charset="0"/>
                         <a:cs typeface="Roboto" panose="02000000000000000000" pitchFamily="2" charset="0"/>
                       </a:endParaRPr>
                     </a:p>
                   </a:txBody>
-                  <a:tcPr marL="0" marR="0" marT="42545" marB="0">
+                  <a:tcPr marL="0" marR="0" marT="42545" marB="0" anchor="ctr">
                     <a:lnL w="6350">
                       <a:solidFill>
                         <a:srgbClr val="000000"/>
@@ -7398,25 +7448,31 @@
                         </a:spcBef>
                       </a:pPr>
                       <a:r>
-                        <a:rPr lang="en-GB" sz="1100" dirty="0"/>
+                        <a:rPr lang="en-GB" sz="1100" dirty="0">
+                          <a:latin typeface="+mn-lt"/>
+                        </a:rPr>
                         <a:t>{{</a:t>
                       </a:r>
                       <a:r>
-                        <a:rPr lang="en-GB" sz="1100" dirty="0" err="1"/>
+                        <a:rPr lang="en-GB" sz="1100" dirty="0" err="1">
+                          <a:latin typeface="+mn-lt"/>
+                        </a:rPr>
                         <a:t>op_vcc_typ</a:t>
                       </a:r>
                       <a:r>
-                        <a:rPr lang="en-GB" sz="1100" dirty="0"/>
+                        <a:rPr lang="en-GB" sz="1100" dirty="0">
+                          <a:latin typeface="+mn-lt"/>
+                        </a:rPr>
                         <a:t>}}</a:t>
                       </a:r>
                       <a:endParaRPr sz="1100" dirty="0">
-                        <a:latin typeface="Roboto" panose="02000000000000000000" pitchFamily="2" charset="0"/>
+                        <a:latin typeface="+mn-lt"/>
                         <a:ea typeface="Roboto" panose="02000000000000000000" pitchFamily="2" charset="0"/>
                         <a:cs typeface="Roboto" panose="02000000000000000000" pitchFamily="2" charset="0"/>
                       </a:endParaRPr>
                     </a:p>
                   </a:txBody>
-                  <a:tcPr marL="0" marR="0" marT="42545" marB="0">
+                  <a:tcPr marL="0" marR="0" marT="42545" marB="0" anchor="ctr">
                     <a:lnL w="6350">
                       <a:solidFill>
                         <a:srgbClr val="000000"/>
@@ -7460,25 +7516,31 @@
                         </a:spcBef>
                       </a:pPr>
                       <a:r>
-                        <a:rPr lang="en-GB" sz="1100" dirty="0"/>
+                        <a:rPr lang="en-GB" sz="1100" dirty="0">
+                          <a:latin typeface="+mn-lt"/>
+                        </a:rPr>
                         <a:t>{{</a:t>
                       </a:r>
                       <a:r>
-                        <a:rPr lang="en-GB" sz="1100" dirty="0" err="1"/>
+                        <a:rPr lang="en-GB" sz="1100" dirty="0" err="1">
+                          <a:latin typeface="+mn-lt"/>
+                        </a:rPr>
                         <a:t>op_vcc_max</a:t>
                       </a:r>
                       <a:r>
-                        <a:rPr lang="en-GB" sz="1100" dirty="0"/>
+                        <a:rPr lang="en-GB" sz="1100" dirty="0">
+                          <a:latin typeface="+mn-lt"/>
+                        </a:rPr>
                         <a:t>}}</a:t>
                       </a:r>
                       <a:endParaRPr sz="1100" dirty="0">
-                        <a:latin typeface="Roboto" panose="02000000000000000000" pitchFamily="2" charset="0"/>
+                        <a:latin typeface="+mn-lt"/>
                         <a:ea typeface="Roboto" panose="02000000000000000000" pitchFamily="2" charset="0"/>
                         <a:cs typeface="Roboto" panose="02000000000000000000" pitchFamily="2" charset="0"/>
                       </a:endParaRPr>
                     </a:p>
                   </a:txBody>
-                  <a:tcPr marL="0" marR="0" marT="42545" marB="0">
+                  <a:tcPr marL="0" marR="0" marT="42545" marB="0" anchor="ctr">
                     <a:lnL w="6350">
                       <a:solidFill>
                         <a:srgbClr val="000000"/>
@@ -7522,25 +7584,31 @@
                         </a:spcBef>
                       </a:pPr>
                       <a:r>
-                        <a:rPr lang="en-GB" sz="1100" dirty="0"/>
+                        <a:rPr lang="en-GB" sz="1100" dirty="0">
+                          <a:latin typeface="+mn-lt"/>
+                        </a:rPr>
                         <a:t>{{</a:t>
                       </a:r>
                       <a:r>
-                        <a:rPr lang="en-GB" sz="1100" dirty="0" err="1"/>
+                        <a:rPr lang="en-GB" sz="1100" dirty="0" err="1">
+                          <a:latin typeface="+mn-lt"/>
+                        </a:rPr>
                         <a:t>op_vcc_unit</a:t>
                       </a:r>
                       <a:r>
-                        <a:rPr lang="en-GB" sz="1100" dirty="0"/>
+                        <a:rPr lang="en-GB" sz="1100" dirty="0">
+                          <a:latin typeface="+mn-lt"/>
+                        </a:rPr>
                         <a:t>}}</a:t>
                       </a:r>
                       <a:endParaRPr lang="en-GB" sz="1100" dirty="0">
-                        <a:latin typeface="Roboto" panose="02000000000000000000" pitchFamily="2" charset="0"/>
+                        <a:latin typeface="+mn-lt"/>
                         <a:ea typeface="Roboto" panose="02000000000000000000" pitchFamily="2" charset="0"/>
                         <a:cs typeface="Roboto" panose="02000000000000000000" pitchFamily="2" charset="0"/>
                       </a:endParaRPr>
                     </a:p>
                   </a:txBody>
-                  <a:tcPr marL="0" marR="0" marT="42545" marB="0">
+                  <a:tcPr marL="0" marR="0" marT="42545" marB="0" anchor="ctr">
                     <a:lnL w="6350">
                       <a:solidFill>
                         <a:srgbClr val="000000"/>
@@ -7609,7 +7677,7 @@
                       </a:endParaRPr>
                     </a:p>
                   </a:txBody>
-                  <a:tcPr marL="0" marR="0" marT="42545" marB="0">
+                  <a:tcPr marL="0" marR="0" marT="42545" marB="0" anchor="ctr">
                     <a:lnL w="6350">
                       <a:solidFill>
                         <a:srgbClr val="000000"/>
@@ -7650,19 +7718,19 @@
                     <a:bodyPr/>
                     <a:lstStyle/>
                     <a:p>
-                      <a:pPr>
+                      <a:pPr algn="ctr">
                         <a:lnSpc>
                           <a:spcPct val="100000"/>
                         </a:lnSpc>
                       </a:pPr>
                       <a:endParaRPr sz="1100" dirty="0">
-                        <a:latin typeface="Roboto" panose="02000000000000000000" pitchFamily="2" charset="0"/>
+                        <a:latin typeface="+mn-lt"/>
                         <a:ea typeface="Roboto" panose="02000000000000000000" pitchFamily="2" charset="0"/>
                         <a:cs typeface="Roboto" panose="02000000000000000000" pitchFamily="2" charset="0"/>
                       </a:endParaRPr>
                     </a:p>
                   </a:txBody>
-                  <a:tcPr marL="0" marR="0" marT="0" marB="0">
+                  <a:tcPr marL="0" marR="0" marT="0" marB="0" anchor="ctr">
                     <a:lnL w="6350" cap="flat" cmpd="sng" algn="ctr">
                       <a:solidFill>
                         <a:srgbClr val="000000"/>
@@ -7706,19 +7774,19 @@
                     <a:bodyPr/>
                     <a:lstStyle/>
                     <a:p>
-                      <a:pPr>
+                      <a:pPr algn="ctr">
                         <a:lnSpc>
                           <a:spcPct val="100000"/>
                         </a:lnSpc>
                       </a:pPr>
-                      <a:endParaRPr sz="1100">
-                        <a:latin typeface="Roboto" panose="02000000000000000000" pitchFamily="2" charset="0"/>
+                      <a:endParaRPr sz="1100" dirty="0">
+                        <a:latin typeface="+mn-lt"/>
                         <a:ea typeface="Roboto" panose="02000000000000000000" pitchFamily="2" charset="0"/>
                         <a:cs typeface="Roboto" panose="02000000000000000000" pitchFamily="2" charset="0"/>
                       </a:endParaRPr>
                     </a:p>
                   </a:txBody>
-                  <a:tcPr marL="0" marR="0" marT="0" marB="0">
+                  <a:tcPr marL="0" marR="0" marT="0" marB="0" anchor="ctr">
                     <a:lnL w="6350" cap="flat" cmpd="sng" algn="ctr">
                       <a:solidFill>
                         <a:srgbClr val="000000"/>
@@ -7804,13 +7872,13 @@
                         <a:t>}}</a:t>
                       </a:r>
                       <a:endParaRPr sz="1100" dirty="0">
-                        <a:latin typeface="Roboto" panose="02000000000000000000" pitchFamily="2" charset="0"/>
+                        <a:latin typeface="+mn-lt"/>
                         <a:ea typeface="Roboto" panose="02000000000000000000" pitchFamily="2" charset="0"/>
                         <a:cs typeface="Roboto" panose="02000000000000000000" pitchFamily="2" charset="0"/>
                       </a:endParaRPr>
                     </a:p>
                   </a:txBody>
-                  <a:tcPr marL="0" marR="0" marT="38100" marB="0">
+                  <a:tcPr marL="0" marR="0" marT="38100" marB="0" anchor="ctr">
                     <a:lnL w="6350" cap="flat" cmpd="sng" algn="ctr">
                       <a:solidFill>
                         <a:srgbClr val="000000"/>
@@ -7854,19 +7922,19 @@
                     <a:bodyPr/>
                     <a:lstStyle/>
                     <a:p>
-                      <a:pPr>
+                      <a:pPr algn="ctr">
                         <a:lnSpc>
                           <a:spcPct val="100000"/>
                         </a:lnSpc>
                       </a:pPr>
                       <a:endParaRPr sz="1100" dirty="0">
-                        <a:latin typeface="Roboto" panose="02000000000000000000" pitchFamily="2" charset="0"/>
+                        <a:latin typeface="+mn-lt"/>
                         <a:ea typeface="Roboto" panose="02000000000000000000" pitchFamily="2" charset="0"/>
                         <a:cs typeface="Roboto" panose="02000000000000000000" pitchFamily="2" charset="0"/>
                       </a:endParaRPr>
                     </a:p>
                   </a:txBody>
-                  <a:tcPr marL="0" marR="0" marT="0" marB="0">
+                  <a:tcPr marL="0" marR="0" marT="0" marB="0" anchor="ctr">
                     <a:lnL w="6350" cap="flat" cmpd="sng" algn="ctr">
                       <a:solidFill>
                         <a:srgbClr val="000000"/>
@@ -7952,13 +8020,13 @@
                         <a:t>}}</a:t>
                       </a:r>
                       <a:endParaRPr sz="1100" dirty="0">
-                        <a:latin typeface="Roboto" panose="02000000000000000000" pitchFamily="2" charset="0"/>
+                        <a:latin typeface="+mn-lt"/>
                         <a:ea typeface="Roboto" panose="02000000000000000000" pitchFamily="2" charset="0"/>
                         <a:cs typeface="Roboto" panose="02000000000000000000" pitchFamily="2" charset="0"/>
                       </a:endParaRPr>
                     </a:p>
                   </a:txBody>
-                  <a:tcPr marL="0" marR="0" marT="42545" marB="0">
+                  <a:tcPr marL="0" marR="0" marT="42545" marB="0" anchor="ctr">
                     <a:lnL w="6350" cap="flat" cmpd="sng" algn="ctr">
                       <a:solidFill>
                         <a:srgbClr val="000000"/>
@@ -8033,7 +8101,7 @@
                       </a:endParaRPr>
                     </a:p>
                   </a:txBody>
-                  <a:tcPr marL="0" marR="0" marT="58419" marB="0">
+                  <a:tcPr marL="0" marR="0" marT="58419" marB="0" anchor="ctr">
                     <a:lnL w="6350">
                       <a:solidFill>
                         <a:srgbClr val="000000"/>
@@ -8068,19 +8136,19 @@
                     <a:bodyPr/>
                     <a:lstStyle/>
                     <a:p>
-                      <a:pPr>
+                      <a:pPr algn="ctr">
                         <a:lnSpc>
                           <a:spcPct val="100000"/>
                         </a:lnSpc>
                       </a:pPr>
-                      <a:endParaRPr sz="1100">
-                        <a:latin typeface="Roboto" panose="02000000000000000000" pitchFamily="2" charset="0"/>
+                      <a:endParaRPr sz="1100" dirty="0">
+                        <a:latin typeface="+mn-lt"/>
                         <a:ea typeface="Roboto" panose="02000000000000000000" pitchFamily="2" charset="0"/>
                         <a:cs typeface="Roboto" panose="02000000000000000000" pitchFamily="2" charset="0"/>
                       </a:endParaRPr>
                     </a:p>
                   </a:txBody>
-                  <a:tcPr marL="0" marR="0" marT="0" marB="0">
+                  <a:tcPr marL="0" marR="0" marT="0" marB="0" anchor="ctr">
                     <a:lnL w="6350">
                       <a:solidFill>
                         <a:srgbClr val="000000"/>
@@ -8125,20 +8193,20 @@
                       </a:pPr>
                       <a:r>
                         <a:rPr sz="1100" spc="-50" dirty="0">
-                          <a:latin typeface="Roboto" panose="02000000000000000000" pitchFamily="2" charset="0"/>
+                          <a:latin typeface="+mn-lt"/>
                           <a:ea typeface="Roboto" panose="02000000000000000000" pitchFamily="2" charset="0"/>
                           <a:cs typeface="Roboto" panose="02000000000000000000" pitchFamily="2" charset="0"/>
                         </a:rPr>
                         <a:t>-</a:t>
                       </a:r>
                       <a:endParaRPr sz="1100" dirty="0">
-                        <a:latin typeface="Roboto" panose="02000000000000000000" pitchFamily="2" charset="0"/>
+                        <a:latin typeface="+mn-lt"/>
                         <a:ea typeface="Roboto" panose="02000000000000000000" pitchFamily="2" charset="0"/>
                         <a:cs typeface="Roboto" panose="02000000000000000000" pitchFamily="2" charset="0"/>
                       </a:endParaRPr>
                     </a:p>
                   </a:txBody>
-                  <a:tcPr marL="0" marR="0" marT="62865" marB="0">
+                  <a:tcPr marL="0" marR="0" marT="62865" marB="0" anchor="ctr">
                     <a:lnL w="6350">
                       <a:solidFill>
                         <a:srgbClr val="000000"/>
@@ -8183,20 +8251,20 @@
                       </a:pPr>
                       <a:r>
                         <a:rPr sz="1100" spc="-50" dirty="0">
-                          <a:latin typeface="Roboto" panose="02000000000000000000" pitchFamily="2" charset="0"/>
+                          <a:latin typeface="+mn-lt"/>
                           <a:ea typeface="Roboto" panose="02000000000000000000" pitchFamily="2" charset="0"/>
                           <a:cs typeface="Roboto" panose="02000000000000000000" pitchFamily="2" charset="0"/>
                         </a:rPr>
                         <a:t>-</a:t>
                       </a:r>
                       <a:endParaRPr sz="1100" dirty="0">
-                        <a:latin typeface="Roboto" panose="02000000000000000000" pitchFamily="2" charset="0"/>
+                        <a:latin typeface="+mn-lt"/>
                         <a:ea typeface="Roboto" panose="02000000000000000000" pitchFamily="2" charset="0"/>
                         <a:cs typeface="Roboto" panose="02000000000000000000" pitchFamily="2" charset="0"/>
                       </a:endParaRPr>
                     </a:p>
                   </a:txBody>
-                  <a:tcPr marL="0" marR="0" marT="93345" marB="0">
+                  <a:tcPr marL="0" marR="0" marT="93345" marB="0" anchor="ctr">
                     <a:lnL w="6350">
                       <a:solidFill>
                         <a:srgbClr val="000000"/>
@@ -8240,25 +8308,31 @@
                         </a:spcBef>
                       </a:pPr>
                       <a:r>
-                        <a:rPr lang="en-GB" sz="1100" dirty="0"/>
+                        <a:rPr lang="en-GB" sz="1100" dirty="0">
+                          <a:latin typeface="+mn-lt"/>
+                        </a:rPr>
                         <a:t>{{</a:t>
                       </a:r>
                       <a:r>
-                        <a:rPr lang="en-GB" sz="1100" dirty="0" err="1"/>
+                        <a:rPr lang="en-GB" sz="1100" dirty="0" err="1">
+                          <a:latin typeface="+mn-lt"/>
+                        </a:rPr>
                         <a:t>fiber_length_max</a:t>
                       </a:r>
                       <a:r>
-                        <a:rPr lang="en-GB" sz="1100" dirty="0"/>
+                        <a:rPr lang="en-GB" sz="1100" dirty="0">
+                          <a:latin typeface="+mn-lt"/>
+                        </a:rPr>
                         <a:t>}}</a:t>
                       </a:r>
                       <a:endParaRPr sz="1100" dirty="0">
-                        <a:latin typeface="Roboto" panose="02000000000000000000" pitchFamily="2" charset="0"/>
+                        <a:latin typeface="+mn-lt"/>
                         <a:ea typeface="Roboto" panose="02000000000000000000" pitchFamily="2" charset="0"/>
                         <a:cs typeface="Roboto" panose="02000000000000000000" pitchFamily="2" charset="0"/>
                       </a:endParaRPr>
                     </a:p>
                   </a:txBody>
-                  <a:tcPr marL="0" marR="0" marT="62865" marB="0">
+                  <a:tcPr marL="0" marR="0" marT="62865" marB="0" anchor="ctr">
                     <a:lnL w="6350">
                       <a:solidFill>
                         <a:srgbClr val="000000"/>
@@ -8302,25 +8376,31 @@
                         </a:spcBef>
                       </a:pPr>
                       <a:r>
-                        <a:rPr lang="en-GB" sz="1100" dirty="0"/>
+                        <a:rPr lang="en-GB" sz="1100" dirty="0">
+                          <a:latin typeface="+mn-lt"/>
+                        </a:rPr>
                         <a:t>{{</a:t>
                       </a:r>
                       <a:r>
-                        <a:rPr lang="en-GB" sz="1100" dirty="0" err="1"/>
+                        <a:rPr lang="en-GB" sz="1100" dirty="0" err="1">
+                          <a:latin typeface="+mn-lt"/>
+                        </a:rPr>
                         <a:t>fiber_length_unit</a:t>
                       </a:r>
                       <a:r>
-                        <a:rPr lang="en-GB" sz="1100" dirty="0"/>
+                        <a:rPr lang="en-GB" sz="1100" dirty="0">
+                          <a:latin typeface="+mn-lt"/>
+                        </a:rPr>
                         <a:t>}}</a:t>
                       </a:r>
                       <a:endParaRPr sz="1100" dirty="0">
-                        <a:latin typeface="Roboto" panose="02000000000000000000" pitchFamily="2" charset="0"/>
+                        <a:latin typeface="+mn-lt"/>
                         <a:ea typeface="Roboto" panose="02000000000000000000" pitchFamily="2" charset="0"/>
                         <a:cs typeface="Roboto" panose="02000000000000000000" pitchFamily="2" charset="0"/>
                       </a:endParaRPr>
                     </a:p>
                   </a:txBody>
-                  <a:tcPr marL="0" marR="0" marT="62865" marB="0">
+                  <a:tcPr marL="0" marR="0" marT="62865" marB="0" anchor="ctr">
                     <a:lnL w="6350">
                       <a:solidFill>
                         <a:srgbClr val="000000"/>
@@ -8374,7 +8454,7 @@
         </p:nvSpPr>
         <p:spPr>
           <a:xfrm>
-            <a:off x="9342618" y="1429663"/>
+            <a:off x="9342618" y="1415904"/>
             <a:ext cx="3712984" cy="323165"/>
           </a:xfrm>
           <a:prstGeom prst="rect">
@@ -8458,14 +8538,14 @@
           <p:nvPr>
             <p:extLst>
               <p:ext uri="{D42A27DB-BD31-4B8C-83A1-F6EECF244321}">
-                <p14:modId xmlns:p14="http://schemas.microsoft.com/office/powerpoint/2010/main" val="2440548868"/>
+                <p14:modId xmlns:p14="http://schemas.microsoft.com/office/powerpoint/2010/main" val="2654212867"/>
               </p:ext>
             </p:extLst>
           </p:nvPr>
         </p:nvGraphicFramePr>
         <p:xfrm>
-          <a:off x="9392060" y="1783691"/>
-          <a:ext cx="8006335" cy="3567234"/>
+          <a:off x="9329165" y="1942500"/>
+          <a:ext cx="8006335" cy="4463557"/>
         </p:xfrm>
         <a:graphic>
           <a:graphicData uri="http://schemas.openxmlformats.org/drawingml/2006/table">
@@ -8474,49 +8554,49 @@
                 <a:tableStyleId>{2D5ABB26-0587-4C30-8999-92F81FD0307C}</a:tableStyleId>
               </a:tblPr>
               <a:tblGrid>
-                <a:gridCol w="2362461">
+                <a:gridCol w="1824580">
                   <a:extLst>
                     <a:ext uri="{9D8B030D-6E8A-4147-A177-3AD203B41FA5}">
                       <a16:colId xmlns:a16="http://schemas.microsoft.com/office/drawing/2014/main" val="20000"/>
                     </a:ext>
                   </a:extLst>
                 </a:gridCol>
-                <a:gridCol w="899910">
+                <a:gridCol w="1135380">
                   <a:extLst>
                     <a:ext uri="{9D8B030D-6E8A-4147-A177-3AD203B41FA5}">
                       <a16:colId xmlns:a16="http://schemas.microsoft.com/office/drawing/2014/main" val="20001"/>
                     </a:ext>
                   </a:extLst>
                 </a:gridCol>
-                <a:gridCol w="788016">
+                <a:gridCol w="1028700">
                   <a:extLst>
                     <a:ext uri="{9D8B030D-6E8A-4147-A177-3AD203B41FA5}">
                       <a16:colId xmlns:a16="http://schemas.microsoft.com/office/drawing/2014/main" val="20002"/>
                     </a:ext>
                   </a:extLst>
                 </a:gridCol>
-                <a:gridCol w="787221">
+                <a:gridCol w="845820">
                   <a:extLst>
                     <a:ext uri="{9D8B030D-6E8A-4147-A177-3AD203B41FA5}">
                       <a16:colId xmlns:a16="http://schemas.microsoft.com/office/drawing/2014/main" val="20003"/>
                     </a:ext>
                   </a:extLst>
                 </a:gridCol>
-                <a:gridCol w="787222">
+                <a:gridCol w="929640">
                   <a:extLst>
                     <a:ext uri="{9D8B030D-6E8A-4147-A177-3AD203B41FA5}">
                       <a16:colId xmlns:a16="http://schemas.microsoft.com/office/drawing/2014/main" val="20004"/>
                     </a:ext>
                   </a:extLst>
                 </a:gridCol>
-                <a:gridCol w="899908">
+                <a:gridCol w="1089690">
                   <a:extLst>
                     <a:ext uri="{9D8B030D-6E8A-4147-A177-3AD203B41FA5}">
                       <a16:colId xmlns:a16="http://schemas.microsoft.com/office/drawing/2014/main" val="20005"/>
                     </a:ext>
                   </a:extLst>
                 </a:gridCol>
-                <a:gridCol w="1481597">
+                <a:gridCol w="1152525">
                   <a:extLst>
                     <a:ext uri="{9D8B030D-6E8A-4147-A177-3AD203B41FA5}">
                       <a16:colId xmlns:a16="http://schemas.microsoft.com/office/drawing/2014/main" val="20006"/>
@@ -8524,7 +8604,7 @@
                   </a:extLst>
                 </a:gridCol>
               </a:tblGrid>
-              <a:tr h="393891">
+              <a:tr h="288206">
                 <a:tc>
                   <a:txBody>
                     <a:bodyPr/>
@@ -9015,13 +9095,13 @@
                   </a:ext>
                 </a:extLst>
               </a:tr>
-              <a:tr h="318389">
+              <a:tr h="504546">
                 <a:tc>
                   <a:txBody>
                     <a:bodyPr/>
                     <a:lstStyle/>
                     <a:p>
-                      <a:pPr marL="67945">
+                      <a:pPr marL="67945" algn="l">
                         <a:lnSpc>
                           <a:spcPct val="100000"/>
                         </a:lnSpc>
@@ -9198,7 +9278,43 @@
                     <a:bodyPr/>
                     <a:lstStyle/>
                     <a:p>
-                      <a:pPr>
+                      <a:pPr marL="0" marR="0" lvl="0" indent="0" algn="ctr" defTabSz="914400" eaLnBrk="1" fontAlgn="auto" latinLnBrk="0" hangingPunct="1">
+                        <a:lnSpc>
+                          <a:spcPct val="100000"/>
+                        </a:lnSpc>
+                        <a:spcBef>
+                          <a:spcPts val="0"/>
+                        </a:spcBef>
+                        <a:spcAft>
+                          <a:spcPts val="0"/>
+                        </a:spcAft>
+                        <a:buClrTx/>
+                        <a:buSzTx/>
+                        <a:buFontTx/>
+                        <a:buNone/>
+                        <a:tabLst/>
+                        <a:defRPr/>
+                      </a:pPr>
+                      <a:r>
+                        <a:rPr lang="en-GB" sz="1100" dirty="0"/>
+                        <a:t>{{</a:t>
+                      </a:r>
+                      <a:r>
+                        <a:rPr lang="en-GB" sz="1100" dirty="0" err="1"/>
+                        <a:t>tx_power_typical</a:t>
+                      </a:r>
+                      <a:r>
+                        <a:rPr lang="en-GB" sz="1100" dirty="0"/>
+                        <a:t>}}</a:t>
+                      </a:r>
+                      <a:endParaRPr lang="en-GB" sz="1100" dirty="0">
+                        <a:latin typeface="Roboto" panose="02000000000000000000" pitchFamily="2" charset="0"/>
+                        <a:ea typeface="Roboto" panose="02000000000000000000" pitchFamily="2" charset="0"/>
+                        <a:cs typeface="Roboto" panose="02000000000000000000" pitchFamily="2" charset="0"/>
+                      </a:endParaRPr>
+                    </a:p>
+                    <a:p>
+                      <a:pPr algn="ctr">
                         <a:lnSpc>
                           <a:spcPct val="100000"/>
                         </a:lnSpc>
@@ -9405,13 +9521,13 @@
                   </a:ext>
                 </a:extLst>
               </a:tr>
-              <a:tr h="318389">
+              <a:tr h="385724">
                 <a:tc>
                   <a:txBody>
                     <a:bodyPr/>
                     <a:lstStyle/>
                     <a:p>
-                      <a:pPr marL="67945">
+                      <a:pPr marL="67945" algn="l">
                         <a:lnSpc>
                           <a:spcPct val="100000"/>
                         </a:lnSpc>
@@ -9810,13 +9926,13 @@
                   </a:ext>
                 </a:extLst>
               </a:tr>
-              <a:tr h="318389">
+              <a:tr h="634489">
                 <a:tc>
                   <a:txBody>
                     <a:bodyPr/>
                     <a:lstStyle/>
                     <a:p>
-                      <a:pPr marL="67945">
+                      <a:pPr marL="67945" algn="l">
                         <a:lnSpc>
                           <a:spcPct val="100000"/>
                         </a:lnSpc>
@@ -9934,12 +10050,50 @@
                     <a:bodyPr/>
                     <a:lstStyle/>
                     <a:p>
-                      <a:pPr>
+                      <a:pPr algn="ctr">
                         <a:lnSpc>
                           <a:spcPct val="100000"/>
                         </a:lnSpc>
-                      </a:pPr>
-                      <a:endParaRPr sz="1100">
+                        <a:spcBef>
+                          <a:spcPts val="300"/>
+                        </a:spcBef>
+                      </a:pPr>
+                      <a:endParaRPr lang="en-GB" sz="1100" dirty="0"/>
+                    </a:p>
+                    <a:p>
+                      <a:pPr algn="ctr">
+                        <a:lnSpc>
+                          <a:spcPct val="100000"/>
+                        </a:lnSpc>
+                        <a:spcBef>
+                          <a:spcPts val="300"/>
+                        </a:spcBef>
+                      </a:pPr>
+                      <a:r>
+                        <a:rPr lang="en-GB" sz="1100" dirty="0"/>
+                        <a:t>{{</a:t>
+                      </a:r>
+                      <a:r>
+                        <a:rPr lang="en-GB" sz="1100" dirty="0" err="1"/>
+                        <a:t>tx_spectral_width_min</a:t>
+                      </a:r>
+                      <a:r>
+                        <a:rPr lang="en-GB" sz="1100" dirty="0"/>
+                        <a:t>}}</a:t>
+                      </a:r>
+                      <a:endParaRPr lang="en-GB" sz="1100" dirty="0">
+                        <a:latin typeface="Roboto" panose="02000000000000000000" pitchFamily="2" charset="0"/>
+                        <a:ea typeface="Roboto" panose="02000000000000000000" pitchFamily="2" charset="0"/>
+                        <a:cs typeface="Roboto" panose="02000000000000000000" pitchFamily="2" charset="0"/>
+                      </a:endParaRPr>
+                    </a:p>
+                    <a:p>
+                      <a:pPr algn="ctr">
+                        <a:lnSpc>
+                          <a:spcPct val="100000"/>
+                        </a:lnSpc>
+                      </a:pPr>
+                      <a:endParaRPr sz="1100" dirty="0">
                         <a:latin typeface="Roboto" panose="02000000000000000000" pitchFamily="2" charset="0"/>
                         <a:ea typeface="Roboto" panose="02000000000000000000" pitchFamily="2" charset="0"/>
                         <a:cs typeface="Roboto" panose="02000000000000000000" pitchFamily="2" charset="0"/>
@@ -9978,12 +10132,50 @@
                     <a:bodyPr/>
                     <a:lstStyle/>
                     <a:p>
-                      <a:pPr>
+                      <a:pPr algn="ctr">
                         <a:lnSpc>
                           <a:spcPct val="100000"/>
                         </a:lnSpc>
-                      </a:pPr>
-                      <a:endParaRPr sz="1100">
+                        <a:spcBef>
+                          <a:spcPts val="300"/>
+                        </a:spcBef>
+                      </a:pPr>
+                      <a:endParaRPr lang="en-GB" sz="1100" dirty="0"/>
+                    </a:p>
+                    <a:p>
+                      <a:pPr algn="ctr">
+                        <a:lnSpc>
+                          <a:spcPct val="100000"/>
+                        </a:lnSpc>
+                        <a:spcBef>
+                          <a:spcPts val="300"/>
+                        </a:spcBef>
+                      </a:pPr>
+                      <a:r>
+                        <a:rPr lang="en-GB" sz="1100" dirty="0"/>
+                        <a:t>{{</a:t>
+                      </a:r>
+                      <a:r>
+                        <a:rPr lang="en-GB" sz="1100" dirty="0" err="1"/>
+                        <a:t>tx_spectral_width_typical</a:t>
+                      </a:r>
+                      <a:r>
+                        <a:rPr lang="en-GB" sz="1100" dirty="0"/>
+                        <a:t>}}</a:t>
+                      </a:r>
+                      <a:endParaRPr lang="en-GB" sz="1100" dirty="0">
+                        <a:latin typeface="Roboto" panose="02000000000000000000" pitchFamily="2" charset="0"/>
+                        <a:ea typeface="Roboto" panose="02000000000000000000" pitchFamily="2" charset="0"/>
+                        <a:cs typeface="Roboto" panose="02000000000000000000" pitchFamily="2" charset="0"/>
+                      </a:endParaRPr>
+                    </a:p>
+                    <a:p>
+                      <a:pPr algn="ctr">
+                        <a:lnSpc>
+                          <a:spcPct val="100000"/>
+                        </a:lnSpc>
+                      </a:pPr>
+                      <a:endParaRPr sz="1100" dirty="0">
                         <a:latin typeface="Roboto" panose="02000000000000000000" pitchFamily="2" charset="0"/>
                         <a:ea typeface="Roboto" panose="02000000000000000000" pitchFamily="2" charset="0"/>
                         <a:cs typeface="Roboto" panose="02000000000000000000" pitchFamily="2" charset="0"/>
@@ -10185,13 +10377,13 @@
                   </a:ext>
                 </a:extLst>
               </a:tr>
-              <a:tr h="318389">
+              <a:tr h="0">
                 <a:tc>
                   <a:txBody>
                     <a:bodyPr/>
                     <a:lstStyle/>
                     <a:p>
-                      <a:pPr marL="67945">
+                      <a:pPr marL="67945" algn="l">
                         <a:lnSpc>
                           <a:spcPct val="100000"/>
                         </a:lnSpc>
@@ -10205,7 +10397,7 @@
                       </a:r>
                       <a:r>
                         <a:rPr lang="en-GB" sz="1100" dirty="0" err="1"/>
-                        <a:t>tx_er_min</a:t>
+                        <a:t>tx_er</a:t>
                       </a:r>
                       <a:r>
                         <a:rPr lang="en-GB" sz="1100" dirty="0"/>
@@ -10264,11 +10456,11 @@
                       </a:r>
                       <a:r>
                         <a:rPr lang="en-GB" sz="1100" dirty="0" err="1"/>
-                        <a:t>tx_er</a:t>
+                        <a:t>tx_er_symbol</a:t>
                       </a:r>
                       <a:r>
                         <a:rPr lang="en-GB" sz="1100" dirty="0"/>
-                        <a:t>_}}</a:t>
+                        <a:t>}}</a:t>
                       </a:r>
                       <a:endParaRPr sz="1100" dirty="0">
                         <a:latin typeface="Roboto" panose="02000000000000000000" pitchFamily="2" charset="0"/>
@@ -10368,7 +10560,66 @@
                     <a:bodyPr/>
                     <a:lstStyle/>
                     <a:p>
-                      <a:pPr>
+                      <a:pPr marL="0" marR="0" lvl="0" indent="0" algn="ctr" defTabSz="914400" eaLnBrk="1" fontAlgn="auto" latinLnBrk="0" hangingPunct="1">
+                        <a:lnSpc>
+                          <a:spcPct val="100000"/>
+                        </a:lnSpc>
+                        <a:spcBef>
+                          <a:spcPts val="0"/>
+                        </a:spcBef>
+                        <a:spcAft>
+                          <a:spcPts val="0"/>
+                        </a:spcAft>
+                        <a:buClrTx/>
+                        <a:buSzTx/>
+                        <a:buFontTx/>
+                        <a:buNone/>
+                        <a:tabLst/>
+                        <a:defRPr/>
+                      </a:pPr>
+                      <a:r>
+                        <a:rPr lang="en-GB" sz="1100" dirty="0"/>
+                        <a:t>  </a:t>
+                      </a:r>
+                    </a:p>
+                    <a:p>
+                      <a:pPr marL="0" marR="0" lvl="0" indent="0" algn="ctr" defTabSz="914400" eaLnBrk="1" fontAlgn="auto" latinLnBrk="0" hangingPunct="1">
+                        <a:lnSpc>
+                          <a:spcPct val="100000"/>
+                        </a:lnSpc>
+                        <a:spcBef>
+                          <a:spcPts val="0"/>
+                        </a:spcBef>
+                        <a:spcAft>
+                          <a:spcPts val="0"/>
+                        </a:spcAft>
+                        <a:buClrTx/>
+                        <a:buSzTx/>
+                        <a:buFontTx/>
+                        <a:buNone/>
+                        <a:tabLst/>
+                        <a:defRPr/>
+                      </a:pPr>
+                      <a:r>
+                        <a:rPr lang="en-GB" sz="1100" dirty="0"/>
+                        <a:t>{{</a:t>
+                      </a:r>
+                      <a:r>
+                        <a:rPr lang="en-GB" sz="1100" dirty="0" err="1"/>
+                        <a:t>tx_er_typical</a:t>
+                      </a:r>
+                      <a:r>
+                        <a:rPr lang="en-GB" sz="1100" dirty="0"/>
+                        <a:t>}}</a:t>
+                      </a:r>
+                      <a:endParaRPr lang="en-GB" sz="1100" dirty="0">
+                        <a:latin typeface="Roboto" panose="02000000000000000000" pitchFamily="2" charset="0"/>
+                        <a:ea typeface="Roboto" panose="02000000000000000000" pitchFamily="2" charset="0"/>
+                        <a:cs typeface="Roboto" panose="02000000000000000000" pitchFamily="2" charset="0"/>
+                      </a:endParaRPr>
+                    </a:p>
+                    <a:p>
+                      <a:pPr algn="ctr">
                         <a:lnSpc>
                           <a:spcPct val="100000"/>
                         </a:lnSpc>
@@ -10412,12 +10663,68 @@
                     <a:bodyPr/>
                     <a:lstStyle/>
                     <a:p>
-                      <a:pPr>
+                      <a:pPr marL="0" marR="0" lvl="0" indent="0" algn="ctr" defTabSz="914400" eaLnBrk="1" fontAlgn="auto" latinLnBrk="0" hangingPunct="1">
                         <a:lnSpc>
                           <a:spcPct val="100000"/>
                         </a:lnSpc>
-                      </a:pPr>
-                      <a:endParaRPr sz="1100">
+                        <a:spcBef>
+                          <a:spcPts val="0"/>
+                        </a:spcBef>
+                        <a:spcAft>
+                          <a:spcPts val="0"/>
+                        </a:spcAft>
+                        <a:buClrTx/>
+                        <a:buSzTx/>
+                        <a:buFontTx/>
+                        <a:buNone/>
+                        <a:tabLst/>
+                        <a:defRPr/>
+                      </a:pPr>
+                      <a:endParaRPr lang="en-GB" sz="1100" dirty="0"/>
+                    </a:p>
+                    <a:p>
+                      <a:pPr marL="0" marR="0" lvl="0" indent="0" algn="ctr" defTabSz="914400" eaLnBrk="1" fontAlgn="auto" latinLnBrk="0" hangingPunct="1">
+                        <a:lnSpc>
+                          <a:spcPct val="100000"/>
+                        </a:lnSpc>
+                        <a:spcBef>
+                          <a:spcPts val="0"/>
+                        </a:spcBef>
+                        <a:spcAft>
+                          <a:spcPts val="0"/>
+                        </a:spcAft>
+                        <a:buClrTx/>
+                        <a:buSzTx/>
+                        <a:buFontTx/>
+                        <a:buNone/>
+                        <a:tabLst/>
+                        <a:defRPr/>
+                      </a:pPr>
+                      <a:r>
+                        <a:rPr lang="en-GB" sz="1100" dirty="0"/>
+                        <a:t>{{</a:t>
+                      </a:r>
+                      <a:r>
+                        <a:rPr lang="en-GB" sz="1100" dirty="0" err="1"/>
+                        <a:t>tx_er_max</a:t>
+                      </a:r>
+                      <a:r>
+                        <a:rPr lang="en-GB" sz="1100" dirty="0"/>
+                        <a:t>}}</a:t>
+                      </a:r>
+                      <a:endParaRPr lang="en-GB" sz="1100" dirty="0">
+                        <a:latin typeface="Roboto" panose="02000000000000000000" pitchFamily="2" charset="0"/>
+                        <a:ea typeface="Roboto" panose="02000000000000000000" pitchFamily="2" charset="0"/>
+                        <a:cs typeface="Roboto" panose="02000000000000000000" pitchFamily="2" charset="0"/>
+                      </a:endParaRPr>
+                    </a:p>
+                    <a:p>
+                      <a:pPr algn="ctr">
+                        <a:lnSpc>
+                          <a:spcPct val="100000"/>
+                        </a:lnSpc>
+                      </a:pPr>
+                      <a:endParaRPr sz="1100" dirty="0">
                         <a:latin typeface="Roboto" panose="02000000000000000000" pitchFamily="2" charset="0"/>
                         <a:ea typeface="Roboto" panose="02000000000000000000" pitchFamily="2" charset="0"/>
                         <a:cs typeface="Roboto" panose="02000000000000000000" pitchFamily="2" charset="0"/>
@@ -10560,13 +10867,13 @@
                   </a:ext>
                 </a:extLst>
               </a:tr>
-              <a:tr h="318389">
+              <a:tr h="197279">
                 <a:tc>
                   <a:txBody>
                     <a:bodyPr/>
                     <a:lstStyle/>
                     <a:p>
-                      <a:pPr marL="67945">
+                      <a:pPr marL="67945" algn="l">
                         <a:lnSpc>
                           <a:spcPct val="100000"/>
                         </a:lnSpc>
@@ -10684,7 +10991,63 @@
                     <a:bodyPr/>
                     <a:lstStyle/>
                     <a:p>
-                      <a:pPr>
+                      <a:pPr marL="0" marR="0" lvl="0" indent="0" algn="ctr" defTabSz="914400" eaLnBrk="1" fontAlgn="auto" latinLnBrk="0" hangingPunct="1">
+                        <a:lnSpc>
+                          <a:spcPct val="100000"/>
+                        </a:lnSpc>
+                        <a:spcBef>
+                          <a:spcPts val="0"/>
+                        </a:spcBef>
+                        <a:spcAft>
+                          <a:spcPts val="0"/>
+                        </a:spcAft>
+                        <a:buClrTx/>
+                        <a:buSzTx/>
+                        <a:buFontTx/>
+                        <a:buNone/>
+                        <a:tabLst/>
+                        <a:defRPr/>
+                      </a:pPr>
+                      <a:endParaRPr lang="en-GB" sz="1100" dirty="0"/>
+                    </a:p>
+                    <a:p>
+                      <a:pPr marL="0" marR="0" lvl="0" indent="0" algn="ctr" defTabSz="914400" eaLnBrk="1" fontAlgn="auto" latinLnBrk="0" hangingPunct="1">
+                        <a:lnSpc>
+                          <a:spcPct val="100000"/>
+                        </a:lnSpc>
+                        <a:spcBef>
+                          <a:spcPts val="0"/>
+                        </a:spcBef>
+                        <a:spcAft>
+                          <a:spcPts val="0"/>
+                        </a:spcAft>
+                        <a:buClrTx/>
+                        <a:buSzTx/>
+                        <a:buFontTx/>
+                        <a:buNone/>
+                        <a:tabLst/>
+                        <a:defRPr/>
+                      </a:pPr>
+                      <a:r>
+                        <a:rPr lang="en-GB" sz="1100" dirty="0"/>
+                        <a:t>{{</a:t>
+                      </a:r>
+                      <a:r>
+                        <a:rPr lang="en-GB" sz="1100" dirty="0" err="1"/>
+                        <a:t>tx_off_power_min</a:t>
+                      </a:r>
+                      <a:r>
+                        <a:rPr lang="en-GB" sz="1100" dirty="0"/>
+                        <a:t>}}</a:t>
+                      </a:r>
+                      <a:endParaRPr lang="en-GB" sz="1100" dirty="0">
+                        <a:latin typeface="Roboto" panose="02000000000000000000" pitchFamily="2" charset="0"/>
+                        <a:ea typeface="Roboto" panose="02000000000000000000" pitchFamily="2" charset="0"/>
+                        <a:cs typeface="Roboto" panose="02000000000000000000" pitchFamily="2" charset="0"/>
+                      </a:endParaRPr>
+                    </a:p>
+                    <a:p>
+                      <a:pPr algn="ctr">
                         <a:lnSpc>
                           <a:spcPct val="100000"/>
                         </a:lnSpc>
@@ -10728,12 +11091,68 @@
                     <a:bodyPr/>
                     <a:lstStyle/>
                     <a:p>
-                      <a:pPr>
+                      <a:pPr marL="0" marR="0" lvl="0" indent="0" algn="ctr" defTabSz="914400" eaLnBrk="1" fontAlgn="auto" latinLnBrk="0" hangingPunct="1">
                         <a:lnSpc>
                           <a:spcPct val="100000"/>
                         </a:lnSpc>
-                      </a:pPr>
-                      <a:endParaRPr sz="1100">
+                        <a:spcBef>
+                          <a:spcPts val="0"/>
+                        </a:spcBef>
+                        <a:spcAft>
+                          <a:spcPts val="0"/>
+                        </a:spcAft>
+                        <a:buClrTx/>
+                        <a:buSzTx/>
+                        <a:buFontTx/>
+                        <a:buNone/>
+                        <a:tabLst/>
+                        <a:defRPr/>
+                      </a:pPr>
+                      <a:endParaRPr lang="en-GB" sz="1100" dirty="0"/>
+                    </a:p>
+                    <a:p>
+                      <a:pPr marL="0" marR="0" lvl="0" indent="0" algn="ctr" defTabSz="914400" eaLnBrk="1" fontAlgn="auto" latinLnBrk="0" hangingPunct="1">
+                        <a:lnSpc>
+                          <a:spcPct val="100000"/>
+                        </a:lnSpc>
+                        <a:spcBef>
+                          <a:spcPts val="0"/>
+                        </a:spcBef>
+                        <a:spcAft>
+                          <a:spcPts val="0"/>
+                        </a:spcAft>
+                        <a:buClrTx/>
+                        <a:buSzTx/>
+                        <a:buFontTx/>
+                        <a:buNone/>
+                        <a:tabLst/>
+                        <a:defRPr/>
+                      </a:pPr>
+                      <a:r>
+                        <a:rPr lang="en-GB" sz="1100" dirty="0"/>
+                        <a:t>{{</a:t>
+                      </a:r>
+                      <a:r>
+                        <a:rPr lang="en-GB" sz="1100" dirty="0" err="1"/>
+                        <a:t>tx_off_power_typical</a:t>
+                      </a:r>
+                      <a:r>
+                        <a:rPr lang="en-GB" sz="1100" dirty="0"/>
+                        <a:t>}}</a:t>
+                      </a:r>
+                      <a:endParaRPr lang="en-GB" sz="1100" dirty="0">
+                        <a:latin typeface="Roboto" panose="02000000000000000000" pitchFamily="2" charset="0"/>
+                        <a:ea typeface="Roboto" panose="02000000000000000000" pitchFamily="2" charset="0"/>
+                        <a:cs typeface="Roboto" panose="02000000000000000000" pitchFamily="2" charset="0"/>
+                      </a:endParaRPr>
+                    </a:p>
+                    <a:p>
+                      <a:pPr algn="ctr">
+                        <a:lnSpc>
+                          <a:spcPct val="100000"/>
+                        </a:lnSpc>
+                      </a:pPr>
+                      <a:endParaRPr sz="1100" dirty="0">
                         <a:latin typeface="Roboto" panose="02000000000000000000" pitchFamily="2" charset="0"/>
                         <a:ea typeface="Roboto" panose="02000000000000000000" pitchFamily="2" charset="0"/>
                         <a:cs typeface="Roboto" panose="02000000000000000000" pitchFamily="2" charset="0"/>
@@ -10772,7 +11191,7 @@
                     <a:bodyPr/>
                     <a:lstStyle/>
                     <a:p>
-                      <a:pPr marL="180340">
+                      <a:pPr marL="180340" algn="ctr">
                         <a:lnSpc>
                           <a:spcPct val="100000"/>
                         </a:lnSpc>
@@ -10786,11 +11205,11 @@
                       </a:r>
                       <a:r>
                         <a:rPr lang="en-GB" sz="1100" dirty="0" err="1"/>
-                        <a:t>tx_off_power_max</a:t>
+                        <a:t>tx_off_power</a:t>
                       </a:r>
                       <a:r>
                         <a:rPr lang="en-GB" sz="1100" dirty="0"/>
-                        <a:t>}}</a:t>
+                        <a:t>  _max}}</a:t>
                       </a:r>
                       <a:endParaRPr sz="1100" dirty="0">
                         <a:latin typeface="Roboto" panose="02000000000000000000" pitchFamily="2" charset="0"/>
@@ -10935,13 +11354,13 @@
                   </a:ext>
                 </a:extLst>
               </a:tr>
-              <a:tr h="575826">
+              <a:tr h="556601">
                 <a:tc>
                   <a:txBody>
                     <a:bodyPr/>
                     <a:lstStyle/>
                     <a:p>
-                      <a:pPr marL="67945">
+                      <a:pPr marL="67945" algn="l">
                         <a:lnSpc>
                           <a:spcPct val="100000"/>
                         </a:lnSpc>
@@ -11118,12 +11537,27 @@
                     <a:bodyPr/>
                     <a:lstStyle/>
                     <a:p>
-                      <a:pPr>
+                      <a:pPr algn="ctr">
                         <a:lnSpc>
                           <a:spcPct val="100000"/>
                         </a:lnSpc>
-                      </a:pPr>
-                      <a:endParaRPr sz="1100" dirty="0">
+                        <a:spcBef>
+                          <a:spcPts val="1010"/>
+                        </a:spcBef>
+                      </a:pPr>
+                      <a:r>
+                        <a:rPr lang="en-GB" sz="1100" dirty="0"/>
+                        <a:t>{{tx_</a:t>
+                      </a:r>
+                      <a:r>
+                        <a:rPr lang="en-GB" sz="1100" dirty="0" err="1"/>
+                        <a:t>oma</a:t>
+                      </a:r>
+                      <a:r>
+                        <a:rPr lang="en-GB" sz="1100" dirty="0"/>
+                        <a:t>__typical}}</a:t>
+                      </a:r>
+                      <a:endParaRPr lang="en-GB" sz="1100" dirty="0">
                         <a:latin typeface="Roboto" panose="02000000000000000000" pitchFamily="2" charset="0"/>
                         <a:ea typeface="Roboto" panose="02000000000000000000" pitchFamily="2" charset="0"/>
                         <a:cs typeface="Roboto" panose="02000000000000000000" pitchFamily="2" charset="0"/>
@@ -11176,7 +11610,7 @@
                       </a:r>
                       <a:r>
                         <a:rPr lang="en-GB" sz="1100" dirty="0" err="1"/>
-                        <a:t>tx_oma_min</a:t>
+                        <a:t>tx_oma_max</a:t>
                       </a:r>
                       <a:r>
                         <a:rPr lang="en-GB" sz="1100" dirty="0"/>
@@ -11285,7 +11719,7 @@
                           <a:spcPct val="100000"/>
                         </a:lnSpc>
                       </a:pPr>
-                      <a:endParaRPr sz="1100">
+                      <a:endParaRPr sz="1100" dirty="0">
                         <a:latin typeface="Roboto" panose="02000000000000000000" pitchFamily="2" charset="0"/>
                         <a:ea typeface="Roboto" panose="02000000000000000000" pitchFamily="2" charset="0"/>
                         <a:cs typeface="Roboto" panose="02000000000000000000" pitchFamily="2" charset="0"/>
@@ -11325,13 +11759,13 @@
                   </a:ext>
                 </a:extLst>
               </a:tr>
-              <a:tr h="576737">
+              <a:tr h="511060">
                 <a:tc>
                   <a:txBody>
                     <a:bodyPr/>
                     <a:lstStyle/>
                     <a:p>
-                      <a:pPr marL="67945">
+                      <a:pPr marL="67945" algn="l">
                         <a:lnSpc>
                           <a:spcPct val="100000"/>
                         </a:lnSpc>
@@ -11491,7 +11925,7 @@
                     <a:bodyPr/>
                     <a:lstStyle/>
                     <a:p>
-                      <a:pPr>
+                      <a:pPr algn="ctr">
                         <a:lnSpc>
                           <a:spcPct val="100000"/>
                         </a:lnSpc>
@@ -11568,7 +12002,7 @@
                     <a:bodyPr/>
                     <a:lstStyle/>
                     <a:p>
-                      <a:pPr>
+                      <a:pPr algn="ctr">
                         <a:lnSpc>
                           <a:spcPct val="100000"/>
                         </a:lnSpc>
@@ -11836,14 +12270,14 @@
           <p:nvPr>
             <p:extLst>
               <p:ext uri="{D42A27DB-BD31-4B8C-83A1-F6EECF244321}">
-                <p14:modId xmlns:p14="http://schemas.microsoft.com/office/powerpoint/2010/main" val="1356334505"/>
+                <p14:modId xmlns:p14="http://schemas.microsoft.com/office/powerpoint/2010/main" val="888147851"/>
               </p:ext>
             </p:extLst>
           </p:nvPr>
         </p:nvGraphicFramePr>
         <p:xfrm>
-          <a:off x="9342618" y="5816114"/>
-          <a:ext cx="8093005" cy="2438081"/>
+          <a:off x="506448" y="6448746"/>
+          <a:ext cx="8093005" cy="3095817"/>
         </p:xfrm>
         <a:graphic>
           <a:graphicData uri="http://schemas.openxmlformats.org/drawingml/2006/table">
@@ -11859,14 +12293,14 @@
                     </a:ext>
                   </a:extLst>
                 </a:gridCol>
-                <a:gridCol w="828084">
+                <a:gridCol w="818356">
                   <a:extLst>
                     <a:ext uri="{9D8B030D-6E8A-4147-A177-3AD203B41FA5}">
                       <a16:colId xmlns:a16="http://schemas.microsoft.com/office/drawing/2014/main" val="20001"/>
                     </a:ext>
                   </a:extLst>
                 </a:gridCol>
-                <a:gridCol w="725121">
+                <a:gridCol w="734849">
                   <a:extLst>
                     <a:ext uri="{9D8B030D-6E8A-4147-A177-3AD203B41FA5}">
                       <a16:colId xmlns:a16="http://schemas.microsoft.com/office/drawing/2014/main" val="20002"/>
@@ -11902,7 +12336,7 @@
                   </a:extLst>
                 </a:gridCol>
               </a:tblGrid>
-              <a:tr h="348298">
+              <a:tr h="0">
                 <a:tc>
                   <a:txBody>
                     <a:bodyPr/>
@@ -12399,7 +12833,7 @@
                     <a:bodyPr/>
                     <a:lstStyle/>
                     <a:p>
-                      <a:pPr marL="67945">
+                      <a:pPr marL="67945" algn="l">
                         <a:lnSpc>
                           <a:spcPct val="100000"/>
                         </a:lnSpc>
@@ -12458,7 +12892,7 @@
                     <a:bodyPr/>
                     <a:lstStyle/>
                     <a:p>
-                      <a:pPr>
+                      <a:pPr algn="ctr">
                         <a:lnSpc>
                           <a:spcPct val="100000"/>
                         </a:lnSpc>
@@ -12801,7 +13235,7 @@
                     <a:bodyPr/>
                     <a:lstStyle/>
                     <a:p>
-                      <a:pPr marL="67945">
+                      <a:pPr marL="67945" algn="l">
                         <a:lnSpc>
                           <a:spcPct val="100000"/>
                         </a:lnSpc>
@@ -12860,7 +13294,63 @@
                     <a:bodyPr/>
                     <a:lstStyle/>
                     <a:p>
-                      <a:pPr>
+                      <a:pPr marL="0" marR="0" lvl="0" indent="0" algn="ctr" defTabSz="914400" eaLnBrk="1" fontAlgn="auto" latinLnBrk="0" hangingPunct="1">
+                        <a:lnSpc>
+                          <a:spcPct val="100000"/>
+                        </a:lnSpc>
+                        <a:spcBef>
+                          <a:spcPts val="0"/>
+                        </a:spcBef>
+                        <a:spcAft>
+                          <a:spcPts val="0"/>
+                        </a:spcAft>
+                        <a:buClrTx/>
+                        <a:buSzTx/>
+                        <a:buFontTx/>
+                        <a:buNone/>
+                        <a:tabLst/>
+                        <a:defRPr/>
+                      </a:pPr>
+                      <a:endParaRPr lang="en-GB" sz="1100" dirty="0"/>
+                    </a:p>
+                    <a:p>
+                      <a:pPr marL="0" marR="0" lvl="0" indent="0" algn="ctr" defTabSz="914400" eaLnBrk="1" fontAlgn="auto" latinLnBrk="0" hangingPunct="1">
+                        <a:lnSpc>
+                          <a:spcPct val="100000"/>
+                        </a:lnSpc>
+                        <a:spcBef>
+                          <a:spcPts val="0"/>
+                        </a:spcBef>
+                        <a:spcAft>
+                          <a:spcPts val="0"/>
+                        </a:spcAft>
+                        <a:buClrTx/>
+                        <a:buSzTx/>
+                        <a:buFontTx/>
+                        <a:buNone/>
+                        <a:tabLst/>
+                        <a:defRPr/>
+                      </a:pPr>
+                      <a:r>
+                        <a:rPr lang="en-GB" sz="1100" dirty="0"/>
+                        <a:t>{{</a:t>
+                      </a:r>
+                      <a:r>
+                        <a:rPr lang="en-GB" sz="1100" dirty="0" err="1"/>
+                        <a:t>rx_power_power</a:t>
+                      </a:r>
+                      <a:r>
+                        <a:rPr lang="en-GB" sz="1100" dirty="0"/>
+                        <a:t>}}</a:t>
+                      </a:r>
+                      <a:endParaRPr lang="en-GB" sz="1100" dirty="0">
+                        <a:latin typeface="Roboto" panose="02000000000000000000" pitchFamily="2" charset="0"/>
+                        <a:ea typeface="Roboto" panose="02000000000000000000" pitchFamily="2" charset="0"/>
+                        <a:cs typeface="Roboto" panose="02000000000000000000" pitchFamily="2" charset="0"/>
+                      </a:endParaRPr>
+                    </a:p>
+                    <a:p>
+                      <a:pPr algn="ctr">
                         <a:lnSpc>
                           <a:spcPct val="100000"/>
                         </a:lnSpc>
@@ -12963,12 +13453,68 @@
                     <a:bodyPr/>
                     <a:lstStyle/>
                     <a:p>
-                      <a:pPr>
+                      <a:pPr marL="0" marR="0" lvl="0" indent="0" algn="ctr" defTabSz="914400" eaLnBrk="1" fontAlgn="auto" latinLnBrk="0" hangingPunct="1">
                         <a:lnSpc>
                           <a:spcPct val="100000"/>
                         </a:lnSpc>
-                      </a:pPr>
-                      <a:endParaRPr lang="en-GB" sz="1100">
+                        <a:spcBef>
+                          <a:spcPts val="0"/>
+                        </a:spcBef>
+                        <a:spcAft>
+                          <a:spcPts val="0"/>
+                        </a:spcAft>
+                        <a:buClrTx/>
+                        <a:buSzTx/>
+                        <a:buFontTx/>
+                        <a:buNone/>
+                        <a:tabLst/>
+                        <a:defRPr/>
+                      </a:pPr>
+                      <a:endParaRPr lang="en-GB" sz="1100" dirty="0"/>
+                    </a:p>
+                    <a:p>
+                      <a:pPr marL="0" marR="0" lvl="0" indent="0" algn="ctr" defTabSz="914400" eaLnBrk="1" fontAlgn="auto" latinLnBrk="0" hangingPunct="1">
+                        <a:lnSpc>
+                          <a:spcPct val="100000"/>
+                        </a:lnSpc>
+                        <a:spcBef>
+                          <a:spcPts val="0"/>
+                        </a:spcBef>
+                        <a:spcAft>
+                          <a:spcPts val="0"/>
+                        </a:spcAft>
+                        <a:buClrTx/>
+                        <a:buSzTx/>
+                        <a:buFontTx/>
+                        <a:buNone/>
+                        <a:tabLst/>
+                        <a:defRPr/>
+                      </a:pPr>
+                      <a:r>
+                        <a:rPr lang="en-GB" sz="1100" dirty="0"/>
+                        <a:t>{{</a:t>
+                      </a:r>
+                      <a:r>
+                        <a:rPr lang="en-GB" sz="1100" dirty="0" err="1"/>
+                        <a:t>rx_power_typical</a:t>
+                      </a:r>
+                      <a:r>
+                        <a:rPr lang="en-GB" sz="1100" dirty="0"/>
+                        <a:t>}}</a:t>
+                      </a:r>
+                      <a:endParaRPr lang="en-GB" sz="1100" dirty="0">
+                        <a:latin typeface="Roboto" panose="02000000000000000000" pitchFamily="2" charset="0"/>
+                        <a:ea typeface="Roboto" panose="02000000000000000000" pitchFamily="2" charset="0"/>
+                        <a:cs typeface="Roboto" panose="02000000000000000000" pitchFamily="2" charset="0"/>
+                      </a:endParaRPr>
+                    </a:p>
+                    <a:p>
+                      <a:pPr algn="ctr">
+                        <a:lnSpc>
+                          <a:spcPct val="100000"/>
+                        </a:lnSpc>
+                      </a:pPr>
+                      <a:endParaRPr lang="en-GB" sz="1100" dirty="0">
                         <a:latin typeface="Roboto" panose="02000000000000000000" pitchFamily="2" charset="0"/>
                         <a:ea typeface="Roboto" panose="02000000000000000000" pitchFamily="2" charset="0"/>
                         <a:cs typeface="Roboto" panose="02000000000000000000" pitchFamily="2" charset="0"/>
@@ -13066,7 +13612,7 @@
                     <a:bodyPr/>
                     <a:lstStyle/>
                     <a:p>
-                      <a:pPr marL="182880">
+                      <a:pPr marL="182880" algn="ctr">
                         <a:lnSpc>
                           <a:spcPct val="100000"/>
                         </a:lnSpc>
@@ -13176,7 +13722,7 @@
                     <a:bodyPr/>
                     <a:lstStyle/>
                     <a:p>
-                      <a:pPr marL="67945">
+                      <a:pPr marL="67945" algn="l">
                         <a:lnSpc>
                           <a:spcPct val="100000"/>
                         </a:lnSpc>
@@ -13294,12 +13840,27 @@
                     <a:bodyPr/>
                     <a:lstStyle/>
                     <a:p>
-                      <a:pPr>
+                      <a:pPr algn="ctr">
                         <a:lnSpc>
                           <a:spcPct val="100000"/>
                         </a:lnSpc>
-                      </a:pPr>
-                      <a:endParaRPr sz="1100">
+                        <a:spcBef>
+                          <a:spcPts val="305"/>
+                        </a:spcBef>
+                      </a:pPr>
+                      <a:r>
+                        <a:rPr lang="en-GB" sz="1100" dirty="0"/>
+                        <a:t>{{</a:t>
+                      </a:r>
+                      <a:r>
+                        <a:rPr lang="en-GB" sz="1100" dirty="0" err="1"/>
+                        <a:t>rx_sensitivity_min</a:t>
+                      </a:r>
+                      <a:r>
+                        <a:rPr lang="en-GB" sz="1100" dirty="0"/>
+                        <a:t>}}</a:t>
+                      </a:r>
+                      <a:endParaRPr lang="en-GB" sz="1100" dirty="0">
                         <a:latin typeface="Roboto" panose="02000000000000000000" pitchFamily="2" charset="0"/>
                         <a:ea typeface="Roboto" panose="02000000000000000000" pitchFamily="2" charset="0"/>
                         <a:cs typeface="Roboto" panose="02000000000000000000" pitchFamily="2" charset="0"/>
@@ -13338,12 +13899,48 @@
                     <a:bodyPr/>
                     <a:lstStyle/>
                     <a:p>
-                      <a:pPr>
+                      <a:pPr marL="0" marR="0" lvl="0" indent="0" algn="ctr" defTabSz="914400" eaLnBrk="1" fontAlgn="auto" latinLnBrk="0" hangingPunct="1">
                         <a:lnSpc>
                           <a:spcPct val="100000"/>
                         </a:lnSpc>
-                      </a:pPr>
-                      <a:endParaRPr lang="en-GB" sz="1100">
+                        <a:spcBef>
+                          <a:spcPts val="0"/>
+                        </a:spcBef>
+                        <a:spcAft>
+                          <a:spcPts val="0"/>
+                        </a:spcAft>
+                        <a:buClrTx/>
+                        <a:buSzTx/>
+                        <a:buFontTx/>
+                        <a:buNone/>
+                        <a:tabLst/>
+                        <a:defRPr/>
+                      </a:pPr>
+                      <a:r>
+                        <a:rPr lang="en-GB" sz="1100" dirty="0"/>
+                        <a:t>{{</a:t>
+                      </a:r>
+                      <a:r>
+                        <a:rPr lang="en-GB" sz="1100" dirty="0" err="1"/>
+                        <a:t>rx_sensitivity_typical</a:t>
+                      </a:r>
+                      <a:r>
+                        <a:rPr lang="en-GB" sz="1100" dirty="0"/>
+                        <a:t>}}</a:t>
+                      </a:r>
+                      <a:endParaRPr lang="en-GB" sz="1100" dirty="0">
+                        <a:latin typeface="Roboto" panose="02000000000000000000" pitchFamily="2" charset="0"/>
+                        <a:ea typeface="Roboto" panose="02000000000000000000" pitchFamily="2" charset="0"/>
+                        <a:cs typeface="Roboto" panose="02000000000000000000" pitchFamily="2" charset="0"/>
+                      </a:endParaRPr>
+                    </a:p>
+                    <a:p>
+                      <a:pPr algn="ctr">
+                        <a:lnSpc>
+                          <a:spcPct val="100000"/>
+                        </a:lnSpc>
+                      </a:pPr>
+                      <a:endParaRPr lang="en-GB" sz="1100" dirty="0">
                         <a:latin typeface="Roboto" panose="02000000000000000000" pitchFamily="2" charset="0"/>
                         <a:ea typeface="Roboto" panose="02000000000000000000" pitchFamily="2" charset="0"/>
                         <a:cs typeface="Roboto" panose="02000000000000000000" pitchFamily="2" charset="0"/>
@@ -13441,7 +14038,7 @@
                     <a:bodyPr/>
                     <a:lstStyle/>
                     <a:p>
-                      <a:pPr marL="242570">
+                      <a:pPr marL="242570" algn="ctr">
                         <a:lnSpc>
                           <a:spcPct val="100000"/>
                         </a:lnSpc>
@@ -13562,7 +14159,7 @@
                     <a:bodyPr/>
                     <a:lstStyle/>
                     <a:p>
-                      <a:pPr marL="67945">
+                      <a:pPr marL="67945" algn="l">
                         <a:lnSpc>
                           <a:spcPct val="100000"/>
                         </a:lnSpc>
@@ -13810,12 +14407,73 @@
                     <a:bodyPr/>
                     <a:lstStyle/>
                     <a:p>
-                      <a:pPr>
+                      <a:pPr marL="0" marR="0" lvl="0" indent="0" algn="ctr" defTabSz="914400" eaLnBrk="1" fontAlgn="auto" latinLnBrk="0" hangingPunct="1">
                         <a:lnSpc>
                           <a:spcPct val="100000"/>
                         </a:lnSpc>
-                      </a:pPr>
-                      <a:endParaRPr lang="en-GB" sz="1100">
+                        <a:spcBef>
+                          <a:spcPts val="0"/>
+                        </a:spcBef>
+                        <a:spcAft>
+                          <a:spcPts val="0"/>
+                        </a:spcAft>
+                        <a:buClrTx/>
+                        <a:buSzTx/>
+                        <a:buFontTx/>
+                        <a:buNone/>
+                        <a:tabLst/>
+                        <a:defRPr/>
+                      </a:pPr>
+                      <a:r>
+                        <a:rPr lang="en-GB" sz="1100" dirty="0">
+                          <a:solidFill>
+                            <a:schemeClr val="tx1"/>
+                          </a:solidFill>
+                          <a:latin typeface="+mn-lt"/>
+                          <a:ea typeface="+mn-ea"/>
+                          <a:cs typeface="+mn-cs"/>
+                        </a:rPr>
+                        <a:t>{{</a:t>
+                      </a:r>
+                      <a:r>
+                        <a:rPr lang="en-GB" sz="1100" dirty="0" err="1">
+                          <a:solidFill>
+                            <a:schemeClr val="tx1"/>
+                          </a:solidFill>
+                          <a:latin typeface="+mn-lt"/>
+                          <a:ea typeface="+mn-ea"/>
+                          <a:cs typeface="+mn-cs"/>
+                        </a:rPr>
+                        <a:t>rx_overload_</a:t>
+                      </a:r>
+                      <a:r>
+                        <a:rPr lang="en-GB" sz="1100" dirty="0" err="1"/>
+                        <a:t>min</a:t>
+                      </a:r>
+                      <a:r>
+                        <a:rPr lang="en-GB" sz="1100" dirty="0">
+                          <a:solidFill>
+                            <a:schemeClr val="tx1"/>
+                          </a:solidFill>
+                          <a:latin typeface="+mn-lt"/>
+                          <a:ea typeface="+mn-ea"/>
+                          <a:cs typeface="+mn-cs"/>
+                        </a:rPr>
+                        <a:t>}}</a:t>
+                      </a:r>
+                      <a:endParaRPr lang="en-GB" sz="1100" dirty="0">
+                        <a:latin typeface="Roboto" panose="02000000000000000000" pitchFamily="2" charset="0"/>
+                        <a:ea typeface="Roboto" panose="02000000000000000000" pitchFamily="2" charset="0"/>
+                        <a:cs typeface="Roboto" panose="02000000000000000000" pitchFamily="2" charset="0"/>
+                      </a:endParaRPr>
+                    </a:p>
+                    <a:p>
+                      <a:pPr algn="ctr">
+                        <a:lnSpc>
+                          <a:spcPct val="100000"/>
+                        </a:lnSpc>
+                      </a:pPr>
+                      <a:endParaRPr lang="en-GB" sz="1100" dirty="0">
                         <a:latin typeface="Roboto" panose="02000000000000000000" pitchFamily="2" charset="0"/>
                         <a:ea typeface="Roboto" panose="02000000000000000000" pitchFamily="2" charset="0"/>
                         <a:cs typeface="Roboto" panose="02000000000000000000" pitchFamily="2" charset="0"/>
@@ -13854,12 +14512,73 @@
                     <a:bodyPr/>
                     <a:lstStyle/>
                     <a:p>
-                      <a:pPr>
+                      <a:pPr marL="0" marR="0" lvl="0" indent="0" algn="ctr" defTabSz="914400" eaLnBrk="1" fontAlgn="auto" latinLnBrk="0" hangingPunct="1">
                         <a:lnSpc>
                           <a:spcPct val="100000"/>
                         </a:lnSpc>
-                      </a:pPr>
-                      <a:endParaRPr sz="1100">
+                        <a:spcBef>
+                          <a:spcPts val="0"/>
+                        </a:spcBef>
+                        <a:spcAft>
+                          <a:spcPts val="0"/>
+                        </a:spcAft>
+                        <a:buClrTx/>
+                        <a:buSzTx/>
+                        <a:buFontTx/>
+                        <a:buNone/>
+                        <a:tabLst/>
+                        <a:defRPr/>
+                      </a:pPr>
+                      <a:r>
+                        <a:rPr lang="en-GB" sz="1100" dirty="0">
+                          <a:solidFill>
+                            <a:schemeClr val="tx1"/>
+                          </a:solidFill>
+                          <a:latin typeface="+mn-lt"/>
+                          <a:ea typeface="+mn-ea"/>
+                          <a:cs typeface="+mn-cs"/>
+                        </a:rPr>
+                        <a:t>{{</a:t>
+                      </a:r>
+                      <a:r>
+                        <a:rPr lang="en-GB" sz="1100" dirty="0" err="1">
+                          <a:solidFill>
+                            <a:schemeClr val="tx1"/>
+                          </a:solidFill>
+                          <a:latin typeface="+mn-lt"/>
+                          <a:ea typeface="+mn-ea"/>
+                          <a:cs typeface="+mn-cs"/>
+                        </a:rPr>
+                        <a:t>rx_overload_</a:t>
+                      </a:r>
+                      <a:r>
+                        <a:rPr lang="en-GB" sz="1100" dirty="0" err="1"/>
+                        <a:t>max</a:t>
+                      </a:r>
+                      <a:r>
+                        <a:rPr lang="en-GB" sz="1100" dirty="0">
+                          <a:solidFill>
+                            <a:schemeClr val="tx1"/>
+                          </a:solidFill>
+                          <a:latin typeface="+mn-lt"/>
+                          <a:ea typeface="+mn-ea"/>
+                          <a:cs typeface="+mn-cs"/>
+                        </a:rPr>
+                        <a:t>}}</a:t>
+                      </a:r>
+                      <a:endParaRPr lang="en-GB" sz="1100" dirty="0">
+                        <a:latin typeface="Roboto" panose="02000000000000000000" pitchFamily="2" charset="0"/>
+                        <a:ea typeface="Roboto" panose="02000000000000000000" pitchFamily="2" charset="0"/>
+                        <a:cs typeface="Roboto" panose="02000000000000000000" pitchFamily="2" charset="0"/>
+                      </a:endParaRPr>
+                    </a:p>
+                    <a:p>
+                      <a:pPr algn="ctr">
+                        <a:lnSpc>
+                          <a:spcPct val="100000"/>
+                        </a:lnSpc>
+                      </a:pPr>
+                      <a:endParaRPr sz="1100" dirty="0">
                         <a:latin typeface="Roboto" panose="02000000000000000000" pitchFamily="2" charset="0"/>
                         <a:ea typeface="Roboto" panose="02000000000000000000" pitchFamily="2" charset="0"/>
                         <a:cs typeface="Roboto" panose="02000000000000000000" pitchFamily="2" charset="0"/>
@@ -13898,7 +14617,7 @@
                     <a:bodyPr/>
                     <a:lstStyle/>
                     <a:p>
-                      <a:pPr marL="242570">
+                      <a:pPr marL="242570" algn="ctr">
                         <a:lnSpc>
                           <a:spcPct val="100000"/>
                         </a:lnSpc>
@@ -14033,7 +14752,7 @@
                     <a:bodyPr/>
                     <a:lstStyle/>
                     <a:p>
-                      <a:pPr marL="67945">
+                      <a:pPr marL="67945" algn="l">
                         <a:lnSpc>
                           <a:spcPct val="100000"/>
                         </a:lnSpc>
@@ -14151,12 +14870,48 @@
                     <a:bodyPr/>
                     <a:lstStyle/>
                     <a:p>
-                      <a:pPr>
+                      <a:pPr marL="0" marR="0" lvl="0" indent="0" algn="ctr" defTabSz="914400" eaLnBrk="1" fontAlgn="auto" latinLnBrk="0" hangingPunct="1">
                         <a:lnSpc>
                           <a:spcPct val="100000"/>
                         </a:lnSpc>
-                      </a:pPr>
-                      <a:endParaRPr sz="1100">
+                        <a:spcBef>
+                          <a:spcPts val="0"/>
+                        </a:spcBef>
+                        <a:spcAft>
+                          <a:spcPts val="0"/>
+                        </a:spcAft>
+                        <a:buClrTx/>
+                        <a:buSzTx/>
+                        <a:buFontTx/>
+                        <a:buNone/>
+                        <a:tabLst/>
+                        <a:defRPr/>
+                      </a:pPr>
+                      <a:r>
+                        <a:rPr lang="en-GB" sz="1100" dirty="0"/>
+                        <a:t>{{</a:t>
+                      </a:r>
+                      <a:r>
+                        <a:rPr lang="en-GB" sz="1100" dirty="0" err="1"/>
+                        <a:t>rx_reflectance_min</a:t>
+                      </a:r>
+                      <a:r>
+                        <a:rPr lang="en-GB" sz="1100" dirty="0"/>
+                        <a:t>}}</a:t>
+                      </a:r>
+                      <a:endParaRPr lang="en-GB" sz="1100" dirty="0">
+                        <a:latin typeface="Roboto" panose="02000000000000000000" pitchFamily="2" charset="0"/>
+                        <a:ea typeface="Roboto" panose="02000000000000000000" pitchFamily="2" charset="0"/>
+                        <a:cs typeface="Roboto" panose="02000000000000000000" pitchFamily="2" charset="0"/>
+                      </a:endParaRPr>
+                    </a:p>
+                    <a:p>
+                      <a:pPr algn="ctr">
+                        <a:lnSpc>
+                          <a:spcPct val="100000"/>
+                        </a:lnSpc>
+                      </a:pPr>
+                      <a:endParaRPr sz="1100" dirty="0">
                         <a:latin typeface="Roboto" panose="02000000000000000000" pitchFamily="2" charset="0"/>
                         <a:ea typeface="Roboto" panose="02000000000000000000" pitchFamily="2" charset="0"/>
                         <a:cs typeface="Roboto" panose="02000000000000000000" pitchFamily="2" charset="0"/>
@@ -14195,7 +14950,43 @@
                     <a:bodyPr/>
                     <a:lstStyle/>
                     <a:p>
-                      <a:pPr>
+                      <a:pPr marL="0" marR="0" lvl="0" indent="0" algn="ctr" defTabSz="914400" eaLnBrk="1" fontAlgn="auto" latinLnBrk="0" hangingPunct="1">
+                        <a:lnSpc>
+                          <a:spcPct val="100000"/>
+                        </a:lnSpc>
+                        <a:spcBef>
+                          <a:spcPts val="0"/>
+                        </a:spcBef>
+                        <a:spcAft>
+                          <a:spcPts val="0"/>
+                        </a:spcAft>
+                        <a:buClrTx/>
+                        <a:buSzTx/>
+                        <a:buFontTx/>
+                        <a:buNone/>
+                        <a:tabLst/>
+                        <a:defRPr/>
+                      </a:pPr>
+                      <a:r>
+                        <a:rPr lang="en-GB" sz="1100" dirty="0"/>
+                        <a:t>{{</a:t>
+                      </a:r>
+                      <a:r>
+                        <a:rPr lang="en-GB" sz="1100" dirty="0" err="1"/>
+                        <a:t>rx_reflectance_typical</a:t>
+                      </a:r>
+                      <a:r>
+                        <a:rPr lang="en-GB" sz="1100" dirty="0"/>
+                        <a:t>}}</a:t>
+                      </a:r>
+                      <a:endParaRPr lang="en-GB" sz="1100" dirty="0">
+                        <a:latin typeface="Roboto" panose="02000000000000000000" pitchFamily="2" charset="0"/>
+                        <a:ea typeface="Roboto" panose="02000000000000000000" pitchFamily="2" charset="0"/>
+                        <a:cs typeface="Roboto" panose="02000000000000000000" pitchFamily="2" charset="0"/>
+                      </a:endParaRPr>
+                    </a:p>
+                    <a:p>
+                      <a:pPr algn="ctr">
                         <a:lnSpc>
                           <a:spcPct val="100000"/>
                         </a:lnSpc>
@@ -14427,7 +15218,7 @@
         </p:nvSpPr>
         <p:spPr>
           <a:xfrm>
-            <a:off x="9342618" y="5350925"/>
+            <a:off x="506448" y="5963335"/>
             <a:ext cx="3712984" cy="323165"/>
           </a:xfrm>
           <a:prstGeom prst="rect">
@@ -14510,7 +15301,7 @@
         </p:nvSpPr>
         <p:spPr>
           <a:xfrm>
-            <a:off x="9342618" y="8396219"/>
+            <a:off x="9342618" y="9273332"/>
             <a:ext cx="7992882" cy="261610"/>
           </a:xfrm>
           <a:prstGeom prst="rect">
@@ -15107,7 +15898,7 @@
           <p:nvPr>
             <p:extLst>
               <p:ext uri="{D42A27DB-BD31-4B8C-83A1-F6EECF244321}">
-                <p14:modId xmlns:p14="http://schemas.microsoft.com/office/powerpoint/2010/main" val="2114067922"/>
+                <p14:modId xmlns:p14="http://schemas.microsoft.com/office/powerpoint/2010/main" val="2334095"/>
               </p:ext>
             </p:extLst>
           </p:nvPr>
@@ -15192,11 +15983,14 @@
                       </a:solidFill>
                       <a:prstDash val="solid"/>
                     </a:lnT>
-                    <a:lnB w="6350">
-                      <a:solidFill>
-                        <a:srgbClr val="000000"/>
-                      </a:solidFill>
-                      <a:prstDash val="solid"/>
+                    <a:lnB w="6350" cap="flat" cmpd="sng" algn="ctr">
+                      <a:solidFill>
+                        <a:srgbClr val="000000"/>
+                      </a:solidFill>
+                      <a:prstDash val="solid"/>
+                      <a:round/>
+                      <a:headEnd type="none" w="med" len="med"/>
+                      <a:tailEnd type="none" w="med" len="med"/>
                     </a:lnB>
                     <a:solidFill>
                       <a:srgbClr val="004455"/>
@@ -15256,11 +16050,14 @@
                       </a:solidFill>
                       <a:prstDash val="solid"/>
                     </a:lnT>
-                    <a:lnB w="6350">
-                      <a:solidFill>
-                        <a:srgbClr val="000000"/>
-                      </a:solidFill>
-                      <a:prstDash val="solid"/>
+                    <a:lnB w="6350" cap="flat" cmpd="sng" algn="ctr">
+                      <a:solidFill>
+                        <a:srgbClr val="000000"/>
+                      </a:solidFill>
+                      <a:prstDash val="solid"/>
+                      <a:round/>
+                      <a:headEnd type="none" w="med" len="med"/>
+                      <a:tailEnd type="none" w="med" len="med"/>
                     </a:lnB>
                     <a:solidFill>
                       <a:srgbClr val="004455"/>
@@ -15290,7 +16087,7 @@
                       </a:r>
                       <a:r>
                         <a:rPr lang="en-GB" sz="1100" dirty="0" err="1"/>
-                        <a:t>compliance_esd_pins</a:t>
+                        <a:t>compliance_esd_pins_feature</a:t>
                       </a:r>
                       <a:r>
                         <a:rPr lang="en-GB" sz="1100" dirty="0"/>
@@ -15358,7 +16155,7 @@
                       </a:r>
                       <a:r>
                         <a:rPr lang="en-GB" sz="1100" dirty="0" err="1"/>
-                        <a:t>compliance_esd_pins</a:t>
+                        <a:t>compliance_esd_pins_standard</a:t>
                       </a:r>
                       <a:r>
                         <a:rPr lang="en-GB" sz="1100" dirty="0"/>
@@ -15433,7 +16230,7 @@
                       </a:r>
                       <a:r>
                         <a:rPr lang="en-GB" sz="1100" dirty="0" err="1"/>
-                        <a:t>compliance_esd_immunity</a:t>
+                        <a:t>compliance_esd_immunity_feature</a:t>
                       </a:r>
                       <a:r>
                         <a:rPr lang="en-GB" sz="1100" dirty="0"/>
@@ -15501,7 +16298,7 @@
                       </a:r>
                       <a:r>
                         <a:rPr lang="en-GB" sz="1100" dirty="0" err="1"/>
-                        <a:t>compliance_esd_immunity</a:t>
+                        <a:t>compliance_esd_immunity_standard</a:t>
                       </a:r>
                       <a:r>
                         <a:rPr lang="en-GB" sz="1100" dirty="0"/>
@@ -15576,7 +16373,7 @@
                       </a:r>
                       <a:r>
                         <a:rPr lang="en-GB" sz="1100" dirty="0" err="1"/>
-                        <a:t>compliance_emi</a:t>
+                        <a:t>compliance_emi_feature</a:t>
                       </a:r>
                       <a:r>
                         <a:rPr lang="en-GB" sz="1100" dirty="0"/>
@@ -15644,7 +16441,7 @@
                       </a:r>
                       <a:r>
                         <a:rPr lang="en-GB" sz="1100" dirty="0" err="1"/>
-                        <a:t>compliance_emi</a:t>
+                        <a:t>compliance_emi_standard</a:t>
                       </a:r>
                       <a:r>
                         <a:rPr lang="en-GB" sz="1100" dirty="0"/>
@@ -15719,7 +16516,7 @@
                       </a:r>
                       <a:r>
                         <a:rPr lang="en-GB" sz="1100" dirty="0" err="1"/>
-                        <a:t>compliance_immunity</a:t>
+                        <a:t>compliance_immunity_feature</a:t>
                       </a:r>
                       <a:r>
                         <a:rPr lang="en-GB" sz="1100" dirty="0"/>
@@ -15801,7 +16598,7 @@
                           <a:ea typeface="+mn-ea"/>
                           <a:cs typeface="+mn-cs"/>
                         </a:rPr>
-                        <a:t>compliance_immunity</a:t>
+                        <a:t>compliance_immunity_standard</a:t>
                       </a:r>
                       <a:r>
                         <a:rPr lang="en-GB" sz="1100" dirty="0">
@@ -15897,7 +16694,7 @@
                           <a:ea typeface="+mn-ea"/>
                           <a:cs typeface="+mn-cs"/>
                         </a:rPr>
-                        <a:t>compliance_laser</a:t>
+                        <a:t>compliance_laser_feature</a:t>
                       </a:r>
                       <a:r>
                         <a:rPr lang="en-GB" sz="1100" dirty="0">
@@ -15975,7 +16772,7 @@
                       </a:r>
                       <a:r>
                         <a:rPr lang="en-GB" sz="1100" dirty="0" err="1"/>
-                        <a:t>compliance_laser</a:t>
+                        <a:t>compliance_laser_standard</a:t>
                       </a:r>
                       <a:r>
                         <a:rPr lang="en-GB" sz="1100" dirty="0"/>
@@ -16053,7 +16850,7 @@
                       </a:r>
                       <a:r>
                         <a:rPr lang="en-GB" sz="1100" dirty="0" err="1"/>
-                        <a:t>compliance_environmental</a:t>
+                        <a:t>compliance_environmental_feature</a:t>
                       </a:r>
                       <a:r>
                         <a:rPr lang="en-GB" sz="1100" dirty="0"/>
@@ -16135,7 +16932,7 @@
                           <a:ea typeface="+mn-ea"/>
                           <a:cs typeface="+mn-cs"/>
                         </a:rPr>
-                        <a:t>compliance_environmental</a:t>
+                        <a:t>compliance_environmental_standard</a:t>
                       </a:r>
                       <a:r>
                         <a:rPr lang="en-GB" sz="1100" dirty="0">
@@ -18082,7 +18879,35 @@
                 <a:latin typeface="Roboto" panose="02000000000000000000" pitchFamily="2" charset="0"/>
                 <a:ea typeface="Roboto" panose="02000000000000000000" pitchFamily="2" charset="0"/>
               </a:rPr>
-              <a:t>Digital diagnostics monitoring function is available on all  Complete Connects QSFP DD products. A 2-wire serial interface provides user to contact with module.</a:t>
+              <a:t>Digital diagnostics monitoring function is available on all Complete Connect {{</a:t>
+            </a:r>
+            <a:r>
+              <a:rPr lang="en-GB" sz="1400" dirty="0" err="1">
+                <a:latin typeface="Roboto" panose="02000000000000000000" pitchFamily="2" charset="0"/>
+                <a:ea typeface="Roboto" panose="02000000000000000000" pitchFamily="2" charset="0"/>
+              </a:rPr>
+              <a:t>form_factor</a:t>
+            </a:r>
+            <a:r>
+              <a:rPr lang="en-GB" sz="1400" dirty="0">
+                <a:latin typeface="Roboto" panose="02000000000000000000" pitchFamily="2" charset="0"/>
+                <a:ea typeface="Roboto" panose="02000000000000000000" pitchFamily="2" charset="0"/>
+              </a:rPr>
+              <a:t>}} products. {{</a:t>
+            </a:r>
+            <a:r>
+              <a:rPr lang="en-GB" sz="1400" dirty="0" err="1">
+                <a:latin typeface="Roboto" panose="02000000000000000000" pitchFamily="2" charset="0"/>
+                <a:ea typeface="Roboto" panose="02000000000000000000" pitchFamily="2" charset="0"/>
+              </a:rPr>
+              <a:t>dmi_interface_description</a:t>
+            </a:r>
+            <a:r>
+              <a:rPr lang="en-GB" sz="1400" dirty="0">
+                <a:latin typeface="Roboto" panose="02000000000000000000" pitchFamily="2" charset="0"/>
+                <a:ea typeface="Roboto" panose="02000000000000000000" pitchFamily="2" charset="0"/>
+              </a:rPr>
+              <a:t>}}</a:t>
             </a:r>
           </a:p>
         </p:txBody>

--- a/template.pptx
+++ b/template.pptx
@@ -8538,14 +8538,14 @@
           <p:nvPr>
             <p:extLst>
               <p:ext uri="{D42A27DB-BD31-4B8C-83A1-F6EECF244321}">
-                <p14:modId xmlns:p14="http://schemas.microsoft.com/office/powerpoint/2010/main" val="2654212867"/>
+                <p14:modId xmlns:p14="http://schemas.microsoft.com/office/powerpoint/2010/main" val="1223096816"/>
               </p:ext>
             </p:extLst>
           </p:nvPr>
         </p:nvGraphicFramePr>
         <p:xfrm>
           <a:off x="9329165" y="1942500"/>
-          <a:ext cx="8006335" cy="4463557"/>
+          <a:ext cx="8006335" cy="3957028"/>
         </p:xfrm>
         <a:graphic>
           <a:graphicData uri="http://schemas.openxmlformats.org/drawingml/2006/table">
@@ -9278,6 +9278,1186 @@
                     <a:bodyPr/>
                     <a:lstStyle/>
                     <a:p>
+                      <a:pPr algn="ctr">
+                        <a:lnSpc>
+                          <a:spcPct val="100000"/>
+                        </a:lnSpc>
+                      </a:pPr>
+                      <a:endParaRPr sz="1100" dirty="0">
+                        <a:latin typeface="Roboto" panose="02000000000000000000" pitchFamily="2" charset="0"/>
+                        <a:ea typeface="Roboto" panose="02000000000000000000" pitchFamily="2" charset="0"/>
+                        <a:cs typeface="Roboto" panose="02000000000000000000" pitchFamily="2" charset="0"/>
+                      </a:endParaRPr>
+                    </a:p>
+                  </a:txBody>
+                  <a:tcPr marL="0" marR="0" marT="0" marB="0" anchor="ctr">
+                    <a:lnL w="6350">
+                      <a:solidFill>
+                        <a:srgbClr val="000000"/>
+                      </a:solidFill>
+                      <a:prstDash val="solid"/>
+                    </a:lnL>
+                    <a:lnR w="6350">
+                      <a:solidFill>
+                        <a:srgbClr val="000000"/>
+                      </a:solidFill>
+                      <a:prstDash val="solid"/>
+                    </a:lnR>
+                    <a:lnT w="6350">
+                      <a:solidFill>
+                        <a:srgbClr val="000000"/>
+                      </a:solidFill>
+                      <a:prstDash val="solid"/>
+                    </a:lnT>
+                    <a:lnB w="6350">
+                      <a:solidFill>
+                        <a:srgbClr val="000000"/>
+                      </a:solidFill>
+                      <a:prstDash val="solid"/>
+                    </a:lnB>
+                  </a:tcPr>
+                </a:tc>
+                <a:tc>
+                  <a:txBody>
+                    <a:bodyPr/>
+                    <a:lstStyle/>
+                    <a:p>
+                      <a:pPr algn="ctr">
+                        <a:lnSpc>
+                          <a:spcPct val="100000"/>
+                        </a:lnSpc>
+                        <a:spcBef>
+                          <a:spcPts val="305"/>
+                        </a:spcBef>
+                      </a:pPr>
+                      <a:r>
+                        <a:rPr lang="en-GB" sz="1100" dirty="0"/>
+                        <a:t>{{</a:t>
+                      </a:r>
+                      <a:r>
+                        <a:rPr lang="en-GB" sz="1100" dirty="0" err="1"/>
+                        <a:t>tx_power_max</a:t>
+                      </a:r>
+                      <a:r>
+                        <a:rPr lang="en-GB" sz="1100" dirty="0"/>
+                        <a:t>}}</a:t>
+                      </a:r>
+                      <a:endParaRPr sz="1100" dirty="0">
+                        <a:latin typeface="Roboto" panose="02000000000000000000" pitchFamily="2" charset="0"/>
+                        <a:ea typeface="Roboto" panose="02000000000000000000" pitchFamily="2" charset="0"/>
+                        <a:cs typeface="Roboto" panose="02000000000000000000" pitchFamily="2" charset="0"/>
+                      </a:endParaRPr>
+                    </a:p>
+                  </a:txBody>
+                  <a:tcPr marL="0" marR="0" marT="48408" marB="0" anchor="ctr">
+                    <a:lnL w="6350">
+                      <a:solidFill>
+                        <a:srgbClr val="000000"/>
+                      </a:solidFill>
+                      <a:prstDash val="solid"/>
+                    </a:lnL>
+                    <a:lnR w="6350">
+                      <a:solidFill>
+                        <a:srgbClr val="000000"/>
+                      </a:solidFill>
+                      <a:prstDash val="solid"/>
+                    </a:lnR>
+                    <a:lnT w="6350">
+                      <a:solidFill>
+                        <a:srgbClr val="000000"/>
+                      </a:solidFill>
+                      <a:prstDash val="solid"/>
+                    </a:lnT>
+                    <a:lnB w="6350">
+                      <a:solidFill>
+                        <a:srgbClr val="000000"/>
+                      </a:solidFill>
+                      <a:prstDash val="solid"/>
+                    </a:lnB>
+                  </a:tcPr>
+                </a:tc>
+                <a:tc>
+                  <a:txBody>
+                    <a:bodyPr/>
+                    <a:lstStyle/>
+                    <a:p>
+                      <a:pPr marL="635" algn="ctr">
+                        <a:lnSpc>
+                          <a:spcPct val="100000"/>
+                        </a:lnSpc>
+                        <a:spcBef>
+                          <a:spcPts val="305"/>
+                        </a:spcBef>
+                      </a:pPr>
+                      <a:r>
+                        <a:rPr lang="en-GB" sz="1100" dirty="0"/>
+                        <a:t>{{</a:t>
+                      </a:r>
+                      <a:r>
+                        <a:rPr lang="en-GB" sz="1100" dirty="0" err="1"/>
+                        <a:t>tx_power_unit</a:t>
+                      </a:r>
+                      <a:r>
+                        <a:rPr lang="en-GB" sz="1100" dirty="0"/>
+                        <a:t>}}</a:t>
+                      </a:r>
+                      <a:endParaRPr sz="1100" dirty="0">
+                        <a:latin typeface="Roboto" panose="02000000000000000000" pitchFamily="2" charset="0"/>
+                        <a:ea typeface="Roboto" panose="02000000000000000000" pitchFamily="2" charset="0"/>
+                        <a:cs typeface="Roboto" panose="02000000000000000000" pitchFamily="2" charset="0"/>
+                      </a:endParaRPr>
+                    </a:p>
+                  </a:txBody>
+                  <a:tcPr marL="0" marR="0" marT="48408" marB="0" anchor="ctr">
+                    <a:lnL w="6350">
+                      <a:solidFill>
+                        <a:srgbClr val="000000"/>
+                      </a:solidFill>
+                      <a:prstDash val="solid"/>
+                    </a:lnL>
+                    <a:lnR w="6350">
+                      <a:solidFill>
+                        <a:srgbClr val="000000"/>
+                      </a:solidFill>
+                      <a:prstDash val="solid"/>
+                    </a:lnR>
+                    <a:lnT w="6350">
+                      <a:solidFill>
+                        <a:srgbClr val="000000"/>
+                      </a:solidFill>
+                      <a:prstDash val="solid"/>
+                    </a:lnT>
+                    <a:lnB w="6350">
+                      <a:solidFill>
+                        <a:srgbClr val="000000"/>
+                      </a:solidFill>
+                      <a:prstDash val="solid"/>
+                    </a:lnB>
+                  </a:tcPr>
+                </a:tc>
+                <a:tc>
+                  <a:txBody>
+                    <a:bodyPr/>
+                    <a:lstStyle/>
+                    <a:p>
+                      <a:pPr>
+                        <a:lnSpc>
+                          <a:spcPct val="100000"/>
+                        </a:lnSpc>
+                      </a:pPr>
+                      <a:endParaRPr sz="1100">
+                        <a:latin typeface="Roboto" panose="02000000000000000000" pitchFamily="2" charset="0"/>
+                        <a:ea typeface="Roboto" panose="02000000000000000000" pitchFamily="2" charset="0"/>
+                        <a:cs typeface="Roboto" panose="02000000000000000000" pitchFamily="2" charset="0"/>
+                      </a:endParaRPr>
+                    </a:p>
+                  </a:txBody>
+                  <a:tcPr marL="0" marR="0" marT="0" marB="0" anchor="ctr">
+                    <a:lnL w="6350">
+                      <a:solidFill>
+                        <a:srgbClr val="000000"/>
+                      </a:solidFill>
+                      <a:prstDash val="solid"/>
+                    </a:lnL>
+                    <a:lnR w="6350">
+                      <a:solidFill>
+                        <a:srgbClr val="000000"/>
+                      </a:solidFill>
+                      <a:prstDash val="solid"/>
+                    </a:lnR>
+                    <a:lnT w="6350">
+                      <a:solidFill>
+                        <a:srgbClr val="000000"/>
+                      </a:solidFill>
+                      <a:prstDash val="solid"/>
+                    </a:lnT>
+                    <a:lnB w="6350">
+                      <a:solidFill>
+                        <a:srgbClr val="000000"/>
+                      </a:solidFill>
+                      <a:prstDash val="solid"/>
+                    </a:lnB>
+                  </a:tcPr>
+                </a:tc>
+                <a:extLst>
+                  <a:ext uri="{0D108BD9-81ED-4DB2-BD59-A6C34878D82A}">
+                    <a16:rowId xmlns:a16="http://schemas.microsoft.com/office/drawing/2014/main" val="10002"/>
+                  </a:ext>
+                </a:extLst>
+              </a:tr>
+              <a:tr h="385724">
+                <a:tc>
+                  <a:txBody>
+                    <a:bodyPr/>
+                    <a:lstStyle/>
+                    <a:p>
+                      <a:pPr marL="67945" algn="l">
+                        <a:lnSpc>
+                          <a:spcPct val="100000"/>
+                        </a:lnSpc>
+                        <a:spcBef>
+                          <a:spcPts val="310"/>
+                        </a:spcBef>
+                      </a:pPr>
+                      <a:r>
+                        <a:rPr lang="en-GB" sz="1100" dirty="0"/>
+                        <a:t>{{</a:t>
+                      </a:r>
+                      <a:r>
+                        <a:rPr lang="en-GB" sz="1100" dirty="0" err="1"/>
+                        <a:t>tx_wavelength</a:t>
+                      </a:r>
+                      <a:r>
+                        <a:rPr lang="en-GB" sz="1100" dirty="0"/>
+                        <a:t>}}</a:t>
+                      </a:r>
+                      <a:endParaRPr sz="1100" dirty="0">
+                        <a:latin typeface="Roboto" panose="02000000000000000000" pitchFamily="2" charset="0"/>
+                        <a:ea typeface="Roboto" panose="02000000000000000000" pitchFamily="2" charset="0"/>
+                        <a:cs typeface="Roboto" panose="02000000000000000000" pitchFamily="2" charset="0"/>
+                      </a:endParaRPr>
+                    </a:p>
+                  </a:txBody>
+                  <a:tcPr marL="0" marR="0" marT="49201" marB="0" anchor="ctr">
+                    <a:lnL w="6350">
+                      <a:solidFill>
+                        <a:srgbClr val="000000"/>
+                      </a:solidFill>
+                      <a:prstDash val="solid"/>
+                    </a:lnL>
+                    <a:lnR w="6350">
+                      <a:solidFill>
+                        <a:srgbClr val="000000"/>
+                      </a:solidFill>
+                      <a:prstDash val="solid"/>
+                    </a:lnR>
+                    <a:lnT w="6350">
+                      <a:solidFill>
+                        <a:srgbClr val="000000"/>
+                      </a:solidFill>
+                      <a:prstDash val="solid"/>
+                    </a:lnT>
+                    <a:lnB w="6350">
+                      <a:solidFill>
+                        <a:srgbClr val="000000"/>
+                      </a:solidFill>
+                      <a:prstDash val="solid"/>
+                    </a:lnB>
+                  </a:tcPr>
+                </a:tc>
+                <a:tc>
+                  <a:txBody>
+                    <a:bodyPr/>
+                    <a:lstStyle/>
+                    <a:p>
+                      <a:pPr algn="ctr">
+                        <a:lnSpc>
+                          <a:spcPct val="100000"/>
+                        </a:lnSpc>
+                        <a:spcBef>
+                          <a:spcPts val="310"/>
+                        </a:spcBef>
+                      </a:pPr>
+                      <a:r>
+                        <a:rPr lang="en-GB" sz="1100" dirty="0"/>
+                        <a:t>{{</a:t>
+                      </a:r>
+                      <a:r>
+                        <a:rPr lang="en-GB" sz="1100" dirty="0" err="1"/>
+                        <a:t>tx_wavelength_symbol</a:t>
+                      </a:r>
+                      <a:r>
+                        <a:rPr lang="en-GB" sz="1100" dirty="0"/>
+                        <a:t>}}</a:t>
+                      </a:r>
+                      <a:endParaRPr sz="1100" dirty="0">
+                        <a:latin typeface="Roboto" panose="02000000000000000000" pitchFamily="2" charset="0"/>
+                        <a:ea typeface="Roboto" panose="02000000000000000000" pitchFamily="2" charset="0"/>
+                        <a:cs typeface="Roboto" panose="02000000000000000000" pitchFamily="2" charset="0"/>
+                      </a:endParaRPr>
+                    </a:p>
+                  </a:txBody>
+                  <a:tcPr marL="0" marR="0" marT="49201" marB="0" anchor="ctr">
+                    <a:lnL w="6350">
+                      <a:solidFill>
+                        <a:srgbClr val="000000"/>
+                      </a:solidFill>
+                      <a:prstDash val="solid"/>
+                    </a:lnL>
+                    <a:lnR w="6350">
+                      <a:solidFill>
+                        <a:srgbClr val="000000"/>
+                      </a:solidFill>
+                      <a:prstDash val="solid"/>
+                    </a:lnR>
+                    <a:lnT w="6350">
+                      <a:solidFill>
+                        <a:srgbClr val="000000"/>
+                      </a:solidFill>
+                      <a:prstDash val="solid"/>
+                    </a:lnT>
+                    <a:lnB w="6350">
+                      <a:solidFill>
+                        <a:srgbClr val="000000"/>
+                      </a:solidFill>
+                      <a:prstDash val="solid"/>
+                    </a:lnB>
+                  </a:tcPr>
+                </a:tc>
+                <a:tc>
+                  <a:txBody>
+                    <a:bodyPr/>
+                    <a:lstStyle/>
+                    <a:p>
+                      <a:pPr algn="ctr">
+                        <a:lnSpc>
+                          <a:spcPct val="100000"/>
+                        </a:lnSpc>
+                        <a:spcBef>
+                          <a:spcPts val="235"/>
+                        </a:spcBef>
+                      </a:pPr>
+                      <a:r>
+                        <a:rPr lang="en-GB" sz="1100" dirty="0"/>
+                        <a:t>{{</a:t>
+                      </a:r>
+                      <a:r>
+                        <a:rPr lang="en-GB" sz="1100" dirty="0" err="1"/>
+                        <a:t>tx_wavelength_min</a:t>
+                      </a:r>
+                      <a:r>
+                        <a:rPr lang="en-GB" sz="1100" dirty="0"/>
+                        <a:t>}}</a:t>
+                      </a:r>
+                      <a:endParaRPr sz="1100" dirty="0">
+                        <a:latin typeface="Roboto" panose="02000000000000000000" pitchFamily="2" charset="0"/>
+                        <a:ea typeface="Roboto" panose="02000000000000000000" pitchFamily="2" charset="0"/>
+                        <a:cs typeface="Roboto" panose="02000000000000000000" pitchFamily="2" charset="0"/>
+                      </a:endParaRPr>
+                    </a:p>
+                  </a:txBody>
+                  <a:tcPr marL="0" marR="0" marT="37298" marB="0" anchor="ctr">
+                    <a:lnL w="6350">
+                      <a:solidFill>
+                        <a:srgbClr val="000000"/>
+                      </a:solidFill>
+                      <a:prstDash val="solid"/>
+                    </a:lnL>
+                    <a:lnR w="6350">
+                      <a:solidFill>
+                        <a:srgbClr val="000000"/>
+                      </a:solidFill>
+                      <a:prstDash val="solid"/>
+                    </a:lnR>
+                    <a:lnT w="6350">
+                      <a:solidFill>
+                        <a:srgbClr val="000000"/>
+                      </a:solidFill>
+                      <a:prstDash val="solid"/>
+                    </a:lnT>
+                    <a:lnB w="6350">
+                      <a:solidFill>
+                        <a:srgbClr val="000000"/>
+                      </a:solidFill>
+                      <a:prstDash val="solid"/>
+                    </a:lnB>
+                  </a:tcPr>
+                </a:tc>
+                <a:tc>
+                  <a:txBody>
+                    <a:bodyPr/>
+                    <a:lstStyle/>
+                    <a:p>
+                      <a:pPr algn="ctr">
+                        <a:lnSpc>
+                          <a:spcPct val="100000"/>
+                        </a:lnSpc>
+                        <a:spcBef>
+                          <a:spcPts val="235"/>
+                        </a:spcBef>
+                      </a:pPr>
+                      <a:r>
+                        <a:rPr lang="en-GB" sz="1100" dirty="0"/>
+                        <a:t>{{</a:t>
+                      </a:r>
+                      <a:r>
+                        <a:rPr lang="en-GB" sz="1100" dirty="0" err="1"/>
+                        <a:t>tx_wavelength_typical</a:t>
+                      </a:r>
+                      <a:r>
+                        <a:rPr lang="en-GB" sz="1100" dirty="0"/>
+                        <a:t>}}</a:t>
+                      </a:r>
+                      <a:endParaRPr sz="1100" dirty="0">
+                        <a:latin typeface="Roboto" panose="02000000000000000000" pitchFamily="2" charset="0"/>
+                        <a:ea typeface="Roboto" panose="02000000000000000000" pitchFamily="2" charset="0"/>
+                        <a:cs typeface="Roboto" panose="02000000000000000000" pitchFamily="2" charset="0"/>
+                      </a:endParaRPr>
+                    </a:p>
+                  </a:txBody>
+                  <a:tcPr marL="0" marR="0" marT="37298" marB="0" anchor="ctr">
+                    <a:lnL w="6350">
+                      <a:solidFill>
+                        <a:srgbClr val="000000"/>
+                      </a:solidFill>
+                      <a:prstDash val="solid"/>
+                    </a:lnL>
+                    <a:lnR w="6350">
+                      <a:solidFill>
+                        <a:srgbClr val="000000"/>
+                      </a:solidFill>
+                      <a:prstDash val="solid"/>
+                    </a:lnR>
+                    <a:lnT w="6350">
+                      <a:solidFill>
+                        <a:srgbClr val="000000"/>
+                      </a:solidFill>
+                      <a:prstDash val="solid"/>
+                    </a:lnT>
+                    <a:lnB w="6350">
+                      <a:solidFill>
+                        <a:srgbClr val="000000"/>
+                      </a:solidFill>
+                      <a:prstDash val="solid"/>
+                    </a:lnB>
+                  </a:tcPr>
+                </a:tc>
+                <a:tc>
+                  <a:txBody>
+                    <a:bodyPr/>
+                    <a:lstStyle/>
+                    <a:p>
+                      <a:pPr algn="ctr">
+                        <a:lnSpc>
+                          <a:spcPct val="100000"/>
+                        </a:lnSpc>
+                        <a:spcBef>
+                          <a:spcPts val="235"/>
+                        </a:spcBef>
+                      </a:pPr>
+                      <a:r>
+                        <a:rPr lang="en-GB" sz="1100" dirty="0"/>
+                        <a:t>{{</a:t>
+                      </a:r>
+                      <a:r>
+                        <a:rPr lang="en-GB" sz="1100" dirty="0" err="1"/>
+                        <a:t>tx_wavelength_max</a:t>
+                      </a:r>
+                      <a:r>
+                        <a:rPr lang="en-GB" sz="1100" dirty="0"/>
+                        <a:t>}}</a:t>
+                      </a:r>
+                      <a:endParaRPr sz="1100" dirty="0">
+                        <a:latin typeface="Roboto" panose="02000000000000000000" pitchFamily="2" charset="0"/>
+                        <a:ea typeface="Roboto" panose="02000000000000000000" pitchFamily="2" charset="0"/>
+                        <a:cs typeface="Roboto" panose="02000000000000000000" pitchFamily="2" charset="0"/>
+                      </a:endParaRPr>
+                    </a:p>
+                  </a:txBody>
+                  <a:tcPr marL="0" marR="0" marT="37298" marB="0" anchor="ctr">
+                    <a:lnL w="6350">
+                      <a:solidFill>
+                        <a:srgbClr val="000000"/>
+                      </a:solidFill>
+                      <a:prstDash val="solid"/>
+                    </a:lnL>
+                    <a:lnR w="6350">
+                      <a:solidFill>
+                        <a:srgbClr val="000000"/>
+                      </a:solidFill>
+                      <a:prstDash val="solid"/>
+                    </a:lnR>
+                    <a:lnT w="6350">
+                      <a:solidFill>
+                        <a:srgbClr val="000000"/>
+                      </a:solidFill>
+                      <a:prstDash val="solid"/>
+                    </a:lnT>
+                    <a:lnB w="6350">
+                      <a:solidFill>
+                        <a:srgbClr val="000000"/>
+                      </a:solidFill>
+                      <a:prstDash val="solid"/>
+                    </a:lnB>
+                  </a:tcPr>
+                </a:tc>
+                <a:tc>
+                  <a:txBody>
+                    <a:bodyPr/>
+                    <a:lstStyle/>
+                    <a:p>
+                      <a:pPr marL="635" algn="ctr">
+                        <a:lnSpc>
+                          <a:spcPct val="100000"/>
+                        </a:lnSpc>
+                        <a:spcBef>
+                          <a:spcPts val="310"/>
+                        </a:spcBef>
+                      </a:pPr>
+                      <a:r>
+                        <a:rPr lang="en-GB" sz="1100" dirty="0"/>
+                        <a:t>{{</a:t>
+                      </a:r>
+                      <a:r>
+                        <a:rPr lang="en-GB" sz="1100" dirty="0" err="1"/>
+                        <a:t>tx_wavelength_unit</a:t>
+                      </a:r>
+                      <a:r>
+                        <a:rPr lang="en-GB" sz="1100" dirty="0"/>
+                        <a:t>}}</a:t>
+                      </a:r>
+                      <a:endParaRPr sz="1100" dirty="0">
+                        <a:latin typeface="Roboto" panose="02000000000000000000" pitchFamily="2" charset="0"/>
+                        <a:ea typeface="Roboto" panose="02000000000000000000" pitchFamily="2" charset="0"/>
+                        <a:cs typeface="Roboto" panose="02000000000000000000" pitchFamily="2" charset="0"/>
+                      </a:endParaRPr>
+                    </a:p>
+                  </a:txBody>
+                  <a:tcPr marL="0" marR="0" marT="49201" marB="0" anchor="ctr">
+                    <a:lnL w="6350">
+                      <a:solidFill>
+                        <a:srgbClr val="000000"/>
+                      </a:solidFill>
+                      <a:prstDash val="solid"/>
+                    </a:lnL>
+                    <a:lnR w="6350">
+                      <a:solidFill>
+                        <a:srgbClr val="000000"/>
+                      </a:solidFill>
+                      <a:prstDash val="solid"/>
+                    </a:lnR>
+                    <a:lnT w="6350">
+                      <a:solidFill>
+                        <a:srgbClr val="000000"/>
+                      </a:solidFill>
+                      <a:prstDash val="solid"/>
+                    </a:lnT>
+                    <a:lnB w="6350">
+                      <a:solidFill>
+                        <a:srgbClr val="000000"/>
+                      </a:solidFill>
+                      <a:prstDash val="solid"/>
+                    </a:lnB>
+                  </a:tcPr>
+                </a:tc>
+                <a:tc>
+                  <a:txBody>
+                    <a:bodyPr/>
+                    <a:lstStyle/>
+                    <a:p>
+                      <a:pPr>
+                        <a:lnSpc>
+                          <a:spcPct val="100000"/>
+                        </a:lnSpc>
+                      </a:pPr>
+                      <a:endParaRPr sz="1100">
+                        <a:latin typeface="Roboto" panose="02000000000000000000" pitchFamily="2" charset="0"/>
+                        <a:ea typeface="Roboto" panose="02000000000000000000" pitchFamily="2" charset="0"/>
+                        <a:cs typeface="Roboto" panose="02000000000000000000" pitchFamily="2" charset="0"/>
+                      </a:endParaRPr>
+                    </a:p>
+                  </a:txBody>
+                  <a:tcPr marL="0" marR="0" marT="0" marB="0" anchor="ctr">
+                    <a:lnL w="6350">
+                      <a:solidFill>
+                        <a:srgbClr val="000000"/>
+                      </a:solidFill>
+                      <a:prstDash val="solid"/>
+                    </a:lnL>
+                    <a:lnR w="6350">
+                      <a:solidFill>
+                        <a:srgbClr val="000000"/>
+                      </a:solidFill>
+                      <a:prstDash val="solid"/>
+                    </a:lnR>
+                    <a:lnT w="6350">
+                      <a:solidFill>
+                        <a:srgbClr val="000000"/>
+                      </a:solidFill>
+                      <a:prstDash val="solid"/>
+                    </a:lnT>
+                    <a:lnB w="6350">
+                      <a:solidFill>
+                        <a:srgbClr val="000000"/>
+                      </a:solidFill>
+                      <a:prstDash val="solid"/>
+                    </a:lnB>
+                  </a:tcPr>
+                </a:tc>
+                <a:extLst>
+                  <a:ext uri="{0D108BD9-81ED-4DB2-BD59-A6C34878D82A}">
+                    <a16:rowId xmlns:a16="http://schemas.microsoft.com/office/drawing/2014/main" val="10003"/>
+                  </a:ext>
+                </a:extLst>
+              </a:tr>
+              <a:tr h="634489">
+                <a:tc>
+                  <a:txBody>
+                    <a:bodyPr/>
+                    <a:lstStyle/>
+                    <a:p>
+                      <a:pPr marL="67945" algn="l">
+                        <a:lnSpc>
+                          <a:spcPct val="100000"/>
+                        </a:lnSpc>
+                        <a:spcBef>
+                          <a:spcPts val="300"/>
+                        </a:spcBef>
+                      </a:pPr>
+                      <a:r>
+                        <a:rPr lang="en-GB" sz="1100" dirty="0"/>
+                        <a:t>{{</a:t>
+                      </a:r>
+                      <a:r>
+                        <a:rPr lang="en-GB" sz="1100" dirty="0" err="1"/>
+                        <a:t>tx_spectral_width</a:t>
+                      </a:r>
+                      <a:r>
+                        <a:rPr lang="en-GB" sz="1100" dirty="0"/>
+                        <a:t>}}</a:t>
+                      </a:r>
+                      <a:endParaRPr sz="1100" dirty="0">
+                        <a:latin typeface="Roboto" panose="02000000000000000000" pitchFamily="2" charset="0"/>
+                        <a:ea typeface="Roboto" panose="02000000000000000000" pitchFamily="2" charset="0"/>
+                        <a:cs typeface="Roboto" panose="02000000000000000000" pitchFamily="2" charset="0"/>
+                      </a:endParaRPr>
+                    </a:p>
+                  </a:txBody>
+                  <a:tcPr marL="0" marR="0" marT="47614" marB="0" anchor="ctr">
+                    <a:lnL w="6350">
+                      <a:solidFill>
+                        <a:srgbClr val="000000"/>
+                      </a:solidFill>
+                      <a:prstDash val="solid"/>
+                    </a:lnL>
+                    <a:lnR w="6350">
+                      <a:solidFill>
+                        <a:srgbClr val="000000"/>
+                      </a:solidFill>
+                      <a:prstDash val="solid"/>
+                    </a:lnR>
+                    <a:lnT w="6350">
+                      <a:solidFill>
+                        <a:srgbClr val="000000"/>
+                      </a:solidFill>
+                      <a:prstDash val="solid"/>
+                    </a:lnT>
+                    <a:lnB w="6350">
+                      <a:solidFill>
+                        <a:srgbClr val="000000"/>
+                      </a:solidFill>
+                      <a:prstDash val="solid"/>
+                    </a:lnB>
+                  </a:tcPr>
+                </a:tc>
+                <a:tc>
+                  <a:txBody>
+                    <a:bodyPr/>
+                    <a:lstStyle/>
+                    <a:p>
+                      <a:pPr algn="ctr">
+                        <a:lnSpc>
+                          <a:spcPct val="100000"/>
+                        </a:lnSpc>
+                        <a:spcBef>
+                          <a:spcPts val="300"/>
+                        </a:spcBef>
+                      </a:pPr>
+                      <a:r>
+                        <a:rPr lang="en-GB" sz="1100" dirty="0"/>
+                        <a:t>{{</a:t>
+                      </a:r>
+                      <a:r>
+                        <a:rPr lang="en-GB" sz="1100" dirty="0" err="1"/>
+                        <a:t>tx_spectral_width_symbol</a:t>
+                      </a:r>
+                      <a:r>
+                        <a:rPr lang="en-GB" sz="1100" dirty="0"/>
+                        <a:t>}}</a:t>
+                      </a:r>
+                      <a:endParaRPr sz="1100" dirty="0">
+                        <a:latin typeface="Roboto" panose="02000000000000000000" pitchFamily="2" charset="0"/>
+                        <a:ea typeface="Roboto" panose="02000000000000000000" pitchFamily="2" charset="0"/>
+                        <a:cs typeface="Roboto" panose="02000000000000000000" pitchFamily="2" charset="0"/>
+                      </a:endParaRPr>
+                    </a:p>
+                  </a:txBody>
+                  <a:tcPr marL="0" marR="0" marT="47614" marB="0" anchor="ctr">
+                    <a:lnL w="6350">
+                      <a:solidFill>
+                        <a:srgbClr val="000000"/>
+                      </a:solidFill>
+                      <a:prstDash val="solid"/>
+                    </a:lnL>
+                    <a:lnR w="6350">
+                      <a:solidFill>
+                        <a:srgbClr val="000000"/>
+                      </a:solidFill>
+                      <a:prstDash val="solid"/>
+                    </a:lnR>
+                    <a:lnT w="6350">
+                      <a:solidFill>
+                        <a:srgbClr val="000000"/>
+                      </a:solidFill>
+                      <a:prstDash val="solid"/>
+                    </a:lnT>
+                    <a:lnB w="6350">
+                      <a:solidFill>
+                        <a:srgbClr val="000000"/>
+                      </a:solidFill>
+                      <a:prstDash val="solid"/>
+                    </a:lnB>
+                  </a:tcPr>
+                </a:tc>
+                <a:tc>
+                  <a:txBody>
+                    <a:bodyPr/>
+                    <a:lstStyle/>
+                    <a:p>
+                      <a:pPr algn="ctr">
+                        <a:lnSpc>
+                          <a:spcPct val="100000"/>
+                        </a:lnSpc>
+                        <a:spcBef>
+                          <a:spcPts val="300"/>
+                        </a:spcBef>
+                      </a:pPr>
+                      <a:endParaRPr lang="en-GB" sz="1100" dirty="0"/>
+                    </a:p>
+                    <a:p>
+                      <a:pPr algn="ctr">
+                        <a:lnSpc>
+                          <a:spcPct val="100000"/>
+                        </a:lnSpc>
+                      </a:pPr>
+                      <a:endParaRPr sz="1100" dirty="0">
+                        <a:latin typeface="Roboto" panose="02000000000000000000" pitchFamily="2" charset="0"/>
+                        <a:ea typeface="Roboto" panose="02000000000000000000" pitchFamily="2" charset="0"/>
+                        <a:cs typeface="Roboto" panose="02000000000000000000" pitchFamily="2" charset="0"/>
+                      </a:endParaRPr>
+                    </a:p>
+                  </a:txBody>
+                  <a:tcPr marL="0" marR="0" marT="0" marB="0" anchor="ctr">
+                    <a:lnL w="6350">
+                      <a:solidFill>
+                        <a:srgbClr val="000000"/>
+                      </a:solidFill>
+                      <a:prstDash val="solid"/>
+                    </a:lnL>
+                    <a:lnR w="6350">
+                      <a:solidFill>
+                        <a:srgbClr val="000000"/>
+                      </a:solidFill>
+                      <a:prstDash val="solid"/>
+                    </a:lnR>
+                    <a:lnT w="6350">
+                      <a:solidFill>
+                        <a:srgbClr val="000000"/>
+                      </a:solidFill>
+                      <a:prstDash val="solid"/>
+                    </a:lnT>
+                    <a:lnB w="6350">
+                      <a:solidFill>
+                        <a:srgbClr val="000000"/>
+                      </a:solidFill>
+                      <a:prstDash val="solid"/>
+                    </a:lnB>
+                  </a:tcPr>
+                </a:tc>
+                <a:tc>
+                  <a:txBody>
+                    <a:bodyPr/>
+                    <a:lstStyle/>
+                    <a:p>
+                      <a:pPr algn="ctr">
+                        <a:lnSpc>
+                          <a:spcPct val="100000"/>
+                        </a:lnSpc>
+                        <a:spcBef>
+                          <a:spcPts val="300"/>
+                        </a:spcBef>
+                      </a:pPr>
+                      <a:endParaRPr lang="en-GB" sz="1100" dirty="0"/>
+                    </a:p>
+                    <a:p>
+                      <a:pPr algn="ctr">
+                        <a:lnSpc>
+                          <a:spcPct val="100000"/>
+                        </a:lnSpc>
+                      </a:pPr>
+                      <a:endParaRPr sz="1100" dirty="0">
+                        <a:latin typeface="Roboto" panose="02000000000000000000" pitchFamily="2" charset="0"/>
+                        <a:ea typeface="Roboto" panose="02000000000000000000" pitchFamily="2" charset="0"/>
+                        <a:cs typeface="Roboto" panose="02000000000000000000" pitchFamily="2" charset="0"/>
+                      </a:endParaRPr>
+                    </a:p>
+                  </a:txBody>
+                  <a:tcPr marL="0" marR="0" marT="0" marB="0" anchor="ctr">
+                    <a:lnL w="6350">
+                      <a:solidFill>
+                        <a:srgbClr val="000000"/>
+                      </a:solidFill>
+                      <a:prstDash val="solid"/>
+                    </a:lnL>
+                    <a:lnR w="6350">
+                      <a:solidFill>
+                        <a:srgbClr val="000000"/>
+                      </a:solidFill>
+                      <a:prstDash val="solid"/>
+                    </a:lnR>
+                    <a:lnT w="6350">
+                      <a:solidFill>
+                        <a:srgbClr val="000000"/>
+                      </a:solidFill>
+                      <a:prstDash val="solid"/>
+                    </a:lnT>
+                    <a:lnB w="6350">
+                      <a:solidFill>
+                        <a:srgbClr val="000000"/>
+                      </a:solidFill>
+                      <a:prstDash val="solid"/>
+                    </a:lnB>
+                  </a:tcPr>
+                </a:tc>
+                <a:tc>
+                  <a:txBody>
+                    <a:bodyPr/>
+                    <a:lstStyle/>
+                    <a:p>
+                      <a:pPr marL="635" algn="ctr">
+                        <a:lnSpc>
+                          <a:spcPct val="100000"/>
+                        </a:lnSpc>
+                        <a:spcBef>
+                          <a:spcPts val="300"/>
+                        </a:spcBef>
+                      </a:pPr>
+                      <a:r>
+                        <a:rPr lang="en-GB" sz="1100" dirty="0"/>
+                        <a:t>{{</a:t>
+                      </a:r>
+                      <a:r>
+                        <a:rPr lang="en-GB" sz="1100" dirty="0" err="1"/>
+                        <a:t>tx_spectral_max</a:t>
+                      </a:r>
+                      <a:r>
+                        <a:rPr lang="en-GB" sz="1100" dirty="0"/>
+                        <a:t>}}</a:t>
+                      </a:r>
+                      <a:endParaRPr sz="1100" dirty="0">
+                        <a:latin typeface="Roboto" panose="02000000000000000000" pitchFamily="2" charset="0"/>
+                        <a:ea typeface="Roboto" panose="02000000000000000000" pitchFamily="2" charset="0"/>
+                        <a:cs typeface="Roboto" panose="02000000000000000000" pitchFamily="2" charset="0"/>
+                      </a:endParaRPr>
+                    </a:p>
+                  </a:txBody>
+                  <a:tcPr marL="0" marR="0" marT="47614" marB="0" anchor="ctr">
+                    <a:lnL w="6350">
+                      <a:solidFill>
+                        <a:srgbClr val="000000"/>
+                      </a:solidFill>
+                      <a:prstDash val="solid"/>
+                    </a:lnL>
+                    <a:lnR w="6350">
+                      <a:solidFill>
+                        <a:srgbClr val="000000"/>
+                      </a:solidFill>
+                      <a:prstDash val="solid"/>
+                    </a:lnR>
+                    <a:lnT w="6350">
+                      <a:solidFill>
+                        <a:srgbClr val="000000"/>
+                      </a:solidFill>
+                      <a:prstDash val="solid"/>
+                    </a:lnT>
+                    <a:lnB w="6350">
+                      <a:solidFill>
+                        <a:srgbClr val="000000"/>
+                      </a:solidFill>
+                      <a:prstDash val="solid"/>
+                    </a:lnB>
+                  </a:tcPr>
+                </a:tc>
+                <a:tc>
+                  <a:txBody>
+                    <a:bodyPr/>
+                    <a:lstStyle/>
+                    <a:p>
+                      <a:pPr marL="635" algn="ctr">
+                        <a:lnSpc>
+                          <a:spcPct val="100000"/>
+                        </a:lnSpc>
+                        <a:spcBef>
+                          <a:spcPts val="300"/>
+                        </a:spcBef>
+                      </a:pPr>
+                      <a:r>
+                        <a:rPr lang="en-GB" sz="1100" dirty="0"/>
+                        <a:t>{{</a:t>
+                      </a:r>
+                      <a:r>
+                        <a:rPr lang="en-GB" sz="1100" dirty="0" err="1"/>
+                        <a:t>tx_spectral_unit</a:t>
+                      </a:r>
+                      <a:r>
+                        <a:rPr lang="en-GB" sz="1100" dirty="0"/>
+                        <a:t>}}</a:t>
+                      </a:r>
+                      <a:endParaRPr sz="1100" dirty="0">
+                        <a:latin typeface="Roboto" panose="02000000000000000000" pitchFamily="2" charset="0"/>
+                        <a:ea typeface="Roboto" panose="02000000000000000000" pitchFamily="2" charset="0"/>
+                        <a:cs typeface="Roboto" panose="02000000000000000000" pitchFamily="2" charset="0"/>
+                      </a:endParaRPr>
+                    </a:p>
+                  </a:txBody>
+                  <a:tcPr marL="0" marR="0" marT="47614" marB="0" anchor="ctr">
+                    <a:lnL w="6350">
+                      <a:solidFill>
+                        <a:srgbClr val="000000"/>
+                      </a:solidFill>
+                      <a:prstDash val="solid"/>
+                    </a:lnL>
+                    <a:lnR w="6350">
+                      <a:solidFill>
+                        <a:srgbClr val="000000"/>
+                      </a:solidFill>
+                      <a:prstDash val="solid"/>
+                    </a:lnR>
+                    <a:lnT w="6350">
+                      <a:solidFill>
+                        <a:srgbClr val="000000"/>
+                      </a:solidFill>
+                      <a:prstDash val="solid"/>
+                    </a:lnT>
+                    <a:lnB w="6350">
+                      <a:solidFill>
+                        <a:srgbClr val="000000"/>
+                      </a:solidFill>
+                      <a:prstDash val="solid"/>
+                    </a:lnB>
+                  </a:tcPr>
+                </a:tc>
+                <a:tc>
+                  <a:txBody>
+                    <a:bodyPr/>
+                    <a:lstStyle/>
+                    <a:p>
+                      <a:pPr>
+                        <a:lnSpc>
+                          <a:spcPct val="100000"/>
+                        </a:lnSpc>
+                      </a:pPr>
+                      <a:endParaRPr sz="1100">
+                        <a:latin typeface="Roboto" panose="02000000000000000000" pitchFamily="2" charset="0"/>
+                        <a:ea typeface="Roboto" panose="02000000000000000000" pitchFamily="2" charset="0"/>
+                        <a:cs typeface="Roboto" panose="02000000000000000000" pitchFamily="2" charset="0"/>
+                      </a:endParaRPr>
+                    </a:p>
+                  </a:txBody>
+                  <a:tcPr marL="0" marR="0" marT="0" marB="0" anchor="ctr">
+                    <a:lnL w="6350">
+                      <a:solidFill>
+                        <a:srgbClr val="000000"/>
+                      </a:solidFill>
+                      <a:prstDash val="solid"/>
+                    </a:lnL>
+                    <a:lnR w="6350">
+                      <a:solidFill>
+                        <a:srgbClr val="000000"/>
+                      </a:solidFill>
+                      <a:prstDash val="solid"/>
+                    </a:lnR>
+                    <a:lnT w="6350">
+                      <a:solidFill>
+                        <a:srgbClr val="000000"/>
+                      </a:solidFill>
+                      <a:prstDash val="solid"/>
+                    </a:lnT>
+                    <a:lnB w="6350">
+                      <a:solidFill>
+                        <a:srgbClr val="000000"/>
+                      </a:solidFill>
+                      <a:prstDash val="solid"/>
+                    </a:lnB>
+                  </a:tcPr>
+                </a:tc>
+                <a:extLst>
+                  <a:ext uri="{0D108BD9-81ED-4DB2-BD59-A6C34878D82A}">
+                    <a16:rowId xmlns:a16="http://schemas.microsoft.com/office/drawing/2014/main" val="10004"/>
+                  </a:ext>
+                </a:extLst>
+              </a:tr>
+              <a:tr h="0">
+                <a:tc>
+                  <a:txBody>
+                    <a:bodyPr/>
+                    <a:lstStyle/>
+                    <a:p>
+                      <a:pPr marL="67945" algn="l">
+                        <a:lnSpc>
+                          <a:spcPct val="100000"/>
+                        </a:lnSpc>
+                        <a:spcBef>
+                          <a:spcPts val="300"/>
+                        </a:spcBef>
+                      </a:pPr>
+                      <a:r>
+                        <a:rPr lang="en-GB" sz="1100" dirty="0"/>
+                        <a:t>{{</a:t>
+                      </a:r>
+                      <a:r>
+                        <a:rPr lang="en-GB" sz="1100" dirty="0" err="1"/>
+                        <a:t>tx_er</a:t>
+                      </a:r>
+                      <a:r>
+                        <a:rPr lang="en-GB" sz="1100" dirty="0"/>
+                        <a:t>}}</a:t>
+                      </a:r>
+                      <a:endParaRPr sz="1100" dirty="0">
+                        <a:latin typeface="Roboto" panose="02000000000000000000" pitchFamily="2" charset="0"/>
+                        <a:ea typeface="Roboto" panose="02000000000000000000" pitchFamily="2" charset="0"/>
+                        <a:cs typeface="Roboto" panose="02000000000000000000" pitchFamily="2" charset="0"/>
+                      </a:endParaRPr>
+                    </a:p>
+                  </a:txBody>
+                  <a:tcPr marL="0" marR="0" marT="47614" marB="0" anchor="ctr">
+                    <a:lnL w="6350">
+                      <a:solidFill>
+                        <a:srgbClr val="000000"/>
+                      </a:solidFill>
+                      <a:prstDash val="solid"/>
+                    </a:lnL>
+                    <a:lnR w="6350">
+                      <a:solidFill>
+                        <a:srgbClr val="000000"/>
+                      </a:solidFill>
+                      <a:prstDash val="solid"/>
+                    </a:lnR>
+                    <a:lnT w="6350">
+                      <a:solidFill>
+                        <a:srgbClr val="000000"/>
+                      </a:solidFill>
+                      <a:prstDash val="solid"/>
+                    </a:lnT>
+                    <a:lnB w="6350">
+                      <a:solidFill>
+                        <a:srgbClr val="000000"/>
+                      </a:solidFill>
+                      <a:prstDash val="solid"/>
+                    </a:lnB>
+                  </a:tcPr>
+                </a:tc>
+                <a:tc>
+                  <a:txBody>
+                    <a:bodyPr/>
+                    <a:lstStyle/>
+                    <a:p>
+                      <a:pPr algn="ctr">
+                        <a:lnSpc>
+                          <a:spcPct val="100000"/>
+                        </a:lnSpc>
+                        <a:spcBef>
+                          <a:spcPts val="300"/>
+                        </a:spcBef>
+                      </a:pPr>
+                      <a:endParaRPr sz="1100" dirty="0">
+                        <a:latin typeface="Roboto" panose="02000000000000000000" pitchFamily="2" charset="0"/>
+                        <a:ea typeface="Roboto" panose="02000000000000000000" pitchFamily="2" charset="0"/>
+                        <a:cs typeface="Roboto" panose="02000000000000000000" pitchFamily="2" charset="0"/>
+                      </a:endParaRPr>
+                    </a:p>
+                  </a:txBody>
+                  <a:tcPr marL="0" marR="0" marT="47614" marB="0" anchor="ctr">
+                    <a:lnL w="6350">
+                      <a:solidFill>
+                        <a:srgbClr val="000000"/>
+                      </a:solidFill>
+                      <a:prstDash val="solid"/>
+                    </a:lnL>
+                    <a:lnR w="6350">
+                      <a:solidFill>
+                        <a:srgbClr val="000000"/>
+                      </a:solidFill>
+                      <a:prstDash val="solid"/>
+                    </a:lnR>
+                    <a:lnT w="6350">
+                      <a:solidFill>
+                        <a:srgbClr val="000000"/>
+                      </a:solidFill>
+                      <a:prstDash val="solid"/>
+                    </a:lnT>
+                    <a:lnB w="6350">
+                      <a:solidFill>
+                        <a:srgbClr val="000000"/>
+                      </a:solidFill>
+                      <a:prstDash val="solid"/>
+                    </a:lnB>
+                  </a:tcPr>
+                </a:tc>
+                <a:tc>
+                  <a:txBody>
+                    <a:bodyPr/>
+                    <a:lstStyle/>
+                    <a:p>
+                      <a:pPr algn="ctr">
+                        <a:lnSpc>
+                          <a:spcPct val="100000"/>
+                        </a:lnSpc>
+                        <a:spcBef>
+                          <a:spcPts val="300"/>
+                        </a:spcBef>
+                      </a:pPr>
+                      <a:r>
+                        <a:rPr lang="en-GB" sz="1100" dirty="0"/>
+                        <a:t>{{</a:t>
+                      </a:r>
+                      <a:r>
+                        <a:rPr lang="en-GB" sz="1100" dirty="0" err="1"/>
+                        <a:t>tx_er_min</a:t>
+                      </a:r>
+                      <a:r>
+                        <a:rPr lang="en-GB" sz="1100" dirty="0"/>
+                        <a:t>}}</a:t>
+                      </a:r>
+                      <a:endParaRPr sz="1100" dirty="0">
+                        <a:latin typeface="Roboto" panose="02000000000000000000" pitchFamily="2" charset="0"/>
+                        <a:ea typeface="Roboto" panose="02000000000000000000" pitchFamily="2" charset="0"/>
+                        <a:cs typeface="Roboto" panose="02000000000000000000" pitchFamily="2" charset="0"/>
+                      </a:endParaRPr>
+                    </a:p>
+                  </a:txBody>
+                  <a:tcPr marL="0" marR="0" marT="47614" marB="0" anchor="ctr">
+                    <a:lnL w="6350">
+                      <a:solidFill>
+                        <a:srgbClr val="000000"/>
+                      </a:solidFill>
+                      <a:prstDash val="solid"/>
+                    </a:lnL>
+                    <a:lnR w="6350">
+                      <a:solidFill>
+                        <a:srgbClr val="000000"/>
+                      </a:solidFill>
+                      <a:prstDash val="solid"/>
+                    </a:lnR>
+                    <a:lnT w="6350">
+                      <a:solidFill>
+                        <a:srgbClr val="000000"/>
+                      </a:solidFill>
+                      <a:prstDash val="solid"/>
+                    </a:lnT>
+                    <a:lnB w="6350">
+                      <a:solidFill>
+                        <a:srgbClr val="000000"/>
+                      </a:solidFill>
+                      <a:prstDash val="solid"/>
+                    </a:lnB>
+                  </a:tcPr>
+                </a:tc>
+                <a:tc>
+                  <a:txBody>
+                    <a:bodyPr/>
+                    <a:lstStyle/>
+                    <a:p>
                       <a:pPr marL="0" marR="0" lvl="0" indent="0" algn="ctr" defTabSz="914400" eaLnBrk="1" fontAlgn="auto" latinLnBrk="0" hangingPunct="1">
                         <a:lnSpc>
                           <a:spcPct val="100000"/>
@@ -9297,21 +10477,8 @@
                       </a:pPr>
                       <a:r>
                         <a:rPr lang="en-GB" sz="1100" dirty="0"/>
-                        <a:t>{{</a:t>
-                      </a:r>
-                      <a:r>
-                        <a:rPr lang="en-GB" sz="1100" dirty="0" err="1"/>
-                        <a:t>tx_power_typical</a:t>
-                      </a:r>
-                      <a:r>
-                        <a:rPr lang="en-GB" sz="1100" dirty="0"/>
-                        <a:t>}}</a:t>
-                      </a:r>
-                      <a:endParaRPr lang="en-GB" sz="1100" dirty="0">
-                        <a:latin typeface="Roboto" panose="02000000000000000000" pitchFamily="2" charset="0"/>
-                        <a:ea typeface="Roboto" panose="02000000000000000000" pitchFamily="2" charset="0"/>
-                        <a:cs typeface="Roboto" panose="02000000000000000000" pitchFamily="2" charset="0"/>
-                      </a:endParaRPr>
+                        <a:t>  </a:t>
+                      </a:r>
                     </a:p>
                     <a:p>
                       <a:pPr algn="ctr">
@@ -9327,1208 +10494,6 @@
                     </a:p>
                   </a:txBody>
                   <a:tcPr marL="0" marR="0" marT="0" marB="0" anchor="ctr">
-                    <a:lnL w="6350">
-                      <a:solidFill>
-                        <a:srgbClr val="000000"/>
-                      </a:solidFill>
-                      <a:prstDash val="solid"/>
-                    </a:lnL>
-                    <a:lnR w="6350">
-                      <a:solidFill>
-                        <a:srgbClr val="000000"/>
-                      </a:solidFill>
-                      <a:prstDash val="solid"/>
-                    </a:lnR>
-                    <a:lnT w="6350">
-                      <a:solidFill>
-                        <a:srgbClr val="000000"/>
-                      </a:solidFill>
-                      <a:prstDash val="solid"/>
-                    </a:lnT>
-                    <a:lnB w="6350">
-                      <a:solidFill>
-                        <a:srgbClr val="000000"/>
-                      </a:solidFill>
-                      <a:prstDash val="solid"/>
-                    </a:lnB>
-                  </a:tcPr>
-                </a:tc>
-                <a:tc>
-                  <a:txBody>
-                    <a:bodyPr/>
-                    <a:lstStyle/>
-                    <a:p>
-                      <a:pPr algn="ctr">
-                        <a:lnSpc>
-                          <a:spcPct val="100000"/>
-                        </a:lnSpc>
-                        <a:spcBef>
-                          <a:spcPts val="305"/>
-                        </a:spcBef>
-                      </a:pPr>
-                      <a:r>
-                        <a:rPr lang="en-GB" sz="1100" dirty="0"/>
-                        <a:t>{{</a:t>
-                      </a:r>
-                      <a:r>
-                        <a:rPr lang="en-GB" sz="1100" dirty="0" err="1"/>
-                        <a:t>tx_power_max</a:t>
-                      </a:r>
-                      <a:r>
-                        <a:rPr lang="en-GB" sz="1100" dirty="0"/>
-                        <a:t>}}</a:t>
-                      </a:r>
-                      <a:endParaRPr sz="1100" dirty="0">
-                        <a:latin typeface="Roboto" panose="02000000000000000000" pitchFamily="2" charset="0"/>
-                        <a:ea typeface="Roboto" panose="02000000000000000000" pitchFamily="2" charset="0"/>
-                        <a:cs typeface="Roboto" panose="02000000000000000000" pitchFamily="2" charset="0"/>
-                      </a:endParaRPr>
-                    </a:p>
-                  </a:txBody>
-                  <a:tcPr marL="0" marR="0" marT="48408" marB="0" anchor="ctr">
-                    <a:lnL w="6350">
-                      <a:solidFill>
-                        <a:srgbClr val="000000"/>
-                      </a:solidFill>
-                      <a:prstDash val="solid"/>
-                    </a:lnL>
-                    <a:lnR w="6350">
-                      <a:solidFill>
-                        <a:srgbClr val="000000"/>
-                      </a:solidFill>
-                      <a:prstDash val="solid"/>
-                    </a:lnR>
-                    <a:lnT w="6350">
-                      <a:solidFill>
-                        <a:srgbClr val="000000"/>
-                      </a:solidFill>
-                      <a:prstDash val="solid"/>
-                    </a:lnT>
-                    <a:lnB w="6350">
-                      <a:solidFill>
-                        <a:srgbClr val="000000"/>
-                      </a:solidFill>
-                      <a:prstDash val="solid"/>
-                    </a:lnB>
-                  </a:tcPr>
-                </a:tc>
-                <a:tc>
-                  <a:txBody>
-                    <a:bodyPr/>
-                    <a:lstStyle/>
-                    <a:p>
-                      <a:pPr marL="635" algn="ctr">
-                        <a:lnSpc>
-                          <a:spcPct val="100000"/>
-                        </a:lnSpc>
-                        <a:spcBef>
-                          <a:spcPts val="305"/>
-                        </a:spcBef>
-                      </a:pPr>
-                      <a:r>
-                        <a:rPr lang="en-GB" sz="1100" dirty="0"/>
-                        <a:t>{{</a:t>
-                      </a:r>
-                      <a:r>
-                        <a:rPr lang="en-GB" sz="1100" dirty="0" err="1"/>
-                        <a:t>tx_power_unit</a:t>
-                      </a:r>
-                      <a:r>
-                        <a:rPr lang="en-GB" sz="1100" dirty="0"/>
-                        <a:t>}}</a:t>
-                      </a:r>
-                      <a:endParaRPr sz="1100" dirty="0">
-                        <a:latin typeface="Roboto" panose="02000000000000000000" pitchFamily="2" charset="0"/>
-                        <a:ea typeface="Roboto" panose="02000000000000000000" pitchFamily="2" charset="0"/>
-                        <a:cs typeface="Roboto" panose="02000000000000000000" pitchFamily="2" charset="0"/>
-                      </a:endParaRPr>
-                    </a:p>
-                  </a:txBody>
-                  <a:tcPr marL="0" marR="0" marT="48408" marB="0" anchor="ctr">
-                    <a:lnL w="6350">
-                      <a:solidFill>
-                        <a:srgbClr val="000000"/>
-                      </a:solidFill>
-                      <a:prstDash val="solid"/>
-                    </a:lnL>
-                    <a:lnR w="6350">
-                      <a:solidFill>
-                        <a:srgbClr val="000000"/>
-                      </a:solidFill>
-                      <a:prstDash val="solid"/>
-                    </a:lnR>
-                    <a:lnT w="6350">
-                      <a:solidFill>
-                        <a:srgbClr val="000000"/>
-                      </a:solidFill>
-                      <a:prstDash val="solid"/>
-                    </a:lnT>
-                    <a:lnB w="6350">
-                      <a:solidFill>
-                        <a:srgbClr val="000000"/>
-                      </a:solidFill>
-                      <a:prstDash val="solid"/>
-                    </a:lnB>
-                  </a:tcPr>
-                </a:tc>
-                <a:tc>
-                  <a:txBody>
-                    <a:bodyPr/>
-                    <a:lstStyle/>
-                    <a:p>
-                      <a:pPr>
-                        <a:lnSpc>
-                          <a:spcPct val="100000"/>
-                        </a:lnSpc>
-                      </a:pPr>
-                      <a:endParaRPr sz="1100">
-                        <a:latin typeface="Roboto" panose="02000000000000000000" pitchFamily="2" charset="0"/>
-                        <a:ea typeface="Roboto" panose="02000000000000000000" pitchFamily="2" charset="0"/>
-                        <a:cs typeface="Roboto" panose="02000000000000000000" pitchFamily="2" charset="0"/>
-                      </a:endParaRPr>
-                    </a:p>
-                  </a:txBody>
-                  <a:tcPr marL="0" marR="0" marT="0" marB="0" anchor="ctr">
-                    <a:lnL w="6350">
-                      <a:solidFill>
-                        <a:srgbClr val="000000"/>
-                      </a:solidFill>
-                      <a:prstDash val="solid"/>
-                    </a:lnL>
-                    <a:lnR w="6350">
-                      <a:solidFill>
-                        <a:srgbClr val="000000"/>
-                      </a:solidFill>
-                      <a:prstDash val="solid"/>
-                    </a:lnR>
-                    <a:lnT w="6350">
-                      <a:solidFill>
-                        <a:srgbClr val="000000"/>
-                      </a:solidFill>
-                      <a:prstDash val="solid"/>
-                    </a:lnT>
-                    <a:lnB w="6350">
-                      <a:solidFill>
-                        <a:srgbClr val="000000"/>
-                      </a:solidFill>
-                      <a:prstDash val="solid"/>
-                    </a:lnB>
-                  </a:tcPr>
-                </a:tc>
-                <a:extLst>
-                  <a:ext uri="{0D108BD9-81ED-4DB2-BD59-A6C34878D82A}">
-                    <a16:rowId xmlns:a16="http://schemas.microsoft.com/office/drawing/2014/main" val="10002"/>
-                  </a:ext>
-                </a:extLst>
-              </a:tr>
-              <a:tr h="385724">
-                <a:tc>
-                  <a:txBody>
-                    <a:bodyPr/>
-                    <a:lstStyle/>
-                    <a:p>
-                      <a:pPr marL="67945" algn="l">
-                        <a:lnSpc>
-                          <a:spcPct val="100000"/>
-                        </a:lnSpc>
-                        <a:spcBef>
-                          <a:spcPts val="310"/>
-                        </a:spcBef>
-                      </a:pPr>
-                      <a:r>
-                        <a:rPr lang="en-GB" sz="1100" dirty="0"/>
-                        <a:t>{{</a:t>
-                      </a:r>
-                      <a:r>
-                        <a:rPr lang="en-GB" sz="1100" dirty="0" err="1"/>
-                        <a:t>tx_wavelength</a:t>
-                      </a:r>
-                      <a:r>
-                        <a:rPr lang="en-GB" sz="1100" dirty="0"/>
-                        <a:t>}}</a:t>
-                      </a:r>
-                      <a:endParaRPr sz="1100" dirty="0">
-                        <a:latin typeface="Roboto" panose="02000000000000000000" pitchFamily="2" charset="0"/>
-                        <a:ea typeface="Roboto" panose="02000000000000000000" pitchFamily="2" charset="0"/>
-                        <a:cs typeface="Roboto" panose="02000000000000000000" pitchFamily="2" charset="0"/>
-                      </a:endParaRPr>
-                    </a:p>
-                  </a:txBody>
-                  <a:tcPr marL="0" marR="0" marT="49201" marB="0" anchor="ctr">
-                    <a:lnL w="6350">
-                      <a:solidFill>
-                        <a:srgbClr val="000000"/>
-                      </a:solidFill>
-                      <a:prstDash val="solid"/>
-                    </a:lnL>
-                    <a:lnR w="6350">
-                      <a:solidFill>
-                        <a:srgbClr val="000000"/>
-                      </a:solidFill>
-                      <a:prstDash val="solid"/>
-                    </a:lnR>
-                    <a:lnT w="6350">
-                      <a:solidFill>
-                        <a:srgbClr val="000000"/>
-                      </a:solidFill>
-                      <a:prstDash val="solid"/>
-                    </a:lnT>
-                    <a:lnB w="6350">
-                      <a:solidFill>
-                        <a:srgbClr val="000000"/>
-                      </a:solidFill>
-                      <a:prstDash val="solid"/>
-                    </a:lnB>
-                  </a:tcPr>
-                </a:tc>
-                <a:tc>
-                  <a:txBody>
-                    <a:bodyPr/>
-                    <a:lstStyle/>
-                    <a:p>
-                      <a:pPr algn="ctr">
-                        <a:lnSpc>
-                          <a:spcPct val="100000"/>
-                        </a:lnSpc>
-                        <a:spcBef>
-                          <a:spcPts val="310"/>
-                        </a:spcBef>
-                      </a:pPr>
-                      <a:r>
-                        <a:rPr lang="en-GB" sz="1100" dirty="0"/>
-                        <a:t>{{</a:t>
-                      </a:r>
-                      <a:r>
-                        <a:rPr lang="en-GB" sz="1100" dirty="0" err="1"/>
-                        <a:t>tx_wavelength_symbol</a:t>
-                      </a:r>
-                      <a:r>
-                        <a:rPr lang="en-GB" sz="1100" dirty="0"/>
-                        <a:t>}}</a:t>
-                      </a:r>
-                      <a:endParaRPr sz="1100" dirty="0">
-                        <a:latin typeface="Roboto" panose="02000000000000000000" pitchFamily="2" charset="0"/>
-                        <a:ea typeface="Roboto" panose="02000000000000000000" pitchFamily="2" charset="0"/>
-                        <a:cs typeface="Roboto" panose="02000000000000000000" pitchFamily="2" charset="0"/>
-                      </a:endParaRPr>
-                    </a:p>
-                  </a:txBody>
-                  <a:tcPr marL="0" marR="0" marT="49201" marB="0" anchor="ctr">
-                    <a:lnL w="6350">
-                      <a:solidFill>
-                        <a:srgbClr val="000000"/>
-                      </a:solidFill>
-                      <a:prstDash val="solid"/>
-                    </a:lnL>
-                    <a:lnR w="6350">
-                      <a:solidFill>
-                        <a:srgbClr val="000000"/>
-                      </a:solidFill>
-                      <a:prstDash val="solid"/>
-                    </a:lnR>
-                    <a:lnT w="6350">
-                      <a:solidFill>
-                        <a:srgbClr val="000000"/>
-                      </a:solidFill>
-                      <a:prstDash val="solid"/>
-                    </a:lnT>
-                    <a:lnB w="6350">
-                      <a:solidFill>
-                        <a:srgbClr val="000000"/>
-                      </a:solidFill>
-                      <a:prstDash val="solid"/>
-                    </a:lnB>
-                  </a:tcPr>
-                </a:tc>
-                <a:tc>
-                  <a:txBody>
-                    <a:bodyPr/>
-                    <a:lstStyle/>
-                    <a:p>
-                      <a:pPr algn="ctr">
-                        <a:lnSpc>
-                          <a:spcPct val="100000"/>
-                        </a:lnSpc>
-                        <a:spcBef>
-                          <a:spcPts val="235"/>
-                        </a:spcBef>
-                      </a:pPr>
-                      <a:r>
-                        <a:rPr lang="en-GB" sz="1100" dirty="0"/>
-                        <a:t>{{</a:t>
-                      </a:r>
-                      <a:r>
-                        <a:rPr lang="en-GB" sz="1100" dirty="0" err="1"/>
-                        <a:t>tx_wavelength_min</a:t>
-                      </a:r>
-                      <a:r>
-                        <a:rPr lang="en-GB" sz="1100" dirty="0"/>
-                        <a:t>}}</a:t>
-                      </a:r>
-                      <a:endParaRPr sz="1100" dirty="0">
-                        <a:latin typeface="Roboto" panose="02000000000000000000" pitchFamily="2" charset="0"/>
-                        <a:ea typeface="Roboto" panose="02000000000000000000" pitchFamily="2" charset="0"/>
-                        <a:cs typeface="Roboto" panose="02000000000000000000" pitchFamily="2" charset="0"/>
-                      </a:endParaRPr>
-                    </a:p>
-                  </a:txBody>
-                  <a:tcPr marL="0" marR="0" marT="37298" marB="0" anchor="ctr">
-                    <a:lnL w="6350">
-                      <a:solidFill>
-                        <a:srgbClr val="000000"/>
-                      </a:solidFill>
-                      <a:prstDash val="solid"/>
-                    </a:lnL>
-                    <a:lnR w="6350">
-                      <a:solidFill>
-                        <a:srgbClr val="000000"/>
-                      </a:solidFill>
-                      <a:prstDash val="solid"/>
-                    </a:lnR>
-                    <a:lnT w="6350">
-                      <a:solidFill>
-                        <a:srgbClr val="000000"/>
-                      </a:solidFill>
-                      <a:prstDash val="solid"/>
-                    </a:lnT>
-                    <a:lnB w="6350">
-                      <a:solidFill>
-                        <a:srgbClr val="000000"/>
-                      </a:solidFill>
-                      <a:prstDash val="solid"/>
-                    </a:lnB>
-                  </a:tcPr>
-                </a:tc>
-                <a:tc>
-                  <a:txBody>
-                    <a:bodyPr/>
-                    <a:lstStyle/>
-                    <a:p>
-                      <a:pPr algn="ctr">
-                        <a:lnSpc>
-                          <a:spcPct val="100000"/>
-                        </a:lnSpc>
-                        <a:spcBef>
-                          <a:spcPts val="235"/>
-                        </a:spcBef>
-                      </a:pPr>
-                      <a:r>
-                        <a:rPr lang="en-GB" sz="1100" dirty="0"/>
-                        <a:t>{{</a:t>
-                      </a:r>
-                      <a:r>
-                        <a:rPr lang="en-GB" sz="1100" dirty="0" err="1"/>
-                        <a:t>tx_wavelength_typical</a:t>
-                      </a:r>
-                      <a:r>
-                        <a:rPr lang="en-GB" sz="1100" dirty="0"/>
-                        <a:t>}}</a:t>
-                      </a:r>
-                      <a:endParaRPr sz="1100" dirty="0">
-                        <a:latin typeface="Roboto" panose="02000000000000000000" pitchFamily="2" charset="0"/>
-                        <a:ea typeface="Roboto" panose="02000000000000000000" pitchFamily="2" charset="0"/>
-                        <a:cs typeface="Roboto" panose="02000000000000000000" pitchFamily="2" charset="0"/>
-                      </a:endParaRPr>
-                    </a:p>
-                  </a:txBody>
-                  <a:tcPr marL="0" marR="0" marT="37298" marB="0" anchor="ctr">
-                    <a:lnL w="6350">
-                      <a:solidFill>
-                        <a:srgbClr val="000000"/>
-                      </a:solidFill>
-                      <a:prstDash val="solid"/>
-                    </a:lnL>
-                    <a:lnR w="6350">
-                      <a:solidFill>
-                        <a:srgbClr val="000000"/>
-                      </a:solidFill>
-                      <a:prstDash val="solid"/>
-                    </a:lnR>
-                    <a:lnT w="6350">
-                      <a:solidFill>
-                        <a:srgbClr val="000000"/>
-                      </a:solidFill>
-                      <a:prstDash val="solid"/>
-                    </a:lnT>
-                    <a:lnB w="6350">
-                      <a:solidFill>
-                        <a:srgbClr val="000000"/>
-                      </a:solidFill>
-                      <a:prstDash val="solid"/>
-                    </a:lnB>
-                  </a:tcPr>
-                </a:tc>
-                <a:tc>
-                  <a:txBody>
-                    <a:bodyPr/>
-                    <a:lstStyle/>
-                    <a:p>
-                      <a:pPr algn="ctr">
-                        <a:lnSpc>
-                          <a:spcPct val="100000"/>
-                        </a:lnSpc>
-                        <a:spcBef>
-                          <a:spcPts val="235"/>
-                        </a:spcBef>
-                      </a:pPr>
-                      <a:r>
-                        <a:rPr lang="en-GB" sz="1100" dirty="0"/>
-                        <a:t>{{</a:t>
-                      </a:r>
-                      <a:r>
-                        <a:rPr lang="en-GB" sz="1100" dirty="0" err="1"/>
-                        <a:t>tx_wavelength_max</a:t>
-                      </a:r>
-                      <a:r>
-                        <a:rPr lang="en-GB" sz="1100" dirty="0"/>
-                        <a:t>}}</a:t>
-                      </a:r>
-                      <a:endParaRPr sz="1100" dirty="0">
-                        <a:latin typeface="Roboto" panose="02000000000000000000" pitchFamily="2" charset="0"/>
-                        <a:ea typeface="Roboto" panose="02000000000000000000" pitchFamily="2" charset="0"/>
-                        <a:cs typeface="Roboto" panose="02000000000000000000" pitchFamily="2" charset="0"/>
-                      </a:endParaRPr>
-                    </a:p>
-                  </a:txBody>
-                  <a:tcPr marL="0" marR="0" marT="37298" marB="0" anchor="ctr">
-                    <a:lnL w="6350">
-                      <a:solidFill>
-                        <a:srgbClr val="000000"/>
-                      </a:solidFill>
-                      <a:prstDash val="solid"/>
-                    </a:lnL>
-                    <a:lnR w="6350">
-                      <a:solidFill>
-                        <a:srgbClr val="000000"/>
-                      </a:solidFill>
-                      <a:prstDash val="solid"/>
-                    </a:lnR>
-                    <a:lnT w="6350">
-                      <a:solidFill>
-                        <a:srgbClr val="000000"/>
-                      </a:solidFill>
-                      <a:prstDash val="solid"/>
-                    </a:lnT>
-                    <a:lnB w="6350">
-                      <a:solidFill>
-                        <a:srgbClr val="000000"/>
-                      </a:solidFill>
-                      <a:prstDash val="solid"/>
-                    </a:lnB>
-                  </a:tcPr>
-                </a:tc>
-                <a:tc>
-                  <a:txBody>
-                    <a:bodyPr/>
-                    <a:lstStyle/>
-                    <a:p>
-                      <a:pPr marL="635" algn="ctr">
-                        <a:lnSpc>
-                          <a:spcPct val="100000"/>
-                        </a:lnSpc>
-                        <a:spcBef>
-                          <a:spcPts val="310"/>
-                        </a:spcBef>
-                      </a:pPr>
-                      <a:r>
-                        <a:rPr lang="en-GB" sz="1100" dirty="0"/>
-                        <a:t>{{</a:t>
-                      </a:r>
-                      <a:r>
-                        <a:rPr lang="en-GB" sz="1100" dirty="0" err="1"/>
-                        <a:t>tx_wavelength_unit</a:t>
-                      </a:r>
-                      <a:r>
-                        <a:rPr lang="en-GB" sz="1100" dirty="0"/>
-                        <a:t>}}</a:t>
-                      </a:r>
-                      <a:endParaRPr sz="1100" dirty="0">
-                        <a:latin typeface="Roboto" panose="02000000000000000000" pitchFamily="2" charset="0"/>
-                        <a:ea typeface="Roboto" panose="02000000000000000000" pitchFamily="2" charset="0"/>
-                        <a:cs typeface="Roboto" panose="02000000000000000000" pitchFamily="2" charset="0"/>
-                      </a:endParaRPr>
-                    </a:p>
-                  </a:txBody>
-                  <a:tcPr marL="0" marR="0" marT="49201" marB="0" anchor="ctr">
-                    <a:lnL w="6350">
-                      <a:solidFill>
-                        <a:srgbClr val="000000"/>
-                      </a:solidFill>
-                      <a:prstDash val="solid"/>
-                    </a:lnL>
-                    <a:lnR w="6350">
-                      <a:solidFill>
-                        <a:srgbClr val="000000"/>
-                      </a:solidFill>
-                      <a:prstDash val="solid"/>
-                    </a:lnR>
-                    <a:lnT w="6350">
-                      <a:solidFill>
-                        <a:srgbClr val="000000"/>
-                      </a:solidFill>
-                      <a:prstDash val="solid"/>
-                    </a:lnT>
-                    <a:lnB w="6350">
-                      <a:solidFill>
-                        <a:srgbClr val="000000"/>
-                      </a:solidFill>
-                      <a:prstDash val="solid"/>
-                    </a:lnB>
-                  </a:tcPr>
-                </a:tc>
-                <a:tc>
-                  <a:txBody>
-                    <a:bodyPr/>
-                    <a:lstStyle/>
-                    <a:p>
-                      <a:pPr>
-                        <a:lnSpc>
-                          <a:spcPct val="100000"/>
-                        </a:lnSpc>
-                      </a:pPr>
-                      <a:endParaRPr sz="1100">
-                        <a:latin typeface="Roboto" panose="02000000000000000000" pitchFamily="2" charset="0"/>
-                        <a:ea typeface="Roboto" panose="02000000000000000000" pitchFamily="2" charset="0"/>
-                        <a:cs typeface="Roboto" panose="02000000000000000000" pitchFamily="2" charset="0"/>
-                      </a:endParaRPr>
-                    </a:p>
-                  </a:txBody>
-                  <a:tcPr marL="0" marR="0" marT="0" marB="0" anchor="ctr">
-                    <a:lnL w="6350">
-                      <a:solidFill>
-                        <a:srgbClr val="000000"/>
-                      </a:solidFill>
-                      <a:prstDash val="solid"/>
-                    </a:lnL>
-                    <a:lnR w="6350">
-                      <a:solidFill>
-                        <a:srgbClr val="000000"/>
-                      </a:solidFill>
-                      <a:prstDash val="solid"/>
-                    </a:lnR>
-                    <a:lnT w="6350">
-                      <a:solidFill>
-                        <a:srgbClr val="000000"/>
-                      </a:solidFill>
-                      <a:prstDash val="solid"/>
-                    </a:lnT>
-                    <a:lnB w="6350">
-                      <a:solidFill>
-                        <a:srgbClr val="000000"/>
-                      </a:solidFill>
-                      <a:prstDash val="solid"/>
-                    </a:lnB>
-                  </a:tcPr>
-                </a:tc>
-                <a:extLst>
-                  <a:ext uri="{0D108BD9-81ED-4DB2-BD59-A6C34878D82A}">
-                    <a16:rowId xmlns:a16="http://schemas.microsoft.com/office/drawing/2014/main" val="10003"/>
-                  </a:ext>
-                </a:extLst>
-              </a:tr>
-              <a:tr h="634489">
-                <a:tc>
-                  <a:txBody>
-                    <a:bodyPr/>
-                    <a:lstStyle/>
-                    <a:p>
-                      <a:pPr marL="67945" algn="l">
-                        <a:lnSpc>
-                          <a:spcPct val="100000"/>
-                        </a:lnSpc>
-                        <a:spcBef>
-                          <a:spcPts val="300"/>
-                        </a:spcBef>
-                      </a:pPr>
-                      <a:r>
-                        <a:rPr lang="en-GB" sz="1100" dirty="0"/>
-                        <a:t>{{</a:t>
-                      </a:r>
-                      <a:r>
-                        <a:rPr lang="en-GB" sz="1100" dirty="0" err="1"/>
-                        <a:t>tx_spectral_width</a:t>
-                      </a:r>
-                      <a:r>
-                        <a:rPr lang="en-GB" sz="1100" dirty="0"/>
-                        <a:t>}}</a:t>
-                      </a:r>
-                      <a:endParaRPr sz="1100" dirty="0">
-                        <a:latin typeface="Roboto" panose="02000000000000000000" pitchFamily="2" charset="0"/>
-                        <a:ea typeface="Roboto" panose="02000000000000000000" pitchFamily="2" charset="0"/>
-                        <a:cs typeface="Roboto" panose="02000000000000000000" pitchFamily="2" charset="0"/>
-                      </a:endParaRPr>
-                    </a:p>
-                  </a:txBody>
-                  <a:tcPr marL="0" marR="0" marT="47614" marB="0" anchor="ctr">
-                    <a:lnL w="6350">
-                      <a:solidFill>
-                        <a:srgbClr val="000000"/>
-                      </a:solidFill>
-                      <a:prstDash val="solid"/>
-                    </a:lnL>
-                    <a:lnR w="6350">
-                      <a:solidFill>
-                        <a:srgbClr val="000000"/>
-                      </a:solidFill>
-                      <a:prstDash val="solid"/>
-                    </a:lnR>
-                    <a:lnT w="6350">
-                      <a:solidFill>
-                        <a:srgbClr val="000000"/>
-                      </a:solidFill>
-                      <a:prstDash val="solid"/>
-                    </a:lnT>
-                    <a:lnB w="6350">
-                      <a:solidFill>
-                        <a:srgbClr val="000000"/>
-                      </a:solidFill>
-                      <a:prstDash val="solid"/>
-                    </a:lnB>
-                  </a:tcPr>
-                </a:tc>
-                <a:tc>
-                  <a:txBody>
-                    <a:bodyPr/>
-                    <a:lstStyle/>
-                    <a:p>
-                      <a:pPr algn="ctr">
-                        <a:lnSpc>
-                          <a:spcPct val="100000"/>
-                        </a:lnSpc>
-                        <a:spcBef>
-                          <a:spcPts val="300"/>
-                        </a:spcBef>
-                      </a:pPr>
-                      <a:r>
-                        <a:rPr lang="en-GB" sz="1100" dirty="0"/>
-                        <a:t>{{</a:t>
-                      </a:r>
-                      <a:r>
-                        <a:rPr lang="en-GB" sz="1100" dirty="0" err="1"/>
-                        <a:t>tx_spectral_width_symbol</a:t>
-                      </a:r>
-                      <a:r>
-                        <a:rPr lang="en-GB" sz="1100" dirty="0"/>
-                        <a:t>}}</a:t>
-                      </a:r>
-                      <a:endParaRPr sz="1100" dirty="0">
-                        <a:latin typeface="Roboto" panose="02000000000000000000" pitchFamily="2" charset="0"/>
-                        <a:ea typeface="Roboto" panose="02000000000000000000" pitchFamily="2" charset="0"/>
-                        <a:cs typeface="Roboto" panose="02000000000000000000" pitchFamily="2" charset="0"/>
-                      </a:endParaRPr>
-                    </a:p>
-                  </a:txBody>
-                  <a:tcPr marL="0" marR="0" marT="47614" marB="0" anchor="ctr">
-                    <a:lnL w="6350">
-                      <a:solidFill>
-                        <a:srgbClr val="000000"/>
-                      </a:solidFill>
-                      <a:prstDash val="solid"/>
-                    </a:lnL>
-                    <a:lnR w="6350">
-                      <a:solidFill>
-                        <a:srgbClr val="000000"/>
-                      </a:solidFill>
-                      <a:prstDash val="solid"/>
-                    </a:lnR>
-                    <a:lnT w="6350">
-                      <a:solidFill>
-                        <a:srgbClr val="000000"/>
-                      </a:solidFill>
-                      <a:prstDash val="solid"/>
-                    </a:lnT>
-                    <a:lnB w="6350">
-                      <a:solidFill>
-                        <a:srgbClr val="000000"/>
-                      </a:solidFill>
-                      <a:prstDash val="solid"/>
-                    </a:lnB>
-                  </a:tcPr>
-                </a:tc>
-                <a:tc>
-                  <a:txBody>
-                    <a:bodyPr/>
-                    <a:lstStyle/>
-                    <a:p>
-                      <a:pPr algn="ctr">
-                        <a:lnSpc>
-                          <a:spcPct val="100000"/>
-                        </a:lnSpc>
-                        <a:spcBef>
-                          <a:spcPts val="300"/>
-                        </a:spcBef>
-                      </a:pPr>
-                      <a:endParaRPr lang="en-GB" sz="1100" dirty="0"/>
-                    </a:p>
-                    <a:p>
-                      <a:pPr algn="ctr">
-                        <a:lnSpc>
-                          <a:spcPct val="100000"/>
-                        </a:lnSpc>
-                        <a:spcBef>
-                          <a:spcPts val="300"/>
-                        </a:spcBef>
-                      </a:pPr>
-                      <a:r>
-                        <a:rPr lang="en-GB" sz="1100" dirty="0"/>
-                        <a:t>{{</a:t>
-                      </a:r>
-                      <a:r>
-                        <a:rPr lang="en-GB" sz="1100" dirty="0" err="1"/>
-                        <a:t>tx_spectral_width_min</a:t>
-                      </a:r>
-                      <a:r>
-                        <a:rPr lang="en-GB" sz="1100" dirty="0"/>
-                        <a:t>}}</a:t>
-                      </a:r>
-                      <a:endParaRPr lang="en-GB" sz="1100" dirty="0">
-                        <a:latin typeface="Roboto" panose="02000000000000000000" pitchFamily="2" charset="0"/>
-                        <a:ea typeface="Roboto" panose="02000000000000000000" pitchFamily="2" charset="0"/>
-                        <a:cs typeface="Roboto" panose="02000000000000000000" pitchFamily="2" charset="0"/>
-                      </a:endParaRPr>
-                    </a:p>
-                    <a:p>
-                      <a:pPr algn="ctr">
-                        <a:lnSpc>
-                          <a:spcPct val="100000"/>
-                        </a:lnSpc>
-                      </a:pPr>
-                      <a:endParaRPr sz="1100" dirty="0">
-                        <a:latin typeface="Roboto" panose="02000000000000000000" pitchFamily="2" charset="0"/>
-                        <a:ea typeface="Roboto" panose="02000000000000000000" pitchFamily="2" charset="0"/>
-                        <a:cs typeface="Roboto" panose="02000000000000000000" pitchFamily="2" charset="0"/>
-                      </a:endParaRPr>
-                    </a:p>
-                  </a:txBody>
-                  <a:tcPr marL="0" marR="0" marT="0" marB="0" anchor="ctr">
-                    <a:lnL w="6350">
-                      <a:solidFill>
-                        <a:srgbClr val="000000"/>
-                      </a:solidFill>
-                      <a:prstDash val="solid"/>
-                    </a:lnL>
-                    <a:lnR w="6350">
-                      <a:solidFill>
-                        <a:srgbClr val="000000"/>
-                      </a:solidFill>
-                      <a:prstDash val="solid"/>
-                    </a:lnR>
-                    <a:lnT w="6350">
-                      <a:solidFill>
-                        <a:srgbClr val="000000"/>
-                      </a:solidFill>
-                      <a:prstDash val="solid"/>
-                    </a:lnT>
-                    <a:lnB w="6350">
-                      <a:solidFill>
-                        <a:srgbClr val="000000"/>
-                      </a:solidFill>
-                      <a:prstDash val="solid"/>
-                    </a:lnB>
-                  </a:tcPr>
-                </a:tc>
-                <a:tc>
-                  <a:txBody>
-                    <a:bodyPr/>
-                    <a:lstStyle/>
-                    <a:p>
-                      <a:pPr algn="ctr">
-                        <a:lnSpc>
-                          <a:spcPct val="100000"/>
-                        </a:lnSpc>
-                        <a:spcBef>
-                          <a:spcPts val="300"/>
-                        </a:spcBef>
-                      </a:pPr>
-                      <a:endParaRPr lang="en-GB" sz="1100" dirty="0"/>
-                    </a:p>
-                    <a:p>
-                      <a:pPr algn="ctr">
-                        <a:lnSpc>
-                          <a:spcPct val="100000"/>
-                        </a:lnSpc>
-                        <a:spcBef>
-                          <a:spcPts val="300"/>
-                        </a:spcBef>
-                      </a:pPr>
-                      <a:r>
-                        <a:rPr lang="en-GB" sz="1100" dirty="0"/>
-                        <a:t>{{</a:t>
-                      </a:r>
-                      <a:r>
-                        <a:rPr lang="en-GB" sz="1100" dirty="0" err="1"/>
-                        <a:t>tx_spectral_width_typical</a:t>
-                      </a:r>
-                      <a:r>
-                        <a:rPr lang="en-GB" sz="1100" dirty="0"/>
-                        <a:t>}}</a:t>
-                      </a:r>
-                      <a:endParaRPr lang="en-GB" sz="1100" dirty="0">
-                        <a:latin typeface="Roboto" panose="02000000000000000000" pitchFamily="2" charset="0"/>
-                        <a:ea typeface="Roboto" panose="02000000000000000000" pitchFamily="2" charset="0"/>
-                        <a:cs typeface="Roboto" panose="02000000000000000000" pitchFamily="2" charset="0"/>
-                      </a:endParaRPr>
-                    </a:p>
-                    <a:p>
-                      <a:pPr algn="ctr">
-                        <a:lnSpc>
-                          <a:spcPct val="100000"/>
-                        </a:lnSpc>
-                      </a:pPr>
-                      <a:endParaRPr sz="1100" dirty="0">
-                        <a:latin typeface="Roboto" panose="02000000000000000000" pitchFamily="2" charset="0"/>
-                        <a:ea typeface="Roboto" panose="02000000000000000000" pitchFamily="2" charset="0"/>
-                        <a:cs typeface="Roboto" panose="02000000000000000000" pitchFamily="2" charset="0"/>
-                      </a:endParaRPr>
-                    </a:p>
-                  </a:txBody>
-                  <a:tcPr marL="0" marR="0" marT="0" marB="0" anchor="ctr">
-                    <a:lnL w="6350">
-                      <a:solidFill>
-                        <a:srgbClr val="000000"/>
-                      </a:solidFill>
-                      <a:prstDash val="solid"/>
-                    </a:lnL>
-                    <a:lnR w="6350">
-                      <a:solidFill>
-                        <a:srgbClr val="000000"/>
-                      </a:solidFill>
-                      <a:prstDash val="solid"/>
-                    </a:lnR>
-                    <a:lnT w="6350">
-                      <a:solidFill>
-                        <a:srgbClr val="000000"/>
-                      </a:solidFill>
-                      <a:prstDash val="solid"/>
-                    </a:lnT>
-                    <a:lnB w="6350">
-                      <a:solidFill>
-                        <a:srgbClr val="000000"/>
-                      </a:solidFill>
-                      <a:prstDash val="solid"/>
-                    </a:lnB>
-                  </a:tcPr>
-                </a:tc>
-                <a:tc>
-                  <a:txBody>
-                    <a:bodyPr/>
-                    <a:lstStyle/>
-                    <a:p>
-                      <a:pPr marL="635" algn="ctr">
-                        <a:lnSpc>
-                          <a:spcPct val="100000"/>
-                        </a:lnSpc>
-                        <a:spcBef>
-                          <a:spcPts val="300"/>
-                        </a:spcBef>
-                      </a:pPr>
-                      <a:r>
-                        <a:rPr lang="en-GB" sz="1100" dirty="0"/>
-                        <a:t>{{</a:t>
-                      </a:r>
-                      <a:r>
-                        <a:rPr lang="en-GB" sz="1100" dirty="0" err="1"/>
-                        <a:t>tx_spectral_max</a:t>
-                      </a:r>
-                      <a:r>
-                        <a:rPr lang="en-GB" sz="1100" dirty="0"/>
-                        <a:t>}}</a:t>
-                      </a:r>
-                      <a:endParaRPr sz="1100" dirty="0">
-                        <a:latin typeface="Roboto" panose="02000000000000000000" pitchFamily="2" charset="0"/>
-                        <a:ea typeface="Roboto" panose="02000000000000000000" pitchFamily="2" charset="0"/>
-                        <a:cs typeface="Roboto" panose="02000000000000000000" pitchFamily="2" charset="0"/>
-                      </a:endParaRPr>
-                    </a:p>
-                  </a:txBody>
-                  <a:tcPr marL="0" marR="0" marT="47614" marB="0" anchor="ctr">
-                    <a:lnL w="6350">
-                      <a:solidFill>
-                        <a:srgbClr val="000000"/>
-                      </a:solidFill>
-                      <a:prstDash val="solid"/>
-                    </a:lnL>
-                    <a:lnR w="6350">
-                      <a:solidFill>
-                        <a:srgbClr val="000000"/>
-                      </a:solidFill>
-                      <a:prstDash val="solid"/>
-                    </a:lnR>
-                    <a:lnT w="6350">
-                      <a:solidFill>
-                        <a:srgbClr val="000000"/>
-                      </a:solidFill>
-                      <a:prstDash val="solid"/>
-                    </a:lnT>
-                    <a:lnB w="6350">
-                      <a:solidFill>
-                        <a:srgbClr val="000000"/>
-                      </a:solidFill>
-                      <a:prstDash val="solid"/>
-                    </a:lnB>
-                  </a:tcPr>
-                </a:tc>
-                <a:tc>
-                  <a:txBody>
-                    <a:bodyPr/>
-                    <a:lstStyle/>
-                    <a:p>
-                      <a:pPr marL="635" algn="ctr">
-                        <a:lnSpc>
-                          <a:spcPct val="100000"/>
-                        </a:lnSpc>
-                        <a:spcBef>
-                          <a:spcPts val="300"/>
-                        </a:spcBef>
-                      </a:pPr>
-                      <a:r>
-                        <a:rPr lang="en-GB" sz="1100" dirty="0"/>
-                        <a:t>{{</a:t>
-                      </a:r>
-                      <a:r>
-                        <a:rPr lang="en-GB" sz="1100" dirty="0" err="1"/>
-                        <a:t>tx_spectral_unit</a:t>
-                      </a:r>
-                      <a:r>
-                        <a:rPr lang="en-GB" sz="1100" dirty="0"/>
-                        <a:t>}}</a:t>
-                      </a:r>
-                      <a:endParaRPr sz="1100" dirty="0">
-                        <a:latin typeface="Roboto" panose="02000000000000000000" pitchFamily="2" charset="0"/>
-                        <a:ea typeface="Roboto" panose="02000000000000000000" pitchFamily="2" charset="0"/>
-                        <a:cs typeface="Roboto" panose="02000000000000000000" pitchFamily="2" charset="0"/>
-                      </a:endParaRPr>
-                    </a:p>
-                  </a:txBody>
-                  <a:tcPr marL="0" marR="0" marT="47614" marB="0" anchor="ctr">
-                    <a:lnL w="6350">
-                      <a:solidFill>
-                        <a:srgbClr val="000000"/>
-                      </a:solidFill>
-                      <a:prstDash val="solid"/>
-                    </a:lnL>
-                    <a:lnR w="6350">
-                      <a:solidFill>
-                        <a:srgbClr val="000000"/>
-                      </a:solidFill>
-                      <a:prstDash val="solid"/>
-                    </a:lnR>
-                    <a:lnT w="6350">
-                      <a:solidFill>
-                        <a:srgbClr val="000000"/>
-                      </a:solidFill>
-                      <a:prstDash val="solid"/>
-                    </a:lnT>
-                    <a:lnB w="6350">
-                      <a:solidFill>
-                        <a:srgbClr val="000000"/>
-                      </a:solidFill>
-                      <a:prstDash val="solid"/>
-                    </a:lnB>
-                  </a:tcPr>
-                </a:tc>
-                <a:tc>
-                  <a:txBody>
-                    <a:bodyPr/>
-                    <a:lstStyle/>
-                    <a:p>
-                      <a:pPr>
-                        <a:lnSpc>
-                          <a:spcPct val="100000"/>
-                        </a:lnSpc>
-                      </a:pPr>
-                      <a:endParaRPr sz="1100">
-                        <a:latin typeface="Roboto" panose="02000000000000000000" pitchFamily="2" charset="0"/>
-                        <a:ea typeface="Roboto" panose="02000000000000000000" pitchFamily="2" charset="0"/>
-                        <a:cs typeface="Roboto" panose="02000000000000000000" pitchFamily="2" charset="0"/>
-                      </a:endParaRPr>
-                    </a:p>
-                  </a:txBody>
-                  <a:tcPr marL="0" marR="0" marT="0" marB="0" anchor="ctr">
-                    <a:lnL w="6350">
-                      <a:solidFill>
-                        <a:srgbClr val="000000"/>
-                      </a:solidFill>
-                      <a:prstDash val="solid"/>
-                    </a:lnL>
-                    <a:lnR w="6350">
-                      <a:solidFill>
-                        <a:srgbClr val="000000"/>
-                      </a:solidFill>
-                      <a:prstDash val="solid"/>
-                    </a:lnR>
-                    <a:lnT w="6350">
-                      <a:solidFill>
-                        <a:srgbClr val="000000"/>
-                      </a:solidFill>
-                      <a:prstDash val="solid"/>
-                    </a:lnT>
-                    <a:lnB w="6350">
-                      <a:solidFill>
-                        <a:srgbClr val="000000"/>
-                      </a:solidFill>
-                      <a:prstDash val="solid"/>
-                    </a:lnB>
-                  </a:tcPr>
-                </a:tc>
-                <a:extLst>
-                  <a:ext uri="{0D108BD9-81ED-4DB2-BD59-A6C34878D82A}">
-                    <a16:rowId xmlns:a16="http://schemas.microsoft.com/office/drawing/2014/main" val="10004"/>
-                  </a:ext>
-                </a:extLst>
-              </a:tr>
-              <a:tr h="0">
-                <a:tc>
-                  <a:txBody>
-                    <a:bodyPr/>
-                    <a:lstStyle/>
-                    <a:p>
-                      <a:pPr marL="67945" algn="l">
-                        <a:lnSpc>
-                          <a:spcPct val="100000"/>
-                        </a:lnSpc>
-                        <a:spcBef>
-                          <a:spcPts val="300"/>
-                        </a:spcBef>
-                      </a:pPr>
-                      <a:r>
-                        <a:rPr lang="en-GB" sz="1100" dirty="0"/>
-                        <a:t>{{</a:t>
-                      </a:r>
-                      <a:r>
-                        <a:rPr lang="en-GB" sz="1100" dirty="0" err="1"/>
-                        <a:t>tx_er</a:t>
-                      </a:r>
-                      <a:r>
-                        <a:rPr lang="en-GB" sz="1100" dirty="0"/>
-                        <a:t>}}</a:t>
-                      </a:r>
-                      <a:endParaRPr sz="1100" dirty="0">
-                        <a:latin typeface="Roboto" panose="02000000000000000000" pitchFamily="2" charset="0"/>
-                        <a:ea typeface="Roboto" panose="02000000000000000000" pitchFamily="2" charset="0"/>
-                        <a:cs typeface="Roboto" panose="02000000000000000000" pitchFamily="2" charset="0"/>
-                      </a:endParaRPr>
-                    </a:p>
-                  </a:txBody>
-                  <a:tcPr marL="0" marR="0" marT="47614" marB="0" anchor="ctr">
-                    <a:lnL w="6350">
-                      <a:solidFill>
-                        <a:srgbClr val="000000"/>
-                      </a:solidFill>
-                      <a:prstDash val="solid"/>
-                    </a:lnL>
-                    <a:lnR w="6350">
-                      <a:solidFill>
-                        <a:srgbClr val="000000"/>
-                      </a:solidFill>
-                      <a:prstDash val="solid"/>
-                    </a:lnR>
-                    <a:lnT w="6350">
-                      <a:solidFill>
-                        <a:srgbClr val="000000"/>
-                      </a:solidFill>
-                      <a:prstDash val="solid"/>
-                    </a:lnT>
-                    <a:lnB w="6350">
-                      <a:solidFill>
-                        <a:srgbClr val="000000"/>
-                      </a:solidFill>
-                      <a:prstDash val="solid"/>
-                    </a:lnB>
-                  </a:tcPr>
-                </a:tc>
-                <a:tc>
-                  <a:txBody>
-                    <a:bodyPr/>
-                    <a:lstStyle/>
-                    <a:p>
-                      <a:pPr algn="ctr">
-                        <a:lnSpc>
-                          <a:spcPct val="100000"/>
-                        </a:lnSpc>
-                        <a:spcBef>
-                          <a:spcPts val="300"/>
-                        </a:spcBef>
-                      </a:pPr>
-                      <a:r>
-                        <a:rPr lang="en-GB" sz="1100" dirty="0"/>
-                        <a:t>{{</a:t>
-                      </a:r>
-                      <a:r>
-                        <a:rPr lang="en-GB" sz="1100" dirty="0" err="1"/>
-                        <a:t>tx_er_symbol</a:t>
-                      </a:r>
-                      <a:r>
-                        <a:rPr lang="en-GB" sz="1100" dirty="0"/>
-                        <a:t>}}</a:t>
-                      </a:r>
-                      <a:endParaRPr sz="1100" dirty="0">
-                        <a:latin typeface="Roboto" panose="02000000000000000000" pitchFamily="2" charset="0"/>
-                        <a:ea typeface="Roboto" panose="02000000000000000000" pitchFamily="2" charset="0"/>
-                        <a:cs typeface="Roboto" panose="02000000000000000000" pitchFamily="2" charset="0"/>
-                      </a:endParaRPr>
-                    </a:p>
-                  </a:txBody>
-                  <a:tcPr marL="0" marR="0" marT="47614" marB="0" anchor="ctr">
-                    <a:lnL w="6350">
-                      <a:solidFill>
-                        <a:srgbClr val="000000"/>
-                      </a:solidFill>
-                      <a:prstDash val="solid"/>
-                    </a:lnL>
-                    <a:lnR w="6350">
-                      <a:solidFill>
-                        <a:srgbClr val="000000"/>
-                      </a:solidFill>
-                      <a:prstDash val="solid"/>
-                    </a:lnR>
-                    <a:lnT w="6350">
-                      <a:solidFill>
-                        <a:srgbClr val="000000"/>
-                      </a:solidFill>
-                      <a:prstDash val="solid"/>
-                    </a:lnT>
-                    <a:lnB w="6350">
-                      <a:solidFill>
-                        <a:srgbClr val="000000"/>
-                      </a:solidFill>
-                      <a:prstDash val="solid"/>
-                    </a:lnB>
-                  </a:tcPr>
-                </a:tc>
-                <a:tc>
-                  <a:txBody>
-                    <a:bodyPr/>
-                    <a:lstStyle/>
-                    <a:p>
-                      <a:pPr algn="ctr">
-                        <a:lnSpc>
-                          <a:spcPct val="100000"/>
-                        </a:lnSpc>
-                        <a:spcBef>
-                          <a:spcPts val="300"/>
-                        </a:spcBef>
-                      </a:pPr>
-                      <a:r>
-                        <a:rPr lang="en-GB" sz="1100" dirty="0"/>
-                        <a:t>{{</a:t>
-                      </a:r>
-                      <a:r>
-                        <a:rPr lang="en-GB" sz="1100" dirty="0" err="1"/>
-                        <a:t>tx_er_min</a:t>
-                      </a:r>
-                      <a:r>
-                        <a:rPr lang="en-GB" sz="1100" dirty="0"/>
-                        <a:t>}}</a:t>
-                      </a:r>
-                      <a:endParaRPr sz="1100" dirty="0">
-                        <a:latin typeface="Roboto" panose="02000000000000000000" pitchFamily="2" charset="0"/>
-                        <a:ea typeface="Roboto" panose="02000000000000000000" pitchFamily="2" charset="0"/>
-                        <a:cs typeface="Roboto" panose="02000000000000000000" pitchFamily="2" charset="0"/>
-                      </a:endParaRPr>
-                    </a:p>
-                  </a:txBody>
-                  <a:tcPr marL="0" marR="0" marT="47614" marB="0" anchor="ctr">
                     <a:lnL w="6350">
                       <a:solidFill>
                         <a:srgbClr val="000000"/>
@@ -10577,18 +10542,59 @@
                         <a:tabLst/>
                         <a:defRPr/>
                       </a:pPr>
-                      <a:r>
-                        <a:rPr lang="en-GB" sz="1100" dirty="0"/>
-                        <a:t>  </a:t>
-                      </a:r>
-                    </a:p>
+                      <a:endParaRPr lang="en-GB" sz="1100" dirty="0"/>
+                    </a:p>
+                    <a:p>
+                      <a:pPr algn="ctr">
+                        <a:lnSpc>
+                          <a:spcPct val="100000"/>
+                        </a:lnSpc>
+                      </a:pPr>
+                      <a:endParaRPr sz="1100" dirty="0">
+                        <a:latin typeface="Roboto" panose="02000000000000000000" pitchFamily="2" charset="0"/>
+                        <a:ea typeface="Roboto" panose="02000000000000000000" pitchFamily="2" charset="0"/>
+                        <a:cs typeface="Roboto" panose="02000000000000000000" pitchFamily="2" charset="0"/>
+                      </a:endParaRPr>
+                    </a:p>
+                  </a:txBody>
+                  <a:tcPr marL="0" marR="0" marT="0" marB="0" anchor="ctr">
+                    <a:lnL w="6350">
+                      <a:solidFill>
+                        <a:srgbClr val="000000"/>
+                      </a:solidFill>
+                      <a:prstDash val="solid"/>
+                    </a:lnL>
+                    <a:lnR w="6350">
+                      <a:solidFill>
+                        <a:srgbClr val="000000"/>
+                      </a:solidFill>
+                      <a:prstDash val="solid"/>
+                    </a:lnR>
+                    <a:lnT w="6350">
+                      <a:solidFill>
+                        <a:srgbClr val="000000"/>
+                      </a:solidFill>
+                      <a:prstDash val="solid"/>
+                    </a:lnT>
+                    <a:lnB w="6350">
+                      <a:solidFill>
+                        <a:srgbClr val="000000"/>
+                      </a:solidFill>
+                      <a:prstDash val="solid"/>
+                    </a:lnB>
+                  </a:tcPr>
+                </a:tc>
+                <a:tc>
+                  <a:txBody>
+                    <a:bodyPr/>
+                    <a:lstStyle/>
                     <a:p>
                       <a:pPr marL="0" marR="0" lvl="0" indent="0" algn="ctr" defTabSz="914400" eaLnBrk="1" fontAlgn="auto" latinLnBrk="0" hangingPunct="1">
                         <a:lnSpc>
                           <a:spcPct val="100000"/>
                         </a:lnSpc>
                         <a:spcBef>
-                          <a:spcPts val="0"/>
+                          <a:spcPts val="300"/>
                         </a:spcBef>
                         <a:spcAft>
                           <a:spcPts val="0"/>
@@ -10606,7 +10612,7 @@
                       </a:r>
                       <a:r>
                         <a:rPr lang="en-GB" sz="1100" dirty="0" err="1"/>
-                        <a:t>tx_er_typical</a:t>
+                        <a:t>tx_er_unit</a:t>
                       </a:r>
                       <a:r>
                         <a:rPr lang="en-GB" sz="1100" dirty="0"/>
@@ -10618,150 +10624,6 @@
                         <a:cs typeface="Roboto" panose="02000000000000000000" pitchFamily="2" charset="0"/>
                       </a:endParaRPr>
                     </a:p>
-                    <a:p>
-                      <a:pPr algn="ctr">
-                        <a:lnSpc>
-                          <a:spcPct val="100000"/>
-                        </a:lnSpc>
-                      </a:pPr>
-                      <a:endParaRPr sz="1100" dirty="0">
-                        <a:latin typeface="Roboto" panose="02000000000000000000" pitchFamily="2" charset="0"/>
-                        <a:ea typeface="Roboto" panose="02000000000000000000" pitchFamily="2" charset="0"/>
-                        <a:cs typeface="Roboto" panose="02000000000000000000" pitchFamily="2" charset="0"/>
-                      </a:endParaRPr>
-                    </a:p>
-                  </a:txBody>
-                  <a:tcPr marL="0" marR="0" marT="0" marB="0" anchor="ctr">
-                    <a:lnL w="6350">
-                      <a:solidFill>
-                        <a:srgbClr val="000000"/>
-                      </a:solidFill>
-                      <a:prstDash val="solid"/>
-                    </a:lnL>
-                    <a:lnR w="6350">
-                      <a:solidFill>
-                        <a:srgbClr val="000000"/>
-                      </a:solidFill>
-                      <a:prstDash val="solid"/>
-                    </a:lnR>
-                    <a:lnT w="6350">
-                      <a:solidFill>
-                        <a:srgbClr val="000000"/>
-                      </a:solidFill>
-                      <a:prstDash val="solid"/>
-                    </a:lnT>
-                    <a:lnB w="6350">
-                      <a:solidFill>
-                        <a:srgbClr val="000000"/>
-                      </a:solidFill>
-                      <a:prstDash val="solid"/>
-                    </a:lnB>
-                  </a:tcPr>
-                </a:tc>
-                <a:tc>
-                  <a:txBody>
-                    <a:bodyPr/>
-                    <a:lstStyle/>
-                    <a:p>
-                      <a:pPr marL="0" marR="0" lvl="0" indent="0" algn="ctr" defTabSz="914400" eaLnBrk="1" fontAlgn="auto" latinLnBrk="0" hangingPunct="1">
-                        <a:lnSpc>
-                          <a:spcPct val="100000"/>
-                        </a:lnSpc>
-                        <a:spcBef>
-                          <a:spcPts val="0"/>
-                        </a:spcBef>
-                        <a:spcAft>
-                          <a:spcPts val="0"/>
-                        </a:spcAft>
-                        <a:buClrTx/>
-                        <a:buSzTx/>
-                        <a:buFontTx/>
-                        <a:buNone/>
-                        <a:tabLst/>
-                        <a:defRPr/>
-                      </a:pPr>
-                      <a:endParaRPr lang="en-GB" sz="1100" dirty="0"/>
-                    </a:p>
-                    <a:p>
-                      <a:pPr marL="0" marR="0" lvl="0" indent="0" algn="ctr" defTabSz="914400" eaLnBrk="1" fontAlgn="auto" latinLnBrk="0" hangingPunct="1">
-                        <a:lnSpc>
-                          <a:spcPct val="100000"/>
-                        </a:lnSpc>
-                        <a:spcBef>
-                          <a:spcPts val="0"/>
-                        </a:spcBef>
-                        <a:spcAft>
-                          <a:spcPts val="0"/>
-                        </a:spcAft>
-                        <a:buClrTx/>
-                        <a:buSzTx/>
-                        <a:buFontTx/>
-                        <a:buNone/>
-                        <a:tabLst/>
-                        <a:defRPr/>
-                      </a:pPr>
-                      <a:r>
-                        <a:rPr lang="en-GB" sz="1100" dirty="0"/>
-                        <a:t>{{</a:t>
-                      </a:r>
-                      <a:r>
-                        <a:rPr lang="en-GB" sz="1100" dirty="0" err="1"/>
-                        <a:t>tx_er_max</a:t>
-                      </a:r>
-                      <a:r>
-                        <a:rPr lang="en-GB" sz="1100" dirty="0"/>
-                        <a:t>}}</a:t>
-                      </a:r>
-                      <a:endParaRPr lang="en-GB" sz="1100" dirty="0">
-                        <a:latin typeface="Roboto" panose="02000000000000000000" pitchFamily="2" charset="0"/>
-                        <a:ea typeface="Roboto" panose="02000000000000000000" pitchFamily="2" charset="0"/>
-                        <a:cs typeface="Roboto" panose="02000000000000000000" pitchFamily="2" charset="0"/>
-                      </a:endParaRPr>
-                    </a:p>
-                    <a:p>
-                      <a:pPr algn="ctr">
-                        <a:lnSpc>
-                          <a:spcPct val="100000"/>
-                        </a:lnSpc>
-                      </a:pPr>
-                      <a:endParaRPr sz="1100" dirty="0">
-                        <a:latin typeface="Roboto" panose="02000000000000000000" pitchFamily="2" charset="0"/>
-                        <a:ea typeface="Roboto" panose="02000000000000000000" pitchFamily="2" charset="0"/>
-                        <a:cs typeface="Roboto" panose="02000000000000000000" pitchFamily="2" charset="0"/>
-                      </a:endParaRPr>
-                    </a:p>
-                  </a:txBody>
-                  <a:tcPr marL="0" marR="0" marT="0" marB="0" anchor="ctr">
-                    <a:lnL w="6350">
-                      <a:solidFill>
-                        <a:srgbClr val="000000"/>
-                      </a:solidFill>
-                      <a:prstDash val="solid"/>
-                    </a:lnL>
-                    <a:lnR w="6350">
-                      <a:solidFill>
-                        <a:srgbClr val="000000"/>
-                      </a:solidFill>
-                      <a:prstDash val="solid"/>
-                    </a:lnR>
-                    <a:lnT w="6350">
-                      <a:solidFill>
-                        <a:srgbClr val="000000"/>
-                      </a:solidFill>
-                      <a:prstDash val="solid"/>
-                    </a:lnT>
-                    <a:lnB w="6350">
-                      <a:solidFill>
-                        <a:srgbClr val="000000"/>
-                      </a:solidFill>
-                      <a:prstDash val="solid"/>
-                    </a:lnB>
-                  </a:tcPr>
-                </a:tc>
-                <a:tc>
-                  <a:txBody>
-                    <a:bodyPr/>
-                    <a:lstStyle/>
                     <a:p>
                       <a:pPr algn="ctr">
                         <a:lnSpc>
@@ -10771,18 +10633,6 @@
                           <a:spcPts val="300"/>
                         </a:spcBef>
                       </a:pPr>
-                      <a:r>
-                        <a:rPr lang="en-GB" sz="1100" dirty="0"/>
-                        <a:t>{{</a:t>
-                      </a:r>
-                      <a:r>
-                        <a:rPr lang="en-GB" sz="1100" dirty="0" err="1"/>
-                        <a:t>tx_er_unit</a:t>
-                      </a:r>
-                      <a:r>
-                        <a:rPr lang="en-GB" sz="1100" dirty="0"/>
-                        <a:t>}}</a:t>
-                      </a:r>
                       <a:endParaRPr sz="1100" dirty="0">
                         <a:latin typeface="Roboto" panose="02000000000000000000" pitchFamily="2" charset="0"/>
                         <a:ea typeface="Roboto" panose="02000000000000000000" pitchFamily="2" charset="0"/>
@@ -10991,12 +10841,147 @@
                     <a:bodyPr/>
                     <a:lstStyle/>
                     <a:p>
-                      <a:pPr marL="0" marR="0" lvl="0" indent="0" algn="ctr" defTabSz="914400" eaLnBrk="1" fontAlgn="auto" latinLnBrk="0" hangingPunct="1">
+                      <a:pPr algn="ctr">
+                        <a:lnSpc>
+                          <a:spcPct val="100000"/>
+                        </a:lnSpc>
+                      </a:pPr>
+                      <a:endParaRPr sz="1100" dirty="0">
+                        <a:latin typeface="Roboto" panose="02000000000000000000" pitchFamily="2" charset="0"/>
+                        <a:ea typeface="Roboto" panose="02000000000000000000" pitchFamily="2" charset="0"/>
+                        <a:cs typeface="Roboto" panose="02000000000000000000" pitchFamily="2" charset="0"/>
+                      </a:endParaRPr>
+                    </a:p>
+                  </a:txBody>
+                  <a:tcPr marL="0" marR="0" marT="0" marB="0" anchor="ctr">
+                    <a:lnL w="6350">
+                      <a:solidFill>
+                        <a:srgbClr val="000000"/>
+                      </a:solidFill>
+                      <a:prstDash val="solid"/>
+                    </a:lnL>
+                    <a:lnR w="6350">
+                      <a:solidFill>
+                        <a:srgbClr val="000000"/>
+                      </a:solidFill>
+                      <a:prstDash val="solid"/>
+                    </a:lnR>
+                    <a:lnT w="6350">
+                      <a:solidFill>
+                        <a:srgbClr val="000000"/>
+                      </a:solidFill>
+                      <a:prstDash val="solid"/>
+                    </a:lnT>
+                    <a:lnB w="6350">
+                      <a:solidFill>
+                        <a:srgbClr val="000000"/>
+                      </a:solidFill>
+                      <a:prstDash val="solid"/>
+                    </a:lnB>
+                  </a:tcPr>
+                </a:tc>
+                <a:tc>
+                  <a:txBody>
+                    <a:bodyPr/>
+                    <a:lstStyle/>
+                    <a:p>
+                      <a:pPr algn="ctr">
+                        <a:lnSpc>
+                          <a:spcPct val="100000"/>
+                        </a:lnSpc>
+                      </a:pPr>
+                      <a:endParaRPr sz="1100" dirty="0">
+                        <a:latin typeface="Roboto" panose="02000000000000000000" pitchFamily="2" charset="0"/>
+                        <a:ea typeface="Roboto" panose="02000000000000000000" pitchFamily="2" charset="0"/>
+                        <a:cs typeface="Roboto" panose="02000000000000000000" pitchFamily="2" charset="0"/>
+                      </a:endParaRPr>
+                    </a:p>
+                  </a:txBody>
+                  <a:tcPr marL="0" marR="0" marT="0" marB="0" anchor="ctr">
+                    <a:lnL w="6350">
+                      <a:solidFill>
+                        <a:srgbClr val="000000"/>
+                      </a:solidFill>
+                      <a:prstDash val="solid"/>
+                    </a:lnL>
+                    <a:lnR w="6350">
+                      <a:solidFill>
+                        <a:srgbClr val="000000"/>
+                      </a:solidFill>
+                      <a:prstDash val="solid"/>
+                    </a:lnR>
+                    <a:lnT w="6350">
+                      <a:solidFill>
+                        <a:srgbClr val="000000"/>
+                      </a:solidFill>
+                      <a:prstDash val="solid"/>
+                    </a:lnT>
+                    <a:lnB w="6350">
+                      <a:solidFill>
+                        <a:srgbClr val="000000"/>
+                      </a:solidFill>
+                      <a:prstDash val="solid"/>
+                    </a:lnB>
+                  </a:tcPr>
+                </a:tc>
+                <a:tc>
+                  <a:txBody>
+                    <a:bodyPr/>
+                    <a:lstStyle/>
+                    <a:p>
+                      <a:pPr marL="180340" algn="ctr">
                         <a:lnSpc>
                           <a:spcPct val="100000"/>
                         </a:lnSpc>
                         <a:spcBef>
-                          <a:spcPts val="0"/>
+                          <a:spcPts val="305"/>
+                        </a:spcBef>
+                      </a:pPr>
+                      <a:endParaRPr sz="1100" dirty="0">
+                        <a:latin typeface="Roboto" panose="02000000000000000000" pitchFamily="2" charset="0"/>
+                        <a:ea typeface="Roboto" panose="02000000000000000000" pitchFamily="2" charset="0"/>
+                        <a:cs typeface="Roboto" panose="02000000000000000000" pitchFamily="2" charset="0"/>
+                      </a:endParaRPr>
+                    </a:p>
+                  </a:txBody>
+                  <a:tcPr marL="0" marR="0" marT="48408" marB="0" anchor="ctr">
+                    <a:lnL w="6350">
+                      <a:solidFill>
+                        <a:srgbClr val="000000"/>
+                      </a:solidFill>
+                      <a:prstDash val="solid"/>
+                    </a:lnL>
+                    <a:lnR w="6350">
+                      <a:solidFill>
+                        <a:srgbClr val="000000"/>
+                      </a:solidFill>
+                      <a:prstDash val="solid"/>
+                    </a:lnR>
+                    <a:lnT w="6350">
+                      <a:solidFill>
+                        <a:srgbClr val="000000"/>
+                      </a:solidFill>
+                      <a:prstDash val="solid"/>
+                    </a:lnT>
+                    <a:lnB w="6350">
+                      <a:solidFill>
+                        <a:srgbClr val="000000"/>
+                      </a:solidFill>
+                      <a:prstDash val="solid"/>
+                    </a:lnB>
+                  </a:tcPr>
+                </a:tc>
+                <a:tc>
+                  <a:txBody>
+                    <a:bodyPr/>
+                    <a:lstStyle/>
+                    <a:p>
+                      <a:pPr marL="635" marR="0" lvl="0" indent="0" algn="ctr" defTabSz="914400" eaLnBrk="1" fontAlgn="auto" latinLnBrk="0" hangingPunct="1">
+                        <a:lnSpc>
+                          <a:spcPct val="100000"/>
+                        </a:lnSpc>
+                        <a:spcBef>
+                          <a:spcPts val="305"/>
                         </a:spcBef>
                         <a:spcAft>
                           <a:spcPts val="0"/>
@@ -11008,33 +10993,13 @@
                         <a:tabLst/>
                         <a:defRPr/>
                       </a:pPr>
-                      <a:endParaRPr lang="en-GB" sz="1100" dirty="0"/>
-                    </a:p>
-                    <a:p>
-                      <a:pPr marL="0" marR="0" lvl="0" indent="0" algn="ctr" defTabSz="914400" eaLnBrk="1" fontAlgn="auto" latinLnBrk="0" hangingPunct="1">
-                        <a:lnSpc>
-                          <a:spcPct val="100000"/>
-                        </a:lnSpc>
-                        <a:spcBef>
-                          <a:spcPts val="0"/>
-                        </a:spcBef>
-                        <a:spcAft>
-                          <a:spcPts val="0"/>
-                        </a:spcAft>
-                        <a:buClrTx/>
-                        <a:buSzTx/>
-                        <a:buFontTx/>
-                        <a:buNone/>
-                        <a:tabLst/>
-                        <a:defRPr/>
-                      </a:pPr>
                       <a:r>
                         <a:rPr lang="en-GB" sz="1100" dirty="0"/>
                         <a:t>{{</a:t>
                       </a:r>
                       <a:r>
                         <a:rPr lang="en-GB" sz="1100" dirty="0" err="1"/>
-                        <a:t>tx_off_power_min</a:t>
+                        <a:t>tx_off_power_unit</a:t>
                       </a:r>
                       <a:r>
                         <a:rPr lang="en-GB" sz="1100" dirty="0"/>
@@ -11046,209 +11011,6 @@
                         <a:cs typeface="Roboto" panose="02000000000000000000" pitchFamily="2" charset="0"/>
                       </a:endParaRPr>
                     </a:p>
-                    <a:p>
-                      <a:pPr algn="ctr">
-                        <a:lnSpc>
-                          <a:spcPct val="100000"/>
-                        </a:lnSpc>
-                      </a:pPr>
-                      <a:endParaRPr sz="1100" dirty="0">
-                        <a:latin typeface="Roboto" panose="02000000000000000000" pitchFamily="2" charset="0"/>
-                        <a:ea typeface="Roboto" panose="02000000000000000000" pitchFamily="2" charset="0"/>
-                        <a:cs typeface="Roboto" panose="02000000000000000000" pitchFamily="2" charset="0"/>
-                      </a:endParaRPr>
-                    </a:p>
-                  </a:txBody>
-                  <a:tcPr marL="0" marR="0" marT="0" marB="0" anchor="ctr">
-                    <a:lnL w="6350">
-                      <a:solidFill>
-                        <a:srgbClr val="000000"/>
-                      </a:solidFill>
-                      <a:prstDash val="solid"/>
-                    </a:lnL>
-                    <a:lnR w="6350">
-                      <a:solidFill>
-                        <a:srgbClr val="000000"/>
-                      </a:solidFill>
-                      <a:prstDash val="solid"/>
-                    </a:lnR>
-                    <a:lnT w="6350">
-                      <a:solidFill>
-                        <a:srgbClr val="000000"/>
-                      </a:solidFill>
-                      <a:prstDash val="solid"/>
-                    </a:lnT>
-                    <a:lnB w="6350">
-                      <a:solidFill>
-                        <a:srgbClr val="000000"/>
-                      </a:solidFill>
-                      <a:prstDash val="solid"/>
-                    </a:lnB>
-                  </a:tcPr>
-                </a:tc>
-                <a:tc>
-                  <a:txBody>
-                    <a:bodyPr/>
-                    <a:lstStyle/>
-                    <a:p>
-                      <a:pPr marL="0" marR="0" lvl="0" indent="0" algn="ctr" defTabSz="914400" eaLnBrk="1" fontAlgn="auto" latinLnBrk="0" hangingPunct="1">
-                        <a:lnSpc>
-                          <a:spcPct val="100000"/>
-                        </a:lnSpc>
-                        <a:spcBef>
-                          <a:spcPts val="0"/>
-                        </a:spcBef>
-                        <a:spcAft>
-                          <a:spcPts val="0"/>
-                        </a:spcAft>
-                        <a:buClrTx/>
-                        <a:buSzTx/>
-                        <a:buFontTx/>
-                        <a:buNone/>
-                        <a:tabLst/>
-                        <a:defRPr/>
-                      </a:pPr>
-                      <a:endParaRPr lang="en-GB" sz="1100" dirty="0"/>
-                    </a:p>
-                    <a:p>
-                      <a:pPr marL="0" marR="0" lvl="0" indent="0" algn="ctr" defTabSz="914400" eaLnBrk="1" fontAlgn="auto" latinLnBrk="0" hangingPunct="1">
-                        <a:lnSpc>
-                          <a:spcPct val="100000"/>
-                        </a:lnSpc>
-                        <a:spcBef>
-                          <a:spcPts val="0"/>
-                        </a:spcBef>
-                        <a:spcAft>
-                          <a:spcPts val="0"/>
-                        </a:spcAft>
-                        <a:buClrTx/>
-                        <a:buSzTx/>
-                        <a:buFontTx/>
-                        <a:buNone/>
-                        <a:tabLst/>
-                        <a:defRPr/>
-                      </a:pPr>
-                      <a:r>
-                        <a:rPr lang="en-GB" sz="1100" dirty="0"/>
-                        <a:t>{{</a:t>
-                      </a:r>
-                      <a:r>
-                        <a:rPr lang="en-GB" sz="1100" dirty="0" err="1"/>
-                        <a:t>tx_off_power_typical</a:t>
-                      </a:r>
-                      <a:r>
-                        <a:rPr lang="en-GB" sz="1100" dirty="0"/>
-                        <a:t>}}</a:t>
-                      </a:r>
-                      <a:endParaRPr lang="en-GB" sz="1100" dirty="0">
-                        <a:latin typeface="Roboto" panose="02000000000000000000" pitchFamily="2" charset="0"/>
-                        <a:ea typeface="Roboto" panose="02000000000000000000" pitchFamily="2" charset="0"/>
-                        <a:cs typeface="Roboto" panose="02000000000000000000" pitchFamily="2" charset="0"/>
-                      </a:endParaRPr>
-                    </a:p>
-                    <a:p>
-                      <a:pPr algn="ctr">
-                        <a:lnSpc>
-                          <a:spcPct val="100000"/>
-                        </a:lnSpc>
-                      </a:pPr>
-                      <a:endParaRPr sz="1100" dirty="0">
-                        <a:latin typeface="Roboto" panose="02000000000000000000" pitchFamily="2" charset="0"/>
-                        <a:ea typeface="Roboto" panose="02000000000000000000" pitchFamily="2" charset="0"/>
-                        <a:cs typeface="Roboto" panose="02000000000000000000" pitchFamily="2" charset="0"/>
-                      </a:endParaRPr>
-                    </a:p>
-                  </a:txBody>
-                  <a:tcPr marL="0" marR="0" marT="0" marB="0" anchor="ctr">
-                    <a:lnL w="6350">
-                      <a:solidFill>
-                        <a:srgbClr val="000000"/>
-                      </a:solidFill>
-                      <a:prstDash val="solid"/>
-                    </a:lnL>
-                    <a:lnR w="6350">
-                      <a:solidFill>
-                        <a:srgbClr val="000000"/>
-                      </a:solidFill>
-                      <a:prstDash val="solid"/>
-                    </a:lnR>
-                    <a:lnT w="6350">
-                      <a:solidFill>
-                        <a:srgbClr val="000000"/>
-                      </a:solidFill>
-                      <a:prstDash val="solid"/>
-                    </a:lnT>
-                    <a:lnB w="6350">
-                      <a:solidFill>
-                        <a:srgbClr val="000000"/>
-                      </a:solidFill>
-                      <a:prstDash val="solid"/>
-                    </a:lnB>
-                  </a:tcPr>
-                </a:tc>
-                <a:tc>
-                  <a:txBody>
-                    <a:bodyPr/>
-                    <a:lstStyle/>
-                    <a:p>
-                      <a:pPr marL="180340" algn="ctr">
-                        <a:lnSpc>
-                          <a:spcPct val="100000"/>
-                        </a:lnSpc>
-                        <a:spcBef>
-                          <a:spcPts val="305"/>
-                        </a:spcBef>
-                      </a:pPr>
-                      <a:r>
-                        <a:rPr lang="en-GB" sz="1100" dirty="0"/>
-                        <a:t>{{</a:t>
-                      </a:r>
-                      <a:r>
-                        <a:rPr lang="en-GB" sz="1100" dirty="0" err="1"/>
-                        <a:t>tx_off_power</a:t>
-                      </a:r>
-                      <a:r>
-                        <a:rPr lang="en-GB" sz="1100" dirty="0"/>
-                        <a:t>  _max}}</a:t>
-                      </a:r>
-                      <a:endParaRPr sz="1100" dirty="0">
-                        <a:latin typeface="Roboto" panose="02000000000000000000" pitchFamily="2" charset="0"/>
-                        <a:ea typeface="Roboto" panose="02000000000000000000" pitchFamily="2" charset="0"/>
-                        <a:cs typeface="Roboto" panose="02000000000000000000" pitchFamily="2" charset="0"/>
-                      </a:endParaRPr>
-                    </a:p>
-                  </a:txBody>
-                  <a:tcPr marL="0" marR="0" marT="48408" marB="0" anchor="ctr">
-                    <a:lnL w="6350">
-                      <a:solidFill>
-                        <a:srgbClr val="000000"/>
-                      </a:solidFill>
-                      <a:prstDash val="solid"/>
-                    </a:lnL>
-                    <a:lnR w="6350">
-                      <a:solidFill>
-                        <a:srgbClr val="000000"/>
-                      </a:solidFill>
-                      <a:prstDash val="solid"/>
-                    </a:lnR>
-                    <a:lnT w="6350">
-                      <a:solidFill>
-                        <a:srgbClr val="000000"/>
-                      </a:solidFill>
-                      <a:prstDash val="solid"/>
-                    </a:lnT>
-                    <a:lnB w="6350">
-                      <a:solidFill>
-                        <a:srgbClr val="000000"/>
-                      </a:solidFill>
-                      <a:prstDash val="solid"/>
-                    </a:lnB>
-                  </a:tcPr>
-                </a:tc>
-                <a:tc>
-                  <a:txBody>
-                    <a:bodyPr/>
-                    <a:lstStyle/>
                     <a:p>
                       <a:pPr marL="635" algn="ctr">
                         <a:lnSpc>
@@ -11258,18 +11020,6 @@
                           <a:spcPts val="305"/>
                         </a:spcBef>
                       </a:pPr>
-                      <a:r>
-                        <a:rPr lang="en-GB" sz="1100" dirty="0"/>
-                        <a:t>{{</a:t>
-                      </a:r>
-                      <a:r>
-                        <a:rPr lang="en-GB" sz="1100" dirty="0" err="1"/>
-                        <a:t>tx_off_power_unit</a:t>
-                      </a:r>
-                      <a:r>
-                        <a:rPr lang="en-GB" sz="1100" dirty="0"/>
-                        <a:t>}}</a:t>
-                      </a:r>
                       <a:endParaRPr sz="1100" dirty="0">
                         <a:latin typeface="Roboto" panose="02000000000000000000" pitchFamily="2" charset="0"/>
                         <a:ea typeface="Roboto" panose="02000000000000000000" pitchFamily="2" charset="0"/>
@@ -11545,18 +11295,6 @@
                           <a:spcPts val="1010"/>
                         </a:spcBef>
                       </a:pPr>
-                      <a:r>
-                        <a:rPr lang="en-GB" sz="1100" dirty="0"/>
-                        <a:t>{{tx_</a:t>
-                      </a:r>
-                      <a:r>
-                        <a:rPr lang="en-GB" sz="1100" dirty="0" err="1"/>
-                        <a:t>oma</a:t>
-                      </a:r>
-                      <a:r>
-                        <a:rPr lang="en-GB" sz="1100" dirty="0"/>
-                        <a:t>__typical}}</a:t>
-                      </a:r>
                       <a:endParaRPr lang="en-GB" sz="1100" dirty="0">
                         <a:latin typeface="Roboto" panose="02000000000000000000" pitchFamily="2" charset="0"/>
                         <a:ea typeface="Roboto" panose="02000000000000000000" pitchFamily="2" charset="0"/>
@@ -11604,18 +11342,6 @@
                           <a:spcPts val="1010"/>
                         </a:spcBef>
                       </a:pPr>
-                      <a:r>
-                        <a:rPr lang="en-GB" sz="1100" dirty="0"/>
-                        <a:t>{{</a:t>
-                      </a:r>
-                      <a:r>
-                        <a:rPr lang="en-GB" sz="1100" dirty="0" err="1"/>
-                        <a:t>tx_oma_max</a:t>
-                      </a:r>
-                      <a:r>
-                        <a:rPr lang="en-GB" sz="1100" dirty="0"/>
-                        <a:t>}}</a:t>
-                      </a:r>
                       <a:endParaRPr sz="1100" dirty="0">
                         <a:latin typeface="Roboto" panose="02000000000000000000" pitchFamily="2" charset="0"/>
                         <a:ea typeface="Roboto" panose="02000000000000000000" pitchFamily="2" charset="0"/>
@@ -11655,6 +11381,42 @@
                     <a:bodyPr/>
                     <a:lstStyle/>
                     <a:p>
+                      <a:pPr marL="635" marR="0" lvl="0" indent="0" algn="ctr" defTabSz="914400" eaLnBrk="1" fontAlgn="auto" latinLnBrk="0" hangingPunct="1">
+                        <a:lnSpc>
+                          <a:spcPct val="100000"/>
+                        </a:lnSpc>
+                        <a:spcBef>
+                          <a:spcPts val="1010"/>
+                        </a:spcBef>
+                        <a:spcAft>
+                          <a:spcPts val="0"/>
+                        </a:spcAft>
+                        <a:buClrTx/>
+                        <a:buSzTx/>
+                        <a:buFontTx/>
+                        <a:buNone/>
+                        <a:tabLst/>
+                        <a:defRPr/>
+                      </a:pPr>
+                      <a:r>
+                        <a:rPr lang="en-GB" sz="1100" dirty="0"/>
+                        <a:t>{{</a:t>
+                      </a:r>
+                      <a:r>
+                        <a:rPr lang="en-GB" sz="1100" dirty="0" err="1"/>
+                        <a:t>tx_oma_unit</a:t>
+                      </a:r>
+                      <a:r>
+                        <a:rPr lang="en-GB" sz="1100" dirty="0"/>
+                        <a:t>}}</a:t>
+                      </a:r>
+                      <a:endParaRPr lang="en-GB" sz="1100" dirty="0">
+                        <a:latin typeface="Roboto" panose="02000000000000000000" pitchFamily="2" charset="0"/>
+                        <a:ea typeface="Roboto" panose="02000000000000000000" pitchFamily="2" charset="0"/>
+                        <a:cs typeface="Roboto" panose="02000000000000000000" pitchFamily="2" charset="0"/>
+                      </a:endParaRPr>
+                    </a:p>
+                    <a:p>
                       <a:pPr marL="635" algn="ctr">
                         <a:lnSpc>
                           <a:spcPct val="100000"/>
@@ -11663,18 +11425,6 @@
                           <a:spcPts val="1010"/>
                         </a:spcBef>
                       </a:pPr>
-                      <a:r>
-                        <a:rPr lang="en-GB" sz="1100" dirty="0"/>
-                        <a:t>{{</a:t>
-                      </a:r>
-                      <a:r>
-                        <a:rPr lang="en-GB" sz="1100" dirty="0" err="1"/>
-                        <a:t>tx_oma_unit</a:t>
-                      </a:r>
-                      <a:r>
-                        <a:rPr lang="en-GB" sz="1100" dirty="0"/>
-                        <a:t>}}</a:t>
-                      </a:r>
                       <a:endParaRPr sz="1100" dirty="0">
                         <a:latin typeface="Roboto" panose="02000000000000000000" pitchFamily="2" charset="0"/>
                         <a:ea typeface="Roboto" panose="02000000000000000000" pitchFamily="2" charset="0"/>
@@ -12270,14 +12020,14 @@
           <p:nvPr>
             <p:extLst>
               <p:ext uri="{D42A27DB-BD31-4B8C-83A1-F6EECF244321}">
-                <p14:modId xmlns:p14="http://schemas.microsoft.com/office/powerpoint/2010/main" val="888147851"/>
+                <p14:modId xmlns:p14="http://schemas.microsoft.com/office/powerpoint/2010/main" val="1609773809"/>
               </p:ext>
             </p:extLst>
           </p:nvPr>
         </p:nvGraphicFramePr>
         <p:xfrm>
           <a:off x="506448" y="6448746"/>
-          <a:ext cx="8093005" cy="3095817"/>
+          <a:ext cx="8093005" cy="2398706"/>
         </p:xfrm>
         <a:graphic>
           <a:graphicData uri="http://schemas.openxmlformats.org/drawingml/2006/table">
@@ -12307,14 +12057,14 @@
                     </a:ext>
                   </a:extLst>
                 </a:gridCol>
-                <a:gridCol w="724389">
+                <a:gridCol w="709921">
                   <a:extLst>
                     <a:ext uri="{9D8B030D-6E8A-4147-A177-3AD203B41FA5}">
                       <a16:colId xmlns:a16="http://schemas.microsoft.com/office/drawing/2014/main" val="20003"/>
                     </a:ext>
                   </a:extLst>
                 </a:gridCol>
-                <a:gridCol w="724391">
+                <a:gridCol w="738859">
                   <a:extLst>
                     <a:ext uri="{9D8B030D-6E8A-4147-A177-3AD203B41FA5}">
                       <a16:colId xmlns:a16="http://schemas.microsoft.com/office/drawing/2014/main" val="20004"/>
@@ -13314,6 +13064,109 @@
                       <a:endParaRPr lang="en-GB" sz="1100" dirty="0"/>
                     </a:p>
                     <a:p>
+                      <a:pPr algn="ctr">
+                        <a:lnSpc>
+                          <a:spcPct val="100000"/>
+                        </a:lnSpc>
+                      </a:pPr>
+                      <a:endParaRPr sz="1100" dirty="0">
+                        <a:latin typeface="Roboto" panose="02000000000000000000" pitchFamily="2" charset="0"/>
+                        <a:ea typeface="Roboto" panose="02000000000000000000" pitchFamily="2" charset="0"/>
+                        <a:cs typeface="Roboto" panose="02000000000000000000" pitchFamily="2" charset="0"/>
+                      </a:endParaRPr>
+                    </a:p>
+                  </a:txBody>
+                  <a:tcPr marL="0" marR="0" marT="0" marB="0" anchor="ctr">
+                    <a:lnL w="6350">
+                      <a:solidFill>
+                        <a:srgbClr val="000000"/>
+                      </a:solidFill>
+                      <a:prstDash val="solid"/>
+                    </a:lnL>
+                    <a:lnR w="6350">
+                      <a:solidFill>
+                        <a:srgbClr val="000000"/>
+                      </a:solidFill>
+                      <a:prstDash val="solid"/>
+                    </a:lnR>
+                    <a:lnT w="6350">
+                      <a:solidFill>
+                        <a:srgbClr val="000000"/>
+                      </a:solidFill>
+                      <a:prstDash val="solid"/>
+                    </a:lnT>
+                    <a:lnB w="6350">
+                      <a:solidFill>
+                        <a:srgbClr val="000000"/>
+                      </a:solidFill>
+                      <a:prstDash val="solid"/>
+                    </a:lnB>
+                  </a:tcPr>
+                </a:tc>
+                <a:tc>
+                  <a:txBody>
+                    <a:bodyPr/>
+                    <a:lstStyle/>
+                    <a:p>
+                      <a:pPr algn="ctr">
+                        <a:lnSpc>
+                          <a:spcPct val="100000"/>
+                        </a:lnSpc>
+                        <a:spcBef>
+                          <a:spcPts val="305"/>
+                        </a:spcBef>
+                      </a:pPr>
+                      <a:r>
+                        <a:rPr lang="en-GB" sz="1100" dirty="0"/>
+                        <a:t>{{</a:t>
+                      </a:r>
+                      <a:r>
+                        <a:rPr lang="en-GB" sz="1100" dirty="0" err="1"/>
+                        <a:t>rx_power_min</a:t>
+                      </a:r>
+                      <a:r>
+                        <a:rPr lang="en-GB" sz="1100" dirty="0"/>
+                        <a:t>}}</a:t>
+                      </a:r>
+                      <a:endParaRPr sz="1100" dirty="0">
+                        <a:latin typeface="Roboto" panose="02000000000000000000" pitchFamily="2" charset="0"/>
+                        <a:ea typeface="Roboto" panose="02000000000000000000" pitchFamily="2" charset="0"/>
+                        <a:cs typeface="Roboto" panose="02000000000000000000" pitchFamily="2" charset="0"/>
+                      </a:endParaRPr>
+                    </a:p>
+                  </a:txBody>
+                  <a:tcPr marL="0" marR="0" marT="47288" marB="0" anchor="ctr">
+                    <a:lnL w="6350">
+                      <a:solidFill>
+                        <a:srgbClr val="000000"/>
+                      </a:solidFill>
+                      <a:prstDash val="solid"/>
+                    </a:lnL>
+                    <a:lnR w="6350">
+                      <a:solidFill>
+                        <a:srgbClr val="000000"/>
+                      </a:solidFill>
+                      <a:prstDash val="solid"/>
+                    </a:lnR>
+                    <a:lnT w="6350">
+                      <a:solidFill>
+                        <a:srgbClr val="000000"/>
+                      </a:solidFill>
+                      <a:prstDash val="solid"/>
+                    </a:lnT>
+                    <a:lnB w="6350">
+                      <a:solidFill>
+                        <a:srgbClr val="000000"/>
+                      </a:solidFill>
+                      <a:prstDash val="solid"/>
+                    </a:lnB>
+                  </a:tcPr>
+                </a:tc>
+                <a:tc>
+                  <a:txBody>
+                    <a:bodyPr/>
+                    <a:lstStyle/>
+                    <a:p>
                       <a:pPr marL="0" marR="0" lvl="0" indent="0" algn="ctr" defTabSz="914400" eaLnBrk="1" fontAlgn="auto" latinLnBrk="0" hangingPunct="1">
                         <a:lnSpc>
                           <a:spcPct val="100000"/>
@@ -13331,23 +13184,7 @@
                         <a:tabLst/>
                         <a:defRPr/>
                       </a:pPr>
-                      <a:r>
-                        <a:rPr lang="en-GB" sz="1100" dirty="0"/>
-                        <a:t>{{</a:t>
-                      </a:r>
-                      <a:r>
-                        <a:rPr lang="en-GB" sz="1100" dirty="0" err="1"/>
-                        <a:t>rx_power_power</a:t>
-                      </a:r>
-                      <a:r>
-                        <a:rPr lang="en-GB" sz="1100" dirty="0"/>
-                        <a:t>}}</a:t>
-                      </a:r>
-                      <a:endParaRPr lang="en-GB" sz="1100" dirty="0">
-                        <a:latin typeface="Roboto" panose="02000000000000000000" pitchFamily="2" charset="0"/>
-                        <a:ea typeface="Roboto" panose="02000000000000000000" pitchFamily="2" charset="0"/>
-                        <a:cs typeface="Roboto" panose="02000000000000000000" pitchFamily="2" charset="0"/>
-                      </a:endParaRPr>
+                      <a:endParaRPr lang="en-GB" sz="1100" dirty="0"/>
                     </a:p>
                     <a:p>
                       <a:pPr algn="ctr">
@@ -13355,7 +13192,7 @@
                           <a:spcPct val="100000"/>
                         </a:lnSpc>
                       </a:pPr>
-                      <a:endParaRPr sz="1100" dirty="0">
+                      <a:endParaRPr lang="en-GB" sz="1100" dirty="0">
                         <a:latin typeface="Roboto" panose="02000000000000000000" pitchFamily="2" charset="0"/>
                         <a:ea typeface="Roboto" panose="02000000000000000000" pitchFamily="2" charset="0"/>
                         <a:cs typeface="Roboto" panose="02000000000000000000" pitchFamily="2" charset="0"/>
@@ -13408,7 +13245,7 @@
                       </a:r>
                       <a:r>
                         <a:rPr lang="en-GB" sz="1100" dirty="0" err="1"/>
-                        <a:t>rx_power_min</a:t>
+                        <a:t>rx_power_max</a:t>
                       </a:r>
                       <a:r>
                         <a:rPr lang="en-GB" sz="1100" dirty="0"/>
@@ -13422,6 +13259,765 @@
                     </a:p>
                   </a:txBody>
                   <a:tcPr marL="0" marR="0" marT="47288" marB="0" anchor="ctr">
+                    <a:lnL w="6350">
+                      <a:solidFill>
+                        <a:srgbClr val="000000"/>
+                      </a:solidFill>
+                      <a:prstDash val="solid"/>
+                    </a:lnL>
+                    <a:lnR w="6350">
+                      <a:solidFill>
+                        <a:srgbClr val="000000"/>
+                      </a:solidFill>
+                      <a:prstDash val="solid"/>
+                    </a:lnR>
+                    <a:lnT w="6350">
+                      <a:solidFill>
+                        <a:srgbClr val="000000"/>
+                      </a:solidFill>
+                      <a:prstDash val="solid"/>
+                    </a:lnT>
+                    <a:lnB w="6350">
+                      <a:solidFill>
+                        <a:srgbClr val="000000"/>
+                      </a:solidFill>
+                      <a:prstDash val="solid"/>
+                    </a:lnB>
+                  </a:tcPr>
+                </a:tc>
+                <a:tc>
+                  <a:txBody>
+                    <a:bodyPr/>
+                    <a:lstStyle/>
+                    <a:p>
+                      <a:pPr marL="182880" algn="ctr">
+                        <a:lnSpc>
+                          <a:spcPct val="100000"/>
+                        </a:lnSpc>
+                        <a:spcBef>
+                          <a:spcPts val="305"/>
+                        </a:spcBef>
+                      </a:pPr>
+                      <a:r>
+                        <a:rPr lang="en-GB" sz="1100" dirty="0"/>
+                        <a:t>{{</a:t>
+                      </a:r>
+                      <a:r>
+                        <a:rPr lang="en-GB" sz="1100" dirty="0" err="1"/>
+                        <a:t>rx_power_unit</a:t>
+                      </a:r>
+                      <a:r>
+                        <a:rPr lang="en-GB" sz="1100" dirty="0"/>
+                        <a:t>}}</a:t>
+                      </a:r>
+                      <a:endParaRPr sz="1100" dirty="0">
+                        <a:latin typeface="Roboto" panose="02000000000000000000" pitchFamily="2" charset="0"/>
+                        <a:ea typeface="Roboto" panose="02000000000000000000" pitchFamily="2" charset="0"/>
+                        <a:cs typeface="Roboto" panose="02000000000000000000" pitchFamily="2" charset="0"/>
+                      </a:endParaRPr>
+                    </a:p>
+                  </a:txBody>
+                  <a:tcPr marL="0" marR="0" marT="47288" marB="0" anchor="ctr">
+                    <a:lnL w="6350">
+                      <a:solidFill>
+                        <a:srgbClr val="000000"/>
+                      </a:solidFill>
+                      <a:prstDash val="solid"/>
+                    </a:lnL>
+                    <a:lnR w="6350">
+                      <a:solidFill>
+                        <a:srgbClr val="000000"/>
+                      </a:solidFill>
+                      <a:prstDash val="solid"/>
+                    </a:lnR>
+                    <a:lnT w="6350">
+                      <a:solidFill>
+                        <a:srgbClr val="000000"/>
+                      </a:solidFill>
+                      <a:prstDash val="solid"/>
+                    </a:lnT>
+                    <a:lnB w="6350">
+                      <a:solidFill>
+                        <a:srgbClr val="000000"/>
+                      </a:solidFill>
+                      <a:prstDash val="solid"/>
+                    </a:lnB>
+                  </a:tcPr>
+                </a:tc>
+                <a:tc>
+                  <a:txBody>
+                    <a:bodyPr/>
+                    <a:lstStyle/>
+                    <a:p>
+                      <a:pPr>
+                        <a:lnSpc>
+                          <a:spcPct val="100000"/>
+                        </a:lnSpc>
+                      </a:pPr>
+                      <a:endParaRPr sz="1100">
+                        <a:latin typeface="Roboto" panose="02000000000000000000" pitchFamily="2" charset="0"/>
+                        <a:ea typeface="Roboto" panose="02000000000000000000" pitchFamily="2" charset="0"/>
+                        <a:cs typeface="Roboto" panose="02000000000000000000" pitchFamily="2" charset="0"/>
+                      </a:endParaRPr>
+                    </a:p>
+                  </a:txBody>
+                  <a:tcPr marL="0" marR="0" marT="0" marB="0" anchor="ctr">
+                    <a:lnL w="6350">
+                      <a:solidFill>
+                        <a:srgbClr val="000000"/>
+                      </a:solidFill>
+                      <a:prstDash val="solid"/>
+                    </a:lnL>
+                    <a:lnR w="6350">
+                      <a:solidFill>
+                        <a:srgbClr val="000000"/>
+                      </a:solidFill>
+                      <a:prstDash val="solid"/>
+                    </a:lnR>
+                    <a:lnT w="6350">
+                      <a:solidFill>
+                        <a:srgbClr val="000000"/>
+                      </a:solidFill>
+                      <a:prstDash val="solid"/>
+                    </a:lnT>
+                    <a:lnB w="6350">
+                      <a:solidFill>
+                        <a:srgbClr val="000000"/>
+                      </a:solidFill>
+                      <a:prstDash val="solid"/>
+                    </a:lnB>
+                  </a:tcPr>
+                </a:tc>
+                <a:extLst>
+                  <a:ext uri="{0D108BD9-81ED-4DB2-BD59-A6C34878D82A}">
+                    <a16:rowId xmlns:a16="http://schemas.microsoft.com/office/drawing/2014/main" val="10003"/>
+                  </a:ext>
+                </a:extLst>
+              </a:tr>
+              <a:tr h="348298">
+                <a:tc>
+                  <a:txBody>
+                    <a:bodyPr/>
+                    <a:lstStyle/>
+                    <a:p>
+                      <a:pPr marL="67945" algn="l">
+                        <a:lnSpc>
+                          <a:spcPct val="100000"/>
+                        </a:lnSpc>
+                        <a:spcBef>
+                          <a:spcPts val="305"/>
+                        </a:spcBef>
+                      </a:pPr>
+                      <a:r>
+                        <a:rPr lang="en-GB" sz="1100" dirty="0"/>
+                        <a:t>{{</a:t>
+                      </a:r>
+                      <a:r>
+                        <a:rPr lang="en-GB" sz="1100" dirty="0" err="1"/>
+                        <a:t>rx_sensitivity</a:t>
+                      </a:r>
+                      <a:r>
+                        <a:rPr lang="en-GB" sz="1100" dirty="0"/>
+                        <a:t>}}</a:t>
+                      </a:r>
+                      <a:endParaRPr sz="1100" dirty="0">
+                        <a:latin typeface="Roboto" panose="02000000000000000000" pitchFamily="2" charset="0"/>
+                        <a:ea typeface="Roboto" panose="02000000000000000000" pitchFamily="2" charset="0"/>
+                        <a:cs typeface="Roboto" panose="02000000000000000000" pitchFamily="2" charset="0"/>
+                      </a:endParaRPr>
+                    </a:p>
+                  </a:txBody>
+                  <a:tcPr marL="0" marR="0" marT="47288" marB="0" anchor="ctr">
+                    <a:lnL w="6350">
+                      <a:solidFill>
+                        <a:srgbClr val="000000"/>
+                      </a:solidFill>
+                      <a:prstDash val="solid"/>
+                    </a:lnL>
+                    <a:lnR w="6350">
+                      <a:solidFill>
+                        <a:srgbClr val="000000"/>
+                      </a:solidFill>
+                      <a:prstDash val="solid"/>
+                    </a:lnR>
+                    <a:lnT w="6350">
+                      <a:solidFill>
+                        <a:srgbClr val="000000"/>
+                      </a:solidFill>
+                      <a:prstDash val="solid"/>
+                    </a:lnT>
+                    <a:lnB w="6350">
+                      <a:solidFill>
+                        <a:srgbClr val="000000"/>
+                      </a:solidFill>
+                      <a:prstDash val="solid"/>
+                    </a:lnB>
+                  </a:tcPr>
+                </a:tc>
+                <a:tc>
+                  <a:txBody>
+                    <a:bodyPr/>
+                    <a:lstStyle/>
+                    <a:p>
+                      <a:pPr algn="ctr">
+                        <a:lnSpc>
+                          <a:spcPct val="100000"/>
+                        </a:lnSpc>
+                        <a:spcBef>
+                          <a:spcPts val="305"/>
+                        </a:spcBef>
+                      </a:pPr>
+                      <a:r>
+                        <a:rPr lang="en-GB" sz="1100" dirty="0"/>
+                        <a:t>{{</a:t>
+                      </a:r>
+                      <a:r>
+                        <a:rPr lang="en-GB" sz="1100" dirty="0" err="1"/>
+                        <a:t>rx_sensitivity_symbol</a:t>
+                      </a:r>
+                      <a:r>
+                        <a:rPr lang="en-GB" sz="1100" dirty="0"/>
+                        <a:t>}}</a:t>
+                      </a:r>
+                      <a:endParaRPr sz="1100" dirty="0">
+                        <a:latin typeface="Roboto" panose="02000000000000000000" pitchFamily="2" charset="0"/>
+                        <a:ea typeface="Roboto" panose="02000000000000000000" pitchFamily="2" charset="0"/>
+                        <a:cs typeface="Roboto" panose="02000000000000000000" pitchFamily="2" charset="0"/>
+                      </a:endParaRPr>
+                    </a:p>
+                  </a:txBody>
+                  <a:tcPr marL="0" marR="0" marT="47288" marB="0" anchor="ctr">
+                    <a:lnL w="6350">
+                      <a:solidFill>
+                        <a:srgbClr val="000000"/>
+                      </a:solidFill>
+                      <a:prstDash val="solid"/>
+                    </a:lnL>
+                    <a:lnR w="6350">
+                      <a:solidFill>
+                        <a:srgbClr val="000000"/>
+                      </a:solidFill>
+                      <a:prstDash val="solid"/>
+                    </a:lnR>
+                    <a:lnT w="6350">
+                      <a:solidFill>
+                        <a:srgbClr val="000000"/>
+                      </a:solidFill>
+                      <a:prstDash val="solid"/>
+                    </a:lnT>
+                    <a:lnB w="6350">
+                      <a:solidFill>
+                        <a:srgbClr val="000000"/>
+                      </a:solidFill>
+                      <a:prstDash val="solid"/>
+                    </a:lnB>
+                  </a:tcPr>
+                </a:tc>
+                <a:tc>
+                  <a:txBody>
+                    <a:bodyPr/>
+                    <a:lstStyle/>
+                    <a:p>
+                      <a:pPr algn="ctr">
+                        <a:lnSpc>
+                          <a:spcPct val="100000"/>
+                        </a:lnSpc>
+                        <a:spcBef>
+                          <a:spcPts val="305"/>
+                        </a:spcBef>
+                      </a:pPr>
+                      <a:r>
+                        <a:rPr lang="en-GB" sz="1100" dirty="0"/>
+                        <a:t>{{</a:t>
+                      </a:r>
+                      <a:r>
+                        <a:rPr lang="en-GB" sz="1100" dirty="0" err="1"/>
+                        <a:t>rx_sensitivity_min</a:t>
+                      </a:r>
+                      <a:r>
+                        <a:rPr lang="en-GB" sz="1100" dirty="0"/>
+                        <a:t>}}</a:t>
+                      </a:r>
+                      <a:endParaRPr lang="en-GB" sz="1100" dirty="0">
+                        <a:latin typeface="Roboto" panose="02000000000000000000" pitchFamily="2" charset="0"/>
+                        <a:ea typeface="Roboto" panose="02000000000000000000" pitchFamily="2" charset="0"/>
+                        <a:cs typeface="Roboto" panose="02000000000000000000" pitchFamily="2" charset="0"/>
+                      </a:endParaRPr>
+                    </a:p>
+                  </a:txBody>
+                  <a:tcPr marL="0" marR="0" marT="0" marB="0" anchor="ctr">
+                    <a:lnL w="6350">
+                      <a:solidFill>
+                        <a:srgbClr val="000000"/>
+                      </a:solidFill>
+                      <a:prstDash val="solid"/>
+                    </a:lnL>
+                    <a:lnR w="6350">
+                      <a:solidFill>
+                        <a:srgbClr val="000000"/>
+                      </a:solidFill>
+                      <a:prstDash val="solid"/>
+                    </a:lnR>
+                    <a:lnT w="6350">
+                      <a:solidFill>
+                        <a:srgbClr val="000000"/>
+                      </a:solidFill>
+                      <a:prstDash val="solid"/>
+                    </a:lnT>
+                    <a:lnB w="6350">
+                      <a:solidFill>
+                        <a:srgbClr val="000000"/>
+                      </a:solidFill>
+                      <a:prstDash val="solid"/>
+                    </a:lnB>
+                  </a:tcPr>
+                </a:tc>
+                <a:tc>
+                  <a:txBody>
+                    <a:bodyPr/>
+                    <a:lstStyle/>
+                    <a:p>
+                      <a:pPr algn="ctr">
+                        <a:lnSpc>
+                          <a:spcPct val="100000"/>
+                        </a:lnSpc>
+                      </a:pPr>
+                      <a:endParaRPr lang="en-GB" sz="1100" dirty="0">
+                        <a:latin typeface="Roboto" panose="02000000000000000000" pitchFamily="2" charset="0"/>
+                        <a:ea typeface="Roboto" panose="02000000000000000000" pitchFamily="2" charset="0"/>
+                        <a:cs typeface="Roboto" panose="02000000000000000000" pitchFamily="2" charset="0"/>
+                      </a:endParaRPr>
+                    </a:p>
+                  </a:txBody>
+                  <a:tcPr marL="0" marR="0" marT="0" marB="0" anchor="ctr">
+                    <a:lnL w="6350">
+                      <a:solidFill>
+                        <a:srgbClr val="000000"/>
+                      </a:solidFill>
+                      <a:prstDash val="solid"/>
+                    </a:lnL>
+                    <a:lnR w="6350">
+                      <a:solidFill>
+                        <a:srgbClr val="000000"/>
+                      </a:solidFill>
+                      <a:prstDash val="solid"/>
+                    </a:lnR>
+                    <a:lnT w="6350">
+                      <a:solidFill>
+                        <a:srgbClr val="000000"/>
+                      </a:solidFill>
+                      <a:prstDash val="solid"/>
+                    </a:lnT>
+                    <a:lnB w="6350">
+                      <a:solidFill>
+                        <a:srgbClr val="000000"/>
+                      </a:solidFill>
+                      <a:prstDash val="solid"/>
+                    </a:lnB>
+                  </a:tcPr>
+                </a:tc>
+                <a:tc>
+                  <a:txBody>
+                    <a:bodyPr/>
+                    <a:lstStyle/>
+                    <a:p>
+                      <a:pPr algn="ctr">
+                        <a:lnSpc>
+                          <a:spcPct val="100000"/>
+                        </a:lnSpc>
+                        <a:spcBef>
+                          <a:spcPts val="305"/>
+                        </a:spcBef>
+                      </a:pPr>
+                      <a:r>
+                        <a:rPr lang="en-GB" sz="1100" dirty="0"/>
+                        <a:t>{{</a:t>
+                      </a:r>
+                      <a:r>
+                        <a:rPr lang="en-GB" sz="1100" dirty="0" err="1"/>
+                        <a:t>rx_sensitivity_max</a:t>
+                      </a:r>
+                      <a:r>
+                        <a:rPr lang="en-GB" sz="1100" dirty="0"/>
+                        <a:t>}}</a:t>
+                      </a:r>
+                      <a:endParaRPr sz="1100" dirty="0">
+                        <a:latin typeface="Roboto" panose="02000000000000000000" pitchFamily="2" charset="0"/>
+                        <a:ea typeface="Roboto" panose="02000000000000000000" pitchFamily="2" charset="0"/>
+                        <a:cs typeface="Roboto" panose="02000000000000000000" pitchFamily="2" charset="0"/>
+                      </a:endParaRPr>
+                    </a:p>
+                  </a:txBody>
+                  <a:tcPr marL="0" marR="0" marT="47288" marB="0" anchor="ctr">
+                    <a:lnL w="6350">
+                      <a:solidFill>
+                        <a:srgbClr val="000000"/>
+                      </a:solidFill>
+                      <a:prstDash val="solid"/>
+                    </a:lnL>
+                    <a:lnR w="6350">
+                      <a:solidFill>
+                        <a:srgbClr val="000000"/>
+                      </a:solidFill>
+                      <a:prstDash val="solid"/>
+                    </a:lnR>
+                    <a:lnT w="6350">
+                      <a:solidFill>
+                        <a:srgbClr val="000000"/>
+                      </a:solidFill>
+                      <a:prstDash val="solid"/>
+                    </a:lnT>
+                    <a:lnB w="6350">
+                      <a:solidFill>
+                        <a:srgbClr val="000000"/>
+                      </a:solidFill>
+                      <a:prstDash val="solid"/>
+                    </a:lnB>
+                  </a:tcPr>
+                </a:tc>
+                <a:tc>
+                  <a:txBody>
+                    <a:bodyPr/>
+                    <a:lstStyle/>
+                    <a:p>
+                      <a:pPr marL="242570" algn="ctr">
+                        <a:lnSpc>
+                          <a:spcPct val="100000"/>
+                        </a:lnSpc>
+                        <a:spcBef>
+                          <a:spcPts val="305"/>
+                        </a:spcBef>
+                      </a:pPr>
+                      <a:r>
+                        <a:rPr lang="en-GB" sz="1100" dirty="0"/>
+                        <a:t>{{</a:t>
+                      </a:r>
+                      <a:r>
+                        <a:rPr lang="en-GB" sz="1100" dirty="0" err="1"/>
+                        <a:t>rx_sensitivity_unit</a:t>
+                      </a:r>
+                      <a:r>
+                        <a:rPr lang="en-GB" sz="1100" dirty="0"/>
+                        <a:t>}}</a:t>
+                      </a:r>
+                      <a:endParaRPr sz="1100" dirty="0">
+                        <a:latin typeface="Roboto" panose="02000000000000000000" pitchFamily="2" charset="0"/>
+                        <a:ea typeface="Roboto" panose="02000000000000000000" pitchFamily="2" charset="0"/>
+                        <a:cs typeface="Roboto" panose="02000000000000000000" pitchFamily="2" charset="0"/>
+                      </a:endParaRPr>
+                    </a:p>
+                  </a:txBody>
+                  <a:tcPr marL="0" marR="0" marT="47288" marB="0" anchor="ctr">
+                    <a:lnL w="6350">
+                      <a:solidFill>
+                        <a:srgbClr val="000000"/>
+                      </a:solidFill>
+                      <a:prstDash val="solid"/>
+                    </a:lnL>
+                    <a:lnR w="6350">
+                      <a:solidFill>
+                        <a:srgbClr val="000000"/>
+                      </a:solidFill>
+                      <a:prstDash val="solid"/>
+                    </a:lnR>
+                    <a:lnT w="6350">
+                      <a:solidFill>
+                        <a:srgbClr val="000000"/>
+                      </a:solidFill>
+                      <a:prstDash val="solid"/>
+                    </a:lnT>
+                    <a:lnB w="6350">
+                      <a:solidFill>
+                        <a:srgbClr val="000000"/>
+                      </a:solidFill>
+                      <a:prstDash val="solid"/>
+                    </a:lnB>
+                  </a:tcPr>
+                </a:tc>
+                <a:tc>
+                  <a:txBody>
+                    <a:bodyPr/>
+                    <a:lstStyle/>
+                    <a:p>
+                      <a:pPr algn="ctr">
+                        <a:lnSpc>
+                          <a:spcPct val="100000"/>
+                        </a:lnSpc>
+                        <a:spcBef>
+                          <a:spcPts val="305"/>
+                        </a:spcBef>
+                      </a:pPr>
+                      <a:r>
+                        <a:rPr sz="1100" spc="-50" dirty="0">
+                          <a:latin typeface="Roboto" panose="02000000000000000000" pitchFamily="2" charset="0"/>
+                          <a:ea typeface="Roboto" panose="02000000000000000000" pitchFamily="2" charset="0"/>
+                          <a:cs typeface="Roboto" panose="02000000000000000000" pitchFamily="2" charset="0"/>
+                        </a:rPr>
+                        <a:t>1</a:t>
+                      </a:r>
+                      <a:endParaRPr sz="1100" dirty="0">
+                        <a:latin typeface="Roboto" panose="02000000000000000000" pitchFamily="2" charset="0"/>
+                        <a:ea typeface="Roboto" panose="02000000000000000000" pitchFamily="2" charset="0"/>
+                        <a:cs typeface="Roboto" panose="02000000000000000000" pitchFamily="2" charset="0"/>
+                      </a:endParaRPr>
+                    </a:p>
+                  </a:txBody>
+                  <a:tcPr marL="0" marR="0" marT="47288" marB="0" anchor="ctr">
+                    <a:lnL w="6350">
+                      <a:solidFill>
+                        <a:srgbClr val="000000"/>
+                      </a:solidFill>
+                      <a:prstDash val="solid"/>
+                    </a:lnL>
+                    <a:lnR w="6350">
+                      <a:solidFill>
+                        <a:srgbClr val="000000"/>
+                      </a:solidFill>
+                      <a:prstDash val="solid"/>
+                    </a:lnR>
+                    <a:lnT w="6350">
+                      <a:solidFill>
+                        <a:srgbClr val="000000"/>
+                      </a:solidFill>
+                      <a:prstDash val="solid"/>
+                    </a:lnT>
+                    <a:lnB w="6350">
+                      <a:solidFill>
+                        <a:srgbClr val="000000"/>
+                      </a:solidFill>
+                      <a:prstDash val="solid"/>
+                    </a:lnB>
+                  </a:tcPr>
+                </a:tc>
+                <a:extLst>
+                  <a:ext uri="{0D108BD9-81ED-4DB2-BD59-A6C34878D82A}">
+                    <a16:rowId xmlns:a16="http://schemas.microsoft.com/office/drawing/2014/main" val="10004"/>
+                  </a:ext>
+                </a:extLst>
+              </a:tr>
+              <a:tr h="348298">
+                <a:tc>
+                  <a:txBody>
+                    <a:bodyPr/>
+                    <a:lstStyle/>
+                    <a:p>
+                      <a:pPr marL="67945" algn="l">
+                        <a:lnSpc>
+                          <a:spcPct val="100000"/>
+                        </a:lnSpc>
+                        <a:spcBef>
+                          <a:spcPts val="309"/>
+                        </a:spcBef>
+                      </a:pPr>
+                      <a:r>
+                        <a:rPr lang="en-GB" sz="1100" dirty="0">
+                          <a:solidFill>
+                            <a:schemeClr val="tx1"/>
+                          </a:solidFill>
+                          <a:latin typeface="+mn-lt"/>
+                          <a:ea typeface="+mn-ea"/>
+                          <a:cs typeface="+mn-cs"/>
+                        </a:rPr>
+                        <a:t>{{</a:t>
+                      </a:r>
+                      <a:r>
+                        <a:rPr lang="en-GB" sz="1100" dirty="0" err="1">
+                          <a:solidFill>
+                            <a:schemeClr val="tx1"/>
+                          </a:solidFill>
+                          <a:latin typeface="+mn-lt"/>
+                          <a:ea typeface="+mn-ea"/>
+                          <a:cs typeface="+mn-cs"/>
+                        </a:rPr>
+                        <a:t>rx_overload</a:t>
+                      </a:r>
+                      <a:r>
+                        <a:rPr lang="en-GB" sz="1100" dirty="0">
+                          <a:solidFill>
+                            <a:schemeClr val="tx1"/>
+                          </a:solidFill>
+                          <a:latin typeface="+mn-lt"/>
+                          <a:ea typeface="+mn-ea"/>
+                          <a:cs typeface="+mn-cs"/>
+                        </a:rPr>
+                        <a:t>}}</a:t>
+                      </a:r>
+                      <a:endParaRPr sz="1100" dirty="0">
+                        <a:latin typeface="Roboto" panose="02000000000000000000" pitchFamily="2" charset="0"/>
+                        <a:ea typeface="Roboto" panose="02000000000000000000" pitchFamily="2" charset="0"/>
+                        <a:cs typeface="Roboto" panose="02000000000000000000" pitchFamily="2" charset="0"/>
+                      </a:endParaRPr>
+                    </a:p>
+                  </a:txBody>
+                  <a:tcPr marL="0" marR="0" marT="48062" marB="0" anchor="ctr">
+                    <a:lnL w="6350">
+                      <a:solidFill>
+                        <a:srgbClr val="000000"/>
+                      </a:solidFill>
+                      <a:prstDash val="solid"/>
+                    </a:lnL>
+                    <a:lnR w="6350">
+                      <a:solidFill>
+                        <a:srgbClr val="000000"/>
+                      </a:solidFill>
+                      <a:prstDash val="solid"/>
+                    </a:lnR>
+                    <a:lnT w="6350">
+                      <a:solidFill>
+                        <a:srgbClr val="000000"/>
+                      </a:solidFill>
+                      <a:prstDash val="solid"/>
+                    </a:lnT>
+                    <a:lnB w="6350">
+                      <a:solidFill>
+                        <a:srgbClr val="000000"/>
+                      </a:solidFill>
+                      <a:prstDash val="solid"/>
+                    </a:lnB>
+                  </a:tcPr>
+                </a:tc>
+                <a:tc>
+                  <a:txBody>
+                    <a:bodyPr/>
+                    <a:lstStyle/>
+                    <a:p>
+                      <a:pPr algn="ctr">
+                        <a:lnSpc>
+                          <a:spcPct val="100000"/>
+                        </a:lnSpc>
+                        <a:spcBef>
+                          <a:spcPts val="370"/>
+                        </a:spcBef>
+                      </a:pPr>
+                      <a:r>
+                        <a:rPr lang="en-GB" sz="1100" dirty="0">
+                          <a:solidFill>
+                            <a:schemeClr val="tx1"/>
+                          </a:solidFill>
+                          <a:latin typeface="+mn-lt"/>
+                          <a:ea typeface="+mn-ea"/>
+                          <a:cs typeface="+mn-cs"/>
+                        </a:rPr>
+                        <a:t>{{</a:t>
+                      </a:r>
+                      <a:r>
+                        <a:rPr lang="en-GB" sz="1100" dirty="0" err="1">
+                          <a:solidFill>
+                            <a:schemeClr val="tx1"/>
+                          </a:solidFill>
+                          <a:latin typeface="+mn-lt"/>
+                          <a:ea typeface="+mn-ea"/>
+                          <a:cs typeface="+mn-cs"/>
+                        </a:rPr>
+                        <a:t>rx_overload_</a:t>
+                      </a:r>
+                      <a:r>
+                        <a:rPr lang="en-GB" sz="1100" dirty="0" err="1"/>
+                        <a:t>symbol</a:t>
+                      </a:r>
+                      <a:r>
+                        <a:rPr lang="en-GB" sz="1100" dirty="0">
+                          <a:solidFill>
+                            <a:schemeClr val="tx1"/>
+                          </a:solidFill>
+                          <a:latin typeface="+mn-lt"/>
+                          <a:ea typeface="+mn-ea"/>
+                          <a:cs typeface="+mn-cs"/>
+                        </a:rPr>
+                        <a:t>}}</a:t>
+                      </a:r>
+                      <a:endParaRPr sz="1100" dirty="0">
+                        <a:latin typeface="Roboto" panose="02000000000000000000" pitchFamily="2" charset="0"/>
+                        <a:ea typeface="Roboto" panose="02000000000000000000" pitchFamily="2" charset="0"/>
+                        <a:cs typeface="Roboto" panose="02000000000000000000" pitchFamily="2" charset="0"/>
+                      </a:endParaRPr>
+                    </a:p>
+                  </a:txBody>
+                  <a:tcPr marL="0" marR="0" marT="57366" marB="0" anchor="ctr">
+                    <a:lnL w="6350">
+                      <a:solidFill>
+                        <a:srgbClr val="000000"/>
+                      </a:solidFill>
+                      <a:prstDash val="solid"/>
+                    </a:lnL>
+                    <a:lnR w="6350">
+                      <a:solidFill>
+                        <a:srgbClr val="000000"/>
+                      </a:solidFill>
+                      <a:prstDash val="solid"/>
+                    </a:lnR>
+                    <a:lnT w="6350">
+                      <a:solidFill>
+                        <a:srgbClr val="000000"/>
+                      </a:solidFill>
+                      <a:prstDash val="solid"/>
+                    </a:lnT>
+                    <a:lnB w="6350">
+                      <a:solidFill>
+                        <a:srgbClr val="000000"/>
+                      </a:solidFill>
+                      <a:prstDash val="solid"/>
+                    </a:lnB>
+                  </a:tcPr>
+                </a:tc>
+                <a:tc>
+                  <a:txBody>
+                    <a:bodyPr/>
+                    <a:lstStyle/>
+                    <a:p>
+                      <a:pPr algn="ctr">
+                        <a:lnSpc>
+                          <a:spcPct val="100000"/>
+                        </a:lnSpc>
+                        <a:spcBef>
+                          <a:spcPts val="309"/>
+                        </a:spcBef>
+                      </a:pPr>
+                      <a:r>
+                        <a:rPr lang="en-GB" sz="1100" dirty="0">
+                          <a:solidFill>
+                            <a:schemeClr val="tx1"/>
+                          </a:solidFill>
+                          <a:latin typeface="+mn-lt"/>
+                          <a:ea typeface="+mn-ea"/>
+                          <a:cs typeface="+mn-cs"/>
+                        </a:rPr>
+                        <a:t>{{</a:t>
+                      </a:r>
+                      <a:r>
+                        <a:rPr lang="en-GB" sz="1100" dirty="0" err="1">
+                          <a:solidFill>
+                            <a:schemeClr val="tx1"/>
+                          </a:solidFill>
+                          <a:latin typeface="+mn-lt"/>
+                          <a:ea typeface="+mn-ea"/>
+                          <a:cs typeface="+mn-cs"/>
+                        </a:rPr>
+                        <a:t>rx_overload_</a:t>
+                      </a:r>
+                      <a:r>
+                        <a:rPr lang="en-GB" sz="1100" dirty="0" err="1"/>
+                        <a:t>min</a:t>
+                      </a:r>
+                      <a:r>
+                        <a:rPr lang="en-GB" sz="1100" dirty="0">
+                          <a:solidFill>
+                            <a:schemeClr val="tx1"/>
+                          </a:solidFill>
+                          <a:latin typeface="+mn-lt"/>
+                          <a:ea typeface="+mn-ea"/>
+                          <a:cs typeface="+mn-cs"/>
+                        </a:rPr>
+                        <a:t>}}</a:t>
+                      </a:r>
+                      <a:endParaRPr sz="1100" dirty="0">
+                        <a:latin typeface="Roboto" panose="02000000000000000000" pitchFamily="2" charset="0"/>
+                        <a:ea typeface="Roboto" panose="02000000000000000000" pitchFamily="2" charset="0"/>
+                        <a:cs typeface="Roboto" panose="02000000000000000000" pitchFamily="2" charset="0"/>
+                      </a:endParaRPr>
+                    </a:p>
+                  </a:txBody>
+                  <a:tcPr marL="0" marR="0" marT="48062" marB="0" anchor="ctr">
                     <a:lnL w="6350">
                       <a:solidFill>
                         <a:srgbClr val="000000"/>
@@ -13470,703 +14066,6 @@
                         <a:tabLst/>
                         <a:defRPr/>
                       </a:pPr>
-                      <a:endParaRPr lang="en-GB" sz="1100" dirty="0"/>
-                    </a:p>
-                    <a:p>
-                      <a:pPr marL="0" marR="0" lvl="0" indent="0" algn="ctr" defTabSz="914400" eaLnBrk="1" fontAlgn="auto" latinLnBrk="0" hangingPunct="1">
-                        <a:lnSpc>
-                          <a:spcPct val="100000"/>
-                        </a:lnSpc>
-                        <a:spcBef>
-                          <a:spcPts val="0"/>
-                        </a:spcBef>
-                        <a:spcAft>
-                          <a:spcPts val="0"/>
-                        </a:spcAft>
-                        <a:buClrTx/>
-                        <a:buSzTx/>
-                        <a:buFontTx/>
-                        <a:buNone/>
-                        <a:tabLst/>
-                        <a:defRPr/>
-                      </a:pPr>
-                      <a:r>
-                        <a:rPr lang="en-GB" sz="1100" dirty="0"/>
-                        <a:t>{{</a:t>
-                      </a:r>
-                      <a:r>
-                        <a:rPr lang="en-GB" sz="1100" dirty="0" err="1"/>
-                        <a:t>rx_power_typical</a:t>
-                      </a:r>
-                      <a:r>
-                        <a:rPr lang="en-GB" sz="1100" dirty="0"/>
-                        <a:t>}}</a:t>
-                      </a:r>
-                      <a:endParaRPr lang="en-GB" sz="1100" dirty="0">
-                        <a:latin typeface="Roboto" panose="02000000000000000000" pitchFamily="2" charset="0"/>
-                        <a:ea typeface="Roboto" panose="02000000000000000000" pitchFamily="2" charset="0"/>
-                        <a:cs typeface="Roboto" panose="02000000000000000000" pitchFamily="2" charset="0"/>
-                      </a:endParaRPr>
-                    </a:p>
-                    <a:p>
-                      <a:pPr algn="ctr">
-                        <a:lnSpc>
-                          <a:spcPct val="100000"/>
-                        </a:lnSpc>
-                      </a:pPr>
-                      <a:endParaRPr lang="en-GB" sz="1100" dirty="0">
-                        <a:latin typeface="Roboto" panose="02000000000000000000" pitchFamily="2" charset="0"/>
-                        <a:ea typeface="Roboto" panose="02000000000000000000" pitchFamily="2" charset="0"/>
-                        <a:cs typeface="Roboto" panose="02000000000000000000" pitchFamily="2" charset="0"/>
-                      </a:endParaRPr>
-                    </a:p>
-                  </a:txBody>
-                  <a:tcPr marL="0" marR="0" marT="0" marB="0" anchor="ctr">
-                    <a:lnL w="6350">
-                      <a:solidFill>
-                        <a:srgbClr val="000000"/>
-                      </a:solidFill>
-                      <a:prstDash val="solid"/>
-                    </a:lnL>
-                    <a:lnR w="6350">
-                      <a:solidFill>
-                        <a:srgbClr val="000000"/>
-                      </a:solidFill>
-                      <a:prstDash val="solid"/>
-                    </a:lnR>
-                    <a:lnT w="6350">
-                      <a:solidFill>
-                        <a:srgbClr val="000000"/>
-                      </a:solidFill>
-                      <a:prstDash val="solid"/>
-                    </a:lnT>
-                    <a:lnB w="6350">
-                      <a:solidFill>
-                        <a:srgbClr val="000000"/>
-                      </a:solidFill>
-                      <a:prstDash val="solid"/>
-                    </a:lnB>
-                  </a:tcPr>
-                </a:tc>
-                <a:tc>
-                  <a:txBody>
-                    <a:bodyPr/>
-                    <a:lstStyle/>
-                    <a:p>
-                      <a:pPr algn="ctr">
-                        <a:lnSpc>
-                          <a:spcPct val="100000"/>
-                        </a:lnSpc>
-                        <a:spcBef>
-                          <a:spcPts val="305"/>
-                        </a:spcBef>
-                      </a:pPr>
-                      <a:r>
-                        <a:rPr lang="en-GB" sz="1100" dirty="0"/>
-                        <a:t>{{</a:t>
-                      </a:r>
-                      <a:r>
-                        <a:rPr lang="en-GB" sz="1100" dirty="0" err="1"/>
-                        <a:t>rx_power_max</a:t>
-                      </a:r>
-                      <a:r>
-                        <a:rPr lang="en-GB" sz="1100" dirty="0"/>
-                        <a:t>}}</a:t>
-                      </a:r>
-                      <a:endParaRPr sz="1100" dirty="0">
-                        <a:latin typeface="Roboto" panose="02000000000000000000" pitchFamily="2" charset="0"/>
-                        <a:ea typeface="Roboto" panose="02000000000000000000" pitchFamily="2" charset="0"/>
-                        <a:cs typeface="Roboto" panose="02000000000000000000" pitchFamily="2" charset="0"/>
-                      </a:endParaRPr>
-                    </a:p>
-                  </a:txBody>
-                  <a:tcPr marL="0" marR="0" marT="47288" marB="0" anchor="ctr">
-                    <a:lnL w="6350">
-                      <a:solidFill>
-                        <a:srgbClr val="000000"/>
-                      </a:solidFill>
-                      <a:prstDash val="solid"/>
-                    </a:lnL>
-                    <a:lnR w="6350">
-                      <a:solidFill>
-                        <a:srgbClr val="000000"/>
-                      </a:solidFill>
-                      <a:prstDash val="solid"/>
-                    </a:lnR>
-                    <a:lnT w="6350">
-                      <a:solidFill>
-                        <a:srgbClr val="000000"/>
-                      </a:solidFill>
-                      <a:prstDash val="solid"/>
-                    </a:lnT>
-                    <a:lnB w="6350">
-                      <a:solidFill>
-                        <a:srgbClr val="000000"/>
-                      </a:solidFill>
-                      <a:prstDash val="solid"/>
-                    </a:lnB>
-                  </a:tcPr>
-                </a:tc>
-                <a:tc>
-                  <a:txBody>
-                    <a:bodyPr/>
-                    <a:lstStyle/>
-                    <a:p>
-                      <a:pPr marL="182880" algn="ctr">
-                        <a:lnSpc>
-                          <a:spcPct val="100000"/>
-                        </a:lnSpc>
-                        <a:spcBef>
-                          <a:spcPts val="305"/>
-                        </a:spcBef>
-                      </a:pPr>
-                      <a:r>
-                        <a:rPr lang="en-GB" sz="1100" dirty="0"/>
-                        <a:t>{{</a:t>
-                      </a:r>
-                      <a:r>
-                        <a:rPr lang="en-GB" sz="1100" dirty="0" err="1"/>
-                        <a:t>rx_power_unit</a:t>
-                      </a:r>
-                      <a:r>
-                        <a:rPr lang="en-GB" sz="1100" dirty="0"/>
-                        <a:t>}}</a:t>
-                      </a:r>
-                      <a:endParaRPr sz="1100" dirty="0">
-                        <a:latin typeface="Roboto" panose="02000000000000000000" pitchFamily="2" charset="0"/>
-                        <a:ea typeface="Roboto" panose="02000000000000000000" pitchFamily="2" charset="0"/>
-                        <a:cs typeface="Roboto" panose="02000000000000000000" pitchFamily="2" charset="0"/>
-                      </a:endParaRPr>
-                    </a:p>
-                  </a:txBody>
-                  <a:tcPr marL="0" marR="0" marT="47288" marB="0" anchor="ctr">
-                    <a:lnL w="6350">
-                      <a:solidFill>
-                        <a:srgbClr val="000000"/>
-                      </a:solidFill>
-                      <a:prstDash val="solid"/>
-                    </a:lnL>
-                    <a:lnR w="6350">
-                      <a:solidFill>
-                        <a:srgbClr val="000000"/>
-                      </a:solidFill>
-                      <a:prstDash val="solid"/>
-                    </a:lnR>
-                    <a:lnT w="6350">
-                      <a:solidFill>
-                        <a:srgbClr val="000000"/>
-                      </a:solidFill>
-                      <a:prstDash val="solid"/>
-                    </a:lnT>
-                    <a:lnB w="6350">
-                      <a:solidFill>
-                        <a:srgbClr val="000000"/>
-                      </a:solidFill>
-                      <a:prstDash val="solid"/>
-                    </a:lnB>
-                  </a:tcPr>
-                </a:tc>
-                <a:tc>
-                  <a:txBody>
-                    <a:bodyPr/>
-                    <a:lstStyle/>
-                    <a:p>
-                      <a:pPr>
-                        <a:lnSpc>
-                          <a:spcPct val="100000"/>
-                        </a:lnSpc>
-                      </a:pPr>
-                      <a:endParaRPr sz="1100">
-                        <a:latin typeface="Roboto" panose="02000000000000000000" pitchFamily="2" charset="0"/>
-                        <a:ea typeface="Roboto" panose="02000000000000000000" pitchFamily="2" charset="0"/>
-                        <a:cs typeface="Roboto" panose="02000000000000000000" pitchFamily="2" charset="0"/>
-                      </a:endParaRPr>
-                    </a:p>
-                  </a:txBody>
-                  <a:tcPr marL="0" marR="0" marT="0" marB="0" anchor="ctr">
-                    <a:lnL w="6350">
-                      <a:solidFill>
-                        <a:srgbClr val="000000"/>
-                      </a:solidFill>
-                      <a:prstDash val="solid"/>
-                    </a:lnL>
-                    <a:lnR w="6350">
-                      <a:solidFill>
-                        <a:srgbClr val="000000"/>
-                      </a:solidFill>
-                      <a:prstDash val="solid"/>
-                    </a:lnR>
-                    <a:lnT w="6350">
-                      <a:solidFill>
-                        <a:srgbClr val="000000"/>
-                      </a:solidFill>
-                      <a:prstDash val="solid"/>
-                    </a:lnT>
-                    <a:lnB w="6350">
-                      <a:solidFill>
-                        <a:srgbClr val="000000"/>
-                      </a:solidFill>
-                      <a:prstDash val="solid"/>
-                    </a:lnB>
-                  </a:tcPr>
-                </a:tc>
-                <a:extLst>
-                  <a:ext uri="{0D108BD9-81ED-4DB2-BD59-A6C34878D82A}">
-                    <a16:rowId xmlns:a16="http://schemas.microsoft.com/office/drawing/2014/main" val="10003"/>
-                  </a:ext>
-                </a:extLst>
-              </a:tr>
-              <a:tr h="348298">
-                <a:tc>
-                  <a:txBody>
-                    <a:bodyPr/>
-                    <a:lstStyle/>
-                    <a:p>
-                      <a:pPr marL="67945" algn="l">
-                        <a:lnSpc>
-                          <a:spcPct val="100000"/>
-                        </a:lnSpc>
-                        <a:spcBef>
-                          <a:spcPts val="305"/>
-                        </a:spcBef>
-                      </a:pPr>
-                      <a:r>
-                        <a:rPr lang="en-GB" sz="1100" dirty="0"/>
-                        <a:t>{{</a:t>
-                      </a:r>
-                      <a:r>
-                        <a:rPr lang="en-GB" sz="1100" dirty="0" err="1"/>
-                        <a:t>rx_sensitivity</a:t>
-                      </a:r>
-                      <a:r>
-                        <a:rPr lang="en-GB" sz="1100" dirty="0"/>
-                        <a:t>}}</a:t>
-                      </a:r>
-                      <a:endParaRPr sz="1100" dirty="0">
-                        <a:latin typeface="Roboto" panose="02000000000000000000" pitchFamily="2" charset="0"/>
-                        <a:ea typeface="Roboto" panose="02000000000000000000" pitchFamily="2" charset="0"/>
-                        <a:cs typeface="Roboto" panose="02000000000000000000" pitchFamily="2" charset="0"/>
-                      </a:endParaRPr>
-                    </a:p>
-                  </a:txBody>
-                  <a:tcPr marL="0" marR="0" marT="47288" marB="0" anchor="ctr">
-                    <a:lnL w="6350">
-                      <a:solidFill>
-                        <a:srgbClr val="000000"/>
-                      </a:solidFill>
-                      <a:prstDash val="solid"/>
-                    </a:lnL>
-                    <a:lnR w="6350">
-                      <a:solidFill>
-                        <a:srgbClr val="000000"/>
-                      </a:solidFill>
-                      <a:prstDash val="solid"/>
-                    </a:lnR>
-                    <a:lnT w="6350">
-                      <a:solidFill>
-                        <a:srgbClr val="000000"/>
-                      </a:solidFill>
-                      <a:prstDash val="solid"/>
-                    </a:lnT>
-                    <a:lnB w="6350">
-                      <a:solidFill>
-                        <a:srgbClr val="000000"/>
-                      </a:solidFill>
-                      <a:prstDash val="solid"/>
-                    </a:lnB>
-                  </a:tcPr>
-                </a:tc>
-                <a:tc>
-                  <a:txBody>
-                    <a:bodyPr/>
-                    <a:lstStyle/>
-                    <a:p>
-                      <a:pPr algn="ctr">
-                        <a:lnSpc>
-                          <a:spcPct val="100000"/>
-                        </a:lnSpc>
-                        <a:spcBef>
-                          <a:spcPts val="305"/>
-                        </a:spcBef>
-                      </a:pPr>
-                      <a:r>
-                        <a:rPr lang="en-GB" sz="1100" dirty="0"/>
-                        <a:t>{{</a:t>
-                      </a:r>
-                      <a:r>
-                        <a:rPr lang="en-GB" sz="1100" dirty="0" err="1"/>
-                        <a:t>rx_sensitivity_symbol</a:t>
-                      </a:r>
-                      <a:r>
-                        <a:rPr lang="en-GB" sz="1100" dirty="0"/>
-                        <a:t>}}</a:t>
-                      </a:r>
-                      <a:endParaRPr sz="1100" dirty="0">
-                        <a:latin typeface="Roboto" panose="02000000000000000000" pitchFamily="2" charset="0"/>
-                        <a:ea typeface="Roboto" panose="02000000000000000000" pitchFamily="2" charset="0"/>
-                        <a:cs typeface="Roboto" panose="02000000000000000000" pitchFamily="2" charset="0"/>
-                      </a:endParaRPr>
-                    </a:p>
-                  </a:txBody>
-                  <a:tcPr marL="0" marR="0" marT="47288" marB="0" anchor="ctr">
-                    <a:lnL w="6350">
-                      <a:solidFill>
-                        <a:srgbClr val="000000"/>
-                      </a:solidFill>
-                      <a:prstDash val="solid"/>
-                    </a:lnL>
-                    <a:lnR w="6350">
-                      <a:solidFill>
-                        <a:srgbClr val="000000"/>
-                      </a:solidFill>
-                      <a:prstDash val="solid"/>
-                    </a:lnR>
-                    <a:lnT w="6350">
-                      <a:solidFill>
-                        <a:srgbClr val="000000"/>
-                      </a:solidFill>
-                      <a:prstDash val="solid"/>
-                    </a:lnT>
-                    <a:lnB w="6350">
-                      <a:solidFill>
-                        <a:srgbClr val="000000"/>
-                      </a:solidFill>
-                      <a:prstDash val="solid"/>
-                    </a:lnB>
-                  </a:tcPr>
-                </a:tc>
-                <a:tc>
-                  <a:txBody>
-                    <a:bodyPr/>
-                    <a:lstStyle/>
-                    <a:p>
-                      <a:pPr algn="ctr">
-                        <a:lnSpc>
-                          <a:spcPct val="100000"/>
-                        </a:lnSpc>
-                        <a:spcBef>
-                          <a:spcPts val="305"/>
-                        </a:spcBef>
-                      </a:pPr>
-                      <a:r>
-                        <a:rPr lang="en-GB" sz="1100" dirty="0"/>
-                        <a:t>{{</a:t>
-                      </a:r>
-                      <a:r>
-                        <a:rPr lang="en-GB" sz="1100" dirty="0" err="1"/>
-                        <a:t>rx_sensitivity_min</a:t>
-                      </a:r>
-                      <a:r>
-                        <a:rPr lang="en-GB" sz="1100" dirty="0"/>
-                        <a:t>}}</a:t>
-                      </a:r>
-                      <a:endParaRPr lang="en-GB" sz="1100" dirty="0">
-                        <a:latin typeface="Roboto" panose="02000000000000000000" pitchFamily="2" charset="0"/>
-                        <a:ea typeface="Roboto" panose="02000000000000000000" pitchFamily="2" charset="0"/>
-                        <a:cs typeface="Roboto" panose="02000000000000000000" pitchFamily="2" charset="0"/>
-                      </a:endParaRPr>
-                    </a:p>
-                  </a:txBody>
-                  <a:tcPr marL="0" marR="0" marT="0" marB="0" anchor="ctr">
-                    <a:lnL w="6350">
-                      <a:solidFill>
-                        <a:srgbClr val="000000"/>
-                      </a:solidFill>
-                      <a:prstDash val="solid"/>
-                    </a:lnL>
-                    <a:lnR w="6350">
-                      <a:solidFill>
-                        <a:srgbClr val="000000"/>
-                      </a:solidFill>
-                      <a:prstDash val="solid"/>
-                    </a:lnR>
-                    <a:lnT w="6350">
-                      <a:solidFill>
-                        <a:srgbClr val="000000"/>
-                      </a:solidFill>
-                      <a:prstDash val="solid"/>
-                    </a:lnT>
-                    <a:lnB w="6350">
-                      <a:solidFill>
-                        <a:srgbClr val="000000"/>
-                      </a:solidFill>
-                      <a:prstDash val="solid"/>
-                    </a:lnB>
-                  </a:tcPr>
-                </a:tc>
-                <a:tc>
-                  <a:txBody>
-                    <a:bodyPr/>
-                    <a:lstStyle/>
-                    <a:p>
-                      <a:pPr marL="0" marR="0" lvl="0" indent="0" algn="ctr" defTabSz="914400" eaLnBrk="1" fontAlgn="auto" latinLnBrk="0" hangingPunct="1">
-                        <a:lnSpc>
-                          <a:spcPct val="100000"/>
-                        </a:lnSpc>
-                        <a:spcBef>
-                          <a:spcPts val="0"/>
-                        </a:spcBef>
-                        <a:spcAft>
-                          <a:spcPts val="0"/>
-                        </a:spcAft>
-                        <a:buClrTx/>
-                        <a:buSzTx/>
-                        <a:buFontTx/>
-                        <a:buNone/>
-                        <a:tabLst/>
-                        <a:defRPr/>
-                      </a:pPr>
-                      <a:r>
-                        <a:rPr lang="en-GB" sz="1100" dirty="0"/>
-                        <a:t>{{</a:t>
-                      </a:r>
-                      <a:r>
-                        <a:rPr lang="en-GB" sz="1100" dirty="0" err="1"/>
-                        <a:t>rx_sensitivity_typical</a:t>
-                      </a:r>
-                      <a:r>
-                        <a:rPr lang="en-GB" sz="1100" dirty="0"/>
-                        <a:t>}}</a:t>
-                      </a:r>
-                      <a:endParaRPr lang="en-GB" sz="1100" dirty="0">
-                        <a:latin typeface="Roboto" panose="02000000000000000000" pitchFamily="2" charset="0"/>
-                        <a:ea typeface="Roboto" panose="02000000000000000000" pitchFamily="2" charset="0"/>
-                        <a:cs typeface="Roboto" panose="02000000000000000000" pitchFamily="2" charset="0"/>
-                      </a:endParaRPr>
-                    </a:p>
-                    <a:p>
-                      <a:pPr algn="ctr">
-                        <a:lnSpc>
-                          <a:spcPct val="100000"/>
-                        </a:lnSpc>
-                      </a:pPr>
-                      <a:endParaRPr lang="en-GB" sz="1100" dirty="0">
-                        <a:latin typeface="Roboto" panose="02000000000000000000" pitchFamily="2" charset="0"/>
-                        <a:ea typeface="Roboto" panose="02000000000000000000" pitchFamily="2" charset="0"/>
-                        <a:cs typeface="Roboto" panose="02000000000000000000" pitchFamily="2" charset="0"/>
-                      </a:endParaRPr>
-                    </a:p>
-                  </a:txBody>
-                  <a:tcPr marL="0" marR="0" marT="0" marB="0" anchor="ctr">
-                    <a:lnL w="6350">
-                      <a:solidFill>
-                        <a:srgbClr val="000000"/>
-                      </a:solidFill>
-                      <a:prstDash val="solid"/>
-                    </a:lnL>
-                    <a:lnR w="6350">
-                      <a:solidFill>
-                        <a:srgbClr val="000000"/>
-                      </a:solidFill>
-                      <a:prstDash val="solid"/>
-                    </a:lnR>
-                    <a:lnT w="6350">
-                      <a:solidFill>
-                        <a:srgbClr val="000000"/>
-                      </a:solidFill>
-                      <a:prstDash val="solid"/>
-                    </a:lnT>
-                    <a:lnB w="6350">
-                      <a:solidFill>
-                        <a:srgbClr val="000000"/>
-                      </a:solidFill>
-                      <a:prstDash val="solid"/>
-                    </a:lnB>
-                  </a:tcPr>
-                </a:tc>
-                <a:tc>
-                  <a:txBody>
-                    <a:bodyPr/>
-                    <a:lstStyle/>
-                    <a:p>
-                      <a:pPr algn="ctr">
-                        <a:lnSpc>
-                          <a:spcPct val="100000"/>
-                        </a:lnSpc>
-                        <a:spcBef>
-                          <a:spcPts val="305"/>
-                        </a:spcBef>
-                      </a:pPr>
-                      <a:r>
-                        <a:rPr lang="en-GB" sz="1100" dirty="0"/>
-                        <a:t>{{</a:t>
-                      </a:r>
-                      <a:r>
-                        <a:rPr lang="en-GB" sz="1100" dirty="0" err="1"/>
-                        <a:t>rx_sensitivity_max</a:t>
-                      </a:r>
-                      <a:r>
-                        <a:rPr lang="en-GB" sz="1100" dirty="0"/>
-                        <a:t>}}</a:t>
-                      </a:r>
-                      <a:endParaRPr sz="1100" dirty="0">
-                        <a:latin typeface="Roboto" panose="02000000000000000000" pitchFamily="2" charset="0"/>
-                        <a:ea typeface="Roboto" panose="02000000000000000000" pitchFamily="2" charset="0"/>
-                        <a:cs typeface="Roboto" panose="02000000000000000000" pitchFamily="2" charset="0"/>
-                      </a:endParaRPr>
-                    </a:p>
-                  </a:txBody>
-                  <a:tcPr marL="0" marR="0" marT="47288" marB="0" anchor="ctr">
-                    <a:lnL w="6350">
-                      <a:solidFill>
-                        <a:srgbClr val="000000"/>
-                      </a:solidFill>
-                      <a:prstDash val="solid"/>
-                    </a:lnL>
-                    <a:lnR w="6350">
-                      <a:solidFill>
-                        <a:srgbClr val="000000"/>
-                      </a:solidFill>
-                      <a:prstDash val="solid"/>
-                    </a:lnR>
-                    <a:lnT w="6350">
-                      <a:solidFill>
-                        <a:srgbClr val="000000"/>
-                      </a:solidFill>
-                      <a:prstDash val="solid"/>
-                    </a:lnT>
-                    <a:lnB w="6350">
-                      <a:solidFill>
-                        <a:srgbClr val="000000"/>
-                      </a:solidFill>
-                      <a:prstDash val="solid"/>
-                    </a:lnB>
-                  </a:tcPr>
-                </a:tc>
-                <a:tc>
-                  <a:txBody>
-                    <a:bodyPr/>
-                    <a:lstStyle/>
-                    <a:p>
-                      <a:pPr marL="242570" algn="ctr">
-                        <a:lnSpc>
-                          <a:spcPct val="100000"/>
-                        </a:lnSpc>
-                        <a:spcBef>
-                          <a:spcPts val="305"/>
-                        </a:spcBef>
-                      </a:pPr>
-                      <a:r>
-                        <a:rPr lang="en-GB" sz="1100" dirty="0"/>
-                        <a:t>{{</a:t>
-                      </a:r>
-                      <a:r>
-                        <a:rPr lang="en-GB" sz="1100" dirty="0" err="1"/>
-                        <a:t>rx_sensitivity_unit</a:t>
-                      </a:r>
-                      <a:r>
-                        <a:rPr lang="en-GB" sz="1100" dirty="0"/>
-                        <a:t>}}</a:t>
-                      </a:r>
-                      <a:endParaRPr sz="1100" dirty="0">
-                        <a:latin typeface="Roboto" panose="02000000000000000000" pitchFamily="2" charset="0"/>
-                        <a:ea typeface="Roboto" panose="02000000000000000000" pitchFamily="2" charset="0"/>
-                        <a:cs typeface="Roboto" panose="02000000000000000000" pitchFamily="2" charset="0"/>
-                      </a:endParaRPr>
-                    </a:p>
-                  </a:txBody>
-                  <a:tcPr marL="0" marR="0" marT="47288" marB="0" anchor="ctr">
-                    <a:lnL w="6350">
-                      <a:solidFill>
-                        <a:srgbClr val="000000"/>
-                      </a:solidFill>
-                      <a:prstDash val="solid"/>
-                    </a:lnL>
-                    <a:lnR w="6350">
-                      <a:solidFill>
-                        <a:srgbClr val="000000"/>
-                      </a:solidFill>
-                      <a:prstDash val="solid"/>
-                    </a:lnR>
-                    <a:lnT w="6350">
-                      <a:solidFill>
-                        <a:srgbClr val="000000"/>
-                      </a:solidFill>
-                      <a:prstDash val="solid"/>
-                    </a:lnT>
-                    <a:lnB w="6350">
-                      <a:solidFill>
-                        <a:srgbClr val="000000"/>
-                      </a:solidFill>
-                      <a:prstDash val="solid"/>
-                    </a:lnB>
-                  </a:tcPr>
-                </a:tc>
-                <a:tc>
-                  <a:txBody>
-                    <a:bodyPr/>
-                    <a:lstStyle/>
-                    <a:p>
-                      <a:pPr algn="ctr">
-                        <a:lnSpc>
-                          <a:spcPct val="100000"/>
-                        </a:lnSpc>
-                        <a:spcBef>
-                          <a:spcPts val="305"/>
-                        </a:spcBef>
-                      </a:pPr>
-                      <a:r>
-                        <a:rPr sz="1100" spc="-50" dirty="0">
-                          <a:latin typeface="Roboto" panose="02000000000000000000" pitchFamily="2" charset="0"/>
-                          <a:ea typeface="Roboto" panose="02000000000000000000" pitchFamily="2" charset="0"/>
-                          <a:cs typeface="Roboto" panose="02000000000000000000" pitchFamily="2" charset="0"/>
-                        </a:rPr>
-                        <a:t>1</a:t>
-                      </a:r>
-                      <a:endParaRPr sz="1100" dirty="0">
-                        <a:latin typeface="Roboto" panose="02000000000000000000" pitchFamily="2" charset="0"/>
-                        <a:ea typeface="Roboto" panose="02000000000000000000" pitchFamily="2" charset="0"/>
-                        <a:cs typeface="Roboto" panose="02000000000000000000" pitchFamily="2" charset="0"/>
-                      </a:endParaRPr>
-                    </a:p>
-                  </a:txBody>
-                  <a:tcPr marL="0" marR="0" marT="47288" marB="0" anchor="ctr">
-                    <a:lnL w="6350">
-                      <a:solidFill>
-                        <a:srgbClr val="000000"/>
-                      </a:solidFill>
-                      <a:prstDash val="solid"/>
-                    </a:lnL>
-                    <a:lnR w="6350">
-                      <a:solidFill>
-                        <a:srgbClr val="000000"/>
-                      </a:solidFill>
-                      <a:prstDash val="solid"/>
-                    </a:lnR>
-                    <a:lnT w="6350">
-                      <a:solidFill>
-                        <a:srgbClr val="000000"/>
-                      </a:solidFill>
-                      <a:prstDash val="solid"/>
-                    </a:lnT>
-                    <a:lnB w="6350">
-                      <a:solidFill>
-                        <a:srgbClr val="000000"/>
-                      </a:solidFill>
-                      <a:prstDash val="solid"/>
-                    </a:lnB>
-                  </a:tcPr>
-                </a:tc>
-                <a:extLst>
-                  <a:ext uri="{0D108BD9-81ED-4DB2-BD59-A6C34878D82A}">
-                    <a16:rowId xmlns:a16="http://schemas.microsoft.com/office/drawing/2014/main" val="10004"/>
-                  </a:ext>
-                </a:extLst>
-              </a:tr>
-              <a:tr h="348298">
-                <a:tc>
-                  <a:txBody>
-                    <a:bodyPr/>
-                    <a:lstStyle/>
-                    <a:p>
-                      <a:pPr marL="67945" algn="l">
-                        <a:lnSpc>
-                          <a:spcPct val="100000"/>
-                        </a:lnSpc>
-                        <a:spcBef>
-                          <a:spcPts val="309"/>
-                        </a:spcBef>
-                      </a:pPr>
                       <a:r>
                         <a:rPr lang="en-GB" sz="1100" dirty="0">
                           <a:solidFill>
@@ -14187,7 +14086,11 @@
                           <a:ea typeface="+mn-ea"/>
                           <a:cs typeface="+mn-cs"/>
                         </a:rPr>
-                        <a:t>rx_overload</a:t>
+                        <a:t>rx_overload_</a:t>
+                      </a:r>
+                      <a:r>
+                        <a:rPr lang="en-GB" sz="1100" dirty="0" err="1"/>
+                        <a:t>min</a:t>
                       </a:r>
                       <a:r>
                         <a:rPr lang="en-GB" sz="1100" dirty="0">
@@ -14200,14 +14103,26 @@
                         </a:rPr>
                         <a:t>}}</a:t>
                       </a:r>
-                      <a:endParaRPr sz="1100" dirty="0">
+                      <a:endParaRPr lang="en-GB" sz="1100" dirty="0">
                         <a:latin typeface="Roboto" panose="02000000000000000000" pitchFamily="2" charset="0"/>
                         <a:ea typeface="Roboto" panose="02000000000000000000" pitchFamily="2" charset="0"/>
                         <a:cs typeface="Roboto" panose="02000000000000000000" pitchFamily="2" charset="0"/>
                       </a:endParaRPr>
                     </a:p>
+                    <a:p>
+                      <a:pPr algn="ctr">
+                        <a:lnSpc>
+                          <a:spcPct val="100000"/>
+                        </a:lnSpc>
+                      </a:pPr>
+                      <a:endParaRPr lang="en-GB" sz="1100" dirty="0">
+                        <a:latin typeface="Roboto" panose="02000000000000000000" pitchFamily="2" charset="0"/>
+                        <a:ea typeface="Roboto" panose="02000000000000000000" pitchFamily="2" charset="0"/>
+                        <a:cs typeface="Roboto" panose="02000000000000000000" pitchFamily="2" charset="0"/>
+                      </a:endParaRPr>
+                    </a:p>
                   </a:txBody>
-                  <a:tcPr marL="0" marR="0" marT="48062" marB="0" anchor="ctr">
+                  <a:tcPr marL="0" marR="0" marT="0" marB="0" anchor="ctr">
                     <a:lnL w="6350">
                       <a:solidFill>
                         <a:srgbClr val="000000"/>
@@ -14238,340 +14153,6 @@
                   <a:txBody>
                     <a:bodyPr/>
                     <a:lstStyle/>
-                    <a:p>
-                      <a:pPr algn="ctr">
-                        <a:lnSpc>
-                          <a:spcPct val="100000"/>
-                        </a:lnSpc>
-                        <a:spcBef>
-                          <a:spcPts val="370"/>
-                        </a:spcBef>
-                      </a:pPr>
-                      <a:r>
-                        <a:rPr lang="en-GB" sz="1100" dirty="0">
-                          <a:solidFill>
-                            <a:schemeClr val="tx1"/>
-                          </a:solidFill>
-                          <a:latin typeface="+mn-lt"/>
-                          <a:ea typeface="+mn-ea"/>
-                          <a:cs typeface="+mn-cs"/>
-                        </a:rPr>
-                        <a:t>{{</a:t>
-                      </a:r>
-                      <a:r>
-                        <a:rPr lang="en-GB" sz="1100" dirty="0" err="1">
-                          <a:solidFill>
-                            <a:schemeClr val="tx1"/>
-                          </a:solidFill>
-                          <a:latin typeface="+mn-lt"/>
-                          <a:ea typeface="+mn-ea"/>
-                          <a:cs typeface="+mn-cs"/>
-                        </a:rPr>
-                        <a:t>rx_overload_</a:t>
-                      </a:r>
-                      <a:r>
-                        <a:rPr lang="en-GB" sz="1100" dirty="0" err="1"/>
-                        <a:t>symbol</a:t>
-                      </a:r>
-                      <a:r>
-                        <a:rPr lang="en-GB" sz="1100" dirty="0">
-                          <a:solidFill>
-                            <a:schemeClr val="tx1"/>
-                          </a:solidFill>
-                          <a:latin typeface="+mn-lt"/>
-                          <a:ea typeface="+mn-ea"/>
-                          <a:cs typeface="+mn-cs"/>
-                        </a:rPr>
-                        <a:t>}}</a:t>
-                      </a:r>
-                      <a:endParaRPr sz="1100" dirty="0">
-                        <a:latin typeface="Roboto" panose="02000000000000000000" pitchFamily="2" charset="0"/>
-                        <a:ea typeface="Roboto" panose="02000000000000000000" pitchFamily="2" charset="0"/>
-                        <a:cs typeface="Roboto" panose="02000000000000000000" pitchFamily="2" charset="0"/>
-                      </a:endParaRPr>
-                    </a:p>
-                  </a:txBody>
-                  <a:tcPr marL="0" marR="0" marT="57366" marB="0" anchor="ctr">
-                    <a:lnL w="6350">
-                      <a:solidFill>
-                        <a:srgbClr val="000000"/>
-                      </a:solidFill>
-                      <a:prstDash val="solid"/>
-                    </a:lnL>
-                    <a:lnR w="6350">
-                      <a:solidFill>
-                        <a:srgbClr val="000000"/>
-                      </a:solidFill>
-                      <a:prstDash val="solid"/>
-                    </a:lnR>
-                    <a:lnT w="6350">
-                      <a:solidFill>
-                        <a:srgbClr val="000000"/>
-                      </a:solidFill>
-                      <a:prstDash val="solid"/>
-                    </a:lnT>
-                    <a:lnB w="6350">
-                      <a:solidFill>
-                        <a:srgbClr val="000000"/>
-                      </a:solidFill>
-                      <a:prstDash val="solid"/>
-                    </a:lnB>
-                  </a:tcPr>
-                </a:tc>
-                <a:tc>
-                  <a:txBody>
-                    <a:bodyPr/>
-                    <a:lstStyle/>
-                    <a:p>
-                      <a:pPr algn="ctr">
-                        <a:lnSpc>
-                          <a:spcPct val="100000"/>
-                        </a:lnSpc>
-                        <a:spcBef>
-                          <a:spcPts val="309"/>
-                        </a:spcBef>
-                      </a:pPr>
-                      <a:r>
-                        <a:rPr lang="en-GB" sz="1100" dirty="0">
-                          <a:solidFill>
-                            <a:schemeClr val="tx1"/>
-                          </a:solidFill>
-                          <a:latin typeface="+mn-lt"/>
-                          <a:ea typeface="+mn-ea"/>
-                          <a:cs typeface="+mn-cs"/>
-                        </a:rPr>
-                        <a:t>{{</a:t>
-                      </a:r>
-                      <a:r>
-                        <a:rPr lang="en-GB" sz="1100" dirty="0" err="1">
-                          <a:solidFill>
-                            <a:schemeClr val="tx1"/>
-                          </a:solidFill>
-                          <a:latin typeface="+mn-lt"/>
-                          <a:ea typeface="+mn-ea"/>
-                          <a:cs typeface="+mn-cs"/>
-                        </a:rPr>
-                        <a:t>rx_overload_</a:t>
-                      </a:r>
-                      <a:r>
-                        <a:rPr lang="en-GB" sz="1100" dirty="0" err="1"/>
-                        <a:t>min</a:t>
-                      </a:r>
-                      <a:r>
-                        <a:rPr lang="en-GB" sz="1100" dirty="0">
-                          <a:solidFill>
-                            <a:schemeClr val="tx1"/>
-                          </a:solidFill>
-                          <a:latin typeface="+mn-lt"/>
-                          <a:ea typeface="+mn-ea"/>
-                          <a:cs typeface="+mn-cs"/>
-                        </a:rPr>
-                        <a:t>}}</a:t>
-                      </a:r>
-                      <a:endParaRPr sz="1100" dirty="0">
-                        <a:latin typeface="Roboto" panose="02000000000000000000" pitchFamily="2" charset="0"/>
-                        <a:ea typeface="Roboto" panose="02000000000000000000" pitchFamily="2" charset="0"/>
-                        <a:cs typeface="Roboto" panose="02000000000000000000" pitchFamily="2" charset="0"/>
-                      </a:endParaRPr>
-                    </a:p>
-                  </a:txBody>
-                  <a:tcPr marL="0" marR="0" marT="48062" marB="0" anchor="ctr">
-                    <a:lnL w="6350">
-                      <a:solidFill>
-                        <a:srgbClr val="000000"/>
-                      </a:solidFill>
-                      <a:prstDash val="solid"/>
-                    </a:lnL>
-                    <a:lnR w="6350">
-                      <a:solidFill>
-                        <a:srgbClr val="000000"/>
-                      </a:solidFill>
-                      <a:prstDash val="solid"/>
-                    </a:lnR>
-                    <a:lnT w="6350">
-                      <a:solidFill>
-                        <a:srgbClr val="000000"/>
-                      </a:solidFill>
-                      <a:prstDash val="solid"/>
-                    </a:lnT>
-                    <a:lnB w="6350">
-                      <a:solidFill>
-                        <a:srgbClr val="000000"/>
-                      </a:solidFill>
-                      <a:prstDash val="solid"/>
-                    </a:lnB>
-                  </a:tcPr>
-                </a:tc>
-                <a:tc>
-                  <a:txBody>
-                    <a:bodyPr/>
-                    <a:lstStyle/>
-                    <a:p>
-                      <a:pPr marL="0" marR="0" lvl="0" indent="0" algn="ctr" defTabSz="914400" eaLnBrk="1" fontAlgn="auto" latinLnBrk="0" hangingPunct="1">
-                        <a:lnSpc>
-                          <a:spcPct val="100000"/>
-                        </a:lnSpc>
-                        <a:spcBef>
-                          <a:spcPts val="0"/>
-                        </a:spcBef>
-                        <a:spcAft>
-                          <a:spcPts val="0"/>
-                        </a:spcAft>
-                        <a:buClrTx/>
-                        <a:buSzTx/>
-                        <a:buFontTx/>
-                        <a:buNone/>
-                        <a:tabLst/>
-                        <a:defRPr/>
-                      </a:pPr>
-                      <a:r>
-                        <a:rPr lang="en-GB" sz="1100" dirty="0">
-                          <a:solidFill>
-                            <a:schemeClr val="tx1"/>
-                          </a:solidFill>
-                          <a:latin typeface="+mn-lt"/>
-                          <a:ea typeface="+mn-ea"/>
-                          <a:cs typeface="+mn-cs"/>
-                        </a:rPr>
-                        <a:t>{{</a:t>
-                      </a:r>
-                      <a:r>
-                        <a:rPr lang="en-GB" sz="1100" dirty="0" err="1">
-                          <a:solidFill>
-                            <a:schemeClr val="tx1"/>
-                          </a:solidFill>
-                          <a:latin typeface="+mn-lt"/>
-                          <a:ea typeface="+mn-ea"/>
-                          <a:cs typeface="+mn-cs"/>
-                        </a:rPr>
-                        <a:t>rx_overload_</a:t>
-                      </a:r>
-                      <a:r>
-                        <a:rPr lang="en-GB" sz="1100" dirty="0" err="1"/>
-                        <a:t>min</a:t>
-                      </a:r>
-                      <a:r>
-                        <a:rPr lang="en-GB" sz="1100" dirty="0">
-                          <a:solidFill>
-                            <a:schemeClr val="tx1"/>
-                          </a:solidFill>
-                          <a:latin typeface="+mn-lt"/>
-                          <a:ea typeface="+mn-ea"/>
-                          <a:cs typeface="+mn-cs"/>
-                        </a:rPr>
-                        <a:t>}}</a:t>
-                      </a:r>
-                      <a:endParaRPr lang="en-GB" sz="1100" dirty="0">
-                        <a:latin typeface="Roboto" panose="02000000000000000000" pitchFamily="2" charset="0"/>
-                        <a:ea typeface="Roboto" panose="02000000000000000000" pitchFamily="2" charset="0"/>
-                        <a:cs typeface="Roboto" panose="02000000000000000000" pitchFamily="2" charset="0"/>
-                      </a:endParaRPr>
-                    </a:p>
-                    <a:p>
-                      <a:pPr algn="ctr">
-                        <a:lnSpc>
-                          <a:spcPct val="100000"/>
-                        </a:lnSpc>
-                      </a:pPr>
-                      <a:endParaRPr lang="en-GB" sz="1100" dirty="0">
-                        <a:latin typeface="Roboto" panose="02000000000000000000" pitchFamily="2" charset="0"/>
-                        <a:ea typeface="Roboto" panose="02000000000000000000" pitchFamily="2" charset="0"/>
-                        <a:cs typeface="Roboto" panose="02000000000000000000" pitchFamily="2" charset="0"/>
-                      </a:endParaRPr>
-                    </a:p>
-                  </a:txBody>
-                  <a:tcPr marL="0" marR="0" marT="0" marB="0" anchor="ctr">
-                    <a:lnL w="6350">
-                      <a:solidFill>
-                        <a:srgbClr val="000000"/>
-                      </a:solidFill>
-                      <a:prstDash val="solid"/>
-                    </a:lnL>
-                    <a:lnR w="6350">
-                      <a:solidFill>
-                        <a:srgbClr val="000000"/>
-                      </a:solidFill>
-                      <a:prstDash val="solid"/>
-                    </a:lnR>
-                    <a:lnT w="6350">
-                      <a:solidFill>
-                        <a:srgbClr val="000000"/>
-                      </a:solidFill>
-                      <a:prstDash val="solid"/>
-                    </a:lnT>
-                    <a:lnB w="6350">
-                      <a:solidFill>
-                        <a:srgbClr val="000000"/>
-                      </a:solidFill>
-                      <a:prstDash val="solid"/>
-                    </a:lnB>
-                  </a:tcPr>
-                </a:tc>
-                <a:tc>
-                  <a:txBody>
-                    <a:bodyPr/>
-                    <a:lstStyle/>
-                    <a:p>
-                      <a:pPr marL="0" marR="0" lvl="0" indent="0" algn="ctr" defTabSz="914400" eaLnBrk="1" fontAlgn="auto" latinLnBrk="0" hangingPunct="1">
-                        <a:lnSpc>
-                          <a:spcPct val="100000"/>
-                        </a:lnSpc>
-                        <a:spcBef>
-                          <a:spcPts val="0"/>
-                        </a:spcBef>
-                        <a:spcAft>
-                          <a:spcPts val="0"/>
-                        </a:spcAft>
-                        <a:buClrTx/>
-                        <a:buSzTx/>
-                        <a:buFontTx/>
-                        <a:buNone/>
-                        <a:tabLst/>
-                        <a:defRPr/>
-                      </a:pPr>
-                      <a:r>
-                        <a:rPr lang="en-GB" sz="1100" dirty="0">
-                          <a:solidFill>
-                            <a:schemeClr val="tx1"/>
-                          </a:solidFill>
-                          <a:latin typeface="+mn-lt"/>
-                          <a:ea typeface="+mn-ea"/>
-                          <a:cs typeface="+mn-cs"/>
-                        </a:rPr>
-                        <a:t>{{</a:t>
-                      </a:r>
-                      <a:r>
-                        <a:rPr lang="en-GB" sz="1100" dirty="0" err="1">
-                          <a:solidFill>
-                            <a:schemeClr val="tx1"/>
-                          </a:solidFill>
-                          <a:latin typeface="+mn-lt"/>
-                          <a:ea typeface="+mn-ea"/>
-                          <a:cs typeface="+mn-cs"/>
-                        </a:rPr>
-                        <a:t>rx_overload_</a:t>
-                      </a:r>
-                      <a:r>
-                        <a:rPr lang="en-GB" sz="1100" dirty="0" err="1"/>
-                        <a:t>max</a:t>
-                      </a:r>
-                      <a:r>
-                        <a:rPr lang="en-GB" sz="1100" dirty="0">
-                          <a:solidFill>
-                            <a:schemeClr val="tx1"/>
-                          </a:solidFill>
-                          <a:latin typeface="+mn-lt"/>
-                          <a:ea typeface="+mn-ea"/>
-                          <a:cs typeface="+mn-cs"/>
-                        </a:rPr>
-                        <a:t>}}</a:t>
-                      </a:r>
-                      <a:endParaRPr lang="en-GB" sz="1100" dirty="0">
-                        <a:latin typeface="Roboto" panose="02000000000000000000" pitchFamily="2" charset="0"/>
-                        <a:ea typeface="Roboto" panose="02000000000000000000" pitchFamily="2" charset="0"/>
-                        <a:cs typeface="Roboto" panose="02000000000000000000" pitchFamily="2" charset="0"/>
-                      </a:endParaRPr>
-                    </a:p>
                     <a:p>
                       <a:pPr algn="ctr">
                         <a:lnSpc>
@@ -14870,42 +14451,6 @@
                     <a:bodyPr/>
                     <a:lstStyle/>
                     <a:p>
-                      <a:pPr marL="0" marR="0" lvl="0" indent="0" algn="ctr" defTabSz="914400" eaLnBrk="1" fontAlgn="auto" latinLnBrk="0" hangingPunct="1">
-                        <a:lnSpc>
-                          <a:spcPct val="100000"/>
-                        </a:lnSpc>
-                        <a:spcBef>
-                          <a:spcPts val="0"/>
-                        </a:spcBef>
-                        <a:spcAft>
-                          <a:spcPts val="0"/>
-                        </a:spcAft>
-                        <a:buClrTx/>
-                        <a:buSzTx/>
-                        <a:buFontTx/>
-                        <a:buNone/>
-                        <a:tabLst/>
-                        <a:defRPr/>
-                      </a:pPr>
-                      <a:r>
-                        <a:rPr lang="en-GB" sz="1100" dirty="0"/>
-                        <a:t>{{</a:t>
-                      </a:r>
-                      <a:r>
-                        <a:rPr lang="en-GB" sz="1100" dirty="0" err="1"/>
-                        <a:t>rx_reflectance_min</a:t>
-                      </a:r>
-                      <a:r>
-                        <a:rPr lang="en-GB" sz="1100" dirty="0"/>
-                        <a:t>}}</a:t>
-                      </a:r>
-                      <a:endParaRPr lang="en-GB" sz="1100" dirty="0">
-                        <a:latin typeface="Roboto" panose="02000000000000000000" pitchFamily="2" charset="0"/>
-                        <a:ea typeface="Roboto" panose="02000000000000000000" pitchFamily="2" charset="0"/>
-                        <a:cs typeface="Roboto" panose="02000000000000000000" pitchFamily="2" charset="0"/>
-                      </a:endParaRPr>
-                    </a:p>
-                    <a:p>
                       <a:pPr algn="ctr">
                         <a:lnSpc>
                           <a:spcPct val="100000"/>
@@ -14949,42 +14494,6 @@
                   <a:txBody>
                     <a:bodyPr/>
                     <a:lstStyle/>
-                    <a:p>
-                      <a:pPr marL="0" marR="0" lvl="0" indent="0" algn="ctr" defTabSz="914400" eaLnBrk="1" fontAlgn="auto" latinLnBrk="0" hangingPunct="1">
-                        <a:lnSpc>
-                          <a:spcPct val="100000"/>
-                        </a:lnSpc>
-                        <a:spcBef>
-                          <a:spcPts val="0"/>
-                        </a:spcBef>
-                        <a:spcAft>
-                          <a:spcPts val="0"/>
-                        </a:spcAft>
-                        <a:buClrTx/>
-                        <a:buSzTx/>
-                        <a:buFontTx/>
-                        <a:buNone/>
-                        <a:tabLst/>
-                        <a:defRPr/>
-                      </a:pPr>
-                      <a:r>
-                        <a:rPr lang="en-GB" sz="1100" dirty="0"/>
-                        <a:t>{{</a:t>
-                      </a:r>
-                      <a:r>
-                        <a:rPr lang="en-GB" sz="1100" dirty="0" err="1"/>
-                        <a:t>rx_reflectance_typical</a:t>
-                      </a:r>
-                      <a:r>
-                        <a:rPr lang="en-GB" sz="1100" dirty="0"/>
-                        <a:t>}}</a:t>
-                      </a:r>
-                      <a:endParaRPr lang="en-GB" sz="1100" dirty="0">
-                        <a:latin typeface="Roboto" panose="02000000000000000000" pitchFamily="2" charset="0"/>
-                        <a:ea typeface="Roboto" panose="02000000000000000000" pitchFamily="2" charset="0"/>
-                        <a:cs typeface="Roboto" panose="02000000000000000000" pitchFamily="2" charset="0"/>
-                      </a:endParaRPr>
-                    </a:p>
                     <a:p>
                       <a:pPr algn="ctr">
                         <a:lnSpc>

--- a/template.pptx
+++ b/template.pptx
@@ -142,7 +142,7 @@
           <a:p>
             <a:fld id="{C2BA462C-7B8E-41CC-A074-F2F31662260A}" type="datetimeFigureOut">
               <a:rPr lang="en-GB" smtClean="0"/>
-              <a:t>26/06/2026</a:t>
+              <a:t>29/06/2026</a:t>
             </a:fld>
             <a:endParaRPr lang="en-GB"/>
           </a:p>
@@ -319,7 +319,7 @@
           <a:p>
             <a:fld id="{1082EEEB-836D-594B-9F80-250148AC8146}" type="datetimeFigureOut">
               <a:rPr lang="en-US" smtClean="0"/>
-              <a:t>6/26/2026</a:t>
+              <a:t>6/29/2026</a:t>
             </a:fld>
             <a:endParaRPr lang="en-US"/>
           </a:p>
@@ -2628,7 +2628,7 @@
         </p:nvSpPr>
         <p:spPr>
           <a:xfrm>
-            <a:off x="3709504" y="384911"/>
+            <a:off x="3887304" y="325920"/>
             <a:ext cx="7239000" cy="523220"/>
           </a:xfrm>
           <a:prstGeom prst="rect">
@@ -2649,15 +2649,7 @@
             </a:pPr>
             <a:r>
               <a:rPr lang="en-GB" sz="2800" dirty="0"/>
-              <a:t>{{</a:t>
-            </a:r>
-            <a:r>
-              <a:rPr lang="en-GB" sz="2800" dirty="0" err="1"/>
-              <a:t>product_title</a:t>
-            </a:r>
-            <a:r>
-              <a:rPr lang="en-GB" sz="2800" dirty="0"/>
-              <a:t>}}</a:t>
+              <a:t>{{part_number_1}}</a:t>
             </a:r>
             <a:endParaRPr lang="en-GB" sz="2800" b="1" i="0" dirty="0">
               <a:solidFill>
@@ -4250,15 +4242,7 @@
             </a:pPr>
             <a:r>
               <a:rPr lang="en-GB" sz="2800" dirty="0"/>
-              <a:t>{{</a:t>
-            </a:r>
-            <a:r>
-              <a:rPr lang="en-GB" sz="2800" dirty="0" err="1"/>
-              <a:t>product_title</a:t>
-            </a:r>
-            <a:r>
-              <a:rPr lang="en-GB" sz="2800" dirty="0"/>
-              <a:t>}}</a:t>
+              <a:t>{{part_number_1}}</a:t>
             </a:r>
             <a:endParaRPr lang="en-GB" sz="2800" b="1" i="0" dirty="0">
               <a:solidFill>
@@ -12939,10 +12923,10 @@
       </p:sp>
       <p:sp>
         <p:nvSpPr>
-          <p:cNvPr id="17" name="TextBox 16">
+          <p:cNvPr id="3" name="TextBox 2">
             <a:extLst>
               <a:ext uri="{FF2B5EF4-FFF2-40B4-BE49-F238E27FC236}">
-                <a16:creationId xmlns:a16="http://schemas.microsoft.com/office/drawing/2014/main" id="{24824068-31E3-D46F-492A-0B66D5514B05}"/>
+                <a16:creationId xmlns:a16="http://schemas.microsoft.com/office/drawing/2014/main" id="{53EEFB74-84AC-40D3-D05E-DEFFF4BB7BCD}"/>
               </a:ext>
             </a:extLst>
           </p:cNvPr>
@@ -12951,7 +12935,7 @@
         </p:nvSpPr>
         <p:spPr>
           <a:xfrm>
-            <a:off x="3860800" y="252942"/>
+            <a:off x="3871844" y="417306"/>
             <a:ext cx="7239000" cy="523220"/>
           </a:xfrm>
           <a:prstGeom prst="rect">
@@ -12972,15 +12956,7 @@
             </a:pPr>
             <a:r>
               <a:rPr lang="en-GB" sz="2800" dirty="0"/>
-              <a:t>{{</a:t>
-            </a:r>
-            <a:r>
-              <a:rPr lang="en-GB" sz="2800" dirty="0" err="1"/>
-              <a:t>product_title</a:t>
-            </a:r>
-            <a:r>
-              <a:rPr lang="en-GB" sz="2800" dirty="0"/>
-              <a:t>}}</a:t>
+              <a:t>{{part_number_1}}</a:t>
             </a:r>
             <a:endParaRPr lang="en-GB" sz="2800" b="1" i="0" dirty="0">
               <a:solidFill>
@@ -23046,10 +23022,10 @@
       </p:graphicFrame>
       <p:sp>
         <p:nvSpPr>
-          <p:cNvPr id="4" name="TextBox 3">
+          <p:cNvPr id="6" name="TextBox 5">
             <a:extLst>
               <a:ext uri="{FF2B5EF4-FFF2-40B4-BE49-F238E27FC236}">
-                <a16:creationId xmlns:a16="http://schemas.microsoft.com/office/drawing/2014/main" id="{36525A80-2451-A546-AB91-E6E884999DF7}"/>
+                <a16:creationId xmlns:a16="http://schemas.microsoft.com/office/drawing/2014/main" id="{40EEBB1F-04E3-5C44-4A4D-94C5EFA7E80E}"/>
               </a:ext>
             </a:extLst>
           </p:cNvPr>
@@ -23058,8 +23034,8 @@
         </p:nvSpPr>
         <p:spPr>
           <a:xfrm>
-            <a:off x="4219432" y="488434"/>
-            <a:ext cx="8940800" cy="369332"/>
+            <a:off x="3822700" y="369177"/>
+            <a:ext cx="7239000" cy="523220"/>
           </a:xfrm>
           <a:prstGeom prst="rect">
             <a:avLst/>
@@ -23078,18 +23054,10 @@
               </a:spcBef>
             </a:pPr>
             <a:r>
-              <a:rPr lang="en-GB" sz="1800" dirty="0"/>
-              <a:t>{{</a:t>
+              <a:rPr lang="en-GB" sz="2800" dirty="0"/>
+              <a:t>{{part_number_1}}</a:t>
             </a:r>
-            <a:r>
-              <a:rPr lang="en-GB" sz="1800" dirty="0" err="1"/>
-              <a:t>product_title</a:t>
-            </a:r>
-            <a:r>
-              <a:rPr lang="en-GB" sz="1800" dirty="0"/>
-              <a:t>}}</a:t>
-            </a:r>
-            <a:endParaRPr lang="en-GB" sz="1800" b="1" i="0" dirty="0">
+            <a:endParaRPr lang="en-GB" sz="2800" b="1" i="0" dirty="0">
               <a:solidFill>
                 <a:srgbClr val="004455"/>
               </a:solidFill>
@@ -34320,7 +34288,7 @@
         </p:nvSpPr>
         <p:spPr>
           <a:xfrm>
-            <a:off x="4186416" y="488434"/>
+            <a:off x="4180113" y="492606"/>
             <a:ext cx="8940800" cy="369332"/>
           </a:xfrm>
           <a:prstGeom prst="rect">
@@ -34341,15 +34309,7 @@
             </a:pPr>
             <a:r>
               <a:rPr lang="en-GB" sz="1800" dirty="0"/>
-              <a:t>{{</a:t>
-            </a:r>
-            <a:r>
-              <a:rPr lang="en-GB" sz="1800" dirty="0" err="1"/>
-              <a:t>product_title</a:t>
-            </a:r>
-            <a:r>
-              <a:rPr lang="en-GB" sz="1800" dirty="0"/>
-              <a:t>}}</a:t>
+              <a:t>{{part_number_1}}</a:t>
             </a:r>
             <a:endParaRPr lang="en-GB" sz="1800" b="1" i="0" dirty="0">
               <a:solidFill>
@@ -34488,15 +34448,7 @@
             </a:pPr>
             <a:r>
               <a:rPr lang="en-GB" sz="2800" dirty="0"/>
-              <a:t>{{</a:t>
-            </a:r>
-            <a:r>
-              <a:rPr lang="en-GB" sz="2800" dirty="0" err="1"/>
-              <a:t>product_title</a:t>
-            </a:r>
-            <a:r>
-              <a:rPr lang="en-GB" sz="2800" dirty="0"/>
-              <a:t>}}</a:t>
+              <a:t>{{part_number_1}}</a:t>
             </a:r>
             <a:endParaRPr lang="en-GB" sz="2800" b="1" i="0" dirty="0">
               <a:solidFill>
@@ -37733,7 +37685,7 @@
         </p:nvSpPr>
         <p:spPr>
           <a:xfrm>
-            <a:off x="3683000" y="514552"/>
+            <a:off x="3543300" y="349452"/>
             <a:ext cx="7239000" cy="523220"/>
           </a:xfrm>
           <a:prstGeom prst="rect">
@@ -37754,15 +37706,7 @@
             </a:pPr>
             <a:r>
               <a:rPr lang="en-GB" sz="2800" dirty="0"/>
-              <a:t>{{</a:t>
-            </a:r>
-            <a:r>
-              <a:rPr lang="en-GB" sz="2800" dirty="0" err="1"/>
-              <a:t>product_title</a:t>
-            </a:r>
-            <a:r>
-              <a:rPr lang="en-GB" sz="2800" dirty="0"/>
-              <a:t>}}</a:t>
+              <a:t>{{part_number_1}}</a:t>
             </a:r>
             <a:endParaRPr lang="en-GB" sz="2800" b="1" i="0" dirty="0">
               <a:solidFill>

--- a/template.pptx
+++ b/template.pptx
@@ -2628,7 +2628,7 @@
         </p:nvSpPr>
         <p:spPr>
           <a:xfrm>
-            <a:off x="3887304" y="325920"/>
+            <a:off x="3709504" y="384911"/>
             <a:ext cx="7239000" cy="523220"/>
           </a:xfrm>
           <a:prstGeom prst="rect">
@@ -2649,7 +2649,15 @@
             </a:pPr>
             <a:r>
               <a:rPr lang="en-GB" sz="2800" dirty="0"/>
-              <a:t>{{part_number_1}}</a:t>
+              <a:t>{{</a:t>
+            </a:r>
+            <a:r>
+              <a:rPr lang="en-GB" sz="2800" dirty="0" err="1"/>
+              <a:t>product_title</a:t>
+            </a:r>
+            <a:r>
+              <a:rPr lang="en-GB" sz="2800" dirty="0"/>
+              <a:t>}}</a:t>
             </a:r>
             <a:endParaRPr lang="en-GB" sz="2800" b="1" i="0" dirty="0">
               <a:solidFill>
@@ -4242,7 +4250,15 @@
             </a:pPr>
             <a:r>
               <a:rPr lang="en-GB" sz="2800" dirty="0"/>
-              <a:t>{{part_number_1}}</a:t>
+              <a:t>{{</a:t>
+            </a:r>
+            <a:r>
+              <a:rPr lang="en-GB" sz="2800" dirty="0" err="1"/>
+              <a:t>product_title</a:t>
+            </a:r>
+            <a:r>
+              <a:rPr lang="en-GB" sz="2800" dirty="0"/>
+              <a:t>}}</a:t>
             </a:r>
             <a:endParaRPr lang="en-GB" sz="2800" b="1" i="0" dirty="0">
               <a:solidFill>
@@ -8430,7 +8446,7 @@
           <p:nvPr>
             <p:extLst>
               <p:ext uri="{D42A27DB-BD31-4B8C-83A1-F6EECF244321}">
-                <p14:modId xmlns:p14="http://schemas.microsoft.com/office/powerpoint/2010/main" val="730481533"/>
+                <p14:modId xmlns:p14="http://schemas.microsoft.com/office/powerpoint/2010/main" val="780358430"/>
               </p:ext>
             </p:extLst>
           </p:nvPr>
@@ -11713,7 +11729,7 @@
                       </a:r>
                       <a:r>
                         <a:rPr lang="en-GB" sz="1200" dirty="0" err="1"/>
-                        <a:t>op_fiber_lengt_typical</a:t>
+                        <a:t>op_fiber_length_typical</a:t>
                       </a:r>
                       <a:r>
                         <a:rPr lang="en-GB" sz="1200" dirty="0"/>
@@ -12923,10 +12939,10 @@
       </p:sp>
       <p:sp>
         <p:nvSpPr>
-          <p:cNvPr id="3" name="TextBox 2">
+          <p:cNvPr id="17" name="TextBox 16">
             <a:extLst>
               <a:ext uri="{FF2B5EF4-FFF2-40B4-BE49-F238E27FC236}">
-                <a16:creationId xmlns:a16="http://schemas.microsoft.com/office/drawing/2014/main" id="{53EEFB74-84AC-40D3-D05E-DEFFF4BB7BCD}"/>
+                <a16:creationId xmlns:a16="http://schemas.microsoft.com/office/drawing/2014/main" id="{24824068-31E3-D46F-492A-0B66D5514B05}"/>
               </a:ext>
             </a:extLst>
           </p:cNvPr>
@@ -12935,7 +12951,7 @@
         </p:nvSpPr>
         <p:spPr>
           <a:xfrm>
-            <a:off x="3871844" y="417306"/>
+            <a:off x="3860800" y="252942"/>
             <a:ext cx="7239000" cy="523220"/>
           </a:xfrm>
           <a:prstGeom prst="rect">
@@ -12956,7 +12972,15 @@
             </a:pPr>
             <a:r>
               <a:rPr lang="en-GB" sz="2800" dirty="0"/>
-              <a:t>{{part_number_1}}</a:t>
+              <a:t>{{</a:t>
+            </a:r>
+            <a:r>
+              <a:rPr lang="en-GB" sz="2800" dirty="0" err="1"/>
+              <a:t>product_title</a:t>
+            </a:r>
+            <a:r>
+              <a:rPr lang="en-GB" sz="2800" dirty="0"/>
+              <a:t>}}</a:t>
             </a:r>
             <a:endParaRPr lang="en-GB" sz="2800" b="1" i="0" dirty="0">
               <a:solidFill>
@@ -23022,10 +23046,10 @@
       </p:graphicFrame>
       <p:sp>
         <p:nvSpPr>
-          <p:cNvPr id="6" name="TextBox 5">
+          <p:cNvPr id="4" name="TextBox 3">
             <a:extLst>
               <a:ext uri="{FF2B5EF4-FFF2-40B4-BE49-F238E27FC236}">
-                <a16:creationId xmlns:a16="http://schemas.microsoft.com/office/drawing/2014/main" id="{40EEBB1F-04E3-5C44-4A4D-94C5EFA7E80E}"/>
+                <a16:creationId xmlns:a16="http://schemas.microsoft.com/office/drawing/2014/main" id="{36525A80-2451-A546-AB91-E6E884999DF7}"/>
               </a:ext>
             </a:extLst>
           </p:cNvPr>
@@ -23034,8 +23058,8 @@
         </p:nvSpPr>
         <p:spPr>
           <a:xfrm>
-            <a:off x="3822700" y="369177"/>
-            <a:ext cx="7239000" cy="523220"/>
+            <a:off x="4219432" y="488434"/>
+            <a:ext cx="8940800" cy="369332"/>
           </a:xfrm>
           <a:prstGeom prst="rect">
             <a:avLst/>
@@ -23054,10 +23078,18 @@
               </a:spcBef>
             </a:pPr>
             <a:r>
-              <a:rPr lang="en-GB" sz="2800" dirty="0"/>
-              <a:t>{{part_number_1}}</a:t>
+              <a:rPr lang="en-GB" sz="1800" dirty="0"/>
+              <a:t>{{</a:t>
             </a:r>
-            <a:endParaRPr lang="en-GB" sz="2800" b="1" i="0" dirty="0">
+            <a:r>
+              <a:rPr lang="en-GB" sz="1800" dirty="0" err="1"/>
+              <a:t>product_title</a:t>
+            </a:r>
+            <a:r>
+              <a:rPr lang="en-GB" sz="1800" dirty="0"/>
+              <a:t>}}</a:t>
+            </a:r>
+            <a:endParaRPr lang="en-GB" sz="1800" b="1" i="0" dirty="0">
               <a:solidFill>
                 <a:srgbClr val="004455"/>
               </a:solidFill>
@@ -34288,7 +34320,7 @@
         </p:nvSpPr>
         <p:spPr>
           <a:xfrm>
-            <a:off x="4180113" y="492606"/>
+            <a:off x="4186416" y="488434"/>
             <a:ext cx="8940800" cy="369332"/>
           </a:xfrm>
           <a:prstGeom prst="rect">
@@ -34309,7 +34341,15 @@
             </a:pPr>
             <a:r>
               <a:rPr lang="en-GB" sz="1800" dirty="0"/>
-              <a:t>{{part_number_1}}</a:t>
+              <a:t>{{</a:t>
+            </a:r>
+            <a:r>
+              <a:rPr lang="en-GB" sz="1800" dirty="0" err="1"/>
+              <a:t>product_title</a:t>
+            </a:r>
+            <a:r>
+              <a:rPr lang="en-GB" sz="1800" dirty="0"/>
+              <a:t>}}</a:t>
             </a:r>
             <a:endParaRPr lang="en-GB" sz="1800" b="1" i="0" dirty="0">
               <a:solidFill>
@@ -34448,7 +34488,15 @@
             </a:pPr>
             <a:r>
               <a:rPr lang="en-GB" sz="2800" dirty="0"/>
-              <a:t>{{part_number_1}}</a:t>
+              <a:t>{{</a:t>
+            </a:r>
+            <a:r>
+              <a:rPr lang="en-GB" sz="2800" dirty="0" err="1"/>
+              <a:t>product_title</a:t>
+            </a:r>
+            <a:r>
+              <a:rPr lang="en-GB" sz="2800" dirty="0"/>
+              <a:t>}}</a:t>
             </a:r>
             <a:endParaRPr lang="en-GB" sz="2800" b="1" i="0" dirty="0">
               <a:solidFill>
@@ -37685,7 +37733,7 @@
         </p:nvSpPr>
         <p:spPr>
           <a:xfrm>
-            <a:off x="3543300" y="349452"/>
+            <a:off x="3683000" y="514552"/>
             <a:ext cx="7239000" cy="523220"/>
           </a:xfrm>
           <a:prstGeom prst="rect">
@@ -37706,7 +37754,15 @@
             </a:pPr>
             <a:r>
               <a:rPr lang="en-GB" sz="2800" dirty="0"/>
-              <a:t>{{part_number_1}}</a:t>
+              <a:t>{{</a:t>
+            </a:r>
+            <a:r>
+              <a:rPr lang="en-GB" sz="2800" dirty="0" err="1"/>
+              <a:t>product_title</a:t>
+            </a:r>
+            <a:r>
+              <a:rPr lang="en-GB" sz="2800" dirty="0"/>
+              <a:t>}}</a:t>
             </a:r>
             <a:endParaRPr lang="en-GB" sz="2800" b="1" i="0" dirty="0">
               <a:solidFill>

--- a/template.pptx
+++ b/template.pptx
@@ -2628,7 +2628,7 @@
         </p:nvSpPr>
         <p:spPr>
           <a:xfrm>
-            <a:off x="3709504" y="384911"/>
+            <a:off x="3595204" y="435711"/>
             <a:ext cx="7239000" cy="523220"/>
           </a:xfrm>
           <a:prstGeom prst="rect">
@@ -2649,15 +2649,7 @@
             </a:pPr>
             <a:r>
               <a:rPr lang="en-GB" sz="2800" dirty="0"/>
-              <a:t>{{</a:t>
-            </a:r>
-            <a:r>
-              <a:rPr lang="en-GB" sz="2800" dirty="0" err="1"/>
-              <a:t>product_title</a:t>
-            </a:r>
-            <a:r>
-              <a:rPr lang="en-GB" sz="2800" dirty="0"/>
-              <a:t>}}</a:t>
+              <a:t>{{part_number_1}}</a:t>
             </a:r>
             <a:endParaRPr lang="en-GB" sz="2800" b="1" i="0" dirty="0">
               <a:solidFill>
@@ -4255,7 +4247,7 @@
         </p:nvSpPr>
         <p:spPr>
           <a:xfrm>
-            <a:off x="4062344" y="451052"/>
+            <a:off x="4379844" y="400252"/>
             <a:ext cx="7239000" cy="523220"/>
           </a:xfrm>
           <a:prstGeom prst="rect">
@@ -4276,15 +4268,7 @@
             </a:pPr>
             <a:r>
               <a:rPr lang="en-GB" sz="2800" dirty="0"/>
-              <a:t>{{</a:t>
-            </a:r>
-            <a:r>
-              <a:rPr lang="en-GB" sz="2800" dirty="0" err="1"/>
-              <a:t>product_title</a:t>
-            </a:r>
-            <a:r>
-              <a:rPr lang="en-GB" sz="2800" dirty="0"/>
-              <a:t>}}</a:t>
+              <a:t>{{part_number_1}}</a:t>
             </a:r>
             <a:endParaRPr lang="en-GB" sz="2800" b="1" i="0" dirty="0">
               <a:solidFill>
@@ -14294,15 +14278,7 @@
             </a:pPr>
             <a:r>
               <a:rPr lang="en-GB" sz="2800" dirty="0"/>
-              <a:t>{{</a:t>
-            </a:r>
-            <a:r>
-              <a:rPr lang="en-GB" sz="2800" dirty="0" err="1"/>
-              <a:t>product_title</a:t>
-            </a:r>
-            <a:r>
-              <a:rPr lang="en-GB" sz="2800" dirty="0"/>
-              <a:t>}}</a:t>
+              <a:t>{{part_number_1}}</a:t>
             </a:r>
             <a:endParaRPr lang="en-GB" sz="2800" b="1" i="0" dirty="0">
               <a:solidFill>
@@ -25903,16 +25879,8 @@
               </a:spcBef>
             </a:pPr>
             <a:r>
-              <a:rPr lang="en-GB" sz="1800" dirty="0"/>
-              <a:t>{{</a:t>
-            </a:r>
-            <a:r>
-              <a:rPr lang="en-GB" sz="1800" dirty="0" err="1"/>
-              <a:t>product_title</a:t>
-            </a:r>
-            <a:r>
-              <a:rPr lang="en-GB" sz="1800" dirty="0"/>
-              <a:t>}}</a:t>
+              <a:rPr lang="en-GB" dirty="0"/>
+              <a:t>{{part_number_1}}</a:t>
             </a:r>
             <a:endParaRPr lang="en-GB" sz="1800" b="1" i="0" dirty="0">
               <a:solidFill>
@@ -38840,16 +38808,8 @@
               </a:spcBef>
             </a:pPr>
             <a:r>
-              <a:rPr lang="en-GB" sz="1800" dirty="0"/>
-              <a:t>{{</a:t>
-            </a:r>
-            <a:r>
-              <a:rPr lang="en-GB" sz="1800" dirty="0" err="1"/>
-              <a:t>product_title</a:t>
-            </a:r>
-            <a:r>
-              <a:rPr lang="en-GB" sz="1800" dirty="0"/>
-              <a:t>}}</a:t>
+              <a:rPr lang="en-GB" dirty="0"/>
+              <a:t>{{part_number_1}}</a:t>
             </a:r>
             <a:endParaRPr lang="en-GB" sz="1800" b="1" i="0" dirty="0">
               <a:solidFill>
@@ -38988,15 +38948,7 @@
             </a:pPr>
             <a:r>
               <a:rPr lang="en-GB" sz="2800" dirty="0"/>
-              <a:t>{{</a:t>
-            </a:r>
-            <a:r>
-              <a:rPr lang="en-GB" sz="2800" dirty="0" err="1"/>
-              <a:t>product_title</a:t>
-            </a:r>
-            <a:r>
-              <a:rPr lang="en-GB" sz="2800" dirty="0"/>
-              <a:t>}}</a:t>
+              <a:t>{{part_number_1}}</a:t>
             </a:r>
             <a:endParaRPr lang="en-GB" sz="2800" b="1" i="0" dirty="0">
               <a:solidFill>
@@ -42253,16 +42205,8 @@
               </a:spcBef>
             </a:pPr>
             <a:r>
-              <a:rPr lang="en-GB" sz="2800" dirty="0"/>
-              <a:t>{{</a:t>
-            </a:r>
-            <a:r>
-              <a:rPr lang="en-GB" sz="2800" dirty="0" err="1"/>
-              <a:t>product_title</a:t>
-            </a:r>
-            <a:r>
-              <a:rPr lang="en-GB" sz="2800" dirty="0"/>
-              <a:t>}}</a:t>
+              <a:rPr lang="en-GB" sz="2800"/>
+              <a:t>{{part_number_1}}</a:t>
             </a:r>
             <a:endParaRPr lang="en-GB" sz="2800" b="1" i="0" dirty="0">
               <a:solidFill>

--- a/template.pptx
+++ b/template.pptx
@@ -33206,7 +33206,7 @@
           <p:nvPr>
             <p:extLst>
               <p:ext uri="{D42A27DB-BD31-4B8C-83A1-F6EECF244321}">
-                <p14:modId xmlns:p14="http://schemas.microsoft.com/office/powerpoint/2010/main" val="4118548075"/>
+                <p14:modId xmlns:p14="http://schemas.microsoft.com/office/powerpoint/2010/main" val="3331061640"/>
               </p:ext>
             </p:extLst>
           </p:nvPr>
@@ -36967,7 +36967,7 @@
                       </a:pPr>
                       <a:r>
                         <a:rPr lang="en-GB" sz="1100" dirty="0"/>
-                        <a:t>{</a:t>
+                        <a:t>{{</a:t>
                       </a:r>
                       <a:r>
                         <a:rPr lang="en-GB" sz="1100" dirty="0" err="1"/>

--- a/template.pptx
+++ b/template.pptx
@@ -37603,10 +37603,10 @@
       </p:grpSpPr>
       <p:graphicFrame>
         <p:nvGraphicFramePr>
-          <p:cNvPr id="2" name="Table 1">
+          <p:cNvPr id="5" name="object 5">
             <a:extLst>
               <a:ext uri="{FF2B5EF4-FFF2-40B4-BE49-F238E27FC236}">
-                <a16:creationId xmlns:a16="http://schemas.microsoft.com/office/drawing/2014/main" id="{3F057DA3-2CE1-7E72-825C-D11A288B9719}"/>
+                <a16:creationId xmlns:a16="http://schemas.microsoft.com/office/drawing/2014/main" id="{E93EE76D-EB2B-87B5-DBAB-FED1499F2281}"/>
               </a:ext>
             </a:extLst>
           </p:cNvPr>
@@ -37616,14 +37616,14 @@
           <p:nvPr>
             <p:extLst>
               <p:ext uri="{D42A27DB-BD31-4B8C-83A1-F6EECF244321}">
-                <p14:modId xmlns:p14="http://schemas.microsoft.com/office/powerpoint/2010/main" val="1354127761"/>
+                <p14:modId xmlns:p14="http://schemas.microsoft.com/office/powerpoint/2010/main" val="1278658140"/>
               </p:ext>
             </p:extLst>
           </p:nvPr>
         </p:nvGraphicFramePr>
         <p:xfrm>
-          <a:off x="638629" y="2576513"/>
-          <a:ext cx="7736114" cy="4236720"/>
+          <a:off x="522514" y="2282265"/>
+          <a:ext cx="8125096" cy="5477071"/>
         </p:xfrm>
         <a:graphic>
           <a:graphicData uri="http://schemas.openxmlformats.org/drawingml/2006/table">
@@ -37632,57 +37632,530 @@
                 <a:tableStyleId>{2D5ABB26-0587-4C30-8999-92F81FD0307C}</a:tableStyleId>
               </a:tblPr>
               <a:tblGrid>
-                <a:gridCol w="1213326">
+                <a:gridCol w="1274333">
                   <a:extLst>
                     <a:ext uri="{9D8B030D-6E8A-4147-A177-3AD203B41FA5}">
-                      <a16:colId xmlns:a16="http://schemas.microsoft.com/office/drawing/2014/main" val="988447169"/>
+                      <a16:colId xmlns:a16="http://schemas.microsoft.com/office/drawing/2014/main" val="20000"/>
                     </a:ext>
                   </a:extLst>
                 </a:gridCol>
-                <a:gridCol w="950300">
+                <a:gridCol w="998081">
                   <a:extLst>
                     <a:ext uri="{9D8B030D-6E8A-4147-A177-3AD203B41FA5}">
-                      <a16:colId xmlns:a16="http://schemas.microsoft.com/office/drawing/2014/main" val="524809390"/>
+                      <a16:colId xmlns:a16="http://schemas.microsoft.com/office/drawing/2014/main" val="1017605864"/>
                     </a:ext>
                   </a:extLst>
                 </a:gridCol>
-                <a:gridCol w="1094247">
+                <a:gridCol w="1149268">
                   <a:extLst>
                     <a:ext uri="{9D8B030D-6E8A-4147-A177-3AD203B41FA5}">
-                      <a16:colId xmlns:a16="http://schemas.microsoft.com/office/drawing/2014/main" val="2223821934"/>
+                      <a16:colId xmlns:a16="http://schemas.microsoft.com/office/drawing/2014/main" val="20001"/>
                     </a:ext>
                   </a:extLst>
                 </a:gridCol>
-                <a:gridCol w="1094247">
+                <a:gridCol w="1149268">
                   <a:extLst>
                     <a:ext uri="{9D8B030D-6E8A-4147-A177-3AD203B41FA5}">
-                      <a16:colId xmlns:a16="http://schemas.microsoft.com/office/drawing/2014/main" val="911294959"/>
+                      <a16:colId xmlns:a16="http://schemas.microsoft.com/office/drawing/2014/main" val="20002"/>
                     </a:ext>
                   </a:extLst>
                 </a:gridCol>
-                <a:gridCol w="1198455">
+                <a:gridCol w="1258715">
                   <a:extLst>
                     <a:ext uri="{9D8B030D-6E8A-4147-A177-3AD203B41FA5}">
-                      <a16:colId xmlns:a16="http://schemas.microsoft.com/office/drawing/2014/main" val="364417678"/>
+                      <a16:colId xmlns:a16="http://schemas.microsoft.com/office/drawing/2014/main" val="20003"/>
                     </a:ext>
                   </a:extLst>
                 </a:gridCol>
-                <a:gridCol w="1192525">
+                <a:gridCol w="1252487">
                   <a:extLst>
                     <a:ext uri="{9D8B030D-6E8A-4147-A177-3AD203B41FA5}">
-                      <a16:colId xmlns:a16="http://schemas.microsoft.com/office/drawing/2014/main" val="142653470"/>
+                      <a16:colId xmlns:a16="http://schemas.microsoft.com/office/drawing/2014/main" val="20004"/>
                     </a:ext>
                   </a:extLst>
                 </a:gridCol>
-                <a:gridCol w="993014">
+                <a:gridCol w="1042944">
                   <a:extLst>
                     <a:ext uri="{9D8B030D-6E8A-4147-A177-3AD203B41FA5}">
-                      <a16:colId xmlns:a16="http://schemas.microsoft.com/office/drawing/2014/main" val="736082181"/>
+                      <a16:colId xmlns:a16="http://schemas.microsoft.com/office/drawing/2014/main" val="833981636"/>
                     </a:ext>
                   </a:extLst>
                 </a:gridCol>
               </a:tblGrid>
-              <a:tr h="275904">
+              <a:tr h="382767">
+                <a:tc>
+                  <a:txBody>
+                    <a:bodyPr/>
+                    <a:lstStyle/>
+                    <a:p>
+                      <a:pPr marL="635" algn="ctr">
+                        <a:lnSpc>
+                          <a:spcPct val="100000"/>
+                        </a:lnSpc>
+                        <a:spcBef>
+                          <a:spcPts val="385"/>
+                        </a:spcBef>
+                      </a:pPr>
+                      <a:r>
+                        <a:rPr sz="1100" b="1" spc="-10" dirty="0">
+                          <a:solidFill>
+                            <a:srgbClr val="FFFFFF"/>
+                          </a:solidFill>
+                          <a:latin typeface="Roboto" panose="02000000000000000000" pitchFamily="2" charset="0"/>
+                          <a:ea typeface="Roboto" panose="02000000000000000000" pitchFamily="2" charset="0"/>
+                          <a:cs typeface="Arial"/>
+                        </a:rPr>
+                        <a:t>Parameter</a:t>
+                      </a:r>
+                      <a:endParaRPr sz="1100" dirty="0">
+                        <a:latin typeface="Roboto" panose="02000000000000000000" pitchFamily="2" charset="0"/>
+                        <a:ea typeface="Roboto" panose="02000000000000000000" pitchFamily="2" charset="0"/>
+                        <a:cs typeface="Arial"/>
+                      </a:endParaRPr>
+                    </a:p>
+                  </a:txBody>
+                  <a:tcPr marL="0" marR="0" marT="48895" marB="0" anchor="ctr">
+                    <a:lnL w="6350">
+                      <a:solidFill>
+                        <a:srgbClr val="000000"/>
+                      </a:solidFill>
+                      <a:prstDash val="solid"/>
+                    </a:lnL>
+                    <a:lnR w="6350" cap="flat" cmpd="sng" algn="ctr">
+                      <a:solidFill>
+                        <a:srgbClr val="000000"/>
+                      </a:solidFill>
+                      <a:prstDash val="solid"/>
+                      <a:round/>
+                      <a:headEnd type="none" w="med" len="med"/>
+                      <a:tailEnd type="none" w="med" len="med"/>
+                    </a:lnR>
+                    <a:lnT w="6350">
+                      <a:solidFill>
+                        <a:srgbClr val="000000"/>
+                      </a:solidFill>
+                      <a:prstDash val="solid"/>
+                    </a:lnT>
+                    <a:lnB w="6350" cap="flat" cmpd="sng" algn="ctr">
+                      <a:solidFill>
+                        <a:srgbClr val="000000"/>
+                      </a:solidFill>
+                      <a:prstDash val="solid"/>
+                      <a:round/>
+                      <a:headEnd type="none" w="med" len="med"/>
+                      <a:tailEnd type="none" w="med" len="med"/>
+                    </a:lnB>
+                    <a:solidFill>
+                      <a:srgbClr val="004455"/>
+                    </a:solidFill>
+                  </a:tcPr>
+                </a:tc>
+                <a:tc>
+                  <a:txBody>
+                    <a:bodyPr/>
+                    <a:lstStyle/>
+                    <a:p>
+                      <a:pPr algn="ctr">
+                        <a:lnSpc>
+                          <a:spcPct val="100000"/>
+                        </a:lnSpc>
+                        <a:spcBef>
+                          <a:spcPts val="385"/>
+                        </a:spcBef>
+                      </a:pPr>
+                      <a:r>
+                        <a:rPr sz="1100" b="1" spc="-10" dirty="0">
+                          <a:solidFill>
+                            <a:srgbClr val="FFFFFF"/>
+                          </a:solidFill>
+                          <a:latin typeface="Roboto" panose="02000000000000000000" pitchFamily="2" charset="0"/>
+                          <a:ea typeface="Roboto" panose="02000000000000000000" pitchFamily="2" charset="0"/>
+                          <a:cs typeface="Arial"/>
+                        </a:rPr>
+                        <a:t>Symbol</a:t>
+                      </a:r>
+                      <a:endParaRPr sz="1100" dirty="0">
+                        <a:latin typeface="Roboto" panose="02000000000000000000" pitchFamily="2" charset="0"/>
+                        <a:ea typeface="Roboto" panose="02000000000000000000" pitchFamily="2" charset="0"/>
+                        <a:cs typeface="Arial"/>
+                      </a:endParaRPr>
+                    </a:p>
+                  </a:txBody>
+                  <a:tcPr marL="0" marR="0" marT="48895" marB="0" anchor="ctr">
+                    <a:lnL w="6350" cap="flat" cmpd="sng" algn="ctr">
+                      <a:solidFill>
+                        <a:srgbClr val="000000"/>
+                      </a:solidFill>
+                      <a:prstDash val="solid"/>
+                      <a:round/>
+                      <a:headEnd type="none" w="med" len="med"/>
+                      <a:tailEnd type="none" w="med" len="med"/>
+                    </a:lnL>
+                    <a:lnR w="6350">
+                      <a:solidFill>
+                        <a:srgbClr val="000000"/>
+                      </a:solidFill>
+                      <a:prstDash val="solid"/>
+                    </a:lnR>
+                    <a:lnT w="6350">
+                      <a:solidFill>
+                        <a:srgbClr val="000000"/>
+                      </a:solidFill>
+                      <a:prstDash val="solid"/>
+                    </a:lnT>
+                    <a:lnB w="6350" cap="flat" cmpd="sng" algn="ctr">
+                      <a:solidFill>
+                        <a:srgbClr val="000000"/>
+                      </a:solidFill>
+                      <a:prstDash val="solid"/>
+                      <a:round/>
+                      <a:headEnd type="none" w="med" len="med"/>
+                      <a:tailEnd type="none" w="med" len="med"/>
+                    </a:lnB>
+                    <a:solidFill>
+                      <a:srgbClr val="004455"/>
+                    </a:solidFill>
+                  </a:tcPr>
+                </a:tc>
+                <a:tc>
+                  <a:txBody>
+                    <a:bodyPr/>
+                    <a:lstStyle/>
+                    <a:p>
+                      <a:pPr algn="ctr">
+                        <a:lnSpc>
+                          <a:spcPct val="100000"/>
+                        </a:lnSpc>
+                        <a:spcBef>
+                          <a:spcPts val="385"/>
+                        </a:spcBef>
+                      </a:pPr>
+                      <a:r>
+                        <a:rPr sz="1100" b="1" spc="-25" dirty="0">
+                          <a:solidFill>
+                            <a:srgbClr val="FFFFFF"/>
+                          </a:solidFill>
+                          <a:latin typeface="Roboto" panose="02000000000000000000" pitchFamily="2" charset="0"/>
+                          <a:ea typeface="Roboto" panose="02000000000000000000" pitchFamily="2" charset="0"/>
+                          <a:cs typeface="Arial"/>
+                        </a:rPr>
+                        <a:t>Min</a:t>
+                      </a:r>
+                      <a:endParaRPr sz="1100" dirty="0">
+                        <a:latin typeface="Roboto" panose="02000000000000000000" pitchFamily="2" charset="0"/>
+                        <a:ea typeface="Roboto" panose="02000000000000000000" pitchFamily="2" charset="0"/>
+                        <a:cs typeface="Arial"/>
+                      </a:endParaRPr>
+                    </a:p>
+                  </a:txBody>
+                  <a:tcPr marL="0" marR="0" marT="48895" marB="0" anchor="ctr">
+                    <a:lnL w="6350">
+                      <a:solidFill>
+                        <a:srgbClr val="000000"/>
+                      </a:solidFill>
+                      <a:prstDash val="solid"/>
+                    </a:lnL>
+                    <a:lnR w="6350">
+                      <a:solidFill>
+                        <a:srgbClr val="000000"/>
+                      </a:solidFill>
+                      <a:prstDash val="solid"/>
+                    </a:lnR>
+                    <a:lnT w="6350">
+                      <a:solidFill>
+                        <a:srgbClr val="000000"/>
+                      </a:solidFill>
+                      <a:prstDash val="solid"/>
+                    </a:lnT>
+                    <a:lnB w="6350" cap="flat" cmpd="sng" algn="ctr">
+                      <a:solidFill>
+                        <a:srgbClr val="000000"/>
+                      </a:solidFill>
+                      <a:prstDash val="solid"/>
+                      <a:round/>
+                      <a:headEnd type="none" w="med" len="med"/>
+                      <a:tailEnd type="none" w="med" len="med"/>
+                    </a:lnB>
+                    <a:solidFill>
+                      <a:srgbClr val="004455"/>
+                    </a:solidFill>
+                  </a:tcPr>
+                </a:tc>
+                <a:tc>
+                  <a:txBody>
+                    <a:bodyPr/>
+                    <a:lstStyle/>
+                    <a:p>
+                      <a:pPr algn="ctr">
+                        <a:lnSpc>
+                          <a:spcPct val="100000"/>
+                        </a:lnSpc>
+                        <a:spcBef>
+                          <a:spcPts val="385"/>
+                        </a:spcBef>
+                      </a:pPr>
+                      <a:r>
+                        <a:rPr lang="en-GB" sz="1100" b="1" spc="-25" dirty="0">
+                          <a:solidFill>
+                            <a:srgbClr val="FFFFFF"/>
+                          </a:solidFill>
+                          <a:latin typeface="Roboto" panose="02000000000000000000" pitchFamily="2" charset="0"/>
+                          <a:ea typeface="Roboto" panose="02000000000000000000" pitchFamily="2" charset="0"/>
+                          <a:cs typeface="Arial"/>
+                        </a:rPr>
+                        <a:t>Typical</a:t>
+                      </a:r>
+                      <a:endParaRPr sz="1100" dirty="0">
+                        <a:latin typeface="Roboto" panose="02000000000000000000" pitchFamily="2" charset="0"/>
+                        <a:ea typeface="Roboto" panose="02000000000000000000" pitchFamily="2" charset="0"/>
+                        <a:cs typeface="Arial"/>
+                      </a:endParaRPr>
+                    </a:p>
+                  </a:txBody>
+                  <a:tcPr marL="0" marR="0" marT="48895" marB="0" anchor="ctr">
+                    <a:lnL w="6350">
+                      <a:solidFill>
+                        <a:srgbClr val="000000"/>
+                      </a:solidFill>
+                      <a:prstDash val="solid"/>
+                    </a:lnL>
+                    <a:lnR w="6350">
+                      <a:solidFill>
+                        <a:srgbClr val="000000"/>
+                      </a:solidFill>
+                      <a:prstDash val="solid"/>
+                    </a:lnR>
+                    <a:lnT w="6350">
+                      <a:solidFill>
+                        <a:srgbClr val="000000"/>
+                      </a:solidFill>
+                      <a:prstDash val="solid"/>
+                    </a:lnT>
+                    <a:lnB w="6350" cap="flat" cmpd="sng" algn="ctr">
+                      <a:solidFill>
+                        <a:srgbClr val="000000"/>
+                      </a:solidFill>
+                      <a:prstDash val="solid"/>
+                      <a:round/>
+                      <a:headEnd type="none" w="med" len="med"/>
+                      <a:tailEnd type="none" w="med" len="med"/>
+                    </a:lnB>
+                    <a:solidFill>
+                      <a:srgbClr val="004455"/>
+                    </a:solidFill>
+                  </a:tcPr>
+                </a:tc>
+                <a:tc>
+                  <a:txBody>
+                    <a:bodyPr/>
+                    <a:lstStyle/>
+                    <a:p>
+                      <a:pPr marL="635" algn="ctr">
+                        <a:lnSpc>
+                          <a:spcPct val="100000"/>
+                        </a:lnSpc>
+                        <a:spcBef>
+                          <a:spcPts val="385"/>
+                        </a:spcBef>
+                      </a:pPr>
+                      <a:r>
+                        <a:rPr lang="en-GB" sz="1100" b="1" spc="-20" dirty="0">
+                          <a:solidFill>
+                            <a:srgbClr val="FFFFFF"/>
+                          </a:solidFill>
+                          <a:latin typeface="Roboto" panose="02000000000000000000" pitchFamily="2" charset="0"/>
+                          <a:ea typeface="Roboto" panose="02000000000000000000" pitchFamily="2" charset="0"/>
+                          <a:cs typeface="Arial"/>
+                        </a:rPr>
+                        <a:t>Max</a:t>
+                      </a:r>
+                      <a:endParaRPr sz="1100" dirty="0">
+                        <a:latin typeface="Roboto" panose="02000000000000000000" pitchFamily="2" charset="0"/>
+                        <a:ea typeface="Roboto" panose="02000000000000000000" pitchFamily="2" charset="0"/>
+                        <a:cs typeface="Arial"/>
+                      </a:endParaRPr>
+                    </a:p>
+                  </a:txBody>
+                  <a:tcPr marL="0" marR="0" marT="48895" marB="0" anchor="ctr">
+                    <a:lnL w="6350">
+                      <a:solidFill>
+                        <a:srgbClr val="000000"/>
+                      </a:solidFill>
+                      <a:prstDash val="solid"/>
+                    </a:lnL>
+                    <a:lnR w="6350">
+                      <a:solidFill>
+                        <a:srgbClr val="000000"/>
+                      </a:solidFill>
+                      <a:prstDash val="solid"/>
+                    </a:lnR>
+                    <a:lnT w="6350">
+                      <a:solidFill>
+                        <a:srgbClr val="000000"/>
+                      </a:solidFill>
+                      <a:prstDash val="solid"/>
+                    </a:lnT>
+                    <a:lnB w="6350" cap="flat" cmpd="sng" algn="ctr">
+                      <a:solidFill>
+                        <a:srgbClr val="000000"/>
+                      </a:solidFill>
+                      <a:prstDash val="solid"/>
+                      <a:round/>
+                      <a:headEnd type="none" w="med" len="med"/>
+                      <a:tailEnd type="none" w="med" len="med"/>
+                    </a:lnB>
+                    <a:solidFill>
+                      <a:srgbClr val="004455"/>
+                    </a:solidFill>
+                  </a:tcPr>
+                </a:tc>
+                <a:tc>
+                  <a:txBody>
+                    <a:bodyPr/>
+                    <a:lstStyle/>
+                    <a:p>
+                      <a:pPr marL="635" algn="ctr">
+                        <a:lnSpc>
+                          <a:spcPct val="100000"/>
+                        </a:lnSpc>
+                        <a:spcBef>
+                          <a:spcPts val="385"/>
+                        </a:spcBef>
+                      </a:pPr>
+                      <a:r>
+                        <a:rPr sz="1100" b="1" spc="-20" dirty="0">
+                          <a:solidFill>
+                            <a:srgbClr val="FFFFFF"/>
+                          </a:solidFill>
+                          <a:latin typeface="Roboto" panose="02000000000000000000" pitchFamily="2" charset="0"/>
+                          <a:ea typeface="Roboto" panose="02000000000000000000" pitchFamily="2" charset="0"/>
+                          <a:cs typeface="Arial"/>
+                        </a:rPr>
+                        <a:t>Unit</a:t>
+                      </a:r>
+                      <a:endParaRPr sz="1100" dirty="0">
+                        <a:latin typeface="Roboto" panose="02000000000000000000" pitchFamily="2" charset="0"/>
+                        <a:ea typeface="Roboto" panose="02000000000000000000" pitchFamily="2" charset="0"/>
+                        <a:cs typeface="Arial"/>
+                      </a:endParaRPr>
+                    </a:p>
+                  </a:txBody>
+                  <a:tcPr marL="0" marR="0" marT="48895" marB="0" anchor="ctr">
+                    <a:lnL w="6350" cap="flat" cmpd="sng" algn="ctr">
+                      <a:solidFill>
+                        <a:srgbClr val="000000"/>
+                      </a:solidFill>
+                      <a:prstDash val="solid"/>
+                      <a:round/>
+                      <a:headEnd type="none" w="med" len="med"/>
+                      <a:tailEnd type="none" w="med" len="med"/>
+                    </a:lnL>
+                    <a:lnR w="6350" cap="flat" cmpd="sng" algn="ctr">
+                      <a:solidFill>
+                        <a:srgbClr val="000000"/>
+                      </a:solidFill>
+                      <a:prstDash val="solid"/>
+                      <a:round/>
+                      <a:headEnd type="none" w="med" len="med"/>
+                      <a:tailEnd type="none" w="med" len="med"/>
+                    </a:lnR>
+                    <a:lnT w="6350">
+                      <a:solidFill>
+                        <a:srgbClr val="000000"/>
+                      </a:solidFill>
+                      <a:prstDash val="solid"/>
+                    </a:lnT>
+                    <a:lnB w="6350" cap="flat" cmpd="sng" algn="ctr">
+                      <a:solidFill>
+                        <a:srgbClr val="000000"/>
+                      </a:solidFill>
+                      <a:prstDash val="solid"/>
+                      <a:round/>
+                      <a:headEnd type="none" w="med" len="med"/>
+                      <a:tailEnd type="none" w="med" len="med"/>
+                    </a:lnB>
+                    <a:solidFill>
+                      <a:srgbClr val="004455"/>
+                    </a:solidFill>
+                  </a:tcPr>
+                </a:tc>
+                <a:tc>
+                  <a:txBody>
+                    <a:bodyPr/>
+                    <a:lstStyle/>
+                    <a:p>
+                      <a:pPr marL="635" algn="ctr">
+                        <a:lnSpc>
+                          <a:spcPct val="100000"/>
+                        </a:lnSpc>
+                        <a:spcBef>
+                          <a:spcPts val="385"/>
+                        </a:spcBef>
+                      </a:pPr>
+                      <a:r>
+                        <a:rPr lang="en-GB" sz="1100" dirty="0">
+                          <a:solidFill>
+                            <a:schemeClr val="bg1"/>
+                          </a:solidFill>
+                          <a:latin typeface="Roboto" panose="02000000000000000000" pitchFamily="2" charset="0"/>
+                          <a:ea typeface="Roboto" panose="02000000000000000000" pitchFamily="2" charset="0"/>
+                          <a:cs typeface="Arial"/>
+                        </a:rPr>
+                        <a:t>Notes</a:t>
+                      </a:r>
+                      <a:endParaRPr sz="1100" dirty="0">
+                        <a:solidFill>
+                          <a:schemeClr val="bg1"/>
+                        </a:solidFill>
+                        <a:latin typeface="Roboto" panose="02000000000000000000" pitchFamily="2" charset="0"/>
+                        <a:ea typeface="Roboto" panose="02000000000000000000" pitchFamily="2" charset="0"/>
+                        <a:cs typeface="Arial"/>
+                      </a:endParaRPr>
+                    </a:p>
+                  </a:txBody>
+                  <a:tcPr marL="0" marR="0" marT="48895" marB="0" anchor="ctr">
+                    <a:lnL w="6350" cap="flat" cmpd="sng" algn="ctr">
+                      <a:solidFill>
+                        <a:srgbClr val="000000"/>
+                      </a:solidFill>
+                      <a:prstDash val="solid"/>
+                      <a:round/>
+                      <a:headEnd type="none" w="med" len="med"/>
+                      <a:tailEnd type="none" w="med" len="med"/>
+                    </a:lnL>
+                    <a:lnR w="6350">
+                      <a:solidFill>
+                        <a:srgbClr val="000000"/>
+                      </a:solidFill>
+                      <a:prstDash val="solid"/>
+                    </a:lnR>
+                    <a:lnT w="6350">
+                      <a:solidFill>
+                        <a:srgbClr val="000000"/>
+                      </a:solidFill>
+                      <a:prstDash val="solid"/>
+                    </a:lnT>
+                    <a:lnB w="6350" cap="flat" cmpd="sng" algn="ctr">
+                      <a:solidFill>
+                        <a:srgbClr val="000000"/>
+                      </a:solidFill>
+                      <a:prstDash val="solid"/>
+                      <a:round/>
+                      <a:headEnd type="none" w="med" len="med"/>
+                      <a:tailEnd type="none" w="med" len="med"/>
+                    </a:lnB>
+                    <a:solidFill>
+                      <a:srgbClr val="004455"/>
+                    </a:solidFill>
+                  </a:tcPr>
+                </a:tc>
+                <a:extLst>
+                  <a:ext uri="{0D108BD9-81ED-4DB2-BD59-A6C34878D82A}">
+                    <a16:rowId xmlns:a16="http://schemas.microsoft.com/office/drawing/2014/main" val="10000"/>
+                  </a:ext>
+                </a:extLst>
+              </a:tr>
+              <a:tr h="636788">
                 <a:tc>
                   <a:txBody>
                     <a:bodyPr/>
@@ -37716,23 +38189,17 @@
                       <a:headEnd type="none" w="med" len="med"/>
                       <a:tailEnd type="none" w="med" len="med"/>
                     </a:lnR>
-                    <a:lnT w="6350" cap="flat" cmpd="sng" algn="ctr">
-                      <a:solidFill>
-                        <a:srgbClr val="000000"/>
-                      </a:solidFill>
-                      <a:prstDash val="solid"/>
-                      <a:round/>
-                      <a:headEnd type="none" w="med" len="med"/>
-                      <a:tailEnd type="none" w="med" len="med"/>
-                    </a:lnT>
-                    <a:lnB w="6350" cap="flat" cmpd="sng" algn="ctr">
-                      <a:solidFill>
-                        <a:srgbClr val="000000"/>
-                      </a:solidFill>
-                      <a:prstDash val="solid"/>
-                      <a:round/>
-                      <a:headEnd type="none" w="med" len="med"/>
-                      <a:tailEnd type="none" w="med" len="med"/>
+                    <a:lnT w="6350">
+                      <a:solidFill>
+                        <a:srgbClr val="000000"/>
+                      </a:solidFill>
+                      <a:prstDash val="solid"/>
+                    </a:lnT>
+                    <a:lnB w="6350">
+                      <a:solidFill>
+                        <a:srgbClr val="000000"/>
+                      </a:solidFill>
+                      <a:prstDash val="solid"/>
                     </a:lnB>
                     <a:solidFill>
                       <a:schemeClr val="bg1"/>
@@ -37859,14 +38326,11 @@
                       <a:headEnd type="none" w="med" len="med"/>
                       <a:tailEnd type="none" w="med" len="med"/>
                     </a:lnT>
-                    <a:lnB w="6350" cap="flat" cmpd="sng" algn="ctr">
-                      <a:solidFill>
-                        <a:srgbClr val="000000"/>
-                      </a:solidFill>
-                      <a:prstDash val="solid"/>
-                      <a:round/>
-                      <a:headEnd type="none" w="med" len="med"/>
-                      <a:tailEnd type="none" w="med" len="med"/>
+                    <a:lnB w="6350">
+                      <a:solidFill>
+                        <a:srgbClr val="000000"/>
+                      </a:solidFill>
+                      <a:prstDash val="solid"/>
                     </a:lnB>
                     <a:solidFill>
                       <a:schemeClr val="bg1"/>
@@ -37908,14 +38372,11 @@
                       <a:headEnd type="none" w="med" len="med"/>
                       <a:tailEnd type="none" w="med" len="med"/>
                     </a:lnL>
-                    <a:lnR w="6350" cap="flat" cmpd="sng" algn="ctr">
-                      <a:solidFill>
-                        <a:srgbClr val="000000"/>
-                      </a:solidFill>
-                      <a:prstDash val="solid"/>
-                      <a:round/>
-                      <a:headEnd type="none" w="med" len="med"/>
-                      <a:tailEnd type="none" w="med" len="med"/>
+                    <a:lnR w="6350">
+                      <a:solidFill>
+                        <a:srgbClr val="000000"/>
+                      </a:solidFill>
+                      <a:prstDash val="solid"/>
                     </a:lnR>
                     <a:lnT w="6350" cap="flat" cmpd="sng" algn="ctr">
                       <a:solidFill>
@@ -37926,14 +38387,11 @@
                       <a:headEnd type="none" w="med" len="med"/>
                       <a:tailEnd type="none" w="med" len="med"/>
                     </a:lnT>
-                    <a:lnB w="6350" cap="flat" cmpd="sng" algn="ctr">
-                      <a:solidFill>
-                        <a:srgbClr val="000000"/>
-                      </a:solidFill>
-                      <a:prstDash val="solid"/>
-                      <a:round/>
-                      <a:headEnd type="none" w="med" len="med"/>
-                      <a:tailEnd type="none" w="med" len="med"/>
+                    <a:lnB w="6350">
+                      <a:solidFill>
+                        <a:srgbClr val="000000"/>
+                      </a:solidFill>
+                      <a:prstDash val="solid"/>
                     </a:lnB>
                     <a:solidFill>
                       <a:schemeClr val="bg1"/>
@@ -37966,23 +38424,17 @@
                     </a:p>
                   </a:txBody>
                   <a:tcPr anchor="ctr">
-                    <a:lnL w="6350" cap="flat" cmpd="sng" algn="ctr">
-                      <a:solidFill>
-                        <a:srgbClr val="000000"/>
-                      </a:solidFill>
-                      <a:prstDash val="solid"/>
-                      <a:round/>
-                      <a:headEnd type="none" w="med" len="med"/>
-                      <a:tailEnd type="none" w="med" len="med"/>
-                    </a:lnL>
-                    <a:lnR w="6350" cap="flat" cmpd="sng" algn="ctr">
-                      <a:solidFill>
-                        <a:srgbClr val="000000"/>
-                      </a:solidFill>
-                      <a:prstDash val="solid"/>
-                      <a:round/>
-                      <a:headEnd type="none" w="med" len="med"/>
-                      <a:tailEnd type="none" w="med" len="med"/>
+                    <a:lnL w="6350">
+                      <a:solidFill>
+                        <a:srgbClr val="000000"/>
+                      </a:solidFill>
+                      <a:prstDash val="solid"/>
+                    </a:lnL>
+                    <a:lnR w="6350">
+                      <a:solidFill>
+                        <a:srgbClr val="000000"/>
+                      </a:solidFill>
+                      <a:prstDash val="solid"/>
                     </a:lnR>
                     <a:lnT w="6350" cap="flat" cmpd="sng" algn="ctr">
                       <a:solidFill>
@@ -37993,14 +38445,11 @@
                       <a:headEnd type="none" w="med" len="med"/>
                       <a:tailEnd type="none" w="med" len="med"/>
                     </a:lnT>
-                    <a:lnB w="6350" cap="flat" cmpd="sng" algn="ctr">
-                      <a:solidFill>
-                        <a:srgbClr val="000000"/>
-                      </a:solidFill>
-                      <a:prstDash val="solid"/>
-                      <a:round/>
-                      <a:headEnd type="none" w="med" len="med"/>
-                      <a:tailEnd type="none" w="med" len="med"/>
+                    <a:lnB w="6350">
+                      <a:solidFill>
+                        <a:srgbClr val="000000"/>
+                      </a:solidFill>
+                      <a:prstDash val="solid"/>
                     </a:lnB>
                     <a:solidFill>
                       <a:schemeClr val="bg1"/>
@@ -38033,14 +38482,11 @@
                     </a:p>
                   </a:txBody>
                   <a:tcPr anchor="ctr">
-                    <a:lnL w="6350" cap="flat" cmpd="sng" algn="ctr">
-                      <a:solidFill>
-                        <a:srgbClr val="000000"/>
-                      </a:solidFill>
-                      <a:prstDash val="solid"/>
-                      <a:round/>
-                      <a:headEnd type="none" w="med" len="med"/>
-                      <a:tailEnd type="none" w="med" len="med"/>
+                    <a:lnL w="6350">
+                      <a:solidFill>
+                        <a:srgbClr val="000000"/>
+                      </a:solidFill>
+                      <a:prstDash val="solid"/>
                     </a:lnL>
                     <a:lnR w="6350" cap="flat" cmpd="sng" algn="ctr">
                       <a:solidFill>
@@ -38051,23 +38497,17 @@
                       <a:headEnd type="none" w="med" len="med"/>
                       <a:tailEnd type="none" w="med" len="med"/>
                     </a:lnR>
-                    <a:lnT w="6350" cap="flat" cmpd="sng" algn="ctr">
-                      <a:solidFill>
-                        <a:srgbClr val="000000"/>
-                      </a:solidFill>
-                      <a:prstDash val="solid"/>
-                      <a:round/>
-                      <a:headEnd type="none" w="med" len="med"/>
-                      <a:tailEnd type="none" w="med" len="med"/>
-                    </a:lnT>
-                    <a:lnB w="6350" cap="flat" cmpd="sng" algn="ctr">
-                      <a:solidFill>
-                        <a:srgbClr val="000000"/>
-                      </a:solidFill>
-                      <a:prstDash val="solid"/>
-                      <a:round/>
-                      <a:headEnd type="none" w="med" len="med"/>
-                      <a:tailEnd type="none" w="med" len="med"/>
+                    <a:lnT w="6350">
+                      <a:solidFill>
+                        <a:srgbClr val="000000"/>
+                      </a:solidFill>
+                      <a:prstDash val="solid"/>
+                    </a:lnT>
+                    <a:lnB w="6350">
+                      <a:solidFill>
+                        <a:srgbClr val="000000"/>
+                      </a:solidFill>
+                      <a:prstDash val="solid"/>
                     </a:lnB>
                     <a:solidFill>
                       <a:schemeClr val="bg1"/>
@@ -38112,24 +38552,13 @@
                         <a:latin typeface="+mn-lt"/>
                       </a:endParaRPr>
                     </a:p>
-                    <a:p>
-                      <a:pPr algn="ctr">
-                        <a:buNone/>
-                      </a:pPr>
-                      <a:endParaRPr lang="en-GB" sz="1100" dirty="0">
-                        <a:latin typeface="+mn-lt"/>
-                      </a:endParaRPr>
-                    </a:p>
                   </a:txBody>
                   <a:tcPr anchor="ctr">
-                    <a:lnL w="6350" cap="flat" cmpd="sng" algn="ctr">
-                      <a:solidFill>
-                        <a:srgbClr val="000000"/>
-                      </a:solidFill>
-                      <a:prstDash val="solid"/>
-                      <a:round/>
-                      <a:headEnd type="none" w="med" len="med"/>
-                      <a:tailEnd type="none" w="med" len="med"/>
+                    <a:lnL w="6350">
+                      <a:solidFill>
+                        <a:srgbClr val="000000"/>
+                      </a:solidFill>
+                      <a:prstDash val="solid"/>
                     </a:lnL>
                     <a:lnR w="6350">
                       <a:solidFill>
@@ -38162,11 +38591,11 @@
                 </a:tc>
                 <a:extLst>
                   <a:ext uri="{0D108BD9-81ED-4DB2-BD59-A6C34878D82A}">
-                    <a16:rowId xmlns:a16="http://schemas.microsoft.com/office/drawing/2014/main" val="2988655576"/>
+                    <a16:rowId xmlns:a16="http://schemas.microsoft.com/office/drawing/2014/main" val="10001"/>
                   </a:ext>
                 </a:extLst>
               </a:tr>
-              <a:tr h="275904">
+              <a:tr h="816395">
                 <a:tc>
                   <a:txBody>
                     <a:bodyPr/>
@@ -38200,23 +38629,17 @@
                       <a:headEnd type="none" w="med" len="med"/>
                       <a:tailEnd type="none" w="med" len="med"/>
                     </a:lnR>
-                    <a:lnT w="6350" cap="flat" cmpd="sng" algn="ctr">
-                      <a:solidFill>
-                        <a:srgbClr val="000000"/>
-                      </a:solidFill>
-                      <a:prstDash val="solid"/>
-                      <a:round/>
-                      <a:headEnd type="none" w="med" len="med"/>
-                      <a:tailEnd type="none" w="med" len="med"/>
-                    </a:lnT>
-                    <a:lnB w="6350" cap="flat" cmpd="sng" algn="ctr">
-                      <a:solidFill>
-                        <a:srgbClr val="000000"/>
-                      </a:solidFill>
-                      <a:prstDash val="solid"/>
-                      <a:round/>
-                      <a:headEnd type="none" w="med" len="med"/>
-                      <a:tailEnd type="none" w="med" len="med"/>
+                    <a:lnT w="6350">
+                      <a:solidFill>
+                        <a:srgbClr val="000000"/>
+                      </a:solidFill>
+                      <a:prstDash val="solid"/>
+                    </a:lnT>
+                    <a:lnB w="6350">
+                      <a:solidFill>
+                        <a:srgbClr val="000000"/>
+                      </a:solidFill>
+                      <a:prstDash val="solid"/>
                     </a:lnB>
                     <a:solidFill>
                       <a:schemeClr val="bg1"/>
@@ -38334,23 +38757,17 @@
                       <a:headEnd type="none" w="med" len="med"/>
                       <a:tailEnd type="none" w="med" len="med"/>
                     </a:lnR>
-                    <a:lnT w="6350" cap="flat" cmpd="sng" algn="ctr">
-                      <a:solidFill>
-                        <a:srgbClr val="000000"/>
-                      </a:solidFill>
-                      <a:prstDash val="solid"/>
-                      <a:round/>
-                      <a:headEnd type="none" w="med" len="med"/>
-                      <a:tailEnd type="none" w="med" len="med"/>
-                    </a:lnT>
-                    <a:lnB w="6350" cap="flat" cmpd="sng" algn="ctr">
-                      <a:solidFill>
-                        <a:srgbClr val="000000"/>
-                      </a:solidFill>
-                      <a:prstDash val="solid"/>
-                      <a:round/>
-                      <a:headEnd type="none" w="med" len="med"/>
-                      <a:tailEnd type="none" w="med" len="med"/>
+                    <a:lnT w="6350">
+                      <a:solidFill>
+                        <a:srgbClr val="000000"/>
+                      </a:solidFill>
+                      <a:prstDash val="solid"/>
+                    </a:lnT>
+                    <a:lnB w="6350">
+                      <a:solidFill>
+                        <a:srgbClr val="000000"/>
+                      </a:solidFill>
+                      <a:prstDash val="solid"/>
                     </a:lnB>
                     <a:solidFill>
                       <a:schemeClr val="bg1"/>
@@ -38392,32 +38809,23 @@
                       <a:headEnd type="none" w="med" len="med"/>
                       <a:tailEnd type="none" w="med" len="med"/>
                     </a:lnL>
-                    <a:lnR w="6350" cap="flat" cmpd="sng" algn="ctr">
-                      <a:solidFill>
-                        <a:srgbClr val="000000"/>
-                      </a:solidFill>
-                      <a:prstDash val="solid"/>
-                      <a:round/>
-                      <a:headEnd type="none" w="med" len="med"/>
-                      <a:tailEnd type="none" w="med" len="med"/>
-                    </a:lnR>
-                    <a:lnT w="6350" cap="flat" cmpd="sng" algn="ctr">
-                      <a:solidFill>
-                        <a:srgbClr val="000000"/>
-                      </a:solidFill>
-                      <a:prstDash val="solid"/>
-                      <a:round/>
-                      <a:headEnd type="none" w="med" len="med"/>
-                      <a:tailEnd type="none" w="med" len="med"/>
-                    </a:lnT>
-                    <a:lnB w="6350" cap="flat" cmpd="sng" algn="ctr">
-                      <a:solidFill>
-                        <a:srgbClr val="000000"/>
-                      </a:solidFill>
-                      <a:prstDash val="solid"/>
-                      <a:round/>
-                      <a:headEnd type="none" w="med" len="med"/>
-                      <a:tailEnd type="none" w="med" len="med"/>
+                    <a:lnR w="6350">
+                      <a:solidFill>
+                        <a:srgbClr val="000000"/>
+                      </a:solidFill>
+                      <a:prstDash val="solid"/>
+                    </a:lnR>
+                    <a:lnT w="6350">
+                      <a:solidFill>
+                        <a:srgbClr val="000000"/>
+                      </a:solidFill>
+                      <a:prstDash val="solid"/>
+                    </a:lnT>
+                    <a:lnB w="6350">
+                      <a:solidFill>
+                        <a:srgbClr val="000000"/>
+                      </a:solidFill>
+                      <a:prstDash val="solid"/>
                     </a:lnB>
                     <a:solidFill>
                       <a:schemeClr val="bg1"/>
@@ -38450,41 +38858,29 @@
                     </a:p>
                   </a:txBody>
                   <a:tcPr anchor="ctr">
-                    <a:lnL w="6350" cap="flat" cmpd="sng" algn="ctr">
-                      <a:solidFill>
-                        <a:srgbClr val="000000"/>
-                      </a:solidFill>
-                      <a:prstDash val="solid"/>
-                      <a:round/>
-                      <a:headEnd type="none" w="med" len="med"/>
-                      <a:tailEnd type="none" w="med" len="med"/>
-                    </a:lnL>
-                    <a:lnR w="6350" cap="flat" cmpd="sng" algn="ctr">
-                      <a:solidFill>
-                        <a:srgbClr val="000000"/>
-                      </a:solidFill>
-                      <a:prstDash val="solid"/>
-                      <a:round/>
-                      <a:headEnd type="none" w="med" len="med"/>
-                      <a:tailEnd type="none" w="med" len="med"/>
-                    </a:lnR>
-                    <a:lnT w="6350" cap="flat" cmpd="sng" algn="ctr">
-                      <a:solidFill>
-                        <a:srgbClr val="000000"/>
-                      </a:solidFill>
-                      <a:prstDash val="solid"/>
-                      <a:round/>
-                      <a:headEnd type="none" w="med" len="med"/>
-                      <a:tailEnd type="none" w="med" len="med"/>
-                    </a:lnT>
-                    <a:lnB w="6350" cap="flat" cmpd="sng" algn="ctr">
-                      <a:solidFill>
-                        <a:srgbClr val="000000"/>
-                      </a:solidFill>
-                      <a:prstDash val="solid"/>
-                      <a:round/>
-                      <a:headEnd type="none" w="med" len="med"/>
-                      <a:tailEnd type="none" w="med" len="med"/>
+                    <a:lnL w="6350">
+                      <a:solidFill>
+                        <a:srgbClr val="000000"/>
+                      </a:solidFill>
+                      <a:prstDash val="solid"/>
+                    </a:lnL>
+                    <a:lnR w="6350">
+                      <a:solidFill>
+                        <a:srgbClr val="000000"/>
+                      </a:solidFill>
+                      <a:prstDash val="solid"/>
+                    </a:lnR>
+                    <a:lnT w="6350">
+                      <a:solidFill>
+                        <a:srgbClr val="000000"/>
+                      </a:solidFill>
+                      <a:prstDash val="solid"/>
+                    </a:lnT>
+                    <a:lnB w="6350">
+                      <a:solidFill>
+                        <a:srgbClr val="000000"/>
+                      </a:solidFill>
+                      <a:prstDash val="solid"/>
                     </a:lnB>
                     <a:solidFill>
                       <a:schemeClr val="bg1"/>
@@ -38517,14 +38913,11 @@
                     </a:p>
                   </a:txBody>
                   <a:tcPr anchor="ctr">
-                    <a:lnL w="6350" cap="flat" cmpd="sng" algn="ctr">
-                      <a:solidFill>
-                        <a:srgbClr val="000000"/>
-                      </a:solidFill>
-                      <a:prstDash val="solid"/>
-                      <a:round/>
-                      <a:headEnd type="none" w="med" len="med"/>
-                      <a:tailEnd type="none" w="med" len="med"/>
+                    <a:lnL w="6350">
+                      <a:solidFill>
+                        <a:srgbClr val="000000"/>
+                      </a:solidFill>
+                      <a:prstDash val="solid"/>
                     </a:lnL>
                     <a:lnR w="6350" cap="flat" cmpd="sng" algn="ctr">
                       <a:solidFill>
@@ -38535,23 +38928,17 @@
                       <a:headEnd type="none" w="med" len="med"/>
                       <a:tailEnd type="none" w="med" len="med"/>
                     </a:lnR>
-                    <a:lnT w="6350" cap="flat" cmpd="sng" algn="ctr">
-                      <a:solidFill>
-                        <a:srgbClr val="000000"/>
-                      </a:solidFill>
-                      <a:prstDash val="solid"/>
-                      <a:round/>
-                      <a:headEnd type="none" w="med" len="med"/>
-                      <a:tailEnd type="none" w="med" len="med"/>
-                    </a:lnT>
-                    <a:lnB w="6350" cap="flat" cmpd="sng" algn="ctr">
-                      <a:solidFill>
-                        <a:srgbClr val="000000"/>
-                      </a:solidFill>
-                      <a:prstDash val="solid"/>
-                      <a:round/>
-                      <a:headEnd type="none" w="med" len="med"/>
-                      <a:tailEnd type="none" w="med" len="med"/>
+                    <a:lnT w="6350">
+                      <a:solidFill>
+                        <a:srgbClr val="000000"/>
+                      </a:solidFill>
+                      <a:prstDash val="solid"/>
+                    </a:lnT>
+                    <a:lnB w="6350">
+                      <a:solidFill>
+                        <a:srgbClr val="000000"/>
+                      </a:solidFill>
+                      <a:prstDash val="solid"/>
                     </a:lnB>
                     <a:solidFill>
                       <a:schemeClr val="bg1"/>
@@ -38596,24 +38983,13 @@
                         <a:latin typeface="+mn-lt"/>
                       </a:endParaRPr>
                     </a:p>
-                    <a:p>
-                      <a:pPr algn="ctr">
-                        <a:buNone/>
-                      </a:pPr>
-                      <a:endParaRPr lang="en-GB" sz="1100" dirty="0">
-                        <a:latin typeface="+mn-lt"/>
-                      </a:endParaRPr>
-                    </a:p>
                   </a:txBody>
                   <a:tcPr anchor="ctr">
-                    <a:lnL w="6350" cap="flat" cmpd="sng" algn="ctr">
-                      <a:solidFill>
-                        <a:srgbClr val="000000"/>
-                      </a:solidFill>
-                      <a:prstDash val="solid"/>
-                      <a:round/>
-                      <a:headEnd type="none" w="med" len="med"/>
-                      <a:tailEnd type="none" w="med" len="med"/>
+                    <a:lnL w="6350">
+                      <a:solidFill>
+                        <a:srgbClr val="000000"/>
+                      </a:solidFill>
+                      <a:prstDash val="solid"/>
                     </a:lnL>
                     <a:lnR w="6350">
                       <a:solidFill>
@@ -38646,11 +39022,11 @@
                 </a:tc>
                 <a:extLst>
                   <a:ext uri="{0D108BD9-81ED-4DB2-BD59-A6C34878D82A}">
-                    <a16:rowId xmlns:a16="http://schemas.microsoft.com/office/drawing/2014/main" val="359354580"/>
+                    <a16:rowId xmlns:a16="http://schemas.microsoft.com/office/drawing/2014/main" val="10002"/>
                   </a:ext>
                 </a:extLst>
               </a:tr>
-              <a:tr h="153280">
+              <a:tr h="457181">
                 <a:tc>
                   <a:txBody>
                     <a:bodyPr/>
@@ -38690,14 +39066,11 @@
                       </a:solidFill>
                       <a:prstDash val="solid"/>
                     </a:lnT>
-                    <a:lnB w="6350" cap="flat" cmpd="sng" algn="ctr">
-                      <a:solidFill>
-                        <a:srgbClr val="000000"/>
-                      </a:solidFill>
-                      <a:prstDash val="solid"/>
-                      <a:round/>
-                      <a:headEnd type="none" w="med" len="med"/>
-                      <a:tailEnd type="none" w="med" len="med"/>
+                    <a:lnB w="6350">
+                      <a:solidFill>
+                        <a:srgbClr val="000000"/>
+                      </a:solidFill>
+                      <a:prstDash val="solid"/>
                     </a:lnB>
                     <a:solidFill>
                       <a:schemeClr val="bg1"/>
@@ -38821,14 +39194,11 @@
                       </a:solidFill>
                       <a:prstDash val="solid"/>
                     </a:lnT>
-                    <a:lnB w="6350" cap="flat" cmpd="sng" algn="ctr">
-                      <a:solidFill>
-                        <a:srgbClr val="000000"/>
-                      </a:solidFill>
-                      <a:prstDash val="solid"/>
-                      <a:round/>
-                      <a:headEnd type="none" w="med" len="med"/>
-                      <a:tailEnd type="none" w="med" len="med"/>
+                    <a:lnB w="6350">
+                      <a:solidFill>
+                        <a:srgbClr val="000000"/>
+                      </a:solidFill>
+                      <a:prstDash val="solid"/>
                     </a:lnB>
                     <a:solidFill>
                       <a:schemeClr val="bg1"/>
@@ -38870,14 +39240,11 @@
                       <a:headEnd type="none" w="med" len="med"/>
                       <a:tailEnd type="none" w="med" len="med"/>
                     </a:lnL>
-                    <a:lnR w="6350" cap="flat" cmpd="sng" algn="ctr">
-                      <a:solidFill>
-                        <a:srgbClr val="000000"/>
-                      </a:solidFill>
-                      <a:prstDash val="solid"/>
-                      <a:round/>
-                      <a:headEnd type="none" w="med" len="med"/>
-                      <a:tailEnd type="none" w="med" len="med"/>
+                    <a:lnR w="6350">
+                      <a:solidFill>
+                        <a:srgbClr val="000000"/>
+                      </a:solidFill>
+                      <a:prstDash val="solid"/>
                     </a:lnR>
                     <a:lnT w="6350">
                       <a:solidFill>
@@ -38885,14 +39252,11 @@
                       </a:solidFill>
                       <a:prstDash val="solid"/>
                     </a:lnT>
-                    <a:lnB w="6350" cap="flat" cmpd="sng" algn="ctr">
-                      <a:solidFill>
-                        <a:srgbClr val="000000"/>
-                      </a:solidFill>
-                      <a:prstDash val="solid"/>
-                      <a:round/>
-                      <a:headEnd type="none" w="med" len="med"/>
-                      <a:tailEnd type="none" w="med" len="med"/>
+                    <a:lnB w="6350">
+                      <a:solidFill>
+                        <a:srgbClr val="000000"/>
+                      </a:solidFill>
+                      <a:prstDash val="solid"/>
                     </a:lnB>
                     <a:solidFill>
                       <a:schemeClr val="bg1"/>
@@ -38925,23 +39289,17 @@
                     </a:p>
                   </a:txBody>
                   <a:tcPr anchor="ctr">
-                    <a:lnL w="6350" cap="flat" cmpd="sng" algn="ctr">
-                      <a:solidFill>
-                        <a:srgbClr val="000000"/>
-                      </a:solidFill>
-                      <a:prstDash val="solid"/>
-                      <a:round/>
-                      <a:headEnd type="none" w="med" len="med"/>
-                      <a:tailEnd type="none" w="med" len="med"/>
-                    </a:lnL>
-                    <a:lnR w="6350" cap="flat" cmpd="sng" algn="ctr">
-                      <a:solidFill>
-                        <a:srgbClr val="000000"/>
-                      </a:solidFill>
-                      <a:prstDash val="solid"/>
-                      <a:round/>
-                      <a:headEnd type="none" w="med" len="med"/>
-                      <a:tailEnd type="none" w="med" len="med"/>
+                    <a:lnL w="6350">
+                      <a:solidFill>
+                        <a:srgbClr val="000000"/>
+                      </a:solidFill>
+                      <a:prstDash val="solid"/>
+                    </a:lnL>
+                    <a:lnR w="6350">
+                      <a:solidFill>
+                        <a:srgbClr val="000000"/>
+                      </a:solidFill>
+                      <a:prstDash val="solid"/>
                     </a:lnR>
                     <a:lnT w="6350">
                       <a:solidFill>
@@ -38949,14 +39307,11 @@
                       </a:solidFill>
                       <a:prstDash val="solid"/>
                     </a:lnT>
-                    <a:lnB w="6350" cap="flat" cmpd="sng" algn="ctr">
-                      <a:solidFill>
-                        <a:srgbClr val="000000"/>
-                      </a:solidFill>
-                      <a:prstDash val="solid"/>
-                      <a:round/>
-                      <a:headEnd type="none" w="med" len="med"/>
-                      <a:tailEnd type="none" w="med" len="med"/>
+                    <a:lnB w="6350">
+                      <a:solidFill>
+                        <a:srgbClr val="000000"/>
+                      </a:solidFill>
+                      <a:prstDash val="solid"/>
                     </a:lnB>
                     <a:solidFill>
                       <a:schemeClr val="bg1"/>
@@ -38989,14 +39344,11 @@
                     </a:p>
                   </a:txBody>
                   <a:tcPr anchor="ctr">
-                    <a:lnL w="6350" cap="flat" cmpd="sng" algn="ctr">
-                      <a:solidFill>
-                        <a:srgbClr val="000000"/>
-                      </a:solidFill>
-                      <a:prstDash val="solid"/>
-                      <a:round/>
-                      <a:headEnd type="none" w="med" len="med"/>
-                      <a:tailEnd type="none" w="med" len="med"/>
+                    <a:lnL w="6350">
+                      <a:solidFill>
+                        <a:srgbClr val="000000"/>
+                      </a:solidFill>
+                      <a:prstDash val="solid"/>
                     </a:lnL>
                     <a:lnR w="6350" cap="flat" cmpd="sng" algn="ctr">
                       <a:solidFill>
@@ -39013,14 +39365,11 @@
                       </a:solidFill>
                       <a:prstDash val="solid"/>
                     </a:lnT>
-                    <a:lnB w="6350" cap="flat" cmpd="sng" algn="ctr">
-                      <a:solidFill>
-                        <a:srgbClr val="000000"/>
-                      </a:solidFill>
-                      <a:prstDash val="solid"/>
-                      <a:round/>
-                      <a:headEnd type="none" w="med" len="med"/>
-                      <a:tailEnd type="none" w="med" len="med"/>
+                    <a:lnB w="6350">
+                      <a:solidFill>
+                        <a:srgbClr val="000000"/>
+                      </a:solidFill>
+                      <a:prstDash val="solid"/>
                     </a:lnB>
                     <a:solidFill>
                       <a:schemeClr val="bg1"/>
@@ -39065,24 +39414,13 @@
                         <a:latin typeface="+mn-lt"/>
                       </a:endParaRPr>
                     </a:p>
-                    <a:p>
-                      <a:pPr algn="ctr">
-                        <a:buNone/>
-                      </a:pPr>
-                      <a:endParaRPr lang="en-GB" sz="1100" dirty="0">
-                        <a:latin typeface="+mn-lt"/>
-                      </a:endParaRPr>
-                    </a:p>
                   </a:txBody>
                   <a:tcPr anchor="ctr">
-                    <a:lnL w="6350" cap="flat" cmpd="sng" algn="ctr">
-                      <a:solidFill>
-                        <a:srgbClr val="000000"/>
-                      </a:solidFill>
-                      <a:prstDash val="solid"/>
-                      <a:round/>
-                      <a:headEnd type="none" w="med" len="med"/>
-                      <a:tailEnd type="none" w="med" len="med"/>
+                    <a:lnL w="6350">
+                      <a:solidFill>
+                        <a:srgbClr val="000000"/>
+                      </a:solidFill>
+                      <a:prstDash val="solid"/>
                     </a:lnL>
                     <a:lnR w="6350">
                       <a:solidFill>
@@ -39115,11 +39453,11 @@
                 </a:tc>
                 <a:extLst>
                   <a:ext uri="{0D108BD9-81ED-4DB2-BD59-A6C34878D82A}">
-                    <a16:rowId xmlns:a16="http://schemas.microsoft.com/office/drawing/2014/main" val="3270673828"/>
+                    <a16:rowId xmlns:a16="http://schemas.microsoft.com/office/drawing/2014/main" val="10003"/>
                   </a:ext>
                 </a:extLst>
               </a:tr>
-              <a:tr h="275904">
+              <a:tr h="457181">
                 <a:tc>
                   <a:txBody>
                     <a:bodyPr/>
@@ -39211,14 +39549,6 @@
                         <a:latin typeface="+mn-lt"/>
                       </a:endParaRPr>
                     </a:p>
-                    <a:p>
-                      <a:pPr algn="ctr">
-                        <a:buNone/>
-                      </a:pPr>
-                      <a:endParaRPr lang="en-GB" sz="1100" dirty="0">
-                        <a:latin typeface="+mn-lt"/>
-                      </a:endParaRPr>
-                    </a:p>
                   </a:txBody>
                   <a:tcPr anchor="ctr">
                     <a:lnL w="6350" cap="flat" cmpd="sng" algn="ctr">
@@ -39361,14 +39691,11 @@
                       <a:headEnd type="none" w="med" len="med"/>
                       <a:tailEnd type="none" w="med" len="med"/>
                     </a:lnL>
-                    <a:lnR w="6350" cap="flat" cmpd="sng" algn="ctr">
-                      <a:solidFill>
-                        <a:srgbClr val="000000"/>
-                      </a:solidFill>
-                      <a:prstDash val="solid"/>
-                      <a:round/>
-                      <a:headEnd type="none" w="med" len="med"/>
-                      <a:tailEnd type="none" w="med" len="med"/>
+                    <a:lnR w="6350">
+                      <a:solidFill>
+                        <a:srgbClr val="000000"/>
+                      </a:solidFill>
+                      <a:prstDash val="solid"/>
                     </a:lnR>
                     <a:lnT w="6350">
                       <a:solidFill>
@@ -39416,23 +39743,17 @@
                     </a:p>
                   </a:txBody>
                   <a:tcPr anchor="ctr">
-                    <a:lnL w="6350" cap="flat" cmpd="sng" algn="ctr">
-                      <a:solidFill>
-                        <a:srgbClr val="000000"/>
-                      </a:solidFill>
-                      <a:prstDash val="solid"/>
-                      <a:round/>
-                      <a:headEnd type="none" w="med" len="med"/>
-                      <a:tailEnd type="none" w="med" len="med"/>
-                    </a:lnL>
-                    <a:lnR w="6350" cap="flat" cmpd="sng" algn="ctr">
-                      <a:solidFill>
-                        <a:srgbClr val="000000"/>
-                      </a:solidFill>
-                      <a:prstDash val="solid"/>
-                      <a:round/>
-                      <a:headEnd type="none" w="med" len="med"/>
-                      <a:tailEnd type="none" w="med" len="med"/>
+                    <a:lnL w="6350">
+                      <a:solidFill>
+                        <a:srgbClr val="000000"/>
+                      </a:solidFill>
+                      <a:prstDash val="solid"/>
+                    </a:lnL>
+                    <a:lnR w="6350">
+                      <a:solidFill>
+                        <a:srgbClr val="000000"/>
+                      </a:solidFill>
+                      <a:prstDash val="solid"/>
                     </a:lnR>
                     <a:lnT w="6350">
                       <a:solidFill>
@@ -39480,14 +39801,11 @@
                     </a:p>
                   </a:txBody>
                   <a:tcPr anchor="ctr">
-                    <a:lnL w="6350" cap="flat" cmpd="sng" algn="ctr">
-                      <a:solidFill>
-                        <a:srgbClr val="000000"/>
-                      </a:solidFill>
-                      <a:prstDash val="solid"/>
-                      <a:round/>
-                      <a:headEnd type="none" w="med" len="med"/>
-                      <a:tailEnd type="none" w="med" len="med"/>
+                    <a:lnL w="6350">
+                      <a:solidFill>
+                        <a:srgbClr val="000000"/>
+                      </a:solidFill>
+                      <a:prstDash val="solid"/>
                     </a:lnL>
                     <a:lnR w="6350" cap="flat" cmpd="sng" algn="ctr">
                       <a:solidFill>
@@ -39544,14 +39862,11 @@
                     </a:p>
                   </a:txBody>
                   <a:tcPr anchor="ctr">
-                    <a:lnL w="6350" cap="flat" cmpd="sng" algn="ctr">
-                      <a:solidFill>
-                        <a:srgbClr val="000000"/>
-                      </a:solidFill>
-                      <a:prstDash val="solid"/>
-                      <a:round/>
-                      <a:headEnd type="none" w="med" len="med"/>
-                      <a:tailEnd type="none" w="med" len="med"/>
+                    <a:lnL w="6350">
+                      <a:solidFill>
+                        <a:srgbClr val="000000"/>
+                      </a:solidFill>
+                      <a:prstDash val="solid"/>
                     </a:lnL>
                     <a:lnR w="6350">
                       <a:solidFill>
@@ -39584,11 +39899,11 @@
                 </a:tc>
                 <a:extLst>
                   <a:ext uri="{0D108BD9-81ED-4DB2-BD59-A6C34878D82A}">
-                    <a16:rowId xmlns:a16="http://schemas.microsoft.com/office/drawing/2014/main" val="3753452779"/>
+                    <a16:rowId xmlns:a16="http://schemas.microsoft.com/office/drawing/2014/main" val="10004"/>
                   </a:ext>
                 </a:extLst>
               </a:tr>
-              <a:tr h="275904">
+              <a:tr h="636788">
                 <a:tc>
                   <a:txBody>
                     <a:bodyPr/>
@@ -39680,14 +39995,6 @@
                         <a:latin typeface="+mn-lt"/>
                       </a:endParaRPr>
                     </a:p>
-                    <a:p>
-                      <a:pPr algn="ctr">
-                        <a:buNone/>
-                      </a:pPr>
-                      <a:endParaRPr lang="en-GB" sz="1100" dirty="0">
-                        <a:latin typeface="+mn-lt"/>
-                      </a:endParaRPr>
-                    </a:p>
                   </a:txBody>
                   <a:tcPr anchor="ctr">
                     <a:lnL w="6350" cap="flat" cmpd="sng" algn="ctr">
@@ -40025,14 +40332,6 @@
                         <a:latin typeface="+mn-lt"/>
                       </a:endParaRPr>
                     </a:p>
-                    <a:p>
-                      <a:pPr algn="ctr">
-                        <a:buNone/>
-                      </a:pPr>
-                      <a:endParaRPr lang="en-GB" sz="1100" dirty="0">
-                        <a:latin typeface="+mn-lt"/>
-                      </a:endParaRPr>
-                    </a:p>
                   </a:txBody>
                   <a:tcPr anchor="ctr">
                     <a:lnL w="6350" cap="flat" cmpd="sng" algn="ctr">
@@ -40075,11 +40374,11 @@
                 </a:tc>
                 <a:extLst>
                   <a:ext uri="{0D108BD9-81ED-4DB2-BD59-A6C34878D82A}">
-                    <a16:rowId xmlns:a16="http://schemas.microsoft.com/office/drawing/2014/main" val="1610046565"/>
+                    <a16:rowId xmlns:a16="http://schemas.microsoft.com/office/drawing/2014/main" val="562821450"/>
                   </a:ext>
                 </a:extLst>
               </a:tr>
-              <a:tr h="214592">
+              <a:tr h="636788">
                 <a:tc>
                   <a:txBody>
                     <a:bodyPr/>
@@ -40494,14 +40793,6 @@
                         <a:latin typeface="+mn-lt"/>
                       </a:endParaRPr>
                     </a:p>
-                    <a:p>
-                      <a:pPr algn="ctr">
-                        <a:buNone/>
-                      </a:pPr>
-                      <a:endParaRPr lang="en-GB" sz="1100" dirty="0">
-                        <a:latin typeface="+mn-lt"/>
-                      </a:endParaRPr>
-                    </a:p>
                   </a:txBody>
                   <a:tcPr anchor="ctr">
                     <a:lnL w="6350" cap="flat" cmpd="sng" algn="ctr">
@@ -40544,7 +40835,959 @@
                 </a:tc>
                 <a:extLst>
                   <a:ext uri="{0D108BD9-81ED-4DB2-BD59-A6C34878D82A}">
-                    <a16:rowId xmlns:a16="http://schemas.microsoft.com/office/drawing/2014/main" val="1315923609"/>
+                    <a16:rowId xmlns:a16="http://schemas.microsoft.com/office/drawing/2014/main" val="2602563038"/>
+                  </a:ext>
+                </a:extLst>
+              </a:tr>
+              <a:tr h="636788">
+                <a:tc>
+                  <a:txBody>
+                    <a:bodyPr/>
+                    <a:lstStyle/>
+                    <a:p>
+                      <a:pPr>
+                        <a:buNone/>
+                      </a:pPr>
+                      <a:r>
+                        <a:rPr lang="en-GB" sz="1100" dirty="0"/>
+                        <a:t>Difference Between Lane Powers</a:t>
+                      </a:r>
+                      <a:endParaRPr lang="en-GB" sz="1100" dirty="0">
+                        <a:latin typeface="+mn-lt"/>
+                      </a:endParaRPr>
+                    </a:p>
+                  </a:txBody>
+                  <a:tcPr anchor="ctr">
+                    <a:lnL w="6350">
+                      <a:solidFill>
+                        <a:srgbClr val="000000"/>
+                      </a:solidFill>
+                      <a:prstDash val="solid"/>
+                    </a:lnL>
+                    <a:lnR w="6350" cap="flat" cmpd="sng" algn="ctr">
+                      <a:solidFill>
+                        <a:srgbClr val="000000"/>
+                      </a:solidFill>
+                      <a:prstDash val="solid"/>
+                      <a:round/>
+                      <a:headEnd type="none" w="med" len="med"/>
+                      <a:tailEnd type="none" w="med" len="med"/>
+                    </a:lnR>
+                    <a:lnT w="6350" cap="flat" cmpd="sng" algn="ctr">
+                      <a:solidFill>
+                        <a:srgbClr val="000000"/>
+                      </a:solidFill>
+                      <a:prstDash val="solid"/>
+                      <a:round/>
+                      <a:headEnd type="none" w="med" len="med"/>
+                      <a:tailEnd type="none" w="med" len="med"/>
+                    </a:lnT>
+                    <a:lnB w="6350" cap="flat" cmpd="sng" algn="ctr">
+                      <a:solidFill>
+                        <a:srgbClr val="000000"/>
+                      </a:solidFill>
+                      <a:prstDash val="solid"/>
+                      <a:round/>
+                      <a:headEnd type="none" w="med" len="med"/>
+                      <a:tailEnd type="none" w="med" len="med"/>
+                    </a:lnB>
+                    <a:solidFill>
+                      <a:schemeClr val="bg1"/>
+                    </a:solidFill>
+                  </a:tcPr>
+                </a:tc>
+                <a:tc>
+                  <a:txBody>
+                    <a:bodyPr/>
+                    <a:lstStyle/>
+                    <a:p>
+                      <a:pPr algn="ctr">
+                        <a:buNone/>
+                      </a:pPr>
+                      <a:r>
+                        <a:rPr lang="en-GB" sz="1100" dirty="0"/>
+                        <a:t>{{</a:t>
+                      </a:r>
+                      <a:r>
+                        <a:rPr lang="en-GB" sz="1100" dirty="0" err="1"/>
+                        <a:t>tx_lane_power_difference_symbol</a:t>
+                      </a:r>
+                      <a:r>
+                        <a:rPr lang="en-GB" sz="1100" dirty="0"/>
+                        <a:t>}}</a:t>
+                      </a:r>
+                      <a:endParaRPr lang="en-GB" sz="1100" dirty="0">
+                        <a:latin typeface="+mn-lt"/>
+                      </a:endParaRPr>
+                    </a:p>
+                  </a:txBody>
+                  <a:tcPr anchor="ctr">
+                    <a:lnL w="6350" cap="flat" cmpd="sng" algn="ctr">
+                      <a:solidFill>
+                        <a:srgbClr val="000000"/>
+                      </a:solidFill>
+                      <a:prstDash val="solid"/>
+                      <a:round/>
+                      <a:headEnd type="none" w="med" len="med"/>
+                      <a:tailEnd type="none" w="med" len="med"/>
+                    </a:lnL>
+                    <a:lnR w="6350" cap="flat" cmpd="sng" algn="ctr">
+                      <a:solidFill>
+                        <a:srgbClr val="000000"/>
+                      </a:solidFill>
+                      <a:prstDash val="solid"/>
+                      <a:round/>
+                      <a:headEnd type="none" w="med" len="med"/>
+                      <a:tailEnd type="none" w="med" len="med"/>
+                    </a:lnR>
+                    <a:lnT w="6350" cap="flat" cmpd="sng" algn="ctr">
+                      <a:solidFill>
+                        <a:srgbClr val="000000"/>
+                      </a:solidFill>
+                      <a:prstDash val="solid"/>
+                      <a:round/>
+                      <a:headEnd type="none" w="med" len="med"/>
+                      <a:tailEnd type="none" w="med" len="med"/>
+                    </a:lnT>
+                    <a:lnB w="6350" cap="flat" cmpd="sng" algn="ctr">
+                      <a:solidFill>
+                        <a:srgbClr val="000000"/>
+                      </a:solidFill>
+                      <a:prstDash val="solid"/>
+                      <a:round/>
+                      <a:headEnd type="none" w="med" len="med"/>
+                      <a:tailEnd type="none" w="med" len="med"/>
+                    </a:lnB>
+                    <a:solidFill>
+                      <a:schemeClr val="bg1"/>
+                    </a:solidFill>
+                  </a:tcPr>
+                </a:tc>
+                <a:tc>
+                  <a:txBody>
+                    <a:bodyPr/>
+                    <a:lstStyle/>
+                    <a:p>
+                      <a:pPr algn="ctr">
+                        <a:buNone/>
+                      </a:pPr>
+                      <a:r>
+                        <a:rPr lang="en-GB" sz="1100" dirty="0"/>
+                        <a:t>{{</a:t>
+                      </a:r>
+                      <a:r>
+                        <a:rPr lang="en-GB" sz="1100" dirty="0" err="1"/>
+                        <a:t>tx_lane_power_difference_min</a:t>
+                      </a:r>
+                      <a:r>
+                        <a:rPr lang="en-GB" sz="1100" dirty="0"/>
+                        <a:t>}}</a:t>
+                      </a:r>
+                      <a:endParaRPr lang="en-GB" sz="1100" dirty="0">
+                        <a:latin typeface="+mn-lt"/>
+                      </a:endParaRPr>
+                    </a:p>
+                  </a:txBody>
+                  <a:tcPr anchor="ctr">
+                    <a:lnL w="6350" cap="flat" cmpd="sng" algn="ctr">
+                      <a:solidFill>
+                        <a:srgbClr val="000000"/>
+                      </a:solidFill>
+                      <a:prstDash val="solid"/>
+                      <a:round/>
+                      <a:headEnd type="none" w="med" len="med"/>
+                      <a:tailEnd type="none" w="med" len="med"/>
+                    </a:lnL>
+                    <a:lnR w="6350" cap="flat" cmpd="sng" algn="ctr">
+                      <a:solidFill>
+                        <a:srgbClr val="000000"/>
+                      </a:solidFill>
+                      <a:prstDash val="solid"/>
+                      <a:round/>
+                      <a:headEnd type="none" w="med" len="med"/>
+                      <a:tailEnd type="none" w="med" len="med"/>
+                    </a:lnR>
+                    <a:lnT w="6350" cap="flat" cmpd="sng" algn="ctr">
+                      <a:solidFill>
+                        <a:srgbClr val="000000"/>
+                      </a:solidFill>
+                      <a:prstDash val="solid"/>
+                      <a:round/>
+                      <a:headEnd type="none" w="med" len="med"/>
+                      <a:tailEnd type="none" w="med" len="med"/>
+                    </a:lnT>
+                    <a:lnB w="6350" cap="flat" cmpd="sng" algn="ctr">
+                      <a:solidFill>
+                        <a:srgbClr val="000000"/>
+                      </a:solidFill>
+                      <a:prstDash val="solid"/>
+                      <a:round/>
+                      <a:headEnd type="none" w="med" len="med"/>
+                      <a:tailEnd type="none" w="med" len="med"/>
+                    </a:lnB>
+                    <a:solidFill>
+                      <a:schemeClr val="bg1"/>
+                    </a:solidFill>
+                  </a:tcPr>
+                </a:tc>
+                <a:tc>
+                  <a:txBody>
+                    <a:bodyPr/>
+                    <a:lstStyle/>
+                    <a:p>
+                      <a:pPr algn="ctr">
+                        <a:buNone/>
+                      </a:pPr>
+                      <a:r>
+                        <a:rPr lang="en-GB" sz="1100" dirty="0"/>
+                        <a:t>{{</a:t>
+                      </a:r>
+                      <a:r>
+                        <a:rPr lang="en-GB" sz="1100" dirty="0" err="1"/>
+                        <a:t>tx_lane_power_difference_typ</a:t>
+                      </a:r>
+                      <a:r>
+                        <a:rPr lang="en-GB" sz="1100" dirty="0"/>
+                        <a:t>}}</a:t>
+                      </a:r>
+                      <a:endParaRPr lang="en-GB" sz="1100" dirty="0">
+                        <a:latin typeface="+mn-lt"/>
+                      </a:endParaRPr>
+                    </a:p>
+                  </a:txBody>
+                  <a:tcPr anchor="ctr">
+                    <a:lnL w="6350" cap="flat" cmpd="sng" algn="ctr">
+                      <a:solidFill>
+                        <a:srgbClr val="000000"/>
+                      </a:solidFill>
+                      <a:prstDash val="solid"/>
+                      <a:round/>
+                      <a:headEnd type="none" w="med" len="med"/>
+                      <a:tailEnd type="none" w="med" len="med"/>
+                    </a:lnL>
+                    <a:lnR w="6350" cap="flat" cmpd="sng" algn="ctr">
+                      <a:solidFill>
+                        <a:srgbClr val="000000"/>
+                      </a:solidFill>
+                      <a:prstDash val="solid"/>
+                      <a:round/>
+                      <a:headEnd type="none" w="med" len="med"/>
+                      <a:tailEnd type="none" w="med" len="med"/>
+                    </a:lnR>
+                    <a:lnT w="6350" cap="flat" cmpd="sng" algn="ctr">
+                      <a:solidFill>
+                        <a:srgbClr val="000000"/>
+                      </a:solidFill>
+                      <a:prstDash val="solid"/>
+                      <a:round/>
+                      <a:headEnd type="none" w="med" len="med"/>
+                      <a:tailEnd type="none" w="med" len="med"/>
+                    </a:lnT>
+                    <a:lnB w="6350" cap="flat" cmpd="sng" algn="ctr">
+                      <a:solidFill>
+                        <a:srgbClr val="000000"/>
+                      </a:solidFill>
+                      <a:prstDash val="solid"/>
+                      <a:round/>
+                      <a:headEnd type="none" w="med" len="med"/>
+                      <a:tailEnd type="none" w="med" len="med"/>
+                    </a:lnB>
+                    <a:solidFill>
+                      <a:schemeClr val="bg1"/>
+                    </a:solidFill>
+                  </a:tcPr>
+                </a:tc>
+                <a:tc>
+                  <a:txBody>
+                    <a:bodyPr/>
+                    <a:lstStyle/>
+                    <a:p>
+                      <a:pPr algn="ctr">
+                        <a:buNone/>
+                      </a:pPr>
+                      <a:r>
+                        <a:rPr lang="en-GB" sz="1100" dirty="0"/>
+                        <a:t>{{</a:t>
+                      </a:r>
+                      <a:r>
+                        <a:rPr lang="en-GB" sz="1100" dirty="0" err="1"/>
+                        <a:t>tx_lane_power_difference_max</a:t>
+                      </a:r>
+                      <a:r>
+                        <a:rPr lang="en-GB" sz="1100" dirty="0"/>
+                        <a:t>}}</a:t>
+                      </a:r>
+                      <a:endParaRPr lang="en-GB" sz="1100" dirty="0">
+                        <a:latin typeface="+mn-lt"/>
+                      </a:endParaRPr>
+                    </a:p>
+                  </a:txBody>
+                  <a:tcPr anchor="ctr">
+                    <a:lnL w="6350" cap="flat" cmpd="sng" algn="ctr">
+                      <a:solidFill>
+                        <a:srgbClr val="000000"/>
+                      </a:solidFill>
+                      <a:prstDash val="solid"/>
+                      <a:round/>
+                      <a:headEnd type="none" w="med" len="med"/>
+                      <a:tailEnd type="none" w="med" len="med"/>
+                    </a:lnL>
+                    <a:lnR w="6350" cap="flat" cmpd="sng" algn="ctr">
+                      <a:solidFill>
+                        <a:srgbClr val="000000"/>
+                      </a:solidFill>
+                      <a:prstDash val="solid"/>
+                      <a:round/>
+                      <a:headEnd type="none" w="med" len="med"/>
+                      <a:tailEnd type="none" w="med" len="med"/>
+                    </a:lnR>
+                    <a:lnT w="6350" cap="flat" cmpd="sng" algn="ctr">
+                      <a:solidFill>
+                        <a:srgbClr val="000000"/>
+                      </a:solidFill>
+                      <a:prstDash val="solid"/>
+                      <a:round/>
+                      <a:headEnd type="none" w="med" len="med"/>
+                      <a:tailEnd type="none" w="med" len="med"/>
+                    </a:lnT>
+                    <a:lnB w="6350" cap="flat" cmpd="sng" algn="ctr">
+                      <a:solidFill>
+                        <a:srgbClr val="000000"/>
+                      </a:solidFill>
+                      <a:prstDash val="solid"/>
+                      <a:round/>
+                      <a:headEnd type="none" w="med" len="med"/>
+                      <a:tailEnd type="none" w="med" len="med"/>
+                    </a:lnB>
+                    <a:solidFill>
+                      <a:schemeClr val="bg1"/>
+                    </a:solidFill>
+                  </a:tcPr>
+                </a:tc>
+                <a:tc>
+                  <a:txBody>
+                    <a:bodyPr/>
+                    <a:lstStyle/>
+                    <a:p>
+                      <a:pPr algn="ctr">
+                        <a:buNone/>
+                      </a:pPr>
+                      <a:r>
+                        <a:rPr lang="en-GB" sz="1100" dirty="0"/>
+                        <a:t>{{</a:t>
+                      </a:r>
+                      <a:r>
+                        <a:rPr lang="en-GB" sz="1100" dirty="0" err="1"/>
+                        <a:t>tx_lane_power_difference_unit</a:t>
+                      </a:r>
+                      <a:r>
+                        <a:rPr lang="en-GB" sz="1100" dirty="0"/>
+                        <a:t>}}</a:t>
+                      </a:r>
+                      <a:endParaRPr lang="en-GB" sz="1100" dirty="0">
+                        <a:latin typeface="+mn-lt"/>
+                      </a:endParaRPr>
+                    </a:p>
+                  </a:txBody>
+                  <a:tcPr anchor="ctr">
+                    <a:lnL w="6350" cap="flat" cmpd="sng" algn="ctr">
+                      <a:solidFill>
+                        <a:srgbClr val="000000"/>
+                      </a:solidFill>
+                      <a:prstDash val="solid"/>
+                      <a:round/>
+                      <a:headEnd type="none" w="med" len="med"/>
+                      <a:tailEnd type="none" w="med" len="med"/>
+                    </a:lnL>
+                    <a:lnR w="6350" cap="flat" cmpd="sng" algn="ctr">
+                      <a:solidFill>
+                        <a:srgbClr val="000000"/>
+                      </a:solidFill>
+                      <a:prstDash val="solid"/>
+                      <a:round/>
+                      <a:headEnd type="none" w="med" len="med"/>
+                      <a:tailEnd type="none" w="med" len="med"/>
+                    </a:lnR>
+                    <a:lnT w="6350" cap="flat" cmpd="sng" algn="ctr">
+                      <a:solidFill>
+                        <a:srgbClr val="000000"/>
+                      </a:solidFill>
+                      <a:prstDash val="solid"/>
+                      <a:round/>
+                      <a:headEnd type="none" w="med" len="med"/>
+                      <a:tailEnd type="none" w="med" len="med"/>
+                    </a:lnT>
+                    <a:lnB w="6350" cap="flat" cmpd="sng" algn="ctr">
+                      <a:solidFill>
+                        <a:srgbClr val="000000"/>
+                      </a:solidFill>
+                      <a:prstDash val="solid"/>
+                      <a:round/>
+                      <a:headEnd type="none" w="med" len="med"/>
+                      <a:tailEnd type="none" w="med" len="med"/>
+                    </a:lnB>
+                    <a:solidFill>
+                      <a:schemeClr val="bg1"/>
+                    </a:solidFill>
+                  </a:tcPr>
+                </a:tc>
+                <a:tc>
+                  <a:txBody>
+                    <a:bodyPr/>
+                    <a:lstStyle/>
+                    <a:p>
+                      <a:pPr marL="0" marR="0" lvl="0" indent="0" algn="ctr" defTabSz="914400" eaLnBrk="1" fontAlgn="auto" latinLnBrk="0" hangingPunct="1">
+                        <a:lnSpc>
+                          <a:spcPct val="100000"/>
+                        </a:lnSpc>
+                        <a:spcBef>
+                          <a:spcPts val="0"/>
+                        </a:spcBef>
+                        <a:spcAft>
+                          <a:spcPts val="0"/>
+                        </a:spcAft>
+                        <a:buClrTx/>
+                        <a:buSzTx/>
+                        <a:buFontTx/>
+                        <a:buNone/>
+                        <a:tabLst/>
+                        <a:defRPr/>
+                      </a:pPr>
+                      <a:r>
+                        <a:rPr lang="en-GB" sz="1100" dirty="0"/>
+                        <a:t>{{</a:t>
+                      </a:r>
+                      <a:r>
+                        <a:rPr lang="en-GB" sz="1100" dirty="0" err="1"/>
+                        <a:t>tx_lane_power_difference_notes</a:t>
+                      </a:r>
+                      <a:r>
+                        <a:rPr lang="en-GB" sz="1100" dirty="0"/>
+                        <a:t>}}</a:t>
+                      </a:r>
+                      <a:endParaRPr lang="en-GB" sz="1100" dirty="0">
+                        <a:latin typeface="+mn-lt"/>
+                      </a:endParaRPr>
+                    </a:p>
+                  </a:txBody>
+                  <a:tcPr anchor="ctr">
+                    <a:lnL w="6350" cap="flat" cmpd="sng" algn="ctr">
+                      <a:solidFill>
+                        <a:srgbClr val="000000"/>
+                      </a:solidFill>
+                      <a:prstDash val="solid"/>
+                      <a:round/>
+                      <a:headEnd type="none" w="med" len="med"/>
+                      <a:tailEnd type="none" w="med" len="med"/>
+                    </a:lnL>
+                    <a:lnR w="6350">
+                      <a:solidFill>
+                        <a:srgbClr val="000000"/>
+                      </a:solidFill>
+                      <a:prstDash val="solid"/>
+                    </a:lnR>
+                    <a:lnT w="6350" cap="flat" cmpd="sng" algn="ctr">
+                      <a:solidFill>
+                        <a:srgbClr val="000000"/>
+                      </a:solidFill>
+                      <a:prstDash val="solid"/>
+                      <a:round/>
+                      <a:headEnd type="none" w="med" len="med"/>
+                      <a:tailEnd type="none" w="med" len="med"/>
+                    </a:lnT>
+                    <a:lnB w="6350" cap="flat" cmpd="sng" algn="ctr">
+                      <a:solidFill>
+                        <a:srgbClr val="000000"/>
+                      </a:solidFill>
+                      <a:prstDash val="solid"/>
+                      <a:round/>
+                      <a:headEnd type="none" w="med" len="med"/>
+                      <a:tailEnd type="none" w="med" len="med"/>
+                    </a:lnB>
+                    <a:solidFill>
+                      <a:schemeClr val="bg1"/>
+                    </a:solidFill>
+                  </a:tcPr>
+                </a:tc>
+                <a:extLst>
+                  <a:ext uri="{0D108BD9-81ED-4DB2-BD59-A6C34878D82A}">
+                    <a16:rowId xmlns:a16="http://schemas.microsoft.com/office/drawing/2014/main" val="4085259243"/>
+                  </a:ext>
+                </a:extLst>
+              </a:tr>
+              <a:tr h="816395">
+                <a:tc>
+                  <a:txBody>
+                    <a:bodyPr/>
+                    <a:lstStyle/>
+                    <a:p>
+                      <a:pPr>
+                        <a:buNone/>
+                      </a:pPr>
+                      <a:r>
+                        <a:rPr lang="en-GB" sz="1100" dirty="0"/>
+                        <a:t>Optical Return Loss Tolerance</a:t>
+                      </a:r>
+                      <a:endParaRPr lang="en-GB" sz="1100" dirty="0">
+                        <a:latin typeface="+mn-lt"/>
+                      </a:endParaRPr>
+                    </a:p>
+                  </a:txBody>
+                  <a:tcPr anchor="ctr">
+                    <a:lnL w="6350">
+                      <a:solidFill>
+                        <a:srgbClr val="000000"/>
+                      </a:solidFill>
+                      <a:prstDash val="solid"/>
+                    </a:lnL>
+                    <a:lnR w="6350" cap="flat" cmpd="sng" algn="ctr">
+                      <a:solidFill>
+                        <a:srgbClr val="000000"/>
+                      </a:solidFill>
+                      <a:prstDash val="solid"/>
+                      <a:round/>
+                      <a:headEnd type="none" w="med" len="med"/>
+                      <a:tailEnd type="none" w="med" len="med"/>
+                    </a:lnR>
+                    <a:lnT w="6350" cap="flat" cmpd="sng" algn="ctr">
+                      <a:solidFill>
+                        <a:srgbClr val="000000"/>
+                      </a:solidFill>
+                      <a:prstDash val="solid"/>
+                      <a:round/>
+                      <a:headEnd type="none" w="med" len="med"/>
+                      <a:tailEnd type="none" w="med" len="med"/>
+                    </a:lnT>
+                    <a:lnB w="6350" cap="flat" cmpd="sng" algn="ctr">
+                      <a:solidFill>
+                        <a:srgbClr val="000000"/>
+                      </a:solidFill>
+                      <a:prstDash val="solid"/>
+                      <a:round/>
+                      <a:headEnd type="none" w="med" len="med"/>
+                      <a:tailEnd type="none" w="med" len="med"/>
+                    </a:lnB>
+                    <a:solidFill>
+                      <a:schemeClr val="bg1"/>
+                    </a:solidFill>
+                  </a:tcPr>
+                </a:tc>
+                <a:tc>
+                  <a:txBody>
+                    <a:bodyPr/>
+                    <a:lstStyle/>
+                    <a:p>
+                      <a:pPr algn="ctr">
+                        <a:buNone/>
+                      </a:pPr>
+                      <a:r>
+                        <a:rPr lang="en-GB" sz="1100" dirty="0"/>
+                        <a:t>{{</a:t>
+                      </a:r>
+                      <a:r>
+                        <a:rPr lang="en-GB" sz="1100" dirty="0" err="1"/>
+                        <a:t>tx_optical_return_loss_tolerance_symbol</a:t>
+                      </a:r>
+                      <a:r>
+                        <a:rPr lang="en-GB" sz="1100" dirty="0"/>
+                        <a:t>}}</a:t>
+                      </a:r>
+                      <a:endParaRPr lang="en-GB" sz="1100" dirty="0">
+                        <a:latin typeface="+mn-lt"/>
+                      </a:endParaRPr>
+                    </a:p>
+                  </a:txBody>
+                  <a:tcPr anchor="ctr">
+                    <a:lnL w="6350" cap="flat" cmpd="sng" algn="ctr">
+                      <a:solidFill>
+                        <a:srgbClr val="000000"/>
+                      </a:solidFill>
+                      <a:prstDash val="solid"/>
+                      <a:round/>
+                      <a:headEnd type="none" w="med" len="med"/>
+                      <a:tailEnd type="none" w="med" len="med"/>
+                    </a:lnL>
+                    <a:lnR w="6350" cap="flat" cmpd="sng" algn="ctr">
+                      <a:solidFill>
+                        <a:srgbClr val="000000"/>
+                      </a:solidFill>
+                      <a:prstDash val="solid"/>
+                      <a:round/>
+                      <a:headEnd type="none" w="med" len="med"/>
+                      <a:tailEnd type="none" w="med" len="med"/>
+                    </a:lnR>
+                    <a:lnT w="6350" cap="flat" cmpd="sng" algn="ctr">
+                      <a:solidFill>
+                        <a:srgbClr val="000000"/>
+                      </a:solidFill>
+                      <a:prstDash val="solid"/>
+                      <a:round/>
+                      <a:headEnd type="none" w="med" len="med"/>
+                      <a:tailEnd type="none" w="med" len="med"/>
+                    </a:lnT>
+                    <a:lnB w="6350" cap="flat" cmpd="sng" algn="ctr">
+                      <a:solidFill>
+                        <a:srgbClr val="000000"/>
+                      </a:solidFill>
+                      <a:prstDash val="solid"/>
+                      <a:round/>
+                      <a:headEnd type="none" w="med" len="med"/>
+                      <a:tailEnd type="none" w="med" len="med"/>
+                    </a:lnB>
+                    <a:solidFill>
+                      <a:schemeClr val="bg1"/>
+                    </a:solidFill>
+                  </a:tcPr>
+                </a:tc>
+                <a:tc>
+                  <a:txBody>
+                    <a:bodyPr/>
+                    <a:lstStyle/>
+                    <a:p>
+                      <a:pPr algn="ctr">
+                        <a:buNone/>
+                      </a:pPr>
+                      <a:r>
+                        <a:rPr lang="en-GB" sz="1100" dirty="0"/>
+                        <a:t>{{</a:t>
+                      </a:r>
+                      <a:r>
+                        <a:rPr lang="en-GB" sz="1100" dirty="0" err="1"/>
+                        <a:t>tx_optical_return_loss_tolerance_min</a:t>
+                      </a:r>
+                      <a:r>
+                        <a:rPr lang="en-GB" sz="1100" dirty="0"/>
+                        <a:t>}}</a:t>
+                      </a:r>
+                      <a:endParaRPr lang="en-GB" sz="1100" dirty="0">
+                        <a:latin typeface="+mn-lt"/>
+                      </a:endParaRPr>
+                    </a:p>
+                  </a:txBody>
+                  <a:tcPr anchor="ctr">
+                    <a:lnL w="6350" cap="flat" cmpd="sng" algn="ctr">
+                      <a:solidFill>
+                        <a:srgbClr val="000000"/>
+                      </a:solidFill>
+                      <a:prstDash val="solid"/>
+                      <a:round/>
+                      <a:headEnd type="none" w="med" len="med"/>
+                      <a:tailEnd type="none" w="med" len="med"/>
+                    </a:lnL>
+                    <a:lnR w="6350" cap="flat" cmpd="sng" algn="ctr">
+                      <a:solidFill>
+                        <a:srgbClr val="000000"/>
+                      </a:solidFill>
+                      <a:prstDash val="solid"/>
+                      <a:round/>
+                      <a:headEnd type="none" w="med" len="med"/>
+                      <a:tailEnd type="none" w="med" len="med"/>
+                    </a:lnR>
+                    <a:lnT w="6350" cap="flat" cmpd="sng" algn="ctr">
+                      <a:solidFill>
+                        <a:srgbClr val="000000"/>
+                      </a:solidFill>
+                      <a:prstDash val="solid"/>
+                      <a:round/>
+                      <a:headEnd type="none" w="med" len="med"/>
+                      <a:tailEnd type="none" w="med" len="med"/>
+                    </a:lnT>
+                    <a:lnB w="6350" cap="flat" cmpd="sng" algn="ctr">
+                      <a:solidFill>
+                        <a:srgbClr val="000000"/>
+                      </a:solidFill>
+                      <a:prstDash val="solid"/>
+                      <a:round/>
+                      <a:headEnd type="none" w="med" len="med"/>
+                      <a:tailEnd type="none" w="med" len="med"/>
+                    </a:lnB>
+                    <a:solidFill>
+                      <a:schemeClr val="bg1"/>
+                    </a:solidFill>
+                  </a:tcPr>
+                </a:tc>
+                <a:tc>
+                  <a:txBody>
+                    <a:bodyPr/>
+                    <a:lstStyle/>
+                    <a:p>
+                      <a:pPr algn="ctr">
+                        <a:buNone/>
+                      </a:pPr>
+                      <a:r>
+                        <a:rPr lang="en-GB" sz="1100" dirty="0"/>
+                        <a:t>{{</a:t>
+                      </a:r>
+                      <a:r>
+                        <a:rPr lang="en-GB" sz="1100" dirty="0" err="1"/>
+                        <a:t>tx_optical_return_loss_tolerance_typ</a:t>
+                      </a:r>
+                      <a:r>
+                        <a:rPr lang="en-GB" sz="1100" dirty="0"/>
+                        <a:t>}}</a:t>
+                      </a:r>
+                      <a:endParaRPr lang="en-GB" sz="1100" dirty="0">
+                        <a:latin typeface="+mn-lt"/>
+                      </a:endParaRPr>
+                    </a:p>
+                  </a:txBody>
+                  <a:tcPr anchor="ctr">
+                    <a:lnL w="6350" cap="flat" cmpd="sng" algn="ctr">
+                      <a:solidFill>
+                        <a:srgbClr val="000000"/>
+                      </a:solidFill>
+                      <a:prstDash val="solid"/>
+                      <a:round/>
+                      <a:headEnd type="none" w="med" len="med"/>
+                      <a:tailEnd type="none" w="med" len="med"/>
+                    </a:lnL>
+                    <a:lnR w="6350" cap="flat" cmpd="sng" algn="ctr">
+                      <a:solidFill>
+                        <a:srgbClr val="000000"/>
+                      </a:solidFill>
+                      <a:prstDash val="solid"/>
+                      <a:round/>
+                      <a:headEnd type="none" w="med" len="med"/>
+                      <a:tailEnd type="none" w="med" len="med"/>
+                    </a:lnR>
+                    <a:lnT w="6350" cap="flat" cmpd="sng" algn="ctr">
+                      <a:solidFill>
+                        <a:srgbClr val="000000"/>
+                      </a:solidFill>
+                      <a:prstDash val="solid"/>
+                      <a:round/>
+                      <a:headEnd type="none" w="med" len="med"/>
+                      <a:tailEnd type="none" w="med" len="med"/>
+                    </a:lnT>
+                    <a:lnB w="6350" cap="flat" cmpd="sng" algn="ctr">
+                      <a:solidFill>
+                        <a:srgbClr val="000000"/>
+                      </a:solidFill>
+                      <a:prstDash val="solid"/>
+                      <a:round/>
+                      <a:headEnd type="none" w="med" len="med"/>
+                      <a:tailEnd type="none" w="med" len="med"/>
+                    </a:lnB>
+                    <a:solidFill>
+                      <a:schemeClr val="bg1"/>
+                    </a:solidFill>
+                  </a:tcPr>
+                </a:tc>
+                <a:tc>
+                  <a:txBody>
+                    <a:bodyPr/>
+                    <a:lstStyle/>
+                    <a:p>
+                      <a:pPr algn="ctr">
+                        <a:buNone/>
+                      </a:pPr>
+                      <a:r>
+                        <a:rPr lang="en-GB" sz="1100" dirty="0"/>
+                        <a:t>{{</a:t>
+                      </a:r>
+                      <a:r>
+                        <a:rPr lang="en-GB" sz="1100" dirty="0" err="1"/>
+                        <a:t>tx_optical_return_loss_tolerance_max</a:t>
+                      </a:r>
+                      <a:r>
+                        <a:rPr lang="en-GB" sz="1100" dirty="0"/>
+                        <a:t>}}</a:t>
+                      </a:r>
+                      <a:endParaRPr lang="en-GB" sz="1100" dirty="0">
+                        <a:latin typeface="+mn-lt"/>
+                      </a:endParaRPr>
+                    </a:p>
+                  </a:txBody>
+                  <a:tcPr anchor="ctr">
+                    <a:lnL w="6350" cap="flat" cmpd="sng" algn="ctr">
+                      <a:solidFill>
+                        <a:srgbClr val="000000"/>
+                      </a:solidFill>
+                      <a:prstDash val="solid"/>
+                      <a:round/>
+                      <a:headEnd type="none" w="med" len="med"/>
+                      <a:tailEnd type="none" w="med" len="med"/>
+                    </a:lnL>
+                    <a:lnR w="6350" cap="flat" cmpd="sng" algn="ctr">
+                      <a:solidFill>
+                        <a:srgbClr val="000000"/>
+                      </a:solidFill>
+                      <a:prstDash val="solid"/>
+                      <a:round/>
+                      <a:headEnd type="none" w="med" len="med"/>
+                      <a:tailEnd type="none" w="med" len="med"/>
+                    </a:lnR>
+                    <a:lnT w="6350" cap="flat" cmpd="sng" algn="ctr">
+                      <a:solidFill>
+                        <a:srgbClr val="000000"/>
+                      </a:solidFill>
+                      <a:prstDash val="solid"/>
+                      <a:round/>
+                      <a:headEnd type="none" w="med" len="med"/>
+                      <a:tailEnd type="none" w="med" len="med"/>
+                    </a:lnT>
+                    <a:lnB w="6350" cap="flat" cmpd="sng" algn="ctr">
+                      <a:solidFill>
+                        <a:srgbClr val="000000"/>
+                      </a:solidFill>
+                      <a:prstDash val="solid"/>
+                      <a:round/>
+                      <a:headEnd type="none" w="med" len="med"/>
+                      <a:tailEnd type="none" w="med" len="med"/>
+                    </a:lnB>
+                    <a:solidFill>
+                      <a:schemeClr val="bg1"/>
+                    </a:solidFill>
+                  </a:tcPr>
+                </a:tc>
+                <a:tc>
+                  <a:txBody>
+                    <a:bodyPr/>
+                    <a:lstStyle/>
+                    <a:p>
+                      <a:pPr algn="ctr">
+                        <a:buNone/>
+                      </a:pPr>
+                      <a:r>
+                        <a:rPr lang="en-GB" sz="1100" dirty="0"/>
+                        <a:t>{{</a:t>
+                      </a:r>
+                      <a:r>
+                        <a:rPr lang="en-GB" sz="1100" dirty="0" err="1"/>
+                        <a:t>tx_optical_return_loss_tolerance_unit</a:t>
+                      </a:r>
+                      <a:r>
+                        <a:rPr lang="en-GB" sz="1100" dirty="0"/>
+                        <a:t>}}</a:t>
+                      </a:r>
+                      <a:endParaRPr lang="en-GB" sz="1100" dirty="0">
+                        <a:latin typeface="+mn-lt"/>
+                      </a:endParaRPr>
+                    </a:p>
+                  </a:txBody>
+                  <a:tcPr anchor="ctr">
+                    <a:lnL w="6350" cap="flat" cmpd="sng" algn="ctr">
+                      <a:solidFill>
+                        <a:srgbClr val="000000"/>
+                      </a:solidFill>
+                      <a:prstDash val="solid"/>
+                      <a:round/>
+                      <a:headEnd type="none" w="med" len="med"/>
+                      <a:tailEnd type="none" w="med" len="med"/>
+                    </a:lnL>
+                    <a:lnR w="6350" cap="flat" cmpd="sng" algn="ctr">
+                      <a:solidFill>
+                        <a:srgbClr val="000000"/>
+                      </a:solidFill>
+                      <a:prstDash val="solid"/>
+                      <a:round/>
+                      <a:headEnd type="none" w="med" len="med"/>
+                      <a:tailEnd type="none" w="med" len="med"/>
+                    </a:lnR>
+                    <a:lnT w="6350" cap="flat" cmpd="sng" algn="ctr">
+                      <a:solidFill>
+                        <a:srgbClr val="000000"/>
+                      </a:solidFill>
+                      <a:prstDash val="solid"/>
+                      <a:round/>
+                      <a:headEnd type="none" w="med" len="med"/>
+                      <a:tailEnd type="none" w="med" len="med"/>
+                    </a:lnT>
+                    <a:lnB w="6350" cap="flat" cmpd="sng" algn="ctr">
+                      <a:solidFill>
+                        <a:srgbClr val="000000"/>
+                      </a:solidFill>
+                      <a:prstDash val="solid"/>
+                      <a:round/>
+                      <a:headEnd type="none" w="med" len="med"/>
+                      <a:tailEnd type="none" w="med" len="med"/>
+                    </a:lnB>
+                    <a:solidFill>
+                      <a:schemeClr val="bg1"/>
+                    </a:solidFill>
+                  </a:tcPr>
+                </a:tc>
+                <a:tc>
+                  <a:txBody>
+                    <a:bodyPr/>
+                    <a:lstStyle/>
+                    <a:p>
+                      <a:pPr marL="0" marR="0" lvl="0" indent="0" algn="ctr" defTabSz="914400" eaLnBrk="1" fontAlgn="auto" latinLnBrk="0" hangingPunct="1">
+                        <a:lnSpc>
+                          <a:spcPct val="100000"/>
+                        </a:lnSpc>
+                        <a:spcBef>
+                          <a:spcPts val="0"/>
+                        </a:spcBef>
+                        <a:spcAft>
+                          <a:spcPts val="0"/>
+                        </a:spcAft>
+                        <a:buClrTx/>
+                        <a:buSzTx/>
+                        <a:buFontTx/>
+                        <a:buNone/>
+                        <a:tabLst/>
+                        <a:defRPr/>
+                      </a:pPr>
+                      <a:r>
+                        <a:rPr lang="en-GB" sz="1100" dirty="0"/>
+                        <a:t>{{</a:t>
+                      </a:r>
+                      <a:r>
+                        <a:rPr lang="en-GB" sz="1100" dirty="0" err="1"/>
+                        <a:t>tx_optical_return_loss_tolerance_notes</a:t>
+                      </a:r>
+                      <a:r>
+                        <a:rPr lang="en-GB" sz="1100" dirty="0"/>
+                        <a:t>}}</a:t>
+                      </a:r>
+                      <a:endParaRPr lang="en-GB" sz="1100" dirty="0">
+                        <a:latin typeface="+mn-lt"/>
+                      </a:endParaRPr>
+                    </a:p>
+                  </a:txBody>
+                  <a:tcPr anchor="ctr">
+                    <a:lnL w="6350" cap="flat" cmpd="sng" algn="ctr">
+                      <a:solidFill>
+                        <a:srgbClr val="000000"/>
+                      </a:solidFill>
+                      <a:prstDash val="solid"/>
+                      <a:round/>
+                      <a:headEnd type="none" w="med" len="med"/>
+                      <a:tailEnd type="none" w="med" len="med"/>
+                    </a:lnL>
+                    <a:lnR w="6350">
+                      <a:solidFill>
+                        <a:srgbClr val="000000"/>
+                      </a:solidFill>
+                      <a:prstDash val="solid"/>
+                    </a:lnR>
+                    <a:lnT w="6350" cap="flat" cmpd="sng" algn="ctr">
+                      <a:solidFill>
+                        <a:srgbClr val="000000"/>
+                      </a:solidFill>
+                      <a:prstDash val="solid"/>
+                      <a:round/>
+                      <a:headEnd type="none" w="med" len="med"/>
+                      <a:tailEnd type="none" w="med" len="med"/>
+                    </a:lnT>
+                    <a:lnB w="6350" cap="flat" cmpd="sng" algn="ctr">
+                      <a:solidFill>
+                        <a:srgbClr val="000000"/>
+                      </a:solidFill>
+                      <a:prstDash val="solid"/>
+                      <a:round/>
+                      <a:headEnd type="none" w="med" len="med"/>
+                      <a:tailEnd type="none" w="med" len="med"/>
+                    </a:lnB>
+                    <a:solidFill>
+                      <a:schemeClr val="bg1"/>
+                    </a:solidFill>
+                  </a:tcPr>
+                </a:tc>
+                <a:extLst>
+                  <a:ext uri="{0D108BD9-81ED-4DB2-BD59-A6C34878D82A}">
+                    <a16:rowId xmlns:a16="http://schemas.microsoft.com/office/drawing/2014/main" val="627200471"/>
                   </a:ext>
                 </a:extLst>
               </a:tr>
@@ -40552,564 +41795,127 @@
           </a:graphicData>
         </a:graphic>
       </p:graphicFrame>
-      <p:graphicFrame>
-        <p:nvGraphicFramePr>
-          <p:cNvPr id="3" name="Table 2">
+      <p:sp>
+        <p:nvSpPr>
+          <p:cNvPr id="7" name="TextBox 6">
             <a:extLst>
               <a:ext uri="{FF2B5EF4-FFF2-40B4-BE49-F238E27FC236}">
-                <a16:creationId xmlns:a16="http://schemas.microsoft.com/office/drawing/2014/main" id="{270B7E15-F231-BBDF-627A-30A3FAA3AEF8}"/>
+                <a16:creationId xmlns:a16="http://schemas.microsoft.com/office/drawing/2014/main" id="{A302DCAA-ABC6-9513-E3CE-CEBBEC6444D8}"/>
               </a:ext>
             </a:extLst>
           </p:cNvPr>
-          <p:cNvGraphicFramePr>
-            <a:graphicFrameLocks noGrp="1"/>
-          </p:cNvGraphicFramePr>
-          <p:nvPr>
-            <p:extLst>
-              <p:ext uri="{D42A27DB-BD31-4B8C-83A1-F6EECF244321}">
-                <p14:modId xmlns:p14="http://schemas.microsoft.com/office/powerpoint/2010/main" val="817926635"/>
-              </p:ext>
-            </p:extLst>
-          </p:nvPr>
-        </p:nvGraphicFramePr>
-        <p:xfrm>
-          <a:off x="638629" y="2219249"/>
-          <a:ext cx="7736115" cy="357264"/>
-        </p:xfrm>
-        <a:graphic>
-          <a:graphicData uri="http://schemas.openxmlformats.org/drawingml/2006/table">
-            <a:tbl>
-              <a:tblPr firstRow="1" bandRow="1">
-                <a:tableStyleId>{2D5ABB26-0587-4C30-8999-92F81FD0307C}</a:tableStyleId>
-              </a:tblPr>
-              <a:tblGrid>
-                <a:gridCol w="1213326">
-                  <a:extLst>
-                    <a:ext uri="{9D8B030D-6E8A-4147-A177-3AD203B41FA5}">
-                      <a16:colId xmlns:a16="http://schemas.microsoft.com/office/drawing/2014/main" val="1266733858"/>
-                    </a:ext>
-                  </a:extLst>
-                </a:gridCol>
-                <a:gridCol w="950300">
-                  <a:extLst>
-                    <a:ext uri="{9D8B030D-6E8A-4147-A177-3AD203B41FA5}">
-                      <a16:colId xmlns:a16="http://schemas.microsoft.com/office/drawing/2014/main" val="3003156228"/>
-                    </a:ext>
-                  </a:extLst>
-                </a:gridCol>
-                <a:gridCol w="1094247">
-                  <a:extLst>
-                    <a:ext uri="{9D8B030D-6E8A-4147-A177-3AD203B41FA5}">
-                      <a16:colId xmlns:a16="http://schemas.microsoft.com/office/drawing/2014/main" val="2879080888"/>
-                    </a:ext>
-                  </a:extLst>
-                </a:gridCol>
-                <a:gridCol w="1094247">
-                  <a:extLst>
-                    <a:ext uri="{9D8B030D-6E8A-4147-A177-3AD203B41FA5}">
-                      <a16:colId xmlns:a16="http://schemas.microsoft.com/office/drawing/2014/main" val="367533004"/>
-                    </a:ext>
-                  </a:extLst>
-                </a:gridCol>
-                <a:gridCol w="1198455">
-                  <a:extLst>
-                    <a:ext uri="{9D8B030D-6E8A-4147-A177-3AD203B41FA5}">
-                      <a16:colId xmlns:a16="http://schemas.microsoft.com/office/drawing/2014/main" val="1596546496"/>
-                    </a:ext>
-                  </a:extLst>
-                </a:gridCol>
-                <a:gridCol w="1192526">
-                  <a:extLst>
-                    <a:ext uri="{9D8B030D-6E8A-4147-A177-3AD203B41FA5}">
-                      <a16:colId xmlns:a16="http://schemas.microsoft.com/office/drawing/2014/main" val="969499107"/>
-                    </a:ext>
-                  </a:extLst>
-                </a:gridCol>
-                <a:gridCol w="993014">
-                  <a:extLst>
-                    <a:ext uri="{9D8B030D-6E8A-4147-A177-3AD203B41FA5}">
-                      <a16:colId xmlns:a16="http://schemas.microsoft.com/office/drawing/2014/main" val="4292514002"/>
-                    </a:ext>
-                  </a:extLst>
-                </a:gridCol>
-              </a:tblGrid>
-              <a:tr h="357264">
-                <a:tc>
-                  <a:txBody>
-                    <a:bodyPr/>
-                    <a:lstStyle/>
-                    <a:p>
-                      <a:pPr marL="635" algn="ctr">
-                        <a:lnSpc>
-                          <a:spcPct val="100000"/>
-                        </a:lnSpc>
-                        <a:spcBef>
-                          <a:spcPts val="385"/>
-                        </a:spcBef>
-                      </a:pPr>
-                      <a:r>
-                        <a:rPr sz="1100" b="1" spc="-10" dirty="0">
-                          <a:solidFill>
-                            <a:srgbClr val="FFFFFF"/>
-                          </a:solidFill>
-                          <a:latin typeface="Roboto" panose="02000000000000000000" pitchFamily="2" charset="0"/>
-                          <a:ea typeface="Roboto" panose="02000000000000000000" pitchFamily="2" charset="0"/>
-                          <a:cs typeface="Arial"/>
-                        </a:rPr>
-                        <a:t>Parameter</a:t>
-                      </a:r>
-                      <a:endParaRPr sz="1100" dirty="0">
-                        <a:latin typeface="Roboto" panose="02000000000000000000" pitchFamily="2" charset="0"/>
-                        <a:ea typeface="Roboto" panose="02000000000000000000" pitchFamily="2" charset="0"/>
-                        <a:cs typeface="Arial"/>
-                      </a:endParaRPr>
-                    </a:p>
-                  </a:txBody>
-                  <a:tcPr marL="0" marR="0" marT="48895" marB="0" anchor="ctr">
-                    <a:lnL w="6350">
-                      <a:solidFill>
-                        <a:srgbClr val="000000"/>
-                      </a:solidFill>
-                      <a:prstDash val="solid"/>
-                    </a:lnL>
-                    <a:lnR w="6350" cap="flat" cmpd="sng" algn="ctr">
-                      <a:solidFill>
-                        <a:srgbClr val="000000"/>
-                      </a:solidFill>
-                      <a:prstDash val="solid"/>
-                      <a:round/>
-                      <a:headEnd type="none" w="med" len="med"/>
-                      <a:tailEnd type="none" w="med" len="med"/>
-                    </a:lnR>
-                    <a:lnT w="6350">
-                      <a:solidFill>
-                        <a:srgbClr val="000000"/>
-                      </a:solidFill>
-                      <a:prstDash val="solid"/>
-                    </a:lnT>
-                    <a:lnB w="6350" cap="flat" cmpd="sng" algn="ctr">
-                      <a:solidFill>
-                        <a:srgbClr val="000000"/>
-                      </a:solidFill>
-                      <a:prstDash val="solid"/>
-                      <a:round/>
-                      <a:headEnd type="none" w="med" len="med"/>
-                      <a:tailEnd type="none" w="med" len="med"/>
-                    </a:lnB>
-                    <a:solidFill>
-                      <a:srgbClr val="004455"/>
-                    </a:solidFill>
-                  </a:tcPr>
-                </a:tc>
-                <a:tc>
-                  <a:txBody>
-                    <a:bodyPr/>
-                    <a:lstStyle/>
-                    <a:p>
-                      <a:pPr algn="ctr">
-                        <a:lnSpc>
-                          <a:spcPct val="100000"/>
-                        </a:lnSpc>
-                        <a:spcBef>
-                          <a:spcPts val="385"/>
-                        </a:spcBef>
-                      </a:pPr>
-                      <a:r>
-                        <a:rPr sz="1100" b="1" spc="-10" dirty="0">
-                          <a:solidFill>
-                            <a:srgbClr val="FFFFFF"/>
-                          </a:solidFill>
-                          <a:latin typeface="Roboto" panose="02000000000000000000" pitchFamily="2" charset="0"/>
-                          <a:ea typeface="Roboto" panose="02000000000000000000" pitchFamily="2" charset="0"/>
-                          <a:cs typeface="Arial"/>
-                        </a:rPr>
-                        <a:t>Symbol</a:t>
-                      </a:r>
-                      <a:endParaRPr sz="1100" dirty="0">
-                        <a:latin typeface="Roboto" panose="02000000000000000000" pitchFamily="2" charset="0"/>
-                        <a:ea typeface="Roboto" panose="02000000000000000000" pitchFamily="2" charset="0"/>
-                        <a:cs typeface="Arial"/>
-                      </a:endParaRPr>
-                    </a:p>
-                  </a:txBody>
-                  <a:tcPr marL="0" marR="0" marT="48895" marB="0" anchor="ctr">
-                    <a:lnL w="6350" cap="flat" cmpd="sng" algn="ctr">
-                      <a:solidFill>
-                        <a:srgbClr val="000000"/>
-                      </a:solidFill>
-                      <a:prstDash val="solid"/>
-                      <a:round/>
-                      <a:headEnd type="none" w="med" len="med"/>
-                      <a:tailEnd type="none" w="med" len="med"/>
-                    </a:lnL>
-                    <a:lnR w="6350">
-                      <a:solidFill>
-                        <a:srgbClr val="000000"/>
-                      </a:solidFill>
-                      <a:prstDash val="solid"/>
-                    </a:lnR>
-                    <a:lnT w="6350">
-                      <a:solidFill>
-                        <a:srgbClr val="000000"/>
-                      </a:solidFill>
-                      <a:prstDash val="solid"/>
-                    </a:lnT>
-                    <a:lnB w="6350" cap="flat" cmpd="sng" algn="ctr">
-                      <a:solidFill>
-                        <a:srgbClr val="000000"/>
-                      </a:solidFill>
-                      <a:prstDash val="solid"/>
-                      <a:round/>
-                      <a:headEnd type="none" w="med" len="med"/>
-                      <a:tailEnd type="none" w="med" len="med"/>
-                    </a:lnB>
-                    <a:solidFill>
-                      <a:srgbClr val="004455"/>
-                    </a:solidFill>
-                  </a:tcPr>
-                </a:tc>
-                <a:tc>
-                  <a:txBody>
-                    <a:bodyPr/>
-                    <a:lstStyle/>
-                    <a:p>
-                      <a:pPr algn="ctr">
-                        <a:lnSpc>
-                          <a:spcPct val="100000"/>
-                        </a:lnSpc>
-                        <a:spcBef>
-                          <a:spcPts val="385"/>
-                        </a:spcBef>
-                      </a:pPr>
-                      <a:r>
-                        <a:rPr sz="1100" b="1" spc="-25" dirty="0">
-                          <a:solidFill>
-                            <a:srgbClr val="FFFFFF"/>
-                          </a:solidFill>
-                          <a:latin typeface="Roboto" panose="02000000000000000000" pitchFamily="2" charset="0"/>
-                          <a:ea typeface="Roboto" panose="02000000000000000000" pitchFamily="2" charset="0"/>
-                          <a:cs typeface="Arial"/>
-                        </a:rPr>
-                        <a:t>Min</a:t>
-                      </a:r>
-                      <a:endParaRPr sz="1100" dirty="0">
-                        <a:latin typeface="Roboto" panose="02000000000000000000" pitchFamily="2" charset="0"/>
-                        <a:ea typeface="Roboto" panose="02000000000000000000" pitchFamily="2" charset="0"/>
-                        <a:cs typeface="Arial"/>
-                      </a:endParaRPr>
-                    </a:p>
-                  </a:txBody>
-                  <a:tcPr marL="0" marR="0" marT="48895" marB="0" anchor="ctr">
-                    <a:lnL w="6350">
-                      <a:solidFill>
-                        <a:srgbClr val="000000"/>
-                      </a:solidFill>
-                      <a:prstDash val="solid"/>
-                    </a:lnL>
-                    <a:lnR w="6350">
-                      <a:solidFill>
-                        <a:srgbClr val="000000"/>
-                      </a:solidFill>
-                      <a:prstDash val="solid"/>
-                    </a:lnR>
-                    <a:lnT w="6350">
-                      <a:solidFill>
-                        <a:srgbClr val="000000"/>
-                      </a:solidFill>
-                      <a:prstDash val="solid"/>
-                    </a:lnT>
-                    <a:lnB w="6350" cap="flat" cmpd="sng" algn="ctr">
-                      <a:solidFill>
-                        <a:srgbClr val="000000"/>
-                      </a:solidFill>
-                      <a:prstDash val="solid"/>
-                      <a:round/>
-                      <a:headEnd type="none" w="med" len="med"/>
-                      <a:tailEnd type="none" w="med" len="med"/>
-                    </a:lnB>
-                    <a:solidFill>
-                      <a:srgbClr val="004455"/>
-                    </a:solidFill>
-                  </a:tcPr>
-                </a:tc>
-                <a:tc>
-                  <a:txBody>
-                    <a:bodyPr/>
-                    <a:lstStyle/>
-                    <a:p>
-                      <a:pPr algn="ctr">
-                        <a:lnSpc>
-                          <a:spcPct val="100000"/>
-                        </a:lnSpc>
-                        <a:spcBef>
-                          <a:spcPts val="385"/>
-                        </a:spcBef>
-                      </a:pPr>
-                      <a:r>
-                        <a:rPr lang="en-GB" sz="1100" b="1" spc="-25" dirty="0">
-                          <a:solidFill>
-                            <a:srgbClr val="FFFFFF"/>
-                          </a:solidFill>
-                          <a:latin typeface="Roboto" panose="02000000000000000000" pitchFamily="2" charset="0"/>
-                          <a:ea typeface="Roboto" panose="02000000000000000000" pitchFamily="2" charset="0"/>
-                          <a:cs typeface="Arial"/>
-                        </a:rPr>
-                        <a:t>Typical</a:t>
-                      </a:r>
-                      <a:endParaRPr sz="1100" dirty="0">
-                        <a:latin typeface="Roboto" panose="02000000000000000000" pitchFamily="2" charset="0"/>
-                        <a:ea typeface="Roboto" panose="02000000000000000000" pitchFamily="2" charset="0"/>
-                        <a:cs typeface="Arial"/>
-                      </a:endParaRPr>
-                    </a:p>
-                  </a:txBody>
-                  <a:tcPr marL="0" marR="0" marT="48895" marB="0" anchor="ctr">
-                    <a:lnL w="6350">
-                      <a:solidFill>
-                        <a:srgbClr val="000000"/>
-                      </a:solidFill>
-                      <a:prstDash val="solid"/>
-                    </a:lnL>
-                    <a:lnR w="6350">
-                      <a:solidFill>
-                        <a:srgbClr val="000000"/>
-                      </a:solidFill>
-                      <a:prstDash val="solid"/>
-                    </a:lnR>
-                    <a:lnT w="6350">
-                      <a:solidFill>
-                        <a:srgbClr val="000000"/>
-                      </a:solidFill>
-                      <a:prstDash val="solid"/>
-                    </a:lnT>
-                    <a:lnB w="6350" cap="flat" cmpd="sng" algn="ctr">
-                      <a:solidFill>
-                        <a:srgbClr val="000000"/>
-                      </a:solidFill>
-                      <a:prstDash val="solid"/>
-                      <a:round/>
-                      <a:headEnd type="none" w="med" len="med"/>
-                      <a:tailEnd type="none" w="med" len="med"/>
-                    </a:lnB>
-                    <a:solidFill>
-                      <a:srgbClr val="004455"/>
-                    </a:solidFill>
-                  </a:tcPr>
-                </a:tc>
-                <a:tc>
-                  <a:txBody>
-                    <a:bodyPr/>
-                    <a:lstStyle/>
-                    <a:p>
-                      <a:pPr marL="635" algn="ctr">
-                        <a:lnSpc>
-                          <a:spcPct val="100000"/>
-                        </a:lnSpc>
-                        <a:spcBef>
-                          <a:spcPts val="385"/>
-                        </a:spcBef>
-                      </a:pPr>
-                      <a:r>
-                        <a:rPr lang="en-GB" sz="1100" b="1" spc="-20" dirty="0">
-                          <a:solidFill>
-                            <a:srgbClr val="FFFFFF"/>
-                          </a:solidFill>
-                          <a:latin typeface="Roboto" panose="02000000000000000000" pitchFamily="2" charset="0"/>
-                          <a:ea typeface="Roboto" panose="02000000000000000000" pitchFamily="2" charset="0"/>
-                          <a:cs typeface="Arial"/>
-                        </a:rPr>
-                        <a:t>Max</a:t>
-                      </a:r>
-                      <a:endParaRPr sz="1100" dirty="0">
-                        <a:latin typeface="Roboto" panose="02000000000000000000" pitchFamily="2" charset="0"/>
-                        <a:ea typeface="Roboto" panose="02000000000000000000" pitchFamily="2" charset="0"/>
-                        <a:cs typeface="Arial"/>
-                      </a:endParaRPr>
-                    </a:p>
-                  </a:txBody>
-                  <a:tcPr marL="0" marR="0" marT="48895" marB="0" anchor="ctr">
-                    <a:lnL w="6350">
-                      <a:solidFill>
-                        <a:srgbClr val="000000"/>
-                      </a:solidFill>
-                      <a:prstDash val="solid"/>
-                    </a:lnL>
-                    <a:lnR w="6350">
-                      <a:solidFill>
-                        <a:srgbClr val="000000"/>
-                      </a:solidFill>
-                      <a:prstDash val="solid"/>
-                    </a:lnR>
-                    <a:lnT w="6350">
-                      <a:solidFill>
-                        <a:srgbClr val="000000"/>
-                      </a:solidFill>
-                      <a:prstDash val="solid"/>
-                    </a:lnT>
-                    <a:lnB w="6350" cap="flat" cmpd="sng" algn="ctr">
-                      <a:solidFill>
-                        <a:srgbClr val="000000"/>
-                      </a:solidFill>
-                      <a:prstDash val="solid"/>
-                      <a:round/>
-                      <a:headEnd type="none" w="med" len="med"/>
-                      <a:tailEnd type="none" w="med" len="med"/>
-                    </a:lnB>
-                    <a:solidFill>
-                      <a:srgbClr val="004455"/>
-                    </a:solidFill>
-                  </a:tcPr>
-                </a:tc>
-                <a:tc>
-                  <a:txBody>
-                    <a:bodyPr/>
-                    <a:lstStyle/>
-                    <a:p>
-                      <a:pPr marL="635" algn="ctr">
-                        <a:lnSpc>
-                          <a:spcPct val="100000"/>
-                        </a:lnSpc>
-                        <a:spcBef>
-                          <a:spcPts val="385"/>
-                        </a:spcBef>
-                      </a:pPr>
-                      <a:r>
-                        <a:rPr sz="1100" b="1" spc="-20" dirty="0">
-                          <a:solidFill>
-                            <a:srgbClr val="FFFFFF"/>
-                          </a:solidFill>
-                          <a:latin typeface="Roboto" panose="02000000000000000000" pitchFamily="2" charset="0"/>
-                          <a:ea typeface="Roboto" panose="02000000000000000000" pitchFamily="2" charset="0"/>
-                          <a:cs typeface="Arial"/>
-                        </a:rPr>
-                        <a:t>Unit</a:t>
-                      </a:r>
-                      <a:endParaRPr sz="1100" dirty="0">
-                        <a:latin typeface="Roboto" panose="02000000000000000000" pitchFamily="2" charset="0"/>
-                        <a:ea typeface="Roboto" panose="02000000000000000000" pitchFamily="2" charset="0"/>
-                        <a:cs typeface="Arial"/>
-                      </a:endParaRPr>
-                    </a:p>
-                  </a:txBody>
-                  <a:tcPr marL="0" marR="0" marT="48895" marB="0" anchor="ctr">
-                    <a:lnL w="6350" cap="flat" cmpd="sng" algn="ctr">
-                      <a:solidFill>
-                        <a:srgbClr val="000000"/>
-                      </a:solidFill>
-                      <a:prstDash val="solid"/>
-                      <a:round/>
-                      <a:headEnd type="none" w="med" len="med"/>
-                      <a:tailEnd type="none" w="med" len="med"/>
-                    </a:lnL>
-                    <a:lnR w="6350" cap="flat" cmpd="sng" algn="ctr">
-                      <a:solidFill>
-                        <a:srgbClr val="000000"/>
-                      </a:solidFill>
-                      <a:prstDash val="solid"/>
-                      <a:round/>
-                      <a:headEnd type="none" w="med" len="med"/>
-                      <a:tailEnd type="none" w="med" len="med"/>
-                    </a:lnR>
-                    <a:lnT w="6350">
-                      <a:solidFill>
-                        <a:srgbClr val="000000"/>
-                      </a:solidFill>
-                      <a:prstDash val="solid"/>
-                    </a:lnT>
-                    <a:lnB w="6350" cap="flat" cmpd="sng" algn="ctr">
-                      <a:solidFill>
-                        <a:srgbClr val="000000"/>
-                      </a:solidFill>
-                      <a:prstDash val="solid"/>
-                      <a:round/>
-                      <a:headEnd type="none" w="med" len="med"/>
-                      <a:tailEnd type="none" w="med" len="med"/>
-                    </a:lnB>
-                    <a:solidFill>
-                      <a:srgbClr val="004455"/>
-                    </a:solidFill>
-                  </a:tcPr>
-                </a:tc>
-                <a:tc>
-                  <a:txBody>
-                    <a:bodyPr/>
-                    <a:lstStyle/>
-                    <a:p>
-                      <a:pPr marL="635" algn="ctr">
-                        <a:lnSpc>
-                          <a:spcPct val="100000"/>
-                        </a:lnSpc>
-                        <a:spcBef>
-                          <a:spcPts val="385"/>
-                        </a:spcBef>
-                      </a:pPr>
-                      <a:r>
-                        <a:rPr lang="en-GB" sz="1100" dirty="0">
-                          <a:solidFill>
-                            <a:schemeClr val="bg1"/>
-                          </a:solidFill>
-                          <a:latin typeface="Roboto" panose="02000000000000000000" pitchFamily="2" charset="0"/>
-                          <a:ea typeface="Roboto" panose="02000000000000000000" pitchFamily="2" charset="0"/>
-                          <a:cs typeface="Arial"/>
-                        </a:rPr>
-                        <a:t>Notes</a:t>
-                      </a:r>
-                      <a:endParaRPr sz="1100" dirty="0">
-                        <a:solidFill>
-                          <a:schemeClr val="bg1"/>
-                        </a:solidFill>
-                        <a:latin typeface="Roboto" panose="02000000000000000000" pitchFamily="2" charset="0"/>
-                        <a:ea typeface="Roboto" panose="02000000000000000000" pitchFamily="2" charset="0"/>
-                        <a:cs typeface="Arial"/>
-                      </a:endParaRPr>
-                    </a:p>
-                  </a:txBody>
-                  <a:tcPr marL="0" marR="0" marT="48895" marB="0" anchor="ctr">
-                    <a:lnL w="6350" cap="flat" cmpd="sng" algn="ctr">
-                      <a:solidFill>
-                        <a:srgbClr val="000000"/>
-                      </a:solidFill>
-                      <a:prstDash val="solid"/>
-                      <a:round/>
-                      <a:headEnd type="none" w="med" len="med"/>
-                      <a:tailEnd type="none" w="med" len="med"/>
-                    </a:lnL>
-                    <a:lnR w="6350">
-                      <a:solidFill>
-                        <a:srgbClr val="000000"/>
-                      </a:solidFill>
-                      <a:prstDash val="solid"/>
-                    </a:lnR>
-                    <a:lnT w="6350">
-                      <a:solidFill>
-                        <a:srgbClr val="000000"/>
-                      </a:solidFill>
-                      <a:prstDash val="solid"/>
-                    </a:lnT>
-                    <a:lnB w="6350" cap="flat" cmpd="sng" algn="ctr">
-                      <a:solidFill>
-                        <a:srgbClr val="000000"/>
-                      </a:solidFill>
-                      <a:prstDash val="solid"/>
-                      <a:round/>
-                      <a:headEnd type="none" w="med" len="med"/>
-                      <a:tailEnd type="none" w="med" len="med"/>
-                    </a:lnB>
-                    <a:solidFill>
-                      <a:srgbClr val="004455"/>
-                    </a:solidFill>
-                  </a:tcPr>
-                </a:tc>
-                <a:extLst>
-                  <a:ext uri="{0D108BD9-81ED-4DB2-BD59-A6C34878D82A}">
-                    <a16:rowId xmlns:a16="http://schemas.microsoft.com/office/drawing/2014/main" val="4067166089"/>
-                  </a:ext>
-                </a:extLst>
-              </a:tr>
-            </a:tbl>
-          </a:graphicData>
-        </a:graphic>
-      </p:graphicFrame>
+          <p:cNvSpPr txBox="1"/>
+          <p:nvPr/>
+        </p:nvSpPr>
+        <p:spPr>
+          <a:xfrm>
+            <a:off x="522514" y="1618008"/>
+            <a:ext cx="8941524" cy="338554"/>
+          </a:xfrm>
+          <a:prstGeom prst="rect">
+            <a:avLst/>
+          </a:prstGeom>
+          <a:noFill/>
+        </p:spPr>
+        <p:txBody>
+          <a:bodyPr wrap="square">
+            <a:spAutoFit/>
+          </a:bodyPr>
+          <a:lstStyle/>
+          <a:p>
+            <a:pPr marL="12701"/>
+            <a:r>
+              <a:rPr lang="en-GB" sz="1600" b="1" dirty="0">
+                <a:solidFill>
+                  <a:srgbClr val="004455"/>
+                </a:solidFill>
+                <a:latin typeface="Roboto" panose="02000000000000000000" pitchFamily="2" charset="0"/>
+                <a:ea typeface="Roboto" panose="02000000000000000000" pitchFamily="2" charset="0"/>
+                <a:cs typeface="Arial"/>
+              </a:rPr>
+              <a:t>Optical</a:t>
+            </a:r>
+            <a:r>
+              <a:rPr lang="en-GB" sz="1600" b="1" spc="-65" dirty="0">
+                <a:solidFill>
+                  <a:srgbClr val="004455"/>
+                </a:solidFill>
+                <a:latin typeface="Roboto" panose="02000000000000000000" pitchFamily="2" charset="0"/>
+                <a:ea typeface="Roboto" panose="02000000000000000000" pitchFamily="2" charset="0"/>
+                <a:cs typeface="Arial"/>
+              </a:rPr>
+              <a:t> </a:t>
+            </a:r>
+            <a:r>
+              <a:rPr lang="en-GB" sz="1600" b="1" spc="-10" dirty="0">
+                <a:solidFill>
+                  <a:srgbClr val="004455"/>
+                </a:solidFill>
+                <a:latin typeface="Roboto" panose="02000000000000000000" pitchFamily="2" charset="0"/>
+                <a:ea typeface="Roboto" panose="02000000000000000000" pitchFamily="2" charset="0"/>
+                <a:cs typeface="Arial"/>
+              </a:rPr>
+              <a:t>Characteristics - Transmitter</a:t>
+            </a:r>
+            <a:endParaRPr lang="en-GB" sz="1600" dirty="0">
+              <a:solidFill>
+                <a:srgbClr val="004455"/>
+              </a:solidFill>
+              <a:latin typeface="Roboto" panose="02000000000000000000" pitchFamily="2" charset="0"/>
+              <a:ea typeface="Roboto" panose="02000000000000000000" pitchFamily="2" charset="0"/>
+              <a:cs typeface="Arial"/>
+            </a:endParaRPr>
+          </a:p>
+        </p:txBody>
+      </p:sp>
+      <p:sp>
+        <p:nvSpPr>
+          <p:cNvPr id="9" name="TextBox 8">
+            <a:extLst>
+              <a:ext uri="{FF2B5EF4-FFF2-40B4-BE49-F238E27FC236}">
+                <a16:creationId xmlns:a16="http://schemas.microsoft.com/office/drawing/2014/main" id="{D7E36BAF-24A1-5F4C-129C-BC04DF62750B}"/>
+              </a:ext>
+            </a:extLst>
+          </p:cNvPr>
+          <p:cNvSpPr txBox="1"/>
+          <p:nvPr/>
+        </p:nvSpPr>
+        <p:spPr>
+          <a:xfrm>
+            <a:off x="4993276" y="544150"/>
+            <a:ext cx="8941524" cy="369332"/>
+          </a:xfrm>
+          <a:prstGeom prst="rect">
+            <a:avLst/>
+          </a:prstGeom>
+          <a:noFill/>
+        </p:spPr>
+        <p:txBody>
+          <a:bodyPr wrap="square">
+            <a:spAutoFit/>
+          </a:bodyPr>
+          <a:lstStyle/>
+          <a:p>
+            <a:pPr algn="l">
+              <a:spcBef>
+                <a:spcPts val="745"/>
+              </a:spcBef>
+            </a:pPr>
+            <a:r>
+              <a:rPr lang="en-GB" dirty="0"/>
+              <a:t>{{part_number_1}}</a:t>
+            </a:r>
+            <a:endParaRPr lang="en-GB" sz="1800" b="1" i="0" dirty="0">
+              <a:solidFill>
+                <a:srgbClr val="004455"/>
+              </a:solidFill>
+              <a:latin typeface="Roboto Condensed Black" panose="02000000000000000000" pitchFamily="2" charset="0"/>
+              <a:ea typeface="Roboto Condensed Black" panose="02000000000000000000" pitchFamily="2" charset="0"/>
+              <a:cs typeface="Roboto Condensed Black" panose="02000000000000000000" pitchFamily="2" charset="0"/>
+            </a:endParaRPr>
+          </a:p>
+        </p:txBody>
+      </p:sp>
     </p:spTree>
     <p:extLst>
       <p:ext uri="{BB962C8B-B14F-4D97-AF65-F5344CB8AC3E}">
